--- a/artifacts/reports/device-control/20_基本設計/基本設計書_端末アプリ_デバイスコネクタ/diagram.pptx
+++ b/artifacts/reports/device-control/20_基本設計/基本設計書_端末アプリ_デバイスコネクタ/diagram.pptx
@@ -3613,7 +3613,7 @@
       </p:grpSpPr>
       <p:grpSp>
         <p:nvGrpSpPr>
-          <p:cNvPr id="2" name="ImportedDiagram_slide_1">
+          <p:cNvPr id="17" name="ImportedDiagram_slide_1">
             <a:extLst>
               <a:ext uri="{FF2B5EF4-FFF2-40B4-BE49-F238E27FC236}">
                 <a16:creationId xmlns:a16="http://schemas.microsoft.com/office/drawing/2014/main" id="{AD62FDDC-CE20-34F3-BEBB-E9EE228E5E93}"/>
@@ -3621,21 +3621,21 @@
             </a:extLst>
           </p:cNvPr>
           <p:cNvGrpSpPr>
-            <a:grpSpLocks/>
+            <a:grpSpLocks noChangeAspect="1"/>
           </p:cNvGrpSpPr>
           <p:nvPr/>
         </p:nvGrpSpPr>
         <p:grpSpPr>
           <a:xfrm>
-            <a:off x="254000" y="254000"/>
-            <a:ext cx="7838277" cy="2716435"/>
+            <a:off x="76200" y="3863188"/>
+            <a:ext cx="9880600" cy="3424223"/>
             <a:chOff x="0" y="0"/>
             <a:chExt cx="13304520" cy="3300984"/>
           </a:xfrm>
         </p:grpSpPr>
         <p:cxnSp>
           <p:nvCxnSpPr>
-            <p:cNvPr id="3" name="Connector 14">
+            <p:cNvPr id="18" name="Connector 14">
               <a:extLst>
                 <a:ext uri="{FF2B5EF4-FFF2-40B4-BE49-F238E27FC236}">
                   <a16:creationId xmlns:a16="http://schemas.microsoft.com/office/drawing/2014/main" id="{7A719D39-A76E-C178-F7D2-E7F2B2EABF41}"/>
@@ -3678,7 +3678,7 @@
         </p:cxnSp>
         <p:cxnSp>
           <p:nvCxnSpPr>
-            <p:cNvPr id="4" name="Connector 12">
+            <p:cNvPr id="19" name="Connector 12">
               <a:extLst>
                 <a:ext uri="{FF2B5EF4-FFF2-40B4-BE49-F238E27FC236}">
                   <a16:creationId xmlns:a16="http://schemas.microsoft.com/office/drawing/2014/main" id="{8CB650F2-0F9D-272F-B8FE-3D97854D5DF9}"/>
@@ -3722,7 +3722,7 @@
         </p:cxnSp>
         <p:cxnSp>
           <p:nvCxnSpPr>
-            <p:cNvPr id="5" name="Connector 10">
+            <p:cNvPr id="20" name="Connector 10">
               <a:extLst>
                 <a:ext uri="{FF2B5EF4-FFF2-40B4-BE49-F238E27FC236}">
                   <a16:creationId xmlns:a16="http://schemas.microsoft.com/office/drawing/2014/main" id="{BADE7DD1-CCE6-8BB6-0936-B7D23D1B8040}"/>
@@ -3765,7 +3765,7 @@
         </p:cxnSp>
         <p:cxnSp>
           <p:nvCxnSpPr>
-            <p:cNvPr id="6" name="Connector 9">
+            <p:cNvPr id="21" name="Connector 9">
               <a:extLst>
                 <a:ext uri="{FF2B5EF4-FFF2-40B4-BE49-F238E27FC236}">
                   <a16:creationId xmlns:a16="http://schemas.microsoft.com/office/drawing/2014/main" id="{CFE77417-BBAC-8C26-06EC-403F7D59B2BD}"/>
@@ -3808,7 +3808,7 @@
         </p:cxnSp>
         <p:sp>
           <p:nvSpPr>
-            <p:cNvPr id="7" name="Rounded Rectangle 1">
+            <p:cNvPr id="22" name="Rounded Rectangle 1">
               <a:extLst>
                 <a:ext uri="{FF2B5EF4-FFF2-40B4-BE49-F238E27FC236}">
                   <a16:creationId xmlns:a16="http://schemas.microsoft.com/office/drawing/2014/main" id="{A08D930C-F0B9-D4C5-063D-C6528CAAA85A}"/>
@@ -3949,13 +3949,13 @@
             </a:lstStyle>
             <a:p>
               <a:pPr algn="ctr"/>
-              <a:endParaRPr sz="1481"/>
+              <a:endParaRPr/>
             </a:p>
           </p:txBody>
         </p:sp>
         <p:sp>
           <p:nvSpPr>
-            <p:cNvPr id="8" name="Rectangle 2">
+            <p:cNvPr id="23" name="Rectangle 2">
               <a:extLst>
                 <a:ext uri="{FF2B5EF4-FFF2-40B4-BE49-F238E27FC236}">
                   <a16:creationId xmlns:a16="http://schemas.microsoft.com/office/drawing/2014/main" id="{F0118073-E745-F085-C1D3-303FF1E9DBA7}"/>
@@ -3996,7 +3996,7 @@
             </a:fontRef>
           </p:style>
           <p:txBody>
-            <a:bodyPr wrap="square" lIns="26936" tIns="0" rIns="26936" bIns="0" rtlCol="0" anchor="ctr"/>
+            <a:bodyPr wrap="square" lIns="32732" tIns="0" rIns="32732" bIns="0" rtlCol="0" anchor="ctr"/>
             <a:lstStyle>
               <a:defPPr>
                 <a:defRPr lang="en-US"/>
@@ -4095,7 +4095,7 @@
             <a:p>
               <a:pPr algn="ctr"/>
               <a:r>
-                <a:rPr sz="825" b="1">
+                <a:rPr sz="1002" b="1">
                   <a:solidFill>
                     <a:srgbClr val="1F4E79"/>
                   </a:solidFill>
@@ -4110,7 +4110,7 @@
         </p:sp>
         <p:sp>
           <p:nvSpPr>
-            <p:cNvPr id="9" name="Rounded Rectangle 3">
+            <p:cNvPr id="24" name="Rounded Rectangle 3">
               <a:extLst>
                 <a:ext uri="{FF2B5EF4-FFF2-40B4-BE49-F238E27FC236}">
                   <a16:creationId xmlns:a16="http://schemas.microsoft.com/office/drawing/2014/main" id="{F79F836A-6BB0-8C35-86FF-0895FB15D54C}"/>
@@ -4251,13 +4251,13 @@
             </a:lstStyle>
             <a:p>
               <a:pPr algn="ctr"/>
-              <a:endParaRPr sz="1481"/>
+              <a:endParaRPr/>
             </a:p>
           </p:txBody>
         </p:sp>
         <p:sp>
           <p:nvSpPr>
-            <p:cNvPr id="10" name="Rectangle 4">
+            <p:cNvPr id="25" name="Rectangle 4">
               <a:extLst>
                 <a:ext uri="{FF2B5EF4-FFF2-40B4-BE49-F238E27FC236}">
                   <a16:creationId xmlns:a16="http://schemas.microsoft.com/office/drawing/2014/main" id="{5D87C68A-4283-421F-F035-3A98715BD045}"/>
@@ -4298,7 +4298,7 @@
             </a:fontRef>
           </p:style>
           <p:txBody>
-            <a:bodyPr wrap="square" lIns="26936" tIns="0" rIns="26936" bIns="0" rtlCol="0" anchor="ctr"/>
+            <a:bodyPr wrap="square" lIns="32732" tIns="0" rIns="32732" bIns="0" rtlCol="0" anchor="ctr"/>
             <a:lstStyle>
               <a:defPPr>
                 <a:defRPr lang="en-US"/>
@@ -4397,7 +4397,7 @@
             <a:p>
               <a:pPr algn="ctr"/>
               <a:r>
-                <a:rPr sz="825" b="1">
+                <a:rPr sz="1002" b="1">
                   <a:solidFill>
                     <a:srgbClr val="C55A11"/>
                   </a:solidFill>
@@ -4412,7 +4412,7 @@
         </p:sp>
         <p:sp>
           <p:nvSpPr>
-            <p:cNvPr id="11" name="Rounded Rectangle 5">
+            <p:cNvPr id="26" name="Rounded Rectangle 5">
               <a:extLst>
                 <a:ext uri="{FF2B5EF4-FFF2-40B4-BE49-F238E27FC236}">
                   <a16:creationId xmlns:a16="http://schemas.microsoft.com/office/drawing/2014/main" id="{9EB04D49-7D12-2A64-EAAB-6875C02B93DD}"/>
@@ -4457,7 +4457,7 @@
             </a:fontRef>
           </p:style>
           <p:txBody>
-            <a:bodyPr wrap="square" lIns="26936" tIns="0" rIns="26936" bIns="0" rtlCol="0" anchor="ctr"/>
+            <a:bodyPr wrap="square" lIns="32732" tIns="0" rIns="32732" bIns="0" rtlCol="0" anchor="ctr"/>
             <a:lstStyle>
               <a:defPPr>
                 <a:defRPr lang="en-US"/>
@@ -4556,7 +4556,7 @@
             <a:p>
               <a:pPr algn="ctr"/>
               <a:r>
-                <a:rPr sz="942" b="1">
+                <a:rPr sz="1145" b="1">
                   <a:solidFill>
                     <a:srgbClr val="111111"/>
                   </a:solidFill>
@@ -4571,7 +4571,7 @@
         </p:sp>
         <p:sp>
           <p:nvSpPr>
-            <p:cNvPr id="12" name="Rounded Rectangle 6">
+            <p:cNvPr id="27" name="Rounded Rectangle 6">
               <a:extLst>
                 <a:ext uri="{FF2B5EF4-FFF2-40B4-BE49-F238E27FC236}">
                   <a16:creationId xmlns:a16="http://schemas.microsoft.com/office/drawing/2014/main" id="{FF4905AC-8C2D-FB2F-CEB5-A1CAE45D8FCF}"/>
@@ -4616,7 +4616,7 @@
             </a:fontRef>
           </p:style>
           <p:txBody>
-            <a:bodyPr wrap="square" lIns="26936" tIns="0" rIns="26936" bIns="0" rtlCol="0" anchor="ctr"/>
+            <a:bodyPr wrap="square" lIns="32732" tIns="0" rIns="32732" bIns="0" rtlCol="0" anchor="ctr"/>
             <a:lstStyle>
               <a:defPPr>
                 <a:defRPr lang="en-US"/>
@@ -4715,7 +4715,7 @@
             <a:p>
               <a:pPr algn="ctr"/>
               <a:r>
-                <a:rPr sz="942" b="1">
+                <a:rPr sz="1145" b="1">
                   <a:solidFill>
                     <a:srgbClr val="111111"/>
                   </a:solidFill>
@@ -4730,7 +4730,7 @@
         </p:sp>
         <p:sp>
           <p:nvSpPr>
-            <p:cNvPr id="13" name="Rounded Rectangle 7">
+            <p:cNvPr id="28" name="Rounded Rectangle 7">
               <a:extLst>
                 <a:ext uri="{FF2B5EF4-FFF2-40B4-BE49-F238E27FC236}">
                   <a16:creationId xmlns:a16="http://schemas.microsoft.com/office/drawing/2014/main" id="{51E74988-CD1B-84D7-87B6-ED1224E15948}"/>
@@ -4775,7 +4775,7 @@
             </a:fontRef>
           </p:style>
           <p:txBody>
-            <a:bodyPr wrap="square" lIns="26936" tIns="0" rIns="26936" bIns="0" rtlCol="0" anchor="ctr"/>
+            <a:bodyPr wrap="square" lIns="32732" tIns="0" rIns="32732" bIns="0" rtlCol="0" anchor="ctr"/>
             <a:lstStyle>
               <a:defPPr>
                 <a:defRPr lang="en-US"/>
@@ -4874,7 +4874,7 @@
             <a:p>
               <a:pPr algn="ctr"/>
               <a:r>
-                <a:rPr sz="942" b="1">
+                <a:rPr sz="1145" b="1">
                   <a:solidFill>
                     <a:srgbClr val="111111"/>
                   </a:solidFill>
@@ -4888,7 +4888,7 @@
             <a:p>
               <a:pPr algn="ctr"/>
               <a:r>
-                <a:rPr sz="884">
+                <a:rPr sz="1074" b="0">
                   <a:solidFill>
                     <a:srgbClr val="111111"/>
                   </a:solidFill>
@@ -4903,7 +4903,7 @@
         </p:sp>
         <p:sp>
           <p:nvSpPr>
-            <p:cNvPr id="14" name="Rounded Rectangle 8">
+            <p:cNvPr id="29" name="Rounded Rectangle 8">
               <a:extLst>
                 <a:ext uri="{FF2B5EF4-FFF2-40B4-BE49-F238E27FC236}">
                   <a16:creationId xmlns:a16="http://schemas.microsoft.com/office/drawing/2014/main" id="{E980EF37-6A64-3ACC-3C63-09550AE8B933}"/>
@@ -4948,7 +4948,7 @@
             </a:fontRef>
           </p:style>
           <p:txBody>
-            <a:bodyPr wrap="square" lIns="26936" tIns="0" rIns="26936" bIns="0" rtlCol="0" anchor="ctr"/>
+            <a:bodyPr wrap="square" lIns="32732" tIns="0" rIns="32732" bIns="0" rtlCol="0" anchor="ctr"/>
             <a:lstStyle>
               <a:defPPr>
                 <a:defRPr lang="en-US"/>
@@ -5047,7 +5047,7 @@
             <a:p>
               <a:pPr algn="ctr"/>
               <a:r>
-                <a:rPr sz="942" b="1">
+                <a:rPr sz="1145" b="1">
                   <a:solidFill>
                     <a:srgbClr val="111111"/>
                   </a:solidFill>
@@ -5062,7 +5062,7 @@
         </p:sp>
         <p:sp>
           <p:nvSpPr>
-            <p:cNvPr id="15" name="Rectangle 11">
+            <p:cNvPr id="30" name="Rectangle 11">
               <a:extLst>
                 <a:ext uri="{FF2B5EF4-FFF2-40B4-BE49-F238E27FC236}">
                   <a16:creationId xmlns:a16="http://schemas.microsoft.com/office/drawing/2014/main" id="{39A9F6A2-3284-FC10-42A7-9405BFC1A995}"/>
@@ -5105,7 +5105,7 @@
             </a:fontRef>
           </p:style>
           <p:txBody>
-            <a:bodyPr wrap="square" lIns="26936" tIns="0" rIns="26936" bIns="0" rtlCol="0" anchor="ctr"/>
+            <a:bodyPr wrap="square" lIns="32732" tIns="0" rIns="32732" bIns="0" rtlCol="0" anchor="ctr"/>
             <a:lstStyle>
               <a:defPPr>
                 <a:defRPr lang="en-US"/>
@@ -5204,7 +5204,7 @@
             <a:p>
               <a:pPr algn="ctr"/>
               <a:r>
-                <a:rPr sz="825">
+                <a:rPr sz="1002" b="0">
                   <a:solidFill>
                     <a:srgbClr val="111111"/>
                   </a:solidFill>
@@ -5219,7 +5219,7 @@
         </p:sp>
         <p:sp>
           <p:nvSpPr>
-            <p:cNvPr id="16" name="Rectangle 13">
+            <p:cNvPr id="31" name="Rectangle 13">
               <a:extLst>
                 <a:ext uri="{FF2B5EF4-FFF2-40B4-BE49-F238E27FC236}">
                   <a16:creationId xmlns:a16="http://schemas.microsoft.com/office/drawing/2014/main" id="{07E78B2A-26F8-1EB5-6516-B7B001089006}"/>
@@ -5262,7 +5262,7 @@
             </a:fontRef>
           </p:style>
           <p:txBody>
-            <a:bodyPr wrap="square" lIns="26936" tIns="0" rIns="26936" bIns="0" rtlCol="0" anchor="ctr"/>
+            <a:bodyPr wrap="square" lIns="32732" tIns="0" rIns="32732" bIns="0" rtlCol="0" anchor="ctr"/>
             <a:lstStyle>
               <a:defPPr>
                 <a:defRPr lang="en-US"/>
@@ -5361,7 +5361,7 @@
             <a:p>
               <a:pPr algn="ctr"/>
               <a:r>
-                <a:rPr sz="825">
+                <a:rPr sz="1002" b="0">
                   <a:solidFill>
                     <a:srgbClr val="111111"/>
                   </a:solidFill>
@@ -5407,27 +5407,29 @@
       </p:grpSpPr>
       <p:grpSp>
         <p:nvGrpSpPr>
-          <p:cNvPr id="104" name="グループ化 103">
+          <p:cNvPr id="207" name="グループ化 206">
             <a:extLst>
               <a:ext uri="{FF2B5EF4-FFF2-40B4-BE49-F238E27FC236}">
-                <a16:creationId xmlns:a16="http://schemas.microsoft.com/office/drawing/2014/main" id="{566D8D3E-5AC3-33F9-0BFD-89580906BF16}"/>
+                <a16:creationId xmlns:a16="http://schemas.microsoft.com/office/drawing/2014/main" id="{D9481BD1-0603-1579-2428-1D394AC4F1FE}"/>
               </a:ext>
             </a:extLst>
           </p:cNvPr>
-          <p:cNvGrpSpPr/>
+          <p:cNvGrpSpPr>
+            <a:grpSpLocks noChangeAspect="1"/>
+          </p:cNvGrpSpPr>
           <p:nvPr/>
         </p:nvGrpSpPr>
         <p:grpSpPr>
           <a:xfrm>
-            <a:off x="254000" y="254000"/>
-            <a:ext cx="7839261" cy="8753398"/>
-            <a:chOff x="1332904" y="-1889520"/>
+            <a:off x="91683" y="76200"/>
+            <a:ext cx="9849634" cy="10998200"/>
+            <a:chOff x="253404" y="256779"/>
             <a:chExt cx="9526191" cy="10637040"/>
           </a:xfrm>
         </p:grpSpPr>
         <p:grpSp>
           <p:nvGrpSpPr>
-            <p:cNvPr id="2" name="ImportedDiagram_slide_1">
+            <p:cNvPr id="105" name="ImportedDiagram_slide_1">
               <a:extLst>
                 <a:ext uri="{FF2B5EF4-FFF2-40B4-BE49-F238E27FC236}">
                   <a16:creationId xmlns:a16="http://schemas.microsoft.com/office/drawing/2014/main" id="{31FDF084-1867-48DB-86EB-C3A04D2CD682}"/>
@@ -5441,7 +5443,7 @@
           </p:nvGrpSpPr>
           <p:grpSpPr>
             <a:xfrm>
-              <a:off x="1332905" y="-1889520"/>
+              <a:off x="253405" y="256779"/>
               <a:ext cx="9525001" cy="2019776"/>
               <a:chOff x="0" y="0"/>
               <a:chExt cx="19344450" cy="4080239"/>
@@ -5449,7 +5451,7 @@
           </p:grpSpPr>
           <p:sp>
             <p:nvSpPr>
-              <p:cNvPr id="83" name="cell_E43">
+              <p:cNvPr id="186" name="cell_E43">
                 <a:extLst>
                   <a:ext uri="{FF2B5EF4-FFF2-40B4-BE49-F238E27FC236}">
                     <a16:creationId xmlns:a16="http://schemas.microsoft.com/office/drawing/2014/main" id="{73C8DC30-0A0C-1469-F87B-6F39352CCDA8}"/>
@@ -5461,8 +5463,8 @@
             </p:nvSpPr>
             <p:spPr>
               <a:xfrm>
-                <a:off x="2391044" y="3153422"/>
-                <a:ext cx="3247596" cy="328907"/>
+                <a:off x="2391042" y="3167841"/>
+                <a:ext cx="3247594" cy="300070"/>
               </a:xfrm>
               <a:prstGeom prst="rect">
                 <a:avLst/>
@@ -5473,7 +5475,7 @@
               </a:ln>
             </p:spPr>
             <p:txBody>
-              <a:bodyPr wrap="square" lIns="19148" tIns="9574" rIns="19148" bIns="9574" anchor="ctr">
+              <a:bodyPr wrap="square" lIns="23268" tIns="11634" rIns="23268" bIns="11634" anchor="ctr">
                 <a:spAutoFit/>
               </a:bodyPr>
               <a:lstStyle>
@@ -5574,7 +5576,7 @@
               <a:p>
                 <a:pPr algn="l"/>
                 <a:r>
-                  <a:rPr lang="en-US" altLang="ja-JP" sz="745" b="1">
+                  <a:rPr lang="ja-JP" sz="905" b="1">
                     <a:solidFill>
                       <a:srgbClr val="FF0000"/>
                     </a:solidFill>
@@ -5582,25 +5584,14 @@
                     <a:ea typeface="Meiryo UI"/>
                     <a:cs typeface="Meiryo UI"/>
                   </a:rPr>
-                  <a:t>POS</a:t>
-                </a:r>
-                <a:r>
-                  <a:rPr lang="ja-JP" altLang="en-US" sz="745" b="1">
-                    <a:solidFill>
-                      <a:srgbClr val="FF0000"/>
-                    </a:solidFill>
-                    <a:latin typeface="Meiryo UI"/>
-                    <a:ea typeface="Meiryo UI"/>
-                    <a:cs typeface="Meiryo UI"/>
-                  </a:rPr>
-                  <a:t>端末のウィンドウズ環境</a:t>
+                  <a:t>POS端末のウィンドウズ環境</a:t>
                 </a:r>
               </a:p>
             </p:txBody>
           </p:sp>
           <p:sp>
             <p:nvSpPr>
-              <p:cNvPr id="84" name="shape_d511_APP" title="（1） タブレットPOS端末アプリ 業務判断／デバイス操作の依頼">
+              <p:cNvPr id="187" name="shape_d511_APP" title="（1） タブレットPOS端末アプリ 業務判断／デバイス操作の依頼">
                 <a:extLst>
                   <a:ext uri="{FF2B5EF4-FFF2-40B4-BE49-F238E27FC236}">
                     <a16:creationId xmlns:a16="http://schemas.microsoft.com/office/drawing/2014/main" id="{806DA097-D72D-BB5F-1520-7453C97050AC}"/>
@@ -5646,7 +5637,7 @@
               </a:fontRef>
             </p:style>
             <p:txBody>
-              <a:bodyPr wrap="square" lIns="40529" tIns="20264" rIns="40529" bIns="20264" rtlCol="0" anchor="ctr">
+              <a:bodyPr wrap="square" lIns="49250" tIns="24625" rIns="49250" bIns="24625" rtlCol="0" anchor="ctr">
                 <a:noAutofit/>
               </a:bodyPr>
               <a:lstStyle>
@@ -5747,33 +5738,51 @@
               <a:p>
                 <a:pPr algn="r"/>
                 <a:r>
-                  <a:rPr kumimoji="0" lang="ja-JP" altLang="en-US" sz="532" b="1" kern="0">
+                  <a:rPr kumimoji="0" lang="ja-JP" altLang="en-US" sz="646" b="1" i="0" u="none" strike="noStrike" kern="0" cap="none" spc="0" normalizeH="0" baseline="0">
+                    <a:ln>
+                      <a:noFill/>
+                    </a:ln>
                     <a:solidFill>
                       <a:srgbClr val="111111"/>
                     </a:solidFill>
+                    <a:effectLst/>
+                    <a:uLnTx/>
+                    <a:uFillTx/>
                     <a:latin typeface="Meiryo UI"/>
                     <a:ea typeface="Meiryo UI"/>
                   </a:rPr>
-                  <a:t>（1） （1） タブレットPOS端末アプリ</a:t>
+                  <a:t>1 タブレットPOS端末アプリ</a:t>
                 </a:r>
               </a:p>
               <a:p>
                 <a:pPr algn="r"/>
                 <a:r>
-                  <a:rPr kumimoji="0" lang="en-US" altLang="ja-JP" sz="532" b="1" kern="0">
+                  <a:rPr kumimoji="0" lang="en-US" altLang="ja-JP" sz="646" b="1" i="0" u="none" strike="noStrike" kern="0" cap="none" spc="0" normalizeH="0" baseline="0">
+                    <a:ln>
+                      <a:noFill/>
+                    </a:ln>
                     <a:solidFill>
                       <a:srgbClr val="111111"/>
                     </a:solidFill>
+                    <a:effectLst/>
+                    <a:uLnTx/>
+                    <a:uFillTx/>
                     <a:latin typeface="Meiryo UI"/>
                     <a:ea typeface="Meiryo UI"/>
                   </a:rPr>
                   <a:t>MAUI</a:t>
                 </a:r>
                 <a:r>
-                  <a:rPr kumimoji="0" lang="ja-JP" altLang="en-US" sz="532" b="1" kern="0">
+                  <a:rPr kumimoji="0" lang="ja-JP" altLang="en-US" sz="646" b="1" i="0" u="none" strike="noStrike" kern="0" cap="none" spc="0" normalizeH="0" baseline="0">
+                    <a:ln>
+                      <a:noFill/>
+                    </a:ln>
                     <a:solidFill>
                       <a:srgbClr val="111111"/>
                     </a:solidFill>
+                    <a:effectLst/>
+                    <a:uLnTx/>
+                    <a:uFillTx/>
                     <a:latin typeface="Meiryo UI"/>
                     <a:ea typeface="Meiryo UI"/>
                   </a:rPr>
@@ -5784,7 +5793,7 @@
           </p:sp>
           <p:sp>
             <p:nvSpPr>
-              <p:cNvPr id="85" name="shape_d511_DEVICE" descr="周辺機器はデバイスコネクタ経由で&#10;のみ制御します。&#10;アプリから実機を直接呼び出しません。" title="（3） 周辺機器 釣銭機／キャッシュドロア／ カスタマーディスプレイ">
+              <p:cNvPr id="188" name="shape_d511_DEVICE" descr="周辺機器はデバイスコネクタ経由で&#10;のみ制御します。&#10;アプリから実機を直接呼び出しません。" title="（3） 周辺機器 釣銭機／キャッシュドロア／ カスタマーディスプレイ">
                 <a:extLst>
                   <a:ext uri="{FF2B5EF4-FFF2-40B4-BE49-F238E27FC236}">
                     <a16:creationId xmlns:a16="http://schemas.microsoft.com/office/drawing/2014/main" id="{CAFFE840-8285-88D2-80B1-A5591BA70713}"/>
@@ -5796,8 +5805,8 @@
             </p:nvSpPr>
             <p:spPr>
               <a:xfrm>
-                <a:off x="14496966" y="1115250"/>
-                <a:ext cx="4796565" cy="333542"/>
+                <a:off x="14496967" y="1075349"/>
+                <a:ext cx="4796564" cy="413346"/>
               </a:xfrm>
               <a:prstGeom prst="roundRect">
                 <a:avLst/>
@@ -5830,7 +5839,7 @@
               </a:fontRef>
             </p:style>
             <p:txBody>
-              <a:bodyPr wrap="square" lIns="40529" tIns="20264" rIns="40529" bIns="20264" rtlCol="0" anchor="ctr">
+              <a:bodyPr wrap="square" lIns="49250" tIns="24625" rIns="49250" bIns="24625" rtlCol="0" anchor="ctr">
                 <a:spAutoFit/>
               </a:bodyPr>
               <a:lstStyle>
@@ -5931,41 +5940,43 @@
               <a:p>
                 <a:pPr algn="ctr"/>
                 <a:r>
-                  <a:rPr kumimoji="0" lang="ja-JP" altLang="en-US" sz="532" b="1" kern="0">
+                  <a:rPr kumimoji="0" lang="en-US" altLang="ja-JP" sz="646" b="1" i="0" u="none" strike="noStrike" kern="0" cap="none" spc="0" normalizeH="0" baseline="0">
+                    <a:ln>
+                      <a:noFill/>
+                    </a:ln>
                     <a:solidFill>
                       <a:srgbClr val="111111"/>
                     </a:solidFill>
-                    <a:latin typeface="Meiryo UI"/>
-                    <a:ea typeface="Meiryo UI"/>
-                  </a:rPr>
-                  <a:t>（</a:t>
-                </a:r>
-                <a:r>
-                  <a:rPr kumimoji="0" lang="en-US" altLang="ja-JP" sz="532" b="1" kern="0">
-                    <a:solidFill>
-                      <a:srgbClr val="111111"/>
-                    </a:solidFill>
+                    <a:effectLst/>
+                    <a:uLnTx/>
+                    <a:uFillTx/>
                     <a:latin typeface="Meiryo UI"/>
                     <a:ea typeface="Meiryo UI"/>
                   </a:rPr>
                   <a:t>3</a:t>
                 </a:r>
                 <a:r>
-                  <a:rPr kumimoji="0" lang="ja-JP" altLang="en-US" sz="532" b="1" kern="0">
+                  <a:rPr kumimoji="0" lang="ja-JP" altLang="en-US" sz="646" b="1" i="0" u="none" strike="noStrike" kern="0" cap="none" spc="0" normalizeH="0" baseline="0">
+                    <a:ln>
+                      <a:noFill/>
+                    </a:ln>
                     <a:solidFill>
                       <a:srgbClr val="111111"/>
                     </a:solidFill>
+                    <a:effectLst/>
+                    <a:uLnTx/>
+                    <a:uFillTx/>
                     <a:latin typeface="Meiryo UI"/>
                     <a:ea typeface="Meiryo UI"/>
                   </a:rPr>
-                  <a:t>） 周辺機器</a:t>
+                  <a:t> 周辺機器</a:t>
                 </a:r>
               </a:p>
             </p:txBody>
           </p:sp>
           <p:sp>
             <p:nvSpPr>
-              <p:cNvPr id="86" name="shape_d511_HOST" title="（2） デバイスコネクタ 要求制御／実機制御">
+              <p:cNvPr id="189" name="shape_d511_HOST" title="（2） デバイスコネクタ 要求制御／実機制御">
                 <a:extLst>
                   <a:ext uri="{FF2B5EF4-FFF2-40B4-BE49-F238E27FC236}">
                     <a16:creationId xmlns:a16="http://schemas.microsoft.com/office/drawing/2014/main" id="{CC3856D8-65AD-7826-44D0-04ACA36582DF}"/>
@@ -6011,7 +6022,7 @@
               </a:fontRef>
             </p:style>
             <p:txBody>
-              <a:bodyPr wrap="square" lIns="40529" tIns="20264" rIns="40529" bIns="20264" rtlCol="0" anchor="ctr">
+              <a:bodyPr wrap="square" lIns="49250" tIns="24625" rIns="49250" bIns="24625" rtlCol="0" anchor="ctr">
                 <a:noAutofit/>
               </a:bodyPr>
               <a:lstStyle>
@@ -6112,41 +6123,43 @@
               <a:p>
                 <a:pPr algn="ctr"/>
                 <a:r>
-                  <a:rPr kumimoji="0" lang="ja-JP" altLang="en-US" sz="532" b="1" kern="0">
+                  <a:rPr kumimoji="0" lang="en-US" altLang="ja-JP" sz="646" b="1" i="0" u="none" strike="noStrike" kern="0" cap="none" spc="0" normalizeH="0" baseline="0">
+                    <a:ln>
+                      <a:noFill/>
+                    </a:ln>
                     <a:solidFill>
                       <a:srgbClr val="111111"/>
                     </a:solidFill>
-                    <a:latin typeface="Meiryo UI"/>
-                    <a:ea typeface="Meiryo UI"/>
-                  </a:rPr>
-                  <a:t>（</a:t>
-                </a:r>
-                <a:r>
-                  <a:rPr kumimoji="0" lang="en-US" altLang="ja-JP" sz="532" b="1" kern="0">
-                    <a:solidFill>
-                      <a:srgbClr val="111111"/>
-                    </a:solidFill>
+                    <a:effectLst/>
+                    <a:uLnTx/>
+                    <a:uFillTx/>
                     <a:latin typeface="Meiryo UI"/>
                     <a:ea typeface="Meiryo UI"/>
                   </a:rPr>
                   <a:t>2</a:t>
                 </a:r>
                 <a:r>
-                  <a:rPr kumimoji="0" lang="ja-JP" altLang="en-US" sz="532" b="1" kern="0">
+                  <a:rPr kumimoji="0" lang="ja-JP" altLang="en-US" sz="646" b="1" i="0" u="none" strike="noStrike" kern="0" cap="none" spc="0" normalizeH="0" baseline="0">
+                    <a:ln>
+                      <a:noFill/>
+                    </a:ln>
                     <a:solidFill>
                       <a:srgbClr val="111111"/>
                     </a:solidFill>
+                    <a:effectLst/>
+                    <a:uLnTx/>
+                    <a:uFillTx/>
                     <a:latin typeface="Meiryo UI"/>
                     <a:ea typeface="Meiryo UI"/>
                   </a:rPr>
-                  <a:t>） デバイスコネクタ</a:t>
+                  <a:t> デバイスコネクタ</a:t>
                 </a:r>
               </a:p>
             </p:txBody>
           </p:sp>
           <p:cxnSp>
             <p:nvCxnSpPr>
-              <p:cNvPr id="87" name="edge_d511_01_APP_to_HOST" descr="コマンド通信用パイプ&#10;要求（アプリ→コネクタ）&#10;同期応答（コネクタ→アプリ）" title="コマンド通信用パイプ&#10;要求（アプリ→コネクタ）&#10;同期応答（コネクタ→アプリ）">
+              <p:cNvPr id="190" name="edge_d511_01_APP_to_HOST" descr="コマンド通信用パイプ&#10;要求（アプリ→コネクタ）&#10;同期応答（コネクタ→アプリ）" title="コマンド通信用パイプ&#10;要求（アプリ→コネクタ）&#10;同期応答（コネクタ→アプリ）">
                 <a:extLst>
                   <a:ext uri="{FF2B5EF4-FFF2-40B4-BE49-F238E27FC236}">
                     <a16:creationId xmlns:a16="http://schemas.microsoft.com/office/drawing/2014/main" id="{F93879FF-D070-8E17-12E0-03E8D1DA189D}"/>
@@ -6155,8 +6168,8 @@
               </p:cNvPr>
               <p:cNvCxnSpPr>
                 <a:cxnSpLocks/>
-                <a:stCxn id="84" idx="0"/>
-                <a:endCxn id="86" idx="0"/>
+                <a:stCxn id="187" idx="0"/>
+                <a:endCxn id="189" idx="0"/>
               </p:cNvCxnSpPr>
               <p:nvPr/>
             </p:nvCxnSpPr>
@@ -6198,7 +6211,7 @@
           </p:cxnSp>
           <p:cxnSp>
             <p:nvCxnSpPr>
-              <p:cNvPr id="88" name="edge_d511_02_HOST_to_APP" descr="イベント通知用パイプ&#10;非同期イベント（コネクタ→アプリ）" title="イベント通知用パイプ&#10;非同期イベント（コネクタ→アプリ）">
+              <p:cNvPr id="191" name="edge_d511_02_HOST_to_APP" descr="イベント通知用パイプ&#10;非同期イベント（コネクタ→アプリ）" title="イベント通知用パイプ&#10;非同期イベント（コネクタ→アプリ）">
                 <a:extLst>
                   <a:ext uri="{FF2B5EF4-FFF2-40B4-BE49-F238E27FC236}">
                     <a16:creationId xmlns:a16="http://schemas.microsoft.com/office/drawing/2014/main" id="{342E0563-25ED-458C-7918-517D83460B9F}"/>
@@ -6207,8 +6220,8 @@
               </p:cNvPr>
               <p:cNvCxnSpPr>
                 <a:cxnSpLocks/>
-                <a:stCxn id="86" idx="2"/>
-                <a:endCxn id="84" idx="2"/>
+                <a:stCxn id="189" idx="2"/>
+                <a:endCxn id="187" idx="2"/>
               </p:cNvCxnSpPr>
               <p:nvPr/>
             </p:nvCxnSpPr>
@@ -6249,7 +6262,7 @@
           </p:cxnSp>
           <p:cxnSp>
             <p:nvCxnSpPr>
-              <p:cNvPr id="89" name="edge_d511_03_HOST_to_DEVICE" descr="実機制御（コネクタ→機器）&#10;結果（機器→コネクタ）" title="実機制御（コネクタ→機器）&#10;結果（機器→コネクタ）">
+              <p:cNvPr id="192" name="edge_d511_03_HOST_to_DEVICE" descr="実機制御（コネクタ→機器）&#10;結果（機器→コネクタ）" title="実機制御（コネクタ→機器）&#10;結果（機器→コネクタ）">
                 <a:extLst>
                   <a:ext uri="{FF2B5EF4-FFF2-40B4-BE49-F238E27FC236}">
                     <a16:creationId xmlns:a16="http://schemas.microsoft.com/office/drawing/2014/main" id="{91BBE9BC-D450-4F75-336E-FB206AD7E93A}"/>
@@ -6258,15 +6271,15 @@
               </p:cNvPr>
               <p:cNvCxnSpPr>
                 <a:cxnSpLocks/>
-                <a:stCxn id="86" idx="3"/>
-                <a:endCxn id="85" idx="1"/>
+                <a:stCxn id="189" idx="3"/>
+                <a:endCxn id="188" idx="1"/>
               </p:cNvCxnSpPr>
               <p:nvPr/>
             </p:nvCxnSpPr>
             <p:spPr>
               <a:xfrm flipV="1">
-                <a:off x="10903404" y="1282021"/>
-                <a:ext cx="3593563" cy="26559"/>
+                <a:off x="10903404" y="1282024"/>
+                <a:ext cx="3593563" cy="26556"/>
               </a:xfrm>
               <a:prstGeom prst="straightConnector1">
                 <a:avLst/>
@@ -6299,7 +6312,7 @@
           </p:cxnSp>
           <p:sp>
             <p:nvSpPr>
-              <p:cNvPr id="90" name="shape_comment_d511_APP">
+              <p:cNvPr id="193" name="shape_comment_d511_APP">
                 <a:extLst>
                   <a:ext uri="{FF2B5EF4-FFF2-40B4-BE49-F238E27FC236}">
                     <a16:creationId xmlns:a16="http://schemas.microsoft.com/office/drawing/2014/main" id="{955BF283-7D42-B91E-5782-187192A3D876}"/>
@@ -6351,7 +6364,7 @@
               </a:fontRef>
             </p:style>
             <p:txBody>
-              <a:bodyPr wrap="square" lIns="47284" tIns="27020" rIns="47284" bIns="27020" rtlCol="0" anchor="ctr"/>
+              <a:bodyPr wrap="square" lIns="57459" tIns="32834" rIns="57459" bIns="32834" rtlCol="0" anchor="ctr"/>
               <a:lstStyle>
                 <a:defPPr>
                   <a:defRPr lang="en-US"/>
@@ -6450,10 +6463,16 @@
               <a:p>
                 <a:pPr algn="l"/>
                 <a:r>
-                  <a:rPr kumimoji="0" lang="ja-JP" altLang="en-US" sz="425" kern="0">
+                  <a:rPr kumimoji="0" lang="ja-JP" altLang="en-US" sz="517" b="0" i="0" u="none" strike="noStrike" kern="0" cap="none" spc="0" normalizeH="0" baseline="0">
+                    <a:ln>
+                      <a:noFill/>
+                    </a:ln>
                     <a:solidFill>
                       <a:srgbClr val="404040"/>
                     </a:solidFill>
+                    <a:effectLst/>
+                    <a:uLnTx/>
+                    <a:uFillTx/>
                     <a:latin typeface="Meiryo UI"/>
                     <a:ea typeface="Meiryo UI"/>
                   </a:rPr>
@@ -6464,7 +6483,7 @@
           </p:sp>
           <p:sp>
             <p:nvSpPr>
-              <p:cNvPr id="91" name="shape_comment_d511_DEVICE">
+              <p:cNvPr id="194" name="shape_comment_d511_DEVICE">
                 <a:extLst>
                   <a:ext uri="{FF2B5EF4-FFF2-40B4-BE49-F238E27FC236}">
                     <a16:creationId xmlns:a16="http://schemas.microsoft.com/office/drawing/2014/main" id="{D2241EF6-5BCB-1DE9-75D1-657E9D233B3E}"/>
@@ -6516,7 +6535,7 @@
               </a:fontRef>
             </p:style>
             <p:txBody>
-              <a:bodyPr wrap="square" lIns="47284" tIns="27020" rIns="47284" bIns="27020" rtlCol="0" anchor="ctr"/>
+              <a:bodyPr wrap="square" lIns="57459" tIns="32834" rIns="57459" bIns="32834" rtlCol="0" anchor="ctr"/>
               <a:lstStyle>
                 <a:defPPr>
                   <a:defRPr lang="en-US"/>
@@ -6615,40 +6634,64 @@
               <a:p>
                 <a:pPr algn="l"/>
                 <a:r>
-                  <a:rPr kumimoji="0" lang="ja-JP" altLang="en-US" sz="425" kern="0">
+                  <a:rPr kumimoji="0" lang="ja-JP" altLang="en-US" sz="517" b="0" i="0" u="none" strike="noStrike" kern="0" cap="none" spc="0" normalizeH="0" baseline="0">
+                    <a:ln>
+                      <a:noFill/>
+                    </a:ln>
                     <a:solidFill>
                       <a:srgbClr val="404040"/>
                     </a:solidFill>
+                    <a:effectLst/>
+                    <a:uLnTx/>
+                    <a:uFillTx/>
                     <a:latin typeface="Meiryo UI"/>
                     <a:ea typeface="Meiryo UI"/>
                   </a:rPr>
                   <a:t>自動釣銭機：</a:t>
                 </a:r>
                 <a:r>
-                  <a:rPr kumimoji="0" lang="en-US" altLang="ja-JP" sz="425" kern="0">
+                  <a:rPr kumimoji="0" lang="en-US" altLang="ja-JP" sz="517" b="0" i="0" u="none" strike="noStrike" kern="0" cap="none" spc="0" normalizeH="0" baseline="0">
+                    <a:ln>
+                      <a:noFill/>
+                    </a:ln>
                     <a:solidFill>
                       <a:srgbClr val="404040"/>
                     </a:solidFill>
+                    <a:effectLst/>
+                    <a:uLnTx/>
+                    <a:uFillTx/>
                     <a:latin typeface="Meiryo UI"/>
                     <a:ea typeface="Meiryo UI"/>
                   </a:rPr>
                   <a:t>GLORY RT-300</a:t>
                 </a:r>
                 <a:r>
-                  <a:rPr kumimoji="0" lang="ja-JP" altLang="en-US" sz="425" kern="0">
+                  <a:rPr kumimoji="0" lang="ja-JP" altLang="en-US" sz="517" b="0" i="0" u="none" strike="noStrike" kern="0" cap="none" spc="0" normalizeH="0" baseline="0">
+                    <a:ln>
+                      <a:noFill/>
+                    </a:ln>
                     <a:solidFill>
                       <a:srgbClr val="404040"/>
                     </a:solidFill>
+                    <a:effectLst/>
+                    <a:uLnTx/>
+                    <a:uFillTx/>
                     <a:latin typeface="Meiryo UI"/>
                     <a:ea typeface="Meiryo UI"/>
                   </a:rPr>
                   <a:t>／</a:t>
                 </a:r>
                 <a:r>
-                  <a:rPr kumimoji="0" lang="en-US" altLang="ja-JP" sz="425" kern="0">
+                  <a:rPr kumimoji="0" lang="en-US" altLang="ja-JP" sz="517" b="0" i="0" u="none" strike="noStrike" kern="0" cap="none" spc="0" normalizeH="0" baseline="0">
+                    <a:ln>
+                      <a:noFill/>
+                    </a:ln>
                     <a:solidFill>
                       <a:srgbClr val="404040"/>
                     </a:solidFill>
+                    <a:effectLst/>
+                    <a:uLnTx/>
+                    <a:uFillTx/>
                     <a:latin typeface="Meiryo UI"/>
                     <a:ea typeface="Meiryo UI"/>
                   </a:rPr>
@@ -6658,10 +6701,16 @@
               <a:p>
                 <a:pPr algn="l"/>
                 <a:r>
-                  <a:rPr kumimoji="0" lang="ja-JP" altLang="en-US" sz="425" kern="0">
+                  <a:rPr kumimoji="0" lang="ja-JP" altLang="en-US" sz="517" b="0" i="0" u="none" strike="noStrike" kern="0" cap="none" spc="0" normalizeH="0" baseline="0">
+                    <a:ln>
+                      <a:noFill/>
+                    </a:ln>
                     <a:solidFill>
                       <a:srgbClr val="404040"/>
                     </a:solidFill>
+                    <a:effectLst/>
+                    <a:uLnTx/>
+                    <a:uFillTx/>
                     <a:latin typeface="Meiryo UI"/>
                     <a:ea typeface="Meiryo UI"/>
                   </a:rPr>
@@ -6671,10 +6720,16 @@
               <a:p>
                 <a:pPr algn="l"/>
                 <a:r>
-                  <a:rPr kumimoji="0" lang="ja-JP" altLang="en-US" sz="425" kern="0">
+                  <a:rPr kumimoji="0" lang="ja-JP" altLang="en-US" sz="517" b="0" i="0" u="none" strike="noStrike" kern="0" cap="none" spc="0" normalizeH="0" baseline="0">
+                    <a:ln>
+                      <a:noFill/>
+                    </a:ln>
                     <a:solidFill>
                       <a:srgbClr val="404040"/>
                     </a:solidFill>
+                    <a:effectLst/>
+                    <a:uLnTx/>
+                    <a:uFillTx/>
                     <a:latin typeface="Meiryo UI"/>
                     <a:ea typeface="Meiryo UI"/>
                   </a:rPr>
@@ -6684,20 +6739,32 @@
               <a:p>
                 <a:pPr algn="l"/>
                 <a:r>
-                  <a:rPr kumimoji="0" lang="ja-JP" altLang="en-US" sz="425" kern="0">
+                  <a:rPr kumimoji="0" lang="ja-JP" altLang="en-US" sz="517" b="0" i="0" u="none" strike="noStrike" kern="0" cap="none" spc="0" normalizeH="0" baseline="0">
+                    <a:ln>
+                      <a:noFill/>
+                    </a:ln>
                     <a:solidFill>
                       <a:srgbClr val="404040"/>
                     </a:solidFill>
+                    <a:effectLst/>
+                    <a:uLnTx/>
+                    <a:uFillTx/>
                     <a:latin typeface="Meiryo UI"/>
                     <a:ea typeface="Meiryo UI"/>
                   </a:rPr>
                   <a:t>決済端末：</a:t>
                 </a:r>
                 <a:r>
-                  <a:rPr kumimoji="0" lang="en-US" altLang="ja-JP" sz="425" kern="0">
+                  <a:rPr kumimoji="0" lang="en-US" altLang="ja-JP" sz="517" b="0" i="0" u="none" strike="noStrike" kern="0" cap="none" spc="0" normalizeH="0" baseline="0">
+                    <a:ln>
+                      <a:noFill/>
+                    </a:ln>
                     <a:solidFill>
                       <a:srgbClr val="404040"/>
                     </a:solidFill>
+                    <a:effectLst/>
+                    <a:uLnTx/>
+                    <a:uFillTx/>
                     <a:latin typeface="Meiryo UI"/>
                     <a:ea typeface="Meiryo UI"/>
                   </a:rPr>
@@ -6707,20 +6774,32 @@
               <a:p>
                 <a:pPr algn="l"/>
                 <a:r>
-                  <a:rPr kumimoji="0" lang="ja-JP" altLang="en-US" sz="425" kern="0">
+                  <a:rPr kumimoji="0" lang="ja-JP" altLang="en-US" sz="517" b="0" i="0" u="none" strike="noStrike" kern="0" cap="none" spc="0" normalizeH="0" baseline="0">
+                    <a:ln>
+                      <a:noFill/>
+                    </a:ln>
                     <a:solidFill>
                       <a:srgbClr val="404040"/>
                     </a:solidFill>
+                    <a:effectLst/>
+                    <a:uLnTx/>
+                    <a:uFillTx/>
                     <a:latin typeface="Meiryo UI"/>
                     <a:ea typeface="Meiryo UI"/>
                   </a:rPr>
                   <a:t>レシートプリンター：</a:t>
                 </a:r>
                 <a:r>
-                  <a:rPr kumimoji="0" lang="en-US" altLang="ja-JP" sz="425" kern="0">
+                  <a:rPr kumimoji="0" lang="en-US" altLang="ja-JP" sz="517" b="0" i="0" u="none" strike="noStrike" kern="0" cap="none" spc="0" normalizeH="0" baseline="0">
+                    <a:ln>
+                      <a:noFill/>
+                    </a:ln>
                     <a:solidFill>
                       <a:srgbClr val="404040"/>
                     </a:solidFill>
+                    <a:effectLst/>
+                    <a:uLnTx/>
+                    <a:uFillTx/>
                     <a:latin typeface="Meiryo UI"/>
                     <a:ea typeface="Meiryo UI"/>
                   </a:rPr>
@@ -6730,20 +6809,32 @@
               <a:p>
                 <a:pPr algn="l"/>
                 <a:r>
-                  <a:rPr kumimoji="0" lang="en-US" altLang="ja-JP" sz="425" kern="0">
+                  <a:rPr kumimoji="0" lang="en-US" altLang="ja-JP" sz="517" b="0" i="0" u="none" strike="noStrike" kern="0" cap="none" spc="0" normalizeH="0" baseline="0">
+                    <a:ln>
+                      <a:noFill/>
+                    </a:ln>
                     <a:solidFill>
                       <a:srgbClr val="404040"/>
                     </a:solidFill>
+                    <a:effectLst/>
+                    <a:uLnTx/>
+                    <a:uFillTx/>
                     <a:latin typeface="Meiryo UI"/>
                     <a:ea typeface="Meiryo UI"/>
                   </a:rPr>
                   <a:t>※ </a:t>
                 </a:r>
                 <a:r>
-                  <a:rPr kumimoji="0" lang="ja-JP" altLang="en-US" sz="425" kern="0">
+                  <a:rPr kumimoji="0" lang="ja-JP" altLang="en-US" sz="517" b="0" i="0" u="none" strike="noStrike" kern="0" cap="none" spc="0" normalizeH="0" baseline="0">
+                    <a:ln>
+                      <a:noFill/>
+                    </a:ln>
                     <a:solidFill>
                       <a:srgbClr val="404040"/>
                     </a:solidFill>
+                    <a:effectLst/>
+                    <a:uLnTx/>
+                    <a:uFillTx/>
                     <a:latin typeface="Meiryo UI"/>
                     <a:ea typeface="Meiryo UI"/>
                   </a:rPr>
@@ -6754,7 +6845,7 @@
           </p:sp>
           <p:sp>
             <p:nvSpPr>
-              <p:cNvPr id="92" name="shape_comment_d511_HOST">
+              <p:cNvPr id="195" name="shape_comment_d511_HOST">
                 <a:extLst>
                   <a:ext uri="{FF2B5EF4-FFF2-40B4-BE49-F238E27FC236}">
                     <a16:creationId xmlns:a16="http://schemas.microsoft.com/office/drawing/2014/main" id="{738F6E1A-601D-4E7D-EE25-86395047A398}"/>
@@ -6806,7 +6897,7 @@
               </a:fontRef>
             </p:style>
             <p:txBody>
-              <a:bodyPr wrap="square" lIns="47284" tIns="27020" rIns="47284" bIns="27020" rtlCol="0" anchor="ctr"/>
+              <a:bodyPr wrap="square" lIns="57459" tIns="32834" rIns="57459" bIns="32834" rtlCol="0" anchor="ctr"/>
               <a:lstStyle>
                 <a:defPPr>
                   <a:defRPr lang="en-US"/>
@@ -6905,20 +6996,32 @@
               <a:p>
                 <a:pPr algn="l"/>
                 <a:r>
-                  <a:rPr kumimoji="0" lang="en-US" altLang="ja-JP" sz="425" kern="0">
+                  <a:rPr kumimoji="0" lang="en-US" altLang="ja-JP" sz="517" b="0" i="0" u="none" strike="noStrike" kern="0" cap="none" spc="0" normalizeH="0" baseline="0">
+                    <a:ln>
+                      <a:noFill/>
+                    </a:ln>
                     <a:solidFill>
                       <a:srgbClr val="404040"/>
                     </a:solidFill>
+                    <a:effectLst/>
+                    <a:uLnTx/>
+                    <a:uFillTx/>
                     <a:latin typeface="Meiryo UI"/>
                     <a:ea typeface="Meiryo UI"/>
                   </a:rPr>
                   <a:t>Windows</a:t>
                 </a:r>
                 <a:r>
-                  <a:rPr kumimoji="0" lang="ja-JP" altLang="en-US" sz="425" kern="0">
+                  <a:rPr kumimoji="0" lang="ja-JP" altLang="en-US" sz="517" b="0" i="0" u="none" strike="noStrike" kern="0" cap="none" spc="0" normalizeH="0" baseline="0">
+                    <a:ln>
+                      <a:noFill/>
+                    </a:ln>
                     <a:solidFill>
                       <a:srgbClr val="404040"/>
                     </a:solidFill>
+                    <a:effectLst/>
+                    <a:uLnTx/>
+                    <a:uFillTx/>
                     <a:latin typeface="Meiryo UI"/>
                     <a:ea typeface="Meiryo UI"/>
                   </a:rPr>
@@ -6928,10 +7031,16 @@
               <a:p>
                 <a:pPr algn="l"/>
                 <a:r>
-                  <a:rPr kumimoji="0" lang="ja-JP" altLang="en-US" sz="425" kern="0">
+                  <a:rPr kumimoji="0" lang="ja-JP" altLang="en-US" sz="517" b="0" i="0" u="none" strike="noStrike" kern="0" cap="none" spc="0" normalizeH="0" baseline="0">
+                    <a:ln>
+                      <a:noFill/>
+                    </a:ln>
                     <a:solidFill>
                       <a:srgbClr val="404040"/>
                     </a:solidFill>
+                    <a:effectLst/>
+                    <a:uLnTx/>
+                    <a:uFillTx/>
                     <a:latin typeface="Meiryo UI"/>
                     <a:ea typeface="Meiryo UI"/>
                   </a:rPr>
@@ -6942,7 +7051,7 @@
           </p:sp>
           <p:sp>
             <p:nvSpPr>
-              <p:cNvPr id="93" name="edge_label_d511_01_APP_to_HOST">
+              <p:cNvPr id="196" name="edge_label_d511_01_APP_to_HOST">
                 <a:extLst>
                   <a:ext uri="{FF2B5EF4-FFF2-40B4-BE49-F238E27FC236}">
                     <a16:creationId xmlns:a16="http://schemas.microsoft.com/office/drawing/2014/main" id="{DDFB5E88-8EBB-D5D0-4A25-D58E45E6FA66}"/>
@@ -6954,8 +7063,8 @@
             </p:nvSpPr>
             <p:spPr>
               <a:xfrm>
-                <a:off x="5166510" y="511382"/>
-                <a:ext cx="2610711" cy="610028"/>
+                <a:off x="5166512" y="409575"/>
+                <a:ext cx="2610710" cy="813646"/>
               </a:xfrm>
               <a:prstGeom prst="rect">
                 <a:avLst/>
@@ -6970,7 +7079,7 @@
               </a:ln>
             </p:spPr>
             <p:txBody>
-              <a:bodyPr vert="horz" wrap="square" lIns="33774" tIns="13510" rIns="33774" bIns="13510" rtlCol="0" anchor="ctr">
+              <a:bodyPr vert="horz" wrap="square" lIns="41042" tIns="16417" rIns="41042" bIns="16417" rtlCol="0" anchor="ctr">
                 <a:spAutoFit/>
               </a:bodyPr>
               <a:lstStyle>
@@ -7071,20 +7180,32 @@
               <a:p>
                 <a:pPr algn="ctr"/>
                 <a:r>
-                  <a:rPr kumimoji="0" lang="ja-JP" altLang="en-US" sz="479" b="1" kern="0">
+                  <a:rPr kumimoji="0" lang="ja-JP" altLang="en-US" sz="582" b="1" i="0" u="none" strike="noStrike" kern="0" cap="none" spc="0" normalizeH="0" baseline="0">
+                    <a:ln>
+                      <a:noFill/>
+                    </a:ln>
                     <a:solidFill>
                       <a:srgbClr val="000000"/>
                     </a:solidFill>
+                    <a:effectLst/>
+                    <a:uLnTx/>
+                    <a:uFillTx/>
                     <a:latin typeface="Meiryo UI"/>
                     <a:ea typeface="Meiryo UI"/>
                   </a:rPr>
                   <a:t>コマンド通信用パイプ</a:t>
                 </a:r>
                 <a:r>
-                  <a:rPr kumimoji="0" lang="ja-JP" altLang="en-US" sz="479" kern="0">
+                  <a:rPr kumimoji="0" lang="ja-JP" altLang="en-US" sz="582" b="0" i="0" u="none" strike="noStrike" kern="0" cap="none" spc="0" normalizeH="0" baseline="0">
+                    <a:ln>
+                      <a:noFill/>
+                    </a:ln>
                     <a:solidFill>
                       <a:srgbClr val="000000"/>
                     </a:solidFill>
+                    <a:effectLst/>
+                    <a:uLnTx/>
+                    <a:uFillTx/>
                     <a:latin typeface="Meiryo UI"/>
                     <a:ea typeface="Meiryo UI"/>
                   </a:rPr>
@@ -7097,7 +7218,7 @@
           </p:sp>
           <p:sp>
             <p:nvSpPr>
-              <p:cNvPr id="94" name="edge_label_d511_02_HOST_to_APP">
+              <p:cNvPr id="197" name="edge_label_d511_02_HOST_to_APP">
                 <a:extLst>
                   <a:ext uri="{FF2B5EF4-FFF2-40B4-BE49-F238E27FC236}">
                     <a16:creationId xmlns:a16="http://schemas.microsoft.com/office/drawing/2014/main" id="{97AF7E10-E0CD-E8AA-720D-BA0C29A8F4BA}"/>
@@ -7109,8 +7230,8 @@
             </p:nvSpPr>
             <p:spPr>
               <a:xfrm>
-                <a:off x="5146813" y="2305717"/>
-                <a:ext cx="2834687" cy="610028"/>
+                <a:off x="5146813" y="2304492"/>
+                <a:ext cx="2834686" cy="612481"/>
               </a:xfrm>
               <a:prstGeom prst="rect">
                 <a:avLst/>
@@ -7125,7 +7246,7 @@
               </a:ln>
             </p:spPr>
             <p:txBody>
-              <a:bodyPr vert="horz" wrap="square" lIns="33774" tIns="13510" rIns="33774" bIns="13510" rtlCol="0" anchor="ctr">
+              <a:bodyPr vert="horz" wrap="square" lIns="41042" tIns="16417" rIns="41042" bIns="16417" rtlCol="0" anchor="ctr">
                 <a:spAutoFit/>
               </a:bodyPr>
               <a:lstStyle>
@@ -7226,10 +7347,16 @@
               <a:p>
                 <a:pPr algn="ctr"/>
                 <a:r>
-                  <a:rPr kumimoji="0" lang="ja-JP" altLang="en-US" sz="479" b="1" kern="0">
+                  <a:rPr kumimoji="0" lang="ja-JP" altLang="en-US" sz="582" b="1" i="0" u="none" strike="noStrike" kern="0" cap="none" spc="0" normalizeH="0" baseline="0">
+                    <a:ln>
+                      <a:noFill/>
+                    </a:ln>
                     <a:solidFill>
                       <a:srgbClr val="000000"/>
                     </a:solidFill>
+                    <a:effectLst/>
+                    <a:uLnTx/>
+                    <a:uFillTx/>
                     <a:latin typeface="Meiryo UI"/>
                     <a:ea typeface="Meiryo UI"/>
                   </a:rPr>
@@ -7239,39 +7366,63 @@
               <a:p>
                 <a:pPr algn="ctr"/>
                 <a:r>
-                  <a:rPr kumimoji="0" lang="ja-JP" altLang="en-US" sz="479" b="1" kern="0">
+                  <a:rPr kumimoji="0" lang="ja-JP" altLang="en-US" sz="582" b="1" i="0" u="none" strike="noStrike" kern="0" cap="none" spc="0" normalizeH="0" baseline="0">
+                    <a:ln>
+                      <a:noFill/>
+                    </a:ln>
                     <a:solidFill>
                       <a:srgbClr val="000000"/>
                     </a:solidFill>
+                    <a:effectLst/>
+                    <a:uLnTx/>
+                    <a:uFillTx/>
                     <a:latin typeface="Meiryo UI"/>
                     <a:ea typeface="Meiryo UI"/>
                   </a:rPr>
                   <a:t>非同期イベント（コネクタ→</a:t>
                 </a:r>
                 <a:r>
-                  <a:rPr kumimoji="0" lang="en-US" altLang="ja-JP" sz="479" b="1" kern="0">
+                  <a:rPr kumimoji="0" lang="en-US" altLang="ja-JP" sz="582" b="1" i="0" u="none" strike="noStrike" kern="0" cap="none" spc="0" normalizeH="0" baseline="0">
+                    <a:ln>
+                      <a:noFill/>
+                    </a:ln>
                     <a:solidFill>
                       <a:srgbClr val="000000"/>
                     </a:solidFill>
+                    <a:effectLst/>
+                    <a:uLnTx/>
+                    <a:uFillTx/>
                     <a:latin typeface="Meiryo UI"/>
                     <a:ea typeface="Meiryo UI"/>
                   </a:rPr>
                   <a:t>DeviceCtrl</a:t>
                 </a:r>
                 <a:r>
-                  <a:rPr kumimoji="0" lang="ja-JP" altLang="en-US" sz="479" b="1" kern="0">
+                  <a:rPr kumimoji="0" lang="ja-JP" altLang="en-US" sz="582" b="1" i="0" u="none" strike="noStrike" kern="0" cap="none" spc="0" normalizeH="0" baseline="0">
+                    <a:ln>
+                      <a:noFill/>
+                    </a:ln>
                     <a:solidFill>
                       <a:srgbClr val="000000"/>
                     </a:solidFill>
+                    <a:effectLst/>
+                    <a:uLnTx/>
+                    <a:uFillTx/>
                     <a:latin typeface="Meiryo UI"/>
                     <a:ea typeface="Meiryo UI"/>
                   </a:rPr>
                   <a:t>受信処理）</a:t>
                 </a:r>
-                <a:endParaRPr kumimoji="0" lang="ja-JP" altLang="en-US" sz="479" kern="0">
+                <a:endParaRPr kumimoji="0" lang="ja-JP" altLang="en-US" sz="582" b="0" i="0" u="none" strike="noStrike" kern="0" cap="none" spc="0" normalizeH="0" baseline="0">
+                  <a:ln>
+                    <a:noFill/>
+                  </a:ln>
                   <a:solidFill>
                     <a:srgbClr val="000000"/>
                   </a:solidFill>
+                  <a:effectLst/>
+                  <a:uLnTx/>
+                  <a:uFillTx/>
                   <a:latin typeface="Meiryo UI"/>
                   <a:ea typeface="Meiryo UI"/>
                 </a:endParaRPr>
@@ -7280,7 +7431,7 @@
           </p:sp>
           <p:sp>
             <p:nvSpPr>
-              <p:cNvPr id="95" name="edge_label_d511_03_HOST_to_DEVICE">
+              <p:cNvPr id="198" name="edge_label_d511_03_HOST_to_DEVICE">
                 <a:extLst>
                   <a:ext uri="{FF2B5EF4-FFF2-40B4-BE49-F238E27FC236}">
                     <a16:creationId xmlns:a16="http://schemas.microsoft.com/office/drawing/2014/main" id="{B415BDA7-78F1-35F1-FD19-F8AD67A1B98A}"/>
@@ -7292,8 +7443,8 @@
             </p:nvSpPr>
             <p:spPr>
               <a:xfrm>
-                <a:off x="11597074" y="1017736"/>
-                <a:ext cx="2130829" cy="429011"/>
+                <a:off x="11597075" y="1016858"/>
+                <a:ext cx="2130831" cy="430766"/>
               </a:xfrm>
               <a:prstGeom prst="rect">
                 <a:avLst/>
@@ -7308,7 +7459,7 @@
               </a:ln>
             </p:spPr>
             <p:txBody>
-              <a:bodyPr vert="horz" wrap="square" lIns="33774" tIns="13510" rIns="33774" bIns="13510" rtlCol="0" anchor="ctr">
+              <a:bodyPr vert="horz" wrap="square" lIns="41042" tIns="16417" rIns="41042" bIns="16417" rtlCol="0" anchor="ctr">
                 <a:spAutoFit/>
               </a:bodyPr>
               <a:lstStyle>
@@ -7409,10 +7560,16 @@
               <a:p>
                 <a:pPr algn="ctr"/>
                 <a:r>
-                  <a:rPr kumimoji="0" lang="ja-JP" altLang="en-US" sz="479" kern="0">
+                  <a:rPr kumimoji="0" lang="ja-JP" altLang="en-US" sz="582" b="0" i="0" u="none" strike="noStrike" kern="0" cap="none" spc="0" normalizeH="0" baseline="0">
+                    <a:ln>
+                      <a:noFill/>
+                    </a:ln>
                     <a:solidFill>
                       <a:srgbClr val="000000"/>
                     </a:solidFill>
+                    <a:effectLst/>
+                    <a:uLnTx/>
+                    <a:uFillTx/>
                     <a:latin typeface="Meiryo UI"/>
                     <a:ea typeface="Meiryo UI"/>
                   </a:rPr>
@@ -7424,7 +7581,7 @@
           </p:sp>
           <p:sp>
             <p:nvSpPr>
-              <p:cNvPr id="96" name="正方形/長方形 95">
+              <p:cNvPr id="199" name="正方形/長方形 198">
                 <a:extLst>
                   <a:ext uri="{FF2B5EF4-FFF2-40B4-BE49-F238E27FC236}">
                     <a16:creationId xmlns:a16="http://schemas.microsoft.com/office/drawing/2014/main" id="{ECFFC952-EA0A-4F2B-1715-77E116184072}"/>
@@ -7559,13 +7716,13 @@
               </a:lstStyle>
               <a:p>
                 <a:pPr algn="l"/>
-                <a:endParaRPr lang="ja-JP" altLang="en-US" sz="585"/>
+                <a:endParaRPr kumimoji="1" lang="ja-JP" altLang="en-US" sz="711"/>
               </a:p>
             </p:txBody>
           </p:sp>
           <p:pic>
             <p:nvPicPr>
-              <p:cNvPr id="97" name="図 96" descr="RZ-A395S">
+              <p:cNvPr id="200" name="図 199" descr="RZ-A395S">
                 <a:extLst>
                   <a:ext uri="{FF2B5EF4-FFF2-40B4-BE49-F238E27FC236}">
                     <a16:creationId xmlns:a16="http://schemas.microsoft.com/office/drawing/2014/main" id="{7B696411-609D-FC02-CF7B-46690C281932}"/>
@@ -7612,7 +7769,7 @@
           </p:pic>
           <p:pic>
             <p:nvPicPr>
-              <p:cNvPr id="98" name="図 97" descr="新型つり銭機「RT-300」「RAD-300」、包装硬貨管理機「WD-300」を開発 | グローリー株式会社">
+              <p:cNvPr id="201" name="図 200" descr="新型つり銭機「RT-300」「RAD-300」、包装硬貨管理機「WD-300」を開発 | グローリー株式会社">
                 <a:extLst>
                   <a:ext uri="{FF2B5EF4-FFF2-40B4-BE49-F238E27FC236}">
                     <a16:creationId xmlns:a16="http://schemas.microsoft.com/office/drawing/2014/main" id="{659D6C2C-93AA-C9CE-13DA-B8274027D9CD}"/>
@@ -7659,7 +7816,7 @@
           </p:pic>
           <p:pic>
             <p:nvPicPr>
-              <p:cNvPr id="99" name="図 98" descr="DSCA-PO 3B/6C 手動開閉式キャッシュドロアー DSCA-PO クローバー電子 25911753">
+              <p:cNvPr id="202" name="図 201" descr="DSCA-PO 3B/6C 手動開閉式キャッシュドロアー DSCA-PO クローバー電子 25911753">
                 <a:extLst>
                   <a:ext uri="{FF2B5EF4-FFF2-40B4-BE49-F238E27FC236}">
                     <a16:creationId xmlns:a16="http://schemas.microsoft.com/office/drawing/2014/main" id="{B749B711-EA21-16AC-9959-6D9A7E58A2D7}"/>
@@ -7706,7 +7863,7 @@
           </p:pic>
           <p:pic>
             <p:nvPicPr>
-              <p:cNvPr id="100" name="図 99" descr="POSターミナル&lt;RZ-A476S/RZ-A396S&gt;：ニュースリリース画像ダウンロードサービス：シャープ">
+              <p:cNvPr id="203" name="図 202" descr="POSターミナル&lt;RZ-A476S/RZ-A396S&gt;：ニュースリリース画像ダウンロードサービス：シャープ">
                 <a:extLst>
                   <a:ext uri="{FF2B5EF4-FFF2-40B4-BE49-F238E27FC236}">
                     <a16:creationId xmlns:a16="http://schemas.microsoft.com/office/drawing/2014/main" id="{B2CD8304-0A07-5003-8EC2-CB88BD4E48C9}"/>
@@ -7753,7 +7910,7 @@
           </p:pic>
           <p:pic>
             <p:nvPicPr>
-              <p:cNvPr id="101" name="図 100">
+              <p:cNvPr id="204" name="図 203">
                 <a:extLst>
                   <a:ext uri="{FF2B5EF4-FFF2-40B4-BE49-F238E27FC236}">
                     <a16:creationId xmlns:a16="http://schemas.microsoft.com/office/drawing/2014/main" id="{D856D03C-C136-57CD-F180-AAA004E89E7D}"/>
@@ -7789,7 +7946,7 @@
           </p:pic>
           <p:pic>
             <p:nvPicPr>
-              <p:cNvPr id="102" name="図 101" descr="CAFISArch Saturn 1000 E | 日本決済情報センター">
+              <p:cNvPr id="205" name="図 204" descr="CAFISArch Saturn 1000 E | 日本決済情報センター">
                 <a:extLst>
                   <a:ext uri="{FF2B5EF4-FFF2-40B4-BE49-F238E27FC236}">
                     <a16:creationId xmlns:a16="http://schemas.microsoft.com/office/drawing/2014/main" id="{BBBC2F74-8FA7-3115-23B1-AC5F6700870A}"/>
@@ -7836,7 +7993,7 @@
           </p:pic>
           <p:pic>
             <p:nvPicPr>
-              <p:cNvPr id="103" name="Picture 2" descr="EPSON レシートプリンター/80mm・58mm/電源同梱/ホワイト TM302-611W">
+              <p:cNvPr id="206" name="Picture 2" descr="EPSON レシートプリンター/80mm・58mm/電源同梱/ホワイト TM302-611W">
                 <a:extLst>
                   <a:ext uri="{FF2B5EF4-FFF2-40B4-BE49-F238E27FC236}">
                     <a16:creationId xmlns:a16="http://schemas.microsoft.com/office/drawing/2014/main" id="{78EE4DF9-3CD3-EF43-9807-5FA8EEB94AAF}"/>
@@ -7884,7 +8041,7 @@
         </p:grpSp>
         <p:sp>
           <p:nvSpPr>
-            <p:cNvPr id="3" name="frame_0">
+            <p:cNvPr id="106" name="frame_0">
               <a:extLst>
                 <a:ext uri="{FF2B5EF4-FFF2-40B4-BE49-F238E27FC236}">
                   <a16:creationId xmlns:a16="http://schemas.microsoft.com/office/drawing/2014/main" id="{031726FD-35F8-6BB1-476C-892329358C67}"/>
@@ -7896,7 +8053,7 @@
           </p:nvSpPr>
           <p:spPr>
             <a:xfrm>
-              <a:off x="1332904" y="1327005"/>
+              <a:off x="253404" y="3473304"/>
               <a:ext cx="2535465" cy="4143709"/>
             </a:xfrm>
             <a:prstGeom prst="roundRect">
@@ -8009,13 +8166,13 @@
               </a:lvl9pPr>
             </a:lstStyle>
             <a:p>
-              <a:endParaRPr lang="ja-JP" altLang="en-US" sz="1481"/>
+              <a:endParaRPr lang="ja-JP" altLang="en-US"/>
             </a:p>
           </p:txBody>
         </p:sp>
         <p:sp>
           <p:nvSpPr>
-            <p:cNvPr id="4" name="frame_title_0">
+            <p:cNvPr id="107" name="frame_title_0">
               <a:extLst>
                 <a:ext uri="{FF2B5EF4-FFF2-40B4-BE49-F238E27FC236}">
                   <a16:creationId xmlns:a16="http://schemas.microsoft.com/office/drawing/2014/main" id="{B7EDE28F-7394-D3AA-ADA1-E45E6B0C4C41}"/>
@@ -8027,7 +8184,7 @@
           </p:nvSpPr>
           <p:spPr>
             <a:xfrm>
-              <a:off x="1456896" y="1344406"/>
+              <a:off x="377396" y="3490705"/>
               <a:ext cx="2288672" cy="167440"/>
             </a:xfrm>
             <a:prstGeom prst="rect">
@@ -8041,7 +8198,7 @@
             </a:ln>
           </p:spPr>
           <p:txBody>
-            <a:bodyPr wrap="square" lIns="15260" tIns="7630" rIns="15260" bIns="7630" anchor="ctr">
+            <a:bodyPr wrap="square" lIns="18544" tIns="9272" rIns="18544" bIns="9272" anchor="ctr">
               <a:noAutofit/>
             </a:bodyPr>
             <a:lstStyle>
@@ -8142,7 +8299,7 @@
             <a:p>
               <a:pPr algn="ctr"/>
               <a:r>
-                <a:rPr lang="ja-JP" altLang="en-US" sz="551" b="1">
+                <a:rPr lang="ja-JP" sz="669" b="1">
                   <a:solidFill>
                     <a:srgbClr val="2E75B6"/>
                   </a:solidFill>
@@ -8150,58 +8307,14 @@
                   <a:ea typeface="Meiryo UI"/>
                   <a:cs typeface="Meiryo UI"/>
                 </a:rPr>
-                <a:t>（</a:t>
-              </a:r>
-              <a:r>
-                <a:rPr lang="en-US" altLang="ja-JP" sz="551" b="1">
-                  <a:solidFill>
-                    <a:srgbClr val="2E75B6"/>
-                  </a:solidFill>
-                  <a:latin typeface="Meiryo UI"/>
-                  <a:ea typeface="Meiryo UI"/>
-                  <a:cs typeface="Meiryo UI"/>
-                </a:rPr>
-                <a:t>1</a:t>
-              </a:r>
-              <a:r>
-                <a:rPr lang="ja-JP" altLang="en-US" sz="551" b="1">
-                  <a:solidFill>
-                    <a:srgbClr val="2E75B6"/>
-                  </a:solidFill>
-                  <a:latin typeface="Meiryo UI"/>
-                  <a:ea typeface="Meiryo UI"/>
-                  <a:cs typeface="Meiryo UI"/>
-                </a:rPr>
-                <a:t>） タブレット</a:t>
-              </a:r>
-              <a:r>
-                <a:rPr lang="en-US" altLang="ja-JP" sz="551" b="1">
-                  <a:solidFill>
-                    <a:srgbClr val="2E75B6"/>
-                  </a:solidFill>
-                  <a:latin typeface="Meiryo UI"/>
-                  <a:ea typeface="Meiryo UI"/>
-                  <a:cs typeface="Meiryo UI"/>
-                </a:rPr>
-                <a:t>POS</a:t>
-              </a:r>
-              <a:r>
-                <a:rPr lang="ja-JP" altLang="en-US" sz="551" b="1">
-                  <a:solidFill>
-                    <a:srgbClr val="2E75B6"/>
-                  </a:solidFill>
-                  <a:latin typeface="Meiryo UI"/>
-                  <a:ea typeface="Meiryo UI"/>
-                  <a:cs typeface="Meiryo UI"/>
-                </a:rPr>
-                <a:t>端末アプリ（アプリプロセス）</a:t>
+                <a:t>1 タブレットPOS端末アプリ（アプリプロセス）</a:t>
               </a:r>
             </a:p>
           </p:txBody>
         </p:sp>
         <p:sp>
           <p:nvSpPr>
-            <p:cNvPr id="5" name="frame_1">
+            <p:cNvPr id="108" name="frame_1">
               <a:extLst>
                 <a:ext uri="{FF2B5EF4-FFF2-40B4-BE49-F238E27FC236}">
                   <a16:creationId xmlns:a16="http://schemas.microsoft.com/office/drawing/2014/main" id="{E8BA3FF5-B6DA-C219-29F6-E643060C6978}"/>
@@ -8213,7 +8326,7 @@
           </p:nvSpPr>
           <p:spPr>
             <a:xfrm>
-              <a:off x="3912296" y="3061969"/>
+              <a:off x="2832796" y="5208268"/>
               <a:ext cx="2309486" cy="4530643"/>
             </a:xfrm>
             <a:prstGeom prst="roundRect">
@@ -8326,13 +8439,13 @@
               </a:lvl9pPr>
             </a:lstStyle>
             <a:p>
-              <a:endParaRPr lang="ja-JP" altLang="en-US" sz="1481"/>
+              <a:endParaRPr lang="ja-JP" altLang="en-US"/>
             </a:p>
           </p:txBody>
         </p:sp>
         <p:sp>
           <p:nvSpPr>
-            <p:cNvPr id="6" name="frame_title_1">
+            <p:cNvPr id="109" name="frame_title_1">
               <a:extLst>
                 <a:ext uri="{FF2B5EF4-FFF2-40B4-BE49-F238E27FC236}">
                   <a16:creationId xmlns:a16="http://schemas.microsoft.com/office/drawing/2014/main" id="{1BB4ECBE-C1BA-FAF1-4403-BEC618A4AF15}"/>
@@ -8344,7 +8457,7 @@
           </p:nvSpPr>
           <p:spPr>
             <a:xfrm>
-              <a:off x="4152038" y="3166701"/>
+              <a:off x="3072538" y="5313000"/>
               <a:ext cx="1808501" cy="123959"/>
             </a:xfrm>
             <a:prstGeom prst="rect">
@@ -8358,7 +8471,7 @@
             </a:ln>
           </p:spPr>
           <p:txBody>
-            <a:bodyPr wrap="square" lIns="15260" tIns="7630" rIns="15260" bIns="7630" anchor="ctr">
+            <a:bodyPr wrap="square" lIns="18544" tIns="9272" rIns="18544" bIns="9272" anchor="ctr">
               <a:noAutofit/>
             </a:bodyPr>
             <a:lstStyle>
@@ -8459,18 +8572,7 @@
             <a:p>
               <a:pPr algn="ctr"/>
               <a:r>
-                <a:rPr lang="ja-JP" altLang="en-US" sz="551" b="1">
-                  <a:solidFill>
-                    <a:srgbClr val="C55A11"/>
-                  </a:solidFill>
-                  <a:latin typeface="Meiryo UI"/>
-                  <a:ea typeface="Meiryo UI"/>
-                  <a:cs typeface="Meiryo UI"/>
-                </a:rPr>
-                <a:t>（</a:t>
-              </a:r>
-              <a:r>
-                <a:rPr lang="en-US" altLang="ja-JP" sz="551" b="1">
+                <a:rPr lang="en-US" altLang="ja-JP" sz="669" b="1">
                   <a:solidFill>
                     <a:srgbClr val="C55A11"/>
                   </a:solidFill>
@@ -8481,7 +8583,7 @@
                 <a:t>2</a:t>
               </a:r>
               <a:r>
-                <a:rPr lang="ja-JP" altLang="en-US" sz="551" b="1">
+                <a:rPr lang="ja-JP" altLang="en-US" sz="669" b="1">
                   <a:solidFill>
                     <a:srgbClr val="C55A11"/>
                   </a:solidFill>
@@ -8489,10 +8591,10 @@
                   <a:ea typeface="Meiryo UI"/>
                   <a:cs typeface="Meiryo UI"/>
                 </a:rPr>
-                <a:t>） デバイスコネクタ（</a:t>
+                <a:t> デバイスコネクタ（</a:t>
               </a:r>
               <a:r>
-                <a:rPr lang="en-US" altLang="ja-JP" sz="551" b="1">
+                <a:rPr lang="en-US" altLang="ja-JP" sz="669" b="1">
                   <a:solidFill>
                     <a:srgbClr val="C55A11"/>
                   </a:solidFill>
@@ -8503,7 +8605,7 @@
                 <a:t>Windows</a:t>
               </a:r>
               <a:r>
-                <a:rPr lang="ja-JP" altLang="en-US" sz="551" b="1">
+                <a:rPr lang="ja-JP" altLang="en-US" sz="669" b="1">
                   <a:solidFill>
                     <a:srgbClr val="C55A11"/>
                   </a:solidFill>
@@ -8513,12 +8615,20 @@
                 </a:rPr>
                 <a:t>別プロセス）</a:t>
               </a:r>
+              <a:endParaRPr lang="ja-JP" sz="669" b="1">
+                <a:solidFill>
+                  <a:srgbClr val="C55A11"/>
+                </a:solidFill>
+                <a:latin typeface="Meiryo UI"/>
+                <a:ea typeface="Meiryo UI"/>
+                <a:cs typeface="Meiryo UI"/>
+              </a:endParaRPr>
             </a:p>
           </p:txBody>
         </p:sp>
         <p:sp>
           <p:nvSpPr>
-            <p:cNvPr id="7" name="frame_2">
+            <p:cNvPr id="110" name="frame_2">
               <a:extLst>
                 <a:ext uri="{FF2B5EF4-FFF2-40B4-BE49-F238E27FC236}">
                   <a16:creationId xmlns:a16="http://schemas.microsoft.com/office/drawing/2014/main" id="{D6225DEE-6BAE-DDE1-4238-8455AA34B696}"/>
@@ -8530,7 +8640,7 @@
           </p:nvSpPr>
           <p:spPr>
             <a:xfrm>
-              <a:off x="6774224" y="3077738"/>
+              <a:off x="5694724" y="5224037"/>
               <a:ext cx="1768174" cy="5669782"/>
             </a:xfrm>
             <a:prstGeom prst="roundRect">
@@ -8643,13 +8753,13 @@
               </a:lvl9pPr>
             </a:lstStyle>
             <a:p>
-              <a:endParaRPr lang="ja-JP" altLang="en-US" sz="1481"/>
+              <a:endParaRPr lang="ja-JP" altLang="en-US"/>
             </a:p>
           </p:txBody>
         </p:sp>
         <p:sp>
           <p:nvSpPr>
-            <p:cNvPr id="8" name="frame_title_2">
+            <p:cNvPr id="111" name="frame_title_2">
               <a:extLst>
                 <a:ext uri="{FF2B5EF4-FFF2-40B4-BE49-F238E27FC236}">
                   <a16:creationId xmlns:a16="http://schemas.microsoft.com/office/drawing/2014/main" id="{D35FAB1C-EE0F-4C07-2D5D-1F120C65EB3E}"/>
@@ -8661,7 +8771,7 @@
           </p:nvSpPr>
           <p:spPr>
             <a:xfrm>
-              <a:off x="7202843" y="3166701"/>
+              <a:off x="6123343" y="5313000"/>
               <a:ext cx="781356" cy="161091"/>
             </a:xfrm>
             <a:prstGeom prst="rect">
@@ -8675,7 +8785,7 @@
             </a:ln>
           </p:spPr>
           <p:txBody>
-            <a:bodyPr wrap="square" lIns="15260" tIns="7630" rIns="15260" bIns="7630" anchor="ctr">
+            <a:bodyPr wrap="square" lIns="18544" tIns="9272" rIns="18544" bIns="9272" anchor="ctr">
               <a:noAutofit/>
             </a:bodyPr>
             <a:lstStyle>
@@ -8776,7 +8886,7 @@
             <a:p>
               <a:pPr algn="ctr"/>
               <a:r>
-                <a:rPr lang="ja-JP" altLang="en-US" sz="551" b="1">
+                <a:rPr lang="ja-JP" sz="669" b="1">
                   <a:solidFill>
                     <a:srgbClr val="7030A0"/>
                   </a:solidFill>
@@ -8784,36 +8894,14 @@
                   <a:ea typeface="Meiryo UI"/>
                   <a:cs typeface="Meiryo UI"/>
                 </a:rPr>
-                <a:t>（</a:t>
-              </a:r>
-              <a:r>
-                <a:rPr lang="en-US" altLang="ja-JP" sz="551" b="1">
-                  <a:solidFill>
-                    <a:srgbClr val="7030A0"/>
-                  </a:solidFill>
-                  <a:latin typeface="Meiryo UI"/>
-                  <a:ea typeface="Meiryo UI"/>
-                  <a:cs typeface="Meiryo UI"/>
-                </a:rPr>
-                <a:t>3</a:t>
-              </a:r>
-              <a:r>
-                <a:rPr lang="ja-JP" altLang="en-US" sz="551" b="1">
-                  <a:solidFill>
-                    <a:srgbClr val="7030A0"/>
-                  </a:solidFill>
-                  <a:latin typeface="Meiryo UI"/>
-                  <a:ea typeface="Meiryo UI"/>
-                  <a:cs typeface="Meiryo UI"/>
-                </a:rPr>
-                <a:t>） 周辺機器</a:t>
+                <a:t>3 周辺機器</a:t>
               </a:r>
             </a:p>
           </p:txBody>
         </p:sp>
         <p:sp>
           <p:nvSpPr>
-            <p:cNvPr id="9" name="cell_C49">
+            <p:cNvPr id="112" name="cell_C49">
               <a:extLst>
                 <a:ext uri="{FF2B5EF4-FFF2-40B4-BE49-F238E27FC236}">
                   <a16:creationId xmlns:a16="http://schemas.microsoft.com/office/drawing/2014/main" id="{8601335D-A0DA-B3B6-914C-70DB74E67BFB}"/>
@@ -8825,7 +8913,7 @@
           </p:nvSpPr>
           <p:spPr>
             <a:xfrm>
-              <a:off x="1350373" y="1072466"/>
+              <a:off x="270873" y="3218765"/>
               <a:ext cx="5010243" cy="131597"/>
             </a:xfrm>
             <a:prstGeom prst="rect">
@@ -8839,7 +8927,7 @@
             </a:ln>
           </p:spPr>
           <p:txBody>
-            <a:bodyPr wrap="square" lIns="15260" tIns="7630" rIns="15260" bIns="7630" anchor="ctr">
+            <a:bodyPr wrap="square" lIns="18544" tIns="9272" rIns="18544" bIns="9272" anchor="ctr">
               <a:noAutofit/>
             </a:bodyPr>
             <a:lstStyle>
@@ -8940,7 +9028,7 @@
             <a:p>
               <a:pPr algn="ctr"/>
               <a:r>
-                <a:rPr lang="en-US" altLang="ja-JP" sz="593" b="1">
+                <a:rPr lang="ja-JP" sz="721" b="1">
                   <a:solidFill>
                     <a:srgbClr val="FF0000"/>
                   </a:solidFill>
@@ -8948,25 +9036,14 @@
                   <a:ea typeface="Meiryo UI"/>
                   <a:cs typeface="Meiryo UI"/>
                 </a:rPr>
-                <a:t>POS</a:t>
-              </a:r>
-              <a:r>
-                <a:rPr lang="ja-JP" altLang="en-US" sz="593" b="1">
-                  <a:solidFill>
-                    <a:srgbClr val="FF0000"/>
-                  </a:solidFill>
-                  <a:latin typeface="Meiryo UI"/>
-                  <a:ea typeface="Meiryo UI"/>
-                  <a:cs typeface="Meiryo UI"/>
-                </a:rPr>
-                <a:t>端末のウィンドウズ環境</a:t>
+                <a:t>POS端末のウィンドウズ環境</a:t>
               </a:r>
             </a:p>
           </p:txBody>
         </p:sp>
         <p:sp>
           <p:nvSpPr>
-            <p:cNvPr id="10" name="section_bg_d512_2_3">
+            <p:cNvPr id="113" name="section_bg_d512_2_3">
               <a:extLst>
                 <a:ext uri="{FF2B5EF4-FFF2-40B4-BE49-F238E27FC236}">
                   <a16:creationId xmlns:a16="http://schemas.microsoft.com/office/drawing/2014/main" id="{3285102D-6749-D5D6-96A0-98F122381FDB}"/>
@@ -8978,7 +9055,7 @@
           </p:nvSpPr>
           <p:spPr>
             <a:xfrm>
-              <a:off x="4011695" y="6764518"/>
+              <a:off x="2932195" y="8910817"/>
               <a:ext cx="2076876" cy="724394"/>
             </a:xfrm>
             <a:prstGeom prst="rect">
@@ -9113,21 +9190,27 @@
             <a:p>
               <a:pPr algn="ctr"/>
               <a:r>
-                <a:rPr kumimoji="0" lang="ja-JP" altLang="en-US" sz="551" b="1" kern="0">
+                <a:rPr kumimoji="0" lang="ja-JP" altLang="en-US" sz="669" b="1" i="0" u="none" strike="noStrike" kern="0" cap="none" spc="0" normalizeH="0" baseline="0">
+                  <a:ln>
+                    <a:noFill/>
+                  </a:ln>
                   <a:solidFill>
                     <a:srgbClr val="111111"/>
                   </a:solidFill>
+                  <a:effectLst/>
+                  <a:uLnTx/>
+                  <a:uFillTx/>
                   <a:latin typeface="Meiryo UI"/>
                   <a:ea typeface="Meiryo UI"/>
                 </a:rPr>
-                <a:t>(3) 既存デバイス資源呼出し</a:t>
+                <a:t>2.3 既存デバイス資源呼出し</a:t>
               </a:r>
             </a:p>
           </p:txBody>
         </p:sp>
         <p:sp>
           <p:nvSpPr>
-            <p:cNvPr id="11" name="section_bg_d512_2_2">
+            <p:cNvPr id="114" name="section_bg_d512_2_2">
               <a:extLst>
                 <a:ext uri="{FF2B5EF4-FFF2-40B4-BE49-F238E27FC236}">
                   <a16:creationId xmlns:a16="http://schemas.microsoft.com/office/drawing/2014/main" id="{148AC416-C123-E647-8BD5-68B20AADD2DE}"/>
@@ -9139,7 +9222,7 @@
           </p:nvSpPr>
           <p:spPr>
             <a:xfrm>
-              <a:off x="3972269" y="4959814"/>
+              <a:off x="2892769" y="7106113"/>
               <a:ext cx="2136963" cy="1577653"/>
             </a:xfrm>
             <a:prstGeom prst="rect">
@@ -9274,21 +9357,27 @@
             <a:p>
               <a:pPr algn="ctr"/>
               <a:r>
-                <a:rPr kumimoji="0" lang="ja-JP" altLang="en-US" sz="551" b="1" kern="0">
+                <a:rPr kumimoji="0" lang="ja-JP" altLang="en-US" sz="669" b="1" i="0" u="none" strike="noStrike" kern="0" cap="none" spc="0" normalizeH="0" baseline="0">
+                  <a:ln>
+                    <a:noFill/>
+                  </a:ln>
                   <a:solidFill>
                     <a:srgbClr val="111111"/>
                   </a:solidFill>
+                  <a:effectLst/>
+                  <a:uLnTx/>
+                  <a:uFillTx/>
                   <a:latin typeface="Meiryo UI"/>
                   <a:ea typeface="Meiryo UI"/>
                 </a:rPr>
-                <a:t>(2) コマンド実行</a:t>
+                <a:t>2.2 コマンド実行</a:t>
               </a:r>
             </a:p>
           </p:txBody>
         </p:sp>
         <p:sp>
           <p:nvSpPr>
-            <p:cNvPr id="12" name="section_bg_d512_2_1">
+            <p:cNvPr id="115" name="section_bg_d512_2_1">
               <a:extLst>
                 <a:ext uri="{FF2B5EF4-FFF2-40B4-BE49-F238E27FC236}">
                   <a16:creationId xmlns:a16="http://schemas.microsoft.com/office/drawing/2014/main" id="{06D5634C-EDF7-8DDF-50E5-6AB830FA0586}"/>
@@ -9300,7 +9389,7 @@
           </p:nvSpPr>
           <p:spPr>
             <a:xfrm>
-              <a:off x="3983758" y="3460609"/>
+              <a:off x="2904258" y="5606908"/>
               <a:ext cx="2128870" cy="1239814"/>
             </a:xfrm>
             <a:prstGeom prst="rect">
@@ -9435,21 +9524,27 @@
             <a:p>
               <a:pPr algn="ctr"/>
               <a:r>
-                <a:rPr kumimoji="0" lang="ja-JP" altLang="en-US" sz="551" b="1" kern="0">
+                <a:rPr kumimoji="0" lang="ja-JP" altLang="en-US" sz="669" b="1" i="0" u="none" strike="noStrike" kern="0" cap="none" spc="0" normalizeH="0" baseline="0">
+                  <a:ln>
+                    <a:noFill/>
+                  </a:ln>
                   <a:solidFill>
                     <a:srgbClr val="111111"/>
                   </a:solidFill>
+                  <a:effectLst/>
+                  <a:uLnTx/>
+                  <a:uFillTx/>
                   <a:latin typeface="Meiryo UI"/>
                   <a:ea typeface="Meiryo UI"/>
                 </a:rPr>
-                <a:t>(1) プロセス・通信サービス</a:t>
+                <a:t>2.1 プロセス・通信サービス</a:t>
               </a:r>
             </a:p>
           </p:txBody>
         </p:sp>
         <p:sp>
           <p:nvSpPr>
-            <p:cNvPr id="13" name="section_bg_d512_1_2">
+            <p:cNvPr id="116" name="section_bg_d512_1_2">
               <a:extLst>
                 <a:ext uri="{FF2B5EF4-FFF2-40B4-BE49-F238E27FC236}">
                   <a16:creationId xmlns:a16="http://schemas.microsoft.com/office/drawing/2014/main" id="{18EA3712-DB71-8713-33B4-827AFAC15A29}"/>
@@ -9461,7 +9556,7 @@
           </p:nvSpPr>
           <p:spPr>
             <a:xfrm>
-              <a:off x="1440757" y="3176464"/>
+              <a:off x="361257" y="5322763"/>
               <a:ext cx="2389070" cy="2248271"/>
             </a:xfrm>
             <a:prstGeom prst="rect">
@@ -9596,21 +9691,27 @@
             <a:p>
               <a:pPr algn="ctr"/>
               <a:r>
-                <a:rPr kumimoji="0" lang="ja-JP" altLang="en-US" sz="551" b="1" kern="0">
+                <a:rPr kumimoji="0" lang="ja-JP" altLang="en-US" sz="669" b="1" i="0" u="none" strike="noStrike" kern="0" cap="none" spc="0" normalizeH="0" baseline="0">
+                  <a:ln>
+                    <a:noFill/>
+                  </a:ln>
                   <a:solidFill>
                     <a:srgbClr val="111111"/>
                   </a:solidFill>
+                  <a:effectLst/>
+                  <a:uLnTx/>
+                  <a:uFillTx/>
                   <a:latin typeface="Meiryo UI"/>
                   <a:ea typeface="Meiryo UI"/>
                 </a:rPr>
-                <a:t>(2) デバイス制御層</a:t>
+                <a:t>1.2 デバイス制御層</a:t>
               </a:r>
             </a:p>
           </p:txBody>
         </p:sp>
         <p:sp>
           <p:nvSpPr>
-            <p:cNvPr id="14" name="section_bg_d512_1_1">
+            <p:cNvPr id="117" name="section_bg_d512_1_1">
               <a:extLst>
                 <a:ext uri="{FF2B5EF4-FFF2-40B4-BE49-F238E27FC236}">
                   <a16:creationId xmlns:a16="http://schemas.microsoft.com/office/drawing/2014/main" id="{9B93FF45-ABF8-629F-FDC5-592A853A7856}"/>
@@ -9622,7 +9723,7 @@
           </p:nvSpPr>
           <p:spPr>
             <a:xfrm>
-              <a:off x="1441806" y="1606846"/>
+              <a:off x="362306" y="3753145"/>
               <a:ext cx="2361451" cy="1462881"/>
             </a:xfrm>
             <a:prstGeom prst="rect">
@@ -9757,21 +9858,27 @@
             <a:p>
               <a:pPr algn="ctr"/>
               <a:r>
-                <a:rPr kumimoji="0" lang="ja-JP" altLang="en-US" sz="551" b="1" kern="0">
+                <a:rPr kumimoji="0" lang="ja-JP" altLang="en-US" sz="669" b="1" i="0" u="none" strike="noStrike" kern="0" cap="none" spc="0" normalizeH="0" baseline="0">
+                  <a:ln>
+                    <a:noFill/>
+                  </a:ln>
                   <a:solidFill>
                     <a:srgbClr val="111111"/>
                   </a:solidFill>
+                  <a:effectLst/>
+                  <a:uLnTx/>
+                  <a:uFillTx/>
                   <a:latin typeface="Meiryo UI"/>
                   <a:ea typeface="Meiryo UI"/>
                 </a:rPr>
-                <a:t>(1) アプリケーション層（業務・プロセス管理）</a:t>
+                <a:t>1.1 アプリケーション層（業務・プロセス管理）</a:t>
               </a:r>
             </a:p>
           </p:txBody>
         </p:sp>
         <p:sp>
           <p:nvSpPr>
-            <p:cNvPr id="15" name="shape_d512_HOST_HOST_EXEC_CONTROL" title="②-2 要求変換・コマンド制御">
+            <p:cNvPr id="118" name="shape_d512_HOST_HOST_EXEC_CONTROL" title="②-2 要求変換・コマンド制御">
               <a:extLst>
                 <a:ext uri="{FF2B5EF4-FFF2-40B4-BE49-F238E27FC236}">
                   <a16:creationId xmlns:a16="http://schemas.microsoft.com/office/drawing/2014/main" id="{0AD9F8A5-11CC-14F2-A145-B6D778CD176B}"/>
@@ -9783,7 +9890,7 @@
           </p:nvSpPr>
           <p:spPr>
             <a:xfrm>
-              <a:off x="4421918" y="5621994"/>
+              <a:off x="3342418" y="7768293"/>
               <a:ext cx="1255563" cy="189384"/>
             </a:xfrm>
             <a:prstGeom prst="roundRect">
@@ -9817,7 +9924,7 @@
             </a:fontRef>
           </p:style>
           <p:txBody>
-            <a:bodyPr wrap="square" lIns="32301" tIns="16151" rIns="32301" bIns="16151" rtlCol="0" anchor="ctr">
+            <a:bodyPr wrap="square" lIns="39252" tIns="19626" rIns="39252" bIns="19626" rtlCol="0" anchor="ctr">
               <a:noAutofit/>
             </a:bodyPr>
             <a:lstStyle>
@@ -9918,30 +10025,48 @@
             <a:p>
               <a:pPr algn="ctr"/>
               <a:r>
-                <a:rPr kumimoji="0" lang="ja-JP" altLang="en-US" sz="424" b="1" kern="0">
+                <a:rPr kumimoji="0" lang="ja-JP" altLang="en-US" sz="515" b="1" i="0" u="none" strike="noStrike" kern="0" cap="none" spc="0" normalizeH="0" baseline="0">
+                  <a:ln>
+                    <a:noFill/>
+                  </a:ln>
                   <a:solidFill>
                     <a:srgbClr val="111111"/>
                   </a:solidFill>
+                  <a:effectLst/>
+                  <a:uLnTx/>
+                  <a:uFillTx/>
                   <a:latin typeface="Meiryo UI"/>
                   <a:ea typeface="Meiryo UI"/>
                 </a:rPr>
-                <a:t>(2)</a:t>
+                <a:t>2.2.</a:t>
               </a:r>
               <a:r>
-                <a:rPr kumimoji="0" lang="en-US" altLang="ja-JP" sz="424" b="1" kern="0">
+                <a:rPr kumimoji="0" lang="en-US" altLang="ja-JP" sz="515" b="1" i="0" u="none" strike="noStrike" kern="0" cap="none" spc="0" normalizeH="0" baseline="0">
+                  <a:ln>
+                    <a:noFill/>
+                  </a:ln>
                   <a:solidFill>
                     <a:srgbClr val="111111"/>
                   </a:solidFill>
+                  <a:effectLst/>
+                  <a:uLnTx/>
+                  <a:uFillTx/>
                   <a:latin typeface="Meiryo UI"/>
                   <a:ea typeface="Meiryo UI"/>
                 </a:rPr>
-                <a:t>-2 </a:t>
+                <a:t>2 </a:t>
               </a:r>
               <a:r>
-                <a:rPr kumimoji="0" lang="ja-JP" altLang="en-US" sz="424" b="1" kern="0">
+                <a:rPr kumimoji="0" lang="ja-JP" altLang="en-US" sz="515" b="1" i="0" u="none" strike="noStrike" kern="0" cap="none" spc="0" normalizeH="0" baseline="0">
+                  <a:ln>
+                    <a:noFill/>
+                  </a:ln>
                   <a:solidFill>
                     <a:srgbClr val="111111"/>
                   </a:solidFill>
+                  <a:effectLst/>
+                  <a:uLnTx/>
+                  <a:uFillTx/>
                   <a:latin typeface="Meiryo UI"/>
                   <a:ea typeface="Meiryo UI"/>
                 </a:rPr>
@@ -9952,7 +10077,7 @@
         </p:sp>
         <p:sp>
           <p:nvSpPr>
-            <p:cNvPr id="16" name="shape_d512_APP_APP_COORD_PROCESS" descr="デバイスコネクタはアプリと&#10;は別プロセスで管理します。&#10;起動・停止はアプリのライフサイクルに&#10;合わせて制御します。" title="①-3 デバイスコネクタ プロセス管理">
+            <p:cNvPr id="119" name="shape_d512_APP_APP_COORD_PROCESS" descr="デバイスコネクタはアプリと&#10;は別プロセスで管理します。&#10;起動・停止はアプリのライフサイクルに&#10;合わせて制御します。" title="①-3 デバイスコネクタ プロセス管理">
               <a:extLst>
                 <a:ext uri="{FF2B5EF4-FFF2-40B4-BE49-F238E27FC236}">
                   <a16:creationId xmlns:a16="http://schemas.microsoft.com/office/drawing/2014/main" id="{0D98AA08-FA20-6936-B57E-AE4D5614358A}"/>
@@ -9964,7 +10089,7 @@
           </p:nvSpPr>
           <p:spPr>
             <a:xfrm>
-              <a:off x="2107484" y="2574514"/>
+              <a:off x="1027984" y="4720813"/>
               <a:ext cx="1006315" cy="421291"/>
             </a:xfrm>
             <a:prstGeom prst="roundRect">
@@ -9998,7 +10123,7 @@
             </a:fontRef>
           </p:style>
           <p:txBody>
-            <a:bodyPr wrap="square" lIns="32301" tIns="16151" rIns="32301" bIns="16151" rtlCol="0" anchor="ctr">
+            <a:bodyPr wrap="square" lIns="39252" tIns="19626" rIns="39252" bIns="19626" rtlCol="0" anchor="ctr">
               <a:noAutofit/>
             </a:bodyPr>
             <a:lstStyle>
@@ -10099,30 +10224,48 @@
             <a:p>
               <a:pPr algn="ctr"/>
               <a:r>
-                <a:rPr kumimoji="0" lang="ja-JP" altLang="en-US" sz="424" b="1" kern="0">
+                <a:rPr kumimoji="0" lang="ja-JP" altLang="en-US" sz="515" b="1" i="0" u="none" strike="noStrike" kern="0" cap="none" spc="0" normalizeH="0" baseline="0">
+                  <a:ln>
+                    <a:noFill/>
+                  </a:ln>
                   <a:solidFill>
                     <a:srgbClr val="111111"/>
                   </a:solidFill>
+                  <a:effectLst/>
+                  <a:uLnTx/>
+                  <a:uFillTx/>
                   <a:latin typeface="Meiryo UI"/>
                   <a:ea typeface="Meiryo UI"/>
                 </a:rPr>
-                <a:t>(1)</a:t>
+                <a:t>1.1.</a:t>
               </a:r>
               <a:r>
-                <a:rPr kumimoji="0" lang="en-US" altLang="ja-JP" sz="424" b="1" kern="0">
+                <a:rPr kumimoji="0" lang="en-US" altLang="ja-JP" sz="515" b="1" i="0" u="none" strike="noStrike" kern="0" cap="none" spc="0" normalizeH="0" baseline="0">
+                  <a:ln>
+                    <a:noFill/>
+                  </a:ln>
                   <a:solidFill>
                     <a:srgbClr val="111111"/>
                   </a:solidFill>
+                  <a:effectLst/>
+                  <a:uLnTx/>
+                  <a:uFillTx/>
                   <a:latin typeface="Meiryo UI"/>
                   <a:ea typeface="Meiryo UI"/>
                 </a:rPr>
-                <a:t>-3 </a:t>
+                <a:t>3 </a:t>
               </a:r>
               <a:r>
-                <a:rPr kumimoji="0" lang="ja-JP" altLang="en-US" sz="424" b="1" kern="0">
+                <a:rPr kumimoji="0" lang="ja-JP" altLang="en-US" sz="515" b="1" i="0" u="none" strike="noStrike" kern="0" cap="none" spc="0" normalizeH="0" baseline="0">
+                  <a:ln>
+                    <a:noFill/>
+                  </a:ln>
                   <a:solidFill>
                     <a:srgbClr val="111111"/>
                   </a:solidFill>
+                  <a:effectLst/>
+                  <a:uLnTx/>
+                  <a:uFillTx/>
                   <a:latin typeface="Meiryo UI"/>
                   <a:ea typeface="Meiryo UI"/>
                 </a:rPr>
@@ -10134,7 +10277,7 @@
         </p:sp>
         <p:sp>
           <p:nvSpPr>
-            <p:cNvPr id="17" name="shape_d512_APP_APP_COORD_LIFECYCLE" title="①-2 アプリライフサイクル">
+            <p:cNvPr id="120" name="shape_d512_APP_APP_COORD_LIFECYCLE" title="①-2 アプリライフサイクル">
               <a:extLst>
                 <a:ext uri="{FF2B5EF4-FFF2-40B4-BE49-F238E27FC236}">
                   <a16:creationId xmlns:a16="http://schemas.microsoft.com/office/drawing/2014/main" id="{38151D8B-A6B9-355B-9970-7A17E258E024}"/>
@@ -10146,7 +10289,7 @@
           </p:nvSpPr>
           <p:spPr>
             <a:xfrm>
-              <a:off x="2031173" y="2222880"/>
+              <a:off x="951673" y="4369179"/>
               <a:ext cx="1143695" cy="181255"/>
             </a:xfrm>
             <a:prstGeom prst="roundRect">
@@ -10180,7 +10323,7 @@
             </a:fontRef>
           </p:style>
           <p:txBody>
-            <a:bodyPr wrap="square" lIns="32301" tIns="16151" rIns="32301" bIns="16151" rtlCol="0" anchor="ctr">
+            <a:bodyPr wrap="square" lIns="39252" tIns="19626" rIns="39252" bIns="19626" rtlCol="0" anchor="ctr">
               <a:noAutofit/>
             </a:bodyPr>
             <a:lstStyle>
@@ -10281,30 +10424,48 @@
             <a:p>
               <a:pPr algn="ctr"/>
               <a:r>
-                <a:rPr kumimoji="0" lang="ja-JP" altLang="en-US" sz="424" b="1" kern="0">
+                <a:rPr kumimoji="0" lang="ja-JP" altLang="en-US" sz="515" b="1" i="0" u="none" strike="noStrike" kern="0" cap="none" spc="0" normalizeH="0" baseline="0">
+                  <a:ln>
+                    <a:noFill/>
+                  </a:ln>
                   <a:solidFill>
                     <a:srgbClr val="111111"/>
                   </a:solidFill>
+                  <a:effectLst/>
+                  <a:uLnTx/>
+                  <a:uFillTx/>
                   <a:latin typeface="Meiryo UI"/>
                   <a:ea typeface="Meiryo UI"/>
                 </a:rPr>
-                <a:t>(1)</a:t>
+                <a:t>1.1.</a:t>
               </a:r>
               <a:r>
-                <a:rPr kumimoji="0" lang="en-US" altLang="ja-JP" sz="424" b="1" kern="0">
+                <a:rPr kumimoji="0" lang="en-US" altLang="ja-JP" sz="515" b="1" i="0" u="none" strike="noStrike" kern="0" cap="none" spc="0" normalizeH="0" baseline="0">
+                  <a:ln>
+                    <a:noFill/>
+                  </a:ln>
                   <a:solidFill>
                     <a:srgbClr val="111111"/>
                   </a:solidFill>
+                  <a:effectLst/>
+                  <a:uLnTx/>
+                  <a:uFillTx/>
                   <a:latin typeface="Meiryo UI"/>
                   <a:ea typeface="Meiryo UI"/>
                 </a:rPr>
-                <a:t>-2 </a:t>
+                <a:t>2 </a:t>
               </a:r>
               <a:r>
-                <a:rPr kumimoji="0" lang="ja-JP" altLang="en-US" sz="424" b="1" kern="0">
+                <a:rPr kumimoji="0" lang="ja-JP" altLang="en-US" sz="515" b="1" i="0" u="none" strike="noStrike" kern="0" cap="none" spc="0" normalizeH="0" baseline="0">
+                  <a:ln>
+                    <a:noFill/>
+                  </a:ln>
                   <a:solidFill>
                     <a:srgbClr val="111111"/>
                   </a:solidFill>
+                  <a:effectLst/>
+                  <a:uLnTx/>
+                  <a:uFillTx/>
                   <a:latin typeface="Meiryo UI"/>
                   <a:ea typeface="Meiryo UI"/>
                 </a:rPr>
@@ -10315,7 +10476,7 @@
         </p:sp>
         <p:sp>
           <p:nvSpPr>
-            <p:cNvPr id="18" name="shape_d512_HOST_HOST_EXEC_ORDER" descr="同一デバイスへの要求は&#10;デバイスID単位で順序制御し、&#10;並行実行による競合を防止します。" title="②-1 デバイスID別順序制御">
+            <p:cNvPr id="121" name="shape_d512_HOST_HOST_EXEC_ORDER" descr="同一デバイスへの要求は&#10;デバイスID単位で順序制御し、&#10;並行実行による競合を防止します。" title="②-1 デバイスID別順序制御">
               <a:extLst>
                 <a:ext uri="{FF2B5EF4-FFF2-40B4-BE49-F238E27FC236}">
                   <a16:creationId xmlns:a16="http://schemas.microsoft.com/office/drawing/2014/main" id="{B9A038F3-8468-5FC4-8078-82AE36E3B19C}"/>
@@ -10327,7 +10488,7 @@
           </p:nvSpPr>
           <p:spPr>
             <a:xfrm>
-              <a:off x="4466902" y="5187708"/>
+              <a:off x="3387402" y="7334007"/>
               <a:ext cx="1150751" cy="179975"/>
             </a:xfrm>
             <a:prstGeom prst="roundRect">
@@ -10361,7 +10522,7 @@
             </a:fontRef>
           </p:style>
           <p:txBody>
-            <a:bodyPr wrap="square" lIns="32301" tIns="16151" rIns="32301" bIns="16151" rtlCol="0" anchor="ctr">
+            <a:bodyPr wrap="square" lIns="39252" tIns="19626" rIns="39252" bIns="19626" rtlCol="0" anchor="ctr">
               <a:noAutofit/>
             </a:bodyPr>
             <a:lstStyle>
@@ -10462,50 +10623,80 @@
             <a:p>
               <a:pPr algn="ctr"/>
               <a:r>
-                <a:rPr kumimoji="0" lang="ja-JP" altLang="en-US" sz="424" b="1" kern="0">
+                <a:rPr kumimoji="0" lang="ja-JP" altLang="en-US" sz="515" b="1" i="0" u="none" strike="noStrike" kern="0" cap="none" spc="0" normalizeH="0" baseline="0">
+                  <a:ln>
+                    <a:noFill/>
+                  </a:ln>
                   <a:solidFill>
                     <a:srgbClr val="111111"/>
                   </a:solidFill>
+                  <a:effectLst/>
+                  <a:uLnTx/>
+                  <a:uFillTx/>
                   <a:latin typeface="Meiryo UI"/>
                   <a:ea typeface="Meiryo UI"/>
                 </a:rPr>
-                <a:t>(2)</a:t>
+                <a:t>2.2.</a:t>
               </a:r>
               <a:r>
-                <a:rPr kumimoji="0" lang="en-US" altLang="ja-JP" sz="424" b="1" kern="0">
+                <a:rPr kumimoji="0" lang="en-US" altLang="ja-JP" sz="515" b="1" i="0" u="none" strike="noStrike" kern="0" cap="none" spc="0" normalizeH="0" baseline="0">
+                  <a:ln>
+                    <a:noFill/>
+                  </a:ln>
                   <a:solidFill>
                     <a:srgbClr val="111111"/>
                   </a:solidFill>
+                  <a:effectLst/>
+                  <a:uLnTx/>
+                  <a:uFillTx/>
                   <a:latin typeface="Meiryo UI"/>
                   <a:ea typeface="Meiryo UI"/>
                 </a:rPr>
-                <a:t>-1 </a:t>
+                <a:t>1 </a:t>
               </a:r>
               <a:r>
-                <a:rPr kumimoji="0" lang="ja-JP" altLang="en-US" sz="424" b="1" kern="0">
+                <a:rPr kumimoji="0" lang="ja-JP" altLang="en-US" sz="515" b="1" i="0" u="none" strike="noStrike" kern="0" cap="none" spc="0" normalizeH="0" baseline="0">
+                  <a:ln>
+                    <a:noFill/>
+                  </a:ln>
                   <a:solidFill>
                     <a:srgbClr val="111111"/>
                   </a:solidFill>
+                  <a:effectLst/>
+                  <a:uLnTx/>
+                  <a:uFillTx/>
                   <a:latin typeface="Meiryo UI"/>
                   <a:ea typeface="Meiryo UI"/>
                 </a:rPr>
                 <a:t>デバイス</a:t>
               </a:r>
               <a:r>
-                <a:rPr kumimoji="0" lang="en-US" altLang="ja-JP" sz="424" b="1" kern="0">
+                <a:rPr kumimoji="0" lang="en-US" altLang="ja-JP" sz="515" b="1" i="0" u="none" strike="noStrike" kern="0" cap="none" spc="0" normalizeH="0" baseline="0">
+                  <a:ln>
+                    <a:noFill/>
+                  </a:ln>
                   <a:solidFill>
                     <a:srgbClr val="111111"/>
                   </a:solidFill>
+                  <a:effectLst/>
+                  <a:uLnTx/>
+                  <a:uFillTx/>
                   <a:latin typeface="Meiryo UI"/>
                   <a:ea typeface="Meiryo UI"/>
                 </a:rPr>
                 <a:t>ID</a:t>
               </a:r>
               <a:r>
-                <a:rPr kumimoji="0" lang="ja-JP" altLang="en-US" sz="424" b="1" kern="0">
+                <a:rPr kumimoji="0" lang="ja-JP" altLang="en-US" sz="515" b="1" i="0" u="none" strike="noStrike" kern="0" cap="none" spc="0" normalizeH="0" baseline="0">
+                  <a:ln>
+                    <a:noFill/>
+                  </a:ln>
                   <a:solidFill>
                     <a:srgbClr val="111111"/>
                   </a:solidFill>
+                  <a:effectLst/>
+                  <a:uLnTx/>
+                  <a:uFillTx/>
                   <a:latin typeface="Meiryo UI"/>
                   <a:ea typeface="Meiryo UI"/>
                 </a:rPr>
@@ -10516,7 +10707,7 @@
         </p:sp>
         <p:sp>
           <p:nvSpPr>
-            <p:cNvPr id="19" name="shape_d512_APP_APP_ACCESS_SELECT" title="②-1 設定・制御方式選択">
+            <p:cNvPr id="122" name="shape_d512_APP_APP_ACCESS_SELECT" title="②-1 設定・制御方式選択">
               <a:extLst>
                 <a:ext uri="{FF2B5EF4-FFF2-40B4-BE49-F238E27FC236}">
                   <a16:creationId xmlns:a16="http://schemas.microsoft.com/office/drawing/2014/main" id="{AE4EFCDD-9DE8-76A4-DF78-F5D373A09635}"/>
@@ -10528,7 +10719,7 @@
           </p:nvSpPr>
           <p:spPr>
             <a:xfrm>
-              <a:off x="2065518" y="3802478"/>
+              <a:off x="986018" y="5948777"/>
               <a:ext cx="1078180" cy="185569"/>
             </a:xfrm>
             <a:prstGeom prst="roundRect">
@@ -10562,7 +10753,7 @@
             </a:fontRef>
           </p:style>
           <p:txBody>
-            <a:bodyPr wrap="square" lIns="32301" tIns="16151" rIns="32301" bIns="16151" rtlCol="0" anchor="ctr">
+            <a:bodyPr wrap="square" lIns="39252" tIns="19626" rIns="39252" bIns="19626" rtlCol="0" anchor="ctr">
               <a:noAutofit/>
             </a:bodyPr>
             <a:lstStyle>
@@ -10663,30 +10854,48 @@
             <a:p>
               <a:pPr algn="ctr"/>
               <a:r>
-                <a:rPr kumimoji="0" lang="ja-JP" altLang="en-US" sz="424" b="1" kern="0">
+                <a:rPr kumimoji="0" lang="ja-JP" altLang="en-US" sz="515" b="1" i="0" u="none" strike="noStrike" kern="0" cap="none" spc="0" normalizeH="0" baseline="0">
+                  <a:ln>
+                    <a:noFill/>
+                  </a:ln>
                   <a:solidFill>
                     <a:srgbClr val="111111"/>
                   </a:solidFill>
+                  <a:effectLst/>
+                  <a:uLnTx/>
+                  <a:uFillTx/>
                   <a:latin typeface="Meiryo UI"/>
                   <a:ea typeface="Meiryo UI"/>
                 </a:rPr>
-                <a:t>(2)</a:t>
+                <a:t>1.2.</a:t>
               </a:r>
               <a:r>
-                <a:rPr kumimoji="0" lang="en-US" altLang="ja-JP" sz="424" b="1" kern="0">
+                <a:rPr kumimoji="0" lang="en-US" altLang="ja-JP" sz="515" b="1" i="0" u="none" strike="noStrike" kern="0" cap="none" spc="0" normalizeH="0" baseline="0">
+                  <a:ln>
+                    <a:noFill/>
+                  </a:ln>
                   <a:solidFill>
                     <a:srgbClr val="111111"/>
                   </a:solidFill>
+                  <a:effectLst/>
+                  <a:uLnTx/>
+                  <a:uFillTx/>
                   <a:latin typeface="Meiryo UI"/>
                   <a:ea typeface="Meiryo UI"/>
                 </a:rPr>
-                <a:t>-1 </a:t>
+                <a:t>1 </a:t>
               </a:r>
               <a:r>
-                <a:rPr kumimoji="0" lang="ja-JP" altLang="en-US" sz="424" b="1" kern="0">
+                <a:rPr kumimoji="0" lang="ja-JP" altLang="en-US" sz="515" b="1" i="0" u="none" strike="noStrike" kern="0" cap="none" spc="0" normalizeH="0" baseline="0">
+                  <a:ln>
+                    <a:noFill/>
+                  </a:ln>
                   <a:solidFill>
                     <a:srgbClr val="111111"/>
                   </a:solidFill>
+                  <a:effectLst/>
+                  <a:uLnTx/>
+                  <a:uFillTx/>
                   <a:latin typeface="Meiryo UI"/>
                   <a:ea typeface="Meiryo UI"/>
                 </a:rPr>
@@ -10697,7 +10906,7 @@
         </p:sp>
         <p:sp>
           <p:nvSpPr>
-            <p:cNvPr id="20" name="shape_d512_APP_APP_ACCESS_RESULT" title="②-3 結果・イベント連携">
+            <p:cNvPr id="123" name="shape_d512_APP_APP_ACCESS_RESULT" title="②-3 結果・イベント連携">
               <a:extLst>
                 <a:ext uri="{FF2B5EF4-FFF2-40B4-BE49-F238E27FC236}">
                   <a16:creationId xmlns:a16="http://schemas.microsoft.com/office/drawing/2014/main" id="{0A827229-B2D9-BFEC-CE80-220CCD1427B1}"/>
@@ -10709,7 +10918,7 @@
           </p:nvSpPr>
           <p:spPr>
             <a:xfrm>
-              <a:off x="2067943" y="4758301"/>
+              <a:off x="988443" y="6904600"/>
               <a:ext cx="1075755" cy="130675"/>
             </a:xfrm>
             <a:prstGeom prst="roundRect">
@@ -10743,7 +10952,7 @@
             </a:fontRef>
           </p:style>
           <p:txBody>
-            <a:bodyPr wrap="square" lIns="32301" tIns="16151" rIns="32301" bIns="16151" rtlCol="0" anchor="ctr">
+            <a:bodyPr wrap="square" lIns="39252" tIns="19626" rIns="39252" bIns="19626" rtlCol="0" anchor="ctr">
               <a:noAutofit/>
             </a:bodyPr>
             <a:lstStyle>
@@ -10844,39 +11053,63 @@
             <a:p>
               <a:pPr algn="ctr"/>
               <a:r>
-                <a:rPr kumimoji="0" lang="zh-TW" altLang="en-US" sz="424" b="1" kern="0">
+                <a:rPr kumimoji="0" lang="zh-TW" altLang="en-US" sz="515" b="1" i="0" u="none" strike="noStrike" kern="0" cap="none" spc="0" normalizeH="0" baseline="0">
+                  <a:ln>
+                    <a:noFill/>
+                  </a:ln>
                   <a:solidFill>
                     <a:srgbClr val="111111"/>
                   </a:solidFill>
+                  <a:effectLst/>
+                  <a:uLnTx/>
+                  <a:uFillTx/>
                   <a:latin typeface="Meiryo UI"/>
                   <a:ea typeface="Meiryo UI"/>
                 </a:rPr>
-                <a:t>(2)</a:t>
+                <a:t>1.2.</a:t>
               </a:r>
               <a:r>
-                <a:rPr kumimoji="0" lang="en-US" altLang="zh-TW" sz="424" b="1" kern="0">
+                <a:rPr kumimoji="0" lang="en-US" altLang="zh-TW" sz="515" b="1" i="0" u="none" strike="noStrike" kern="0" cap="none" spc="0" normalizeH="0" baseline="0">
+                  <a:ln>
+                    <a:noFill/>
+                  </a:ln>
                   <a:solidFill>
                     <a:srgbClr val="111111"/>
                   </a:solidFill>
+                  <a:effectLst/>
+                  <a:uLnTx/>
+                  <a:uFillTx/>
                   <a:latin typeface="Meiryo UI"/>
                   <a:ea typeface="Meiryo UI"/>
                 </a:rPr>
-                <a:t>-3 </a:t>
+                <a:t>3 </a:t>
               </a:r>
               <a:r>
-                <a:rPr kumimoji="0" lang="zh-TW" altLang="en-US" sz="424" b="1" kern="0">
+                <a:rPr kumimoji="0" lang="zh-TW" altLang="en-US" sz="515" b="1" i="0" u="none" strike="noStrike" kern="0" cap="none" spc="0" normalizeH="0" baseline="0">
+                  <a:ln>
+                    <a:noFill/>
+                  </a:ln>
                   <a:solidFill>
                     <a:srgbClr val="111111"/>
                   </a:solidFill>
+                  <a:effectLst/>
+                  <a:uLnTx/>
+                  <a:uFillTx/>
                   <a:latin typeface="Meiryo UI"/>
                   <a:ea typeface="Meiryo UI"/>
                 </a:rPr>
                 <a:t>同期結果変換</a:t>
               </a:r>
-              <a:endParaRPr kumimoji="0" lang="ja-JP" altLang="en-US" sz="424" b="1" kern="0">
+              <a:endParaRPr kumimoji="0" lang="ja-JP" altLang="en-US" sz="515" b="1" i="0" u="none" strike="noStrike" kern="0" cap="none" spc="0" normalizeH="0" baseline="0">
+                <a:ln>
+                  <a:noFill/>
+                </a:ln>
                 <a:solidFill>
                   <a:srgbClr val="111111"/>
                 </a:solidFill>
+                <a:effectLst/>
+                <a:uLnTx/>
+                <a:uFillTx/>
                 <a:latin typeface="Meiryo UI"/>
                 <a:ea typeface="Meiryo UI"/>
               </a:endParaRPr>
@@ -10885,7 +11118,7 @@
         </p:sp>
         <p:sp>
           <p:nvSpPr>
-            <p:cNvPr id="21" name="shape_d512_HOST_HOST_ADAPTER_ADAPTER" title="③-1 個別デバイス実装">
+            <p:cNvPr id="124" name="shape_d512_HOST_HOST_ADAPTER_ADAPTER" title="③-1 個別デバイス実装">
               <a:extLst>
                 <a:ext uri="{FF2B5EF4-FFF2-40B4-BE49-F238E27FC236}">
                   <a16:creationId xmlns:a16="http://schemas.microsoft.com/office/drawing/2014/main" id="{0CEB3A89-DC3F-1B82-E122-28E1BD1418EB}"/>
@@ -10897,7 +11130,7 @@
           </p:nvSpPr>
           <p:spPr>
             <a:xfrm>
-              <a:off x="4533377" y="7062551"/>
+              <a:off x="3453877" y="9208850"/>
               <a:ext cx="1079047" cy="276493"/>
             </a:xfrm>
             <a:prstGeom prst="roundRect">
@@ -10931,7 +11164,7 @@
             </a:fontRef>
           </p:style>
           <p:txBody>
-            <a:bodyPr wrap="square" lIns="32301" tIns="16151" rIns="32301" bIns="16151" rtlCol="0" anchor="ctr">
+            <a:bodyPr wrap="square" lIns="39252" tIns="19626" rIns="39252" bIns="19626" rtlCol="0" anchor="ctr">
               <a:noAutofit/>
             </a:bodyPr>
             <a:lstStyle>
@@ -11032,72 +11265,114 @@
             <a:p>
               <a:pPr algn="ctr"/>
               <a:r>
-                <a:rPr kumimoji="0" lang="ja-JP" altLang="en-US" sz="424" b="1" kern="0">
+                <a:rPr kumimoji="0" lang="ja-JP" altLang="en-US" sz="515" b="1" i="0" u="none" strike="noStrike" kern="0" cap="none" spc="0" normalizeH="0" baseline="0">
+                  <a:ln>
+                    <a:noFill/>
+                  </a:ln>
                   <a:solidFill>
                     <a:srgbClr val="111111"/>
                   </a:solidFill>
+                  <a:effectLst/>
+                  <a:uLnTx/>
+                  <a:uFillTx/>
                   <a:latin typeface="Meiryo UI"/>
                   <a:ea typeface="Meiryo UI"/>
                 </a:rPr>
-                <a:t>(3)-1 デバイスコネクタ内部実装</a:t>
+                <a:t>2.3.1 デバイスコネクタ内部実装</a:t>
               </a:r>
             </a:p>
             <a:p>
               <a:pPr algn="ctr"/>
               <a:r>
-                <a:rPr kumimoji="0" lang="en-US" altLang="ja-JP" sz="424" b="1" kern="0">
+                <a:rPr kumimoji="0" lang="en-US" altLang="ja-JP" sz="515" b="1" i="0" u="none" strike="noStrike" kern="0" cap="none" spc="0" normalizeH="0" baseline="0">
+                  <a:ln>
+                    <a:noFill/>
+                  </a:ln>
                   <a:solidFill>
                     <a:srgbClr val="111111"/>
                   </a:solidFill>
+                  <a:effectLst/>
+                  <a:uLnTx/>
+                  <a:uFillTx/>
                   <a:latin typeface="Meiryo UI"/>
                   <a:ea typeface="Meiryo UI"/>
                 </a:rPr>
                 <a:t>OPOS</a:t>
               </a:r>
               <a:r>
-                <a:rPr kumimoji="0" lang="ja-JP" altLang="en-US" sz="424" b="1" kern="0">
+                <a:rPr kumimoji="0" lang="ja-JP" altLang="en-US" sz="515" b="1" i="0" u="none" strike="noStrike" kern="0" cap="none" spc="0" normalizeH="0" baseline="0">
+                  <a:ln>
+                    <a:noFill/>
+                  </a:ln>
                   <a:solidFill>
                     <a:srgbClr val="111111"/>
                   </a:solidFill>
+                  <a:effectLst/>
+                  <a:uLnTx/>
+                  <a:uFillTx/>
                   <a:latin typeface="Meiryo UI"/>
                   <a:ea typeface="Meiryo UI"/>
                 </a:rPr>
                 <a:t>／</a:t>
               </a:r>
               <a:r>
-                <a:rPr kumimoji="0" lang="en-US" altLang="ja-JP" sz="424" b="1" kern="0">
+                <a:rPr kumimoji="0" lang="en-US" altLang="ja-JP" sz="515" b="1" i="0" u="none" strike="noStrike" kern="0" cap="none" spc="0" normalizeH="0" baseline="0">
+                  <a:ln>
+                    <a:noFill/>
+                  </a:ln>
                   <a:solidFill>
                     <a:srgbClr val="111111"/>
                   </a:solidFill>
+                  <a:effectLst/>
+                  <a:uLnTx/>
+                  <a:uFillTx/>
                   <a:latin typeface="Meiryo UI"/>
                   <a:ea typeface="Meiryo UI"/>
                 </a:rPr>
                 <a:t>OCX</a:t>
               </a:r>
               <a:r>
-                <a:rPr kumimoji="0" lang="ja-JP" altLang="en-US" sz="424" b="1" kern="0">
+                <a:rPr kumimoji="0" lang="ja-JP" altLang="en-US" sz="515" b="1" i="0" u="none" strike="noStrike" kern="0" cap="none" spc="0" normalizeH="0" baseline="0">
+                  <a:ln>
+                    <a:noFill/>
+                  </a:ln>
                   <a:solidFill>
                     <a:srgbClr val="111111"/>
                   </a:solidFill>
+                  <a:effectLst/>
+                  <a:uLnTx/>
+                  <a:uFillTx/>
                   <a:latin typeface="Meiryo UI"/>
                   <a:ea typeface="Meiryo UI"/>
                 </a:rPr>
                 <a:t>／既存</a:t>
               </a:r>
               <a:r>
-                <a:rPr kumimoji="0" lang="en-US" altLang="ja-JP" sz="424" b="1" kern="0">
+                <a:rPr kumimoji="0" lang="en-US" altLang="ja-JP" sz="515" b="1" i="0" u="none" strike="noStrike" kern="0" cap="none" spc="0" normalizeH="0" baseline="0">
+                  <a:ln>
+                    <a:noFill/>
+                  </a:ln>
                   <a:solidFill>
                     <a:srgbClr val="111111"/>
                   </a:solidFill>
+                  <a:effectLst/>
+                  <a:uLnTx/>
+                  <a:uFillTx/>
                   <a:latin typeface="Meiryo UI"/>
                   <a:ea typeface="Meiryo UI"/>
                 </a:rPr>
                 <a:t>DLL</a:t>
               </a:r>
-              <a:endParaRPr kumimoji="0" lang="ja-JP" altLang="en-US" sz="424" b="1" kern="0">
+              <a:endParaRPr kumimoji="0" lang="ja-JP" altLang="en-US" sz="515" b="1" i="0" u="none" strike="noStrike" kern="0" cap="none" spc="0" normalizeH="0" baseline="0">
+                <a:ln>
+                  <a:noFill/>
+                </a:ln>
                 <a:solidFill>
                   <a:srgbClr val="111111"/>
                 </a:solidFill>
+                <a:effectLst/>
+                <a:uLnTx/>
+                <a:uFillTx/>
                 <a:latin typeface="Meiryo UI"/>
                 <a:ea typeface="Meiryo UI"/>
               </a:endParaRPr>
@@ -11106,7 +11381,7 @@
         </p:sp>
         <p:sp>
           <p:nvSpPr>
-            <p:cNvPr id="22" name="shape_d512_HOST_HOST_SERVICE_RUNTIME" title="①-1 起動・停止管理">
+            <p:cNvPr id="125" name="shape_d512_HOST_HOST_SERVICE_RUNTIME" title="①-1 起動・停止管理">
               <a:extLst>
                 <a:ext uri="{FF2B5EF4-FFF2-40B4-BE49-F238E27FC236}">
                   <a16:creationId xmlns:a16="http://schemas.microsoft.com/office/drawing/2014/main" id="{6759761D-6C5C-E69B-D121-73B8258F08CE}"/>
@@ -11118,7 +11393,7 @@
           </p:nvSpPr>
           <p:spPr>
             <a:xfrm>
-              <a:off x="4601697" y="3692037"/>
+              <a:off x="3522197" y="5838336"/>
               <a:ext cx="892947" cy="225462"/>
             </a:xfrm>
             <a:prstGeom prst="roundRect">
@@ -11152,7 +11427,7 @@
             </a:fontRef>
           </p:style>
           <p:txBody>
-            <a:bodyPr wrap="square" lIns="32301" tIns="16151" rIns="32301" bIns="16151" rtlCol="0" anchor="ctr">
+            <a:bodyPr wrap="square" lIns="39252" tIns="19626" rIns="39252" bIns="19626" rtlCol="0" anchor="ctr">
               <a:noAutofit/>
             </a:bodyPr>
             <a:lstStyle>
@@ -11253,30 +11528,48 @@
             <a:p>
               <a:pPr algn="ctr"/>
               <a:r>
-                <a:rPr kumimoji="0" lang="ja-JP" altLang="en-US" sz="424" b="1" kern="0">
+                <a:rPr kumimoji="0" lang="ja-JP" altLang="en-US" sz="515" b="1" i="0" u="none" strike="noStrike" kern="0" cap="none" spc="0" normalizeH="0" baseline="0">
+                  <a:ln>
+                    <a:noFill/>
+                  </a:ln>
                   <a:solidFill>
                     <a:srgbClr val="111111"/>
                   </a:solidFill>
+                  <a:effectLst/>
+                  <a:uLnTx/>
+                  <a:uFillTx/>
                   <a:latin typeface="Meiryo UI"/>
                   <a:ea typeface="Meiryo UI"/>
                 </a:rPr>
-                <a:t>(1)</a:t>
+                <a:t>2.1.</a:t>
               </a:r>
               <a:r>
-                <a:rPr kumimoji="0" lang="en-US" altLang="ja-JP" sz="424" b="1" kern="0">
+                <a:rPr kumimoji="0" lang="en-US" altLang="ja-JP" sz="515" b="1" i="0" u="none" strike="noStrike" kern="0" cap="none" spc="0" normalizeH="0" baseline="0">
+                  <a:ln>
+                    <a:noFill/>
+                  </a:ln>
                   <a:solidFill>
                     <a:srgbClr val="111111"/>
                   </a:solidFill>
+                  <a:effectLst/>
+                  <a:uLnTx/>
+                  <a:uFillTx/>
                   <a:latin typeface="Meiryo UI"/>
                   <a:ea typeface="Meiryo UI"/>
                 </a:rPr>
-                <a:t>-1 </a:t>
+                <a:t>1 </a:t>
               </a:r>
               <a:r>
-                <a:rPr kumimoji="0" lang="ja-JP" altLang="en-US" sz="424" b="1" kern="0">
+                <a:rPr kumimoji="0" lang="ja-JP" altLang="en-US" sz="515" b="1" i="0" u="none" strike="noStrike" kern="0" cap="none" spc="0" normalizeH="0" baseline="0">
+                  <a:ln>
+                    <a:noFill/>
+                  </a:ln>
                   <a:solidFill>
                     <a:srgbClr val="111111"/>
                   </a:solidFill>
+                  <a:effectLst/>
+                  <a:uLnTx/>
+                  <a:uFillTx/>
                   <a:latin typeface="Meiryo UI"/>
                   <a:ea typeface="Meiryo UI"/>
                 </a:rPr>
@@ -11286,20 +11579,32 @@
             <a:p>
               <a:pPr algn="ctr"/>
               <a:r>
-                <a:rPr kumimoji="0" lang="en-US" altLang="ja-JP" sz="424" b="1" kern="0">
+                <a:rPr kumimoji="0" lang="en-US" altLang="ja-JP" sz="515" b="1" i="0" u="none" strike="noStrike" kern="0" cap="none" spc="0" normalizeH="0" baseline="0">
+                  <a:ln>
+                    <a:noFill/>
+                  </a:ln>
                   <a:solidFill>
                     <a:srgbClr val="111111"/>
                   </a:solidFill>
+                  <a:effectLst/>
+                  <a:uLnTx/>
+                  <a:uFillTx/>
                   <a:latin typeface="Meiryo UI"/>
                   <a:ea typeface="Meiryo UI"/>
                 </a:rPr>
                 <a:t>Mutex</a:t>
               </a:r>
               <a:r>
-                <a:rPr kumimoji="0" lang="ja-JP" altLang="en-US" sz="424" b="1" kern="0">
+                <a:rPr kumimoji="0" lang="ja-JP" altLang="en-US" sz="515" b="1" i="0" u="none" strike="noStrike" kern="0" cap="none" spc="0" normalizeH="0" baseline="0">
+                  <a:ln>
+                    <a:noFill/>
+                  </a:ln>
                   <a:solidFill>
                     <a:srgbClr val="111111"/>
                   </a:solidFill>
+                  <a:effectLst/>
+                  <a:uLnTx/>
+                  <a:uFillTx/>
                   <a:latin typeface="Meiryo UI"/>
                   <a:ea typeface="Meiryo UI"/>
                 </a:rPr>
@@ -11310,7 +11615,7 @@
         </p:sp>
         <p:sp>
           <p:nvSpPr>
-            <p:cNvPr id="23" name="shape_d512_HOST_HOST_SERVICE_SERVER" title="①-2 コマンド受付">
+            <p:cNvPr id="126" name="shape_d512_HOST_HOST_SERVICE_SERVER" title="①-2 コマンド受付">
               <a:extLst>
                 <a:ext uri="{FF2B5EF4-FFF2-40B4-BE49-F238E27FC236}">
                   <a16:creationId xmlns:a16="http://schemas.microsoft.com/office/drawing/2014/main" id="{EEED1238-4E05-E183-9080-8257B98C7A70}"/>
@@ -11322,7 +11627,7 @@
           </p:nvSpPr>
           <p:spPr>
             <a:xfrm>
-              <a:off x="4637585" y="4137243"/>
+              <a:off x="3558085" y="6283542"/>
               <a:ext cx="822122" cy="182594"/>
             </a:xfrm>
             <a:prstGeom prst="roundRect">
@@ -11356,7 +11661,7 @@
             </a:fontRef>
           </p:style>
           <p:txBody>
-            <a:bodyPr wrap="square" lIns="32301" tIns="16151" rIns="32301" bIns="16151" rtlCol="0" anchor="ctr">
+            <a:bodyPr wrap="square" lIns="39252" tIns="19626" rIns="39252" bIns="19626" rtlCol="0" anchor="ctr">
               <a:noAutofit/>
             </a:bodyPr>
             <a:lstStyle>
@@ -11457,30 +11762,48 @@
             <a:p>
               <a:pPr algn="ctr"/>
               <a:r>
-                <a:rPr kumimoji="0" lang="ja-JP" altLang="en-US" sz="424" b="1" kern="0">
+                <a:rPr kumimoji="0" lang="ja-JP" altLang="en-US" sz="515" b="1" i="0" u="none" strike="noStrike" kern="0" cap="none" spc="0" normalizeH="0" baseline="0">
+                  <a:ln>
+                    <a:noFill/>
+                  </a:ln>
                   <a:solidFill>
                     <a:srgbClr val="111111"/>
                   </a:solidFill>
+                  <a:effectLst/>
+                  <a:uLnTx/>
+                  <a:uFillTx/>
                   <a:latin typeface="Meiryo UI"/>
                   <a:ea typeface="Meiryo UI"/>
                 </a:rPr>
-                <a:t>(1)</a:t>
+                <a:t>2.1.</a:t>
               </a:r>
               <a:r>
-                <a:rPr kumimoji="0" lang="en-US" altLang="ja-JP" sz="424" b="1" kern="0">
+                <a:rPr kumimoji="0" lang="en-US" altLang="ja-JP" sz="515" b="1" i="0" u="none" strike="noStrike" kern="0" cap="none" spc="0" normalizeH="0" baseline="0">
+                  <a:ln>
+                    <a:noFill/>
+                  </a:ln>
                   <a:solidFill>
                     <a:srgbClr val="111111"/>
                   </a:solidFill>
+                  <a:effectLst/>
+                  <a:uLnTx/>
+                  <a:uFillTx/>
                   <a:latin typeface="Meiryo UI"/>
                   <a:ea typeface="Meiryo UI"/>
                 </a:rPr>
-                <a:t>-2 </a:t>
+                <a:t>2 </a:t>
               </a:r>
               <a:r>
-                <a:rPr kumimoji="0" lang="ja-JP" altLang="en-US" sz="424" b="1" kern="0">
+                <a:rPr kumimoji="0" lang="ja-JP" altLang="en-US" sz="515" b="1" i="0" u="none" strike="noStrike" kern="0" cap="none" spc="0" normalizeH="0" baseline="0">
+                  <a:ln>
+                    <a:noFill/>
+                  </a:ln>
                   <a:solidFill>
                     <a:srgbClr val="111111"/>
                   </a:solidFill>
+                  <a:effectLst/>
+                  <a:uLnTx/>
+                  <a:uFillTx/>
                   <a:latin typeface="Meiryo UI"/>
                   <a:ea typeface="Meiryo UI"/>
                 </a:rPr>
@@ -11491,7 +11814,7 @@
         </p:sp>
         <p:sp>
           <p:nvSpPr>
-            <p:cNvPr id="24" name="shape_d512_APP_APP_ACCESS_COMMAND" title="②-2 コマンド通信">
+            <p:cNvPr id="127" name="shape_d512_APP_APP_ACCESS_COMMAND" title="②-2 コマンド通信">
               <a:extLst>
                 <a:ext uri="{FF2B5EF4-FFF2-40B4-BE49-F238E27FC236}">
                   <a16:creationId xmlns:a16="http://schemas.microsoft.com/office/drawing/2014/main" id="{6561B67B-532E-9807-572D-C974E51028E6}"/>
@@ -11503,7 +11826,7 @@
           </p:nvSpPr>
           <p:spPr>
             <a:xfrm>
-              <a:off x="2217619" y="4139740"/>
+              <a:off x="1138119" y="6286039"/>
               <a:ext cx="773980" cy="186759"/>
             </a:xfrm>
             <a:prstGeom prst="roundRect">
@@ -11537,7 +11860,7 @@
             </a:fontRef>
           </p:style>
           <p:txBody>
-            <a:bodyPr wrap="square" lIns="32301" tIns="16151" rIns="32301" bIns="16151" rtlCol="0" anchor="ctr">
+            <a:bodyPr wrap="square" lIns="39252" tIns="19626" rIns="39252" bIns="19626" rtlCol="0" anchor="ctr">
               <a:noAutofit/>
             </a:bodyPr>
             <a:lstStyle>
@@ -11638,30 +11961,48 @@
             <a:p>
               <a:pPr algn="ctr"/>
               <a:r>
-                <a:rPr kumimoji="0" lang="ja-JP" altLang="en-US" sz="424" b="1" kern="0">
+                <a:rPr kumimoji="0" lang="ja-JP" altLang="en-US" sz="515" b="1" i="0" u="none" strike="noStrike" kern="0" cap="none" spc="0" normalizeH="0" baseline="0">
+                  <a:ln>
+                    <a:noFill/>
+                  </a:ln>
                   <a:solidFill>
                     <a:srgbClr val="111111"/>
                   </a:solidFill>
+                  <a:effectLst/>
+                  <a:uLnTx/>
+                  <a:uFillTx/>
                   <a:latin typeface="Meiryo UI"/>
                   <a:ea typeface="Meiryo UI"/>
                 </a:rPr>
-                <a:t>(2)</a:t>
+                <a:t>1.2.</a:t>
               </a:r>
               <a:r>
-                <a:rPr kumimoji="0" lang="en-US" altLang="ja-JP" sz="424" b="1" kern="0">
+                <a:rPr kumimoji="0" lang="en-US" altLang="ja-JP" sz="515" b="1" i="0" u="none" strike="noStrike" kern="0" cap="none" spc="0" normalizeH="0" baseline="0">
+                  <a:ln>
+                    <a:noFill/>
+                  </a:ln>
                   <a:solidFill>
                     <a:srgbClr val="111111"/>
                   </a:solidFill>
+                  <a:effectLst/>
+                  <a:uLnTx/>
+                  <a:uFillTx/>
                   <a:latin typeface="Meiryo UI"/>
                   <a:ea typeface="Meiryo UI"/>
                 </a:rPr>
-                <a:t>-2 </a:t>
+                <a:t>2 </a:t>
               </a:r>
               <a:r>
-                <a:rPr kumimoji="0" lang="ja-JP" altLang="en-US" sz="424" b="1" kern="0">
+                <a:rPr kumimoji="0" lang="ja-JP" altLang="en-US" sz="515" b="1" i="0" u="none" strike="noStrike" kern="0" cap="none" spc="0" normalizeH="0" baseline="0">
+                  <a:ln>
+                    <a:noFill/>
+                  </a:ln>
                   <a:solidFill>
                     <a:srgbClr val="111111"/>
                   </a:solidFill>
+                  <a:effectLst/>
+                  <a:uLnTx/>
+                  <a:uFillTx/>
                   <a:latin typeface="Meiryo UI"/>
                   <a:ea typeface="Meiryo UI"/>
                 </a:rPr>
@@ -11672,7 +12013,7 @@
         </p:sp>
         <p:sp>
           <p:nvSpPr>
-            <p:cNvPr id="25" name="shape_d512_HOST_HOST_SERVICE_EVENT" descr="デバイス処理結果は同期応答と&#10;は別経路で配信し、&#10;アプリの購読処理へ通知します。" title="①-3 イベント配信">
+            <p:cNvPr id="128" name="shape_d512_HOST_HOST_SERVICE_EVENT" descr="デバイス処理結果は同期応答と&#10;は別経路で配信し、&#10;アプリの購読処理へ通知します。" title="①-3 イベント配信">
               <a:extLst>
                 <a:ext uri="{FF2B5EF4-FFF2-40B4-BE49-F238E27FC236}">
                   <a16:creationId xmlns:a16="http://schemas.microsoft.com/office/drawing/2014/main" id="{EA25539E-7059-C099-1B02-A6B504A16332}"/>
@@ -11684,7 +12025,7 @@
           </p:nvSpPr>
           <p:spPr>
             <a:xfrm>
-              <a:off x="5127962" y="4454879"/>
+              <a:off x="4048462" y="6601178"/>
               <a:ext cx="813854" cy="177206"/>
             </a:xfrm>
             <a:prstGeom prst="roundRect">
@@ -11718,7 +12059,7 @@
             </a:fontRef>
           </p:style>
           <p:txBody>
-            <a:bodyPr wrap="square" lIns="32301" tIns="16151" rIns="32301" bIns="16151" rtlCol="0" anchor="ctr">
+            <a:bodyPr wrap="square" lIns="39252" tIns="19626" rIns="39252" bIns="19626" rtlCol="0" anchor="ctr">
               <a:noAutofit/>
             </a:bodyPr>
             <a:lstStyle>
@@ -11819,30 +12160,48 @@
             <a:p>
               <a:pPr algn="ctr"/>
               <a:r>
-                <a:rPr kumimoji="0" lang="ja-JP" altLang="en-US" sz="424" b="1" kern="0">
+                <a:rPr kumimoji="0" lang="ja-JP" altLang="en-US" sz="515" b="1" i="0" u="none" strike="noStrike" kern="0" cap="none" spc="0" normalizeH="0" baseline="0">
+                  <a:ln>
+                    <a:noFill/>
+                  </a:ln>
                   <a:solidFill>
                     <a:srgbClr val="111111"/>
                   </a:solidFill>
+                  <a:effectLst/>
+                  <a:uLnTx/>
+                  <a:uFillTx/>
                   <a:latin typeface="Meiryo UI"/>
                   <a:ea typeface="Meiryo UI"/>
                 </a:rPr>
-                <a:t>(1)</a:t>
+                <a:t>2.1.</a:t>
               </a:r>
               <a:r>
-                <a:rPr kumimoji="0" lang="en-US" altLang="ja-JP" sz="424" b="1" kern="0">
+                <a:rPr kumimoji="0" lang="en-US" altLang="ja-JP" sz="515" b="1" i="0" u="none" strike="noStrike" kern="0" cap="none" spc="0" normalizeH="0" baseline="0">
+                  <a:ln>
+                    <a:noFill/>
+                  </a:ln>
                   <a:solidFill>
                     <a:srgbClr val="111111"/>
                   </a:solidFill>
+                  <a:effectLst/>
+                  <a:uLnTx/>
+                  <a:uFillTx/>
                   <a:latin typeface="Meiryo UI"/>
                   <a:ea typeface="Meiryo UI"/>
                 </a:rPr>
-                <a:t>-3 </a:t>
+                <a:t>3 </a:t>
               </a:r>
               <a:r>
-                <a:rPr kumimoji="0" lang="ja-JP" altLang="en-US" sz="424" b="1" kern="0">
+                <a:rPr kumimoji="0" lang="ja-JP" altLang="en-US" sz="515" b="1" i="0" u="none" strike="noStrike" kern="0" cap="none" spc="0" normalizeH="0" baseline="0">
+                  <a:ln>
+                    <a:noFill/>
+                  </a:ln>
                   <a:solidFill>
                     <a:srgbClr val="111111"/>
                   </a:solidFill>
+                  <a:effectLst/>
+                  <a:uLnTx/>
+                  <a:uFillTx/>
                   <a:latin typeface="Meiryo UI"/>
                   <a:ea typeface="Meiryo UI"/>
                 </a:rPr>
@@ -11853,7 +12212,7 @@
         </p:sp>
         <p:sp>
           <p:nvSpPr>
-            <p:cNvPr id="26" name="shape_d512_HOST_HOST_EXEC_MANAGER" title="②-3 デバイス管理">
+            <p:cNvPr id="129" name="shape_d512_HOST_HOST_EXEC_MANAGER" title="②-3 デバイス管理">
               <a:extLst>
                 <a:ext uri="{FF2B5EF4-FFF2-40B4-BE49-F238E27FC236}">
                   <a16:creationId xmlns:a16="http://schemas.microsoft.com/office/drawing/2014/main" id="{EC8FB8E5-60A7-D598-BEE6-8D21A3988469}"/>
@@ -11865,7 +12224,7 @@
           </p:nvSpPr>
           <p:spPr>
             <a:xfrm>
-              <a:off x="4640977" y="6271365"/>
+              <a:off x="3561477" y="8417664"/>
               <a:ext cx="817445" cy="183235"/>
             </a:xfrm>
             <a:prstGeom prst="roundRect">
@@ -11899,7 +12258,7 @@
             </a:fontRef>
           </p:style>
           <p:txBody>
-            <a:bodyPr wrap="square" lIns="32301" tIns="16151" rIns="32301" bIns="16151" rtlCol="0" anchor="ctr">
+            <a:bodyPr wrap="square" lIns="39252" tIns="19626" rIns="39252" bIns="19626" rtlCol="0" anchor="ctr">
               <a:noAutofit/>
             </a:bodyPr>
             <a:lstStyle>
@@ -12000,30 +12359,48 @@
             <a:p>
               <a:pPr algn="ctr"/>
               <a:r>
-                <a:rPr kumimoji="0" lang="ja-JP" altLang="en-US" sz="424" b="1" kern="0">
+                <a:rPr kumimoji="0" lang="ja-JP" altLang="en-US" sz="515" b="1" i="0" u="none" strike="noStrike" kern="0" cap="none" spc="0" normalizeH="0" baseline="0">
+                  <a:ln>
+                    <a:noFill/>
+                  </a:ln>
                   <a:solidFill>
                     <a:srgbClr val="111111"/>
                   </a:solidFill>
+                  <a:effectLst/>
+                  <a:uLnTx/>
+                  <a:uFillTx/>
                   <a:latin typeface="Meiryo UI"/>
                   <a:ea typeface="Meiryo UI"/>
                 </a:rPr>
-                <a:t>(2)</a:t>
+                <a:t>2.2.</a:t>
               </a:r>
               <a:r>
-                <a:rPr kumimoji="0" lang="en-US" altLang="ja-JP" sz="424" b="1" kern="0">
+                <a:rPr kumimoji="0" lang="en-US" altLang="ja-JP" sz="515" b="1" i="0" u="none" strike="noStrike" kern="0" cap="none" spc="0" normalizeH="0" baseline="0">
+                  <a:ln>
+                    <a:noFill/>
+                  </a:ln>
                   <a:solidFill>
                     <a:srgbClr val="111111"/>
                   </a:solidFill>
+                  <a:effectLst/>
+                  <a:uLnTx/>
+                  <a:uFillTx/>
                   <a:latin typeface="Meiryo UI"/>
                   <a:ea typeface="Meiryo UI"/>
                 </a:rPr>
-                <a:t>-3 </a:t>
+                <a:t>3 </a:t>
               </a:r>
               <a:r>
-                <a:rPr kumimoji="0" lang="ja-JP" altLang="en-US" sz="424" b="1" kern="0">
+                <a:rPr kumimoji="0" lang="ja-JP" altLang="en-US" sz="515" b="1" i="0" u="none" strike="noStrike" kern="0" cap="none" spc="0" normalizeH="0" baseline="0">
+                  <a:ln>
+                    <a:noFill/>
+                  </a:ln>
                   <a:solidFill>
                     <a:srgbClr val="111111"/>
                   </a:solidFill>
+                  <a:effectLst/>
+                  <a:uLnTx/>
+                  <a:uFillTx/>
                   <a:latin typeface="Meiryo UI"/>
                   <a:ea typeface="Meiryo UI"/>
                 </a:rPr>
@@ -12034,7 +12411,7 @@
         </p:sp>
         <p:cxnSp>
           <p:nvCxnSpPr>
-            <p:cNvPr id="27" name="edge_d512_01_DEVICE_CASH_to_HOST_HOST_ADAPTER_ADAPTER" descr="制御／結果" title="制御／結果">
+            <p:cNvPr id="130" name="edge_d512_01_DEVICE_CASH_to_HOST_HOST_ADAPTER_ADAPTER" descr="制御／結果" title="制御／結果">
               <a:extLst>
                 <a:ext uri="{FF2B5EF4-FFF2-40B4-BE49-F238E27FC236}">
                   <a16:creationId xmlns:a16="http://schemas.microsoft.com/office/drawing/2014/main" id="{EC977670-9685-63B1-3E5E-3A1C38219820}"/>
@@ -12043,14 +12420,14 @@
             </p:cNvPr>
             <p:cNvCxnSpPr>
               <a:cxnSpLocks/>
-              <a:stCxn id="81" idx="1"/>
-              <a:endCxn id="21" idx="3"/>
+              <a:stCxn id="184" idx="1"/>
+              <a:endCxn id="124" idx="3"/>
             </p:cNvCxnSpPr>
             <p:nvPr/>
           </p:nvCxnSpPr>
           <p:spPr>
             <a:xfrm rot="10800000" flipV="1">
-              <a:off x="5612424" y="3938009"/>
+              <a:off x="4532924" y="6084308"/>
               <a:ext cx="1196640" cy="3266559"/>
             </a:xfrm>
             <a:prstGeom prst="bentConnector3">
@@ -12086,7 +12463,7 @@
         </p:cxnSp>
         <p:cxnSp>
           <p:nvCxnSpPr>
-            <p:cNvPr id="28" name="edge_d512_02_DEVICE_DRAWER_to_HOST_HOST_ADAPTER_ADAPTER" descr="制御／結果" title="制御／結果">
+            <p:cNvPr id="131" name="edge_d512_02_DEVICE_DRAWER_to_HOST_HOST_ADAPTER_ADAPTER" descr="制御／結果" title="制御／結果">
               <a:extLst>
                 <a:ext uri="{FF2B5EF4-FFF2-40B4-BE49-F238E27FC236}">
                   <a16:creationId xmlns:a16="http://schemas.microsoft.com/office/drawing/2014/main" id="{5F39E1D7-5B85-8496-0F29-A18D99E91FCC}"/>
@@ -12095,14 +12472,14 @@
             </p:cNvPr>
             <p:cNvCxnSpPr>
               <a:cxnSpLocks/>
-              <a:stCxn id="79" idx="1"/>
-              <a:endCxn id="21" idx="3"/>
+              <a:stCxn id="182" idx="1"/>
+              <a:endCxn id="124" idx="3"/>
             </p:cNvCxnSpPr>
             <p:nvPr/>
           </p:nvCxnSpPr>
           <p:spPr>
             <a:xfrm rot="10800000" flipV="1">
-              <a:off x="5612425" y="4965891"/>
+              <a:off x="4532925" y="7112190"/>
               <a:ext cx="1254047" cy="2238675"/>
             </a:xfrm>
             <a:prstGeom prst="bentConnector3">
@@ -12138,7 +12515,7 @@
         </p:cxnSp>
         <p:cxnSp>
           <p:nvCxnSpPr>
-            <p:cNvPr id="29" name="edge_d512_03_DEVICE_DISPLAY_to_HOST_HOST_ADAPTER_ADAPTER" descr="制御／結果" title="制御／結果">
+            <p:cNvPr id="132" name="edge_d512_03_DEVICE_DISPLAY_to_HOST_HOST_ADAPTER_ADAPTER" descr="制御／結果" title="制御／結果">
               <a:extLst>
                 <a:ext uri="{FF2B5EF4-FFF2-40B4-BE49-F238E27FC236}">
                   <a16:creationId xmlns:a16="http://schemas.microsoft.com/office/drawing/2014/main" id="{0F3403DE-4000-0241-F4A5-4DAF213B4CBF}"/>
@@ -12147,14 +12524,14 @@
             </p:cNvPr>
             <p:cNvCxnSpPr>
               <a:cxnSpLocks/>
-              <a:stCxn id="77" idx="1"/>
-              <a:endCxn id="21" idx="3"/>
+              <a:stCxn id="180" idx="1"/>
+              <a:endCxn id="124" idx="3"/>
             </p:cNvCxnSpPr>
             <p:nvPr/>
           </p:nvCxnSpPr>
           <p:spPr>
             <a:xfrm rot="10800000" flipV="1">
-              <a:off x="5612425" y="5938352"/>
+              <a:off x="4532925" y="8084651"/>
               <a:ext cx="1243830" cy="1266216"/>
             </a:xfrm>
             <a:prstGeom prst="bentConnector3">
@@ -12190,7 +12567,7 @@
         </p:cxnSp>
         <p:cxnSp>
           <p:nvCxnSpPr>
-            <p:cNvPr id="30" name="edge_d512_04_APP_APP_COORD_PROCESS_to_HOST_HOST_SERVICE_RUNTIME" descr="OSプロセス制御" title="OSプロセス制御">
+            <p:cNvPr id="133" name="edge_d512_04_APP_APP_COORD_PROCESS_to_HOST_HOST_SERVICE_RUNTIME" descr="OSプロセス制御" title="OSプロセス制御">
               <a:extLst>
                 <a:ext uri="{FF2B5EF4-FFF2-40B4-BE49-F238E27FC236}">
                   <a16:creationId xmlns:a16="http://schemas.microsoft.com/office/drawing/2014/main" id="{91D74993-6D2A-50A6-D586-8C23F9A3706F}"/>
@@ -12199,13 +12576,13 @@
             </p:cNvPr>
             <p:cNvCxnSpPr>
               <a:cxnSpLocks/>
-              <a:endCxn id="22" idx="0"/>
+              <a:endCxn id="125" idx="0"/>
             </p:cNvCxnSpPr>
             <p:nvPr/>
           </p:nvCxnSpPr>
           <p:spPr>
             <a:xfrm>
-              <a:off x="3108661" y="2787344"/>
+              <a:off x="2029161" y="4933643"/>
               <a:ext cx="1939510" cy="904693"/>
             </a:xfrm>
             <a:prstGeom prst="bentConnector2">
@@ -12238,7 +12615,7 @@
         </p:cxnSp>
         <p:cxnSp>
           <p:nvCxnSpPr>
-            <p:cNvPr id="31" name="edge_d512_05_APP_APP_ACCESS_COMMAND_to_HOST_HOST_SERVICE_SERVER" descr="コマンド通信用パイプ&#10;要求／同期応答" title="コマンド通信用パイプ&#10;要求／同期応答">
+            <p:cNvPr id="134" name="edge_d512_05_APP_APP_ACCESS_COMMAND_to_HOST_HOST_SERVICE_SERVER" descr="コマンド通信用パイプ&#10;要求／同期応答" title="コマンド通信用パイプ&#10;要求／同期応答">
               <a:extLst>
                 <a:ext uri="{FF2B5EF4-FFF2-40B4-BE49-F238E27FC236}">
                   <a16:creationId xmlns:a16="http://schemas.microsoft.com/office/drawing/2014/main" id="{15B2876B-1C33-D257-0A1E-83DF0F9A37C8}"/>
@@ -12247,14 +12624,14 @@
             </p:cNvPr>
             <p:cNvCxnSpPr>
               <a:cxnSpLocks/>
-              <a:stCxn id="24" idx="3"/>
-              <a:endCxn id="23" idx="1"/>
+              <a:stCxn id="127" idx="3"/>
+              <a:endCxn id="126" idx="1"/>
             </p:cNvCxnSpPr>
             <p:nvPr/>
           </p:nvCxnSpPr>
           <p:spPr>
             <a:xfrm flipV="1">
-              <a:off x="2991599" y="4234294"/>
+              <a:off x="1912099" y="6380593"/>
               <a:ext cx="1645986" cy="0"/>
             </a:xfrm>
             <a:prstGeom prst="straightConnector1">
@@ -12288,7 +12665,7 @@
         </p:cxnSp>
         <p:cxnSp>
           <p:nvCxnSpPr>
-            <p:cNvPr id="32" name="edge_d512_07_HOST_HOST_EXEC_MANAGER_to_HOST_HOST_ADAPTER_ADAPTER">
+            <p:cNvPr id="135" name="edge_d512_07_HOST_HOST_EXEC_MANAGER_to_HOST_HOST_ADAPTER_ADAPTER">
               <a:extLst>
                 <a:ext uri="{FF2B5EF4-FFF2-40B4-BE49-F238E27FC236}">
                   <a16:creationId xmlns:a16="http://schemas.microsoft.com/office/drawing/2014/main" id="{1A0897A1-5260-E92F-F795-C1A7CC9F41FF}"/>
@@ -12297,13 +12674,13 @@
             </p:cNvPr>
             <p:cNvCxnSpPr>
               <a:cxnSpLocks/>
-              <a:endCxn id="21" idx="0"/>
+              <a:endCxn id="124" idx="0"/>
             </p:cNvCxnSpPr>
             <p:nvPr/>
           </p:nvCxnSpPr>
           <p:spPr>
             <a:xfrm>
-              <a:off x="5060793" y="6449240"/>
+              <a:off x="3981293" y="8595539"/>
               <a:ext cx="16870" cy="613311"/>
             </a:xfrm>
             <a:prstGeom prst="straightConnector1">
@@ -12336,7 +12713,7 @@
         </p:cxnSp>
         <p:cxnSp>
           <p:nvCxnSpPr>
-            <p:cNvPr id="33" name="edge_d512_08_HOST_HOST_SERVICE_SERVER_to_HOST_HOST_EXEC_ORDER">
+            <p:cNvPr id="136" name="edge_d512_08_HOST_HOST_SERVICE_SERVER_to_HOST_HOST_EXEC_ORDER">
               <a:extLst>
                 <a:ext uri="{FF2B5EF4-FFF2-40B4-BE49-F238E27FC236}">
                   <a16:creationId xmlns:a16="http://schemas.microsoft.com/office/drawing/2014/main" id="{1D92D190-C8A4-4D2E-53F5-1C7984E5E426}"/>
@@ -12345,14 +12722,14 @@
             </p:cNvPr>
             <p:cNvCxnSpPr>
               <a:cxnSpLocks/>
-              <a:stCxn id="23" idx="2"/>
-              <a:endCxn id="18" idx="0"/>
+              <a:stCxn id="126" idx="2"/>
+              <a:endCxn id="121" idx="0"/>
             </p:cNvCxnSpPr>
             <p:nvPr/>
           </p:nvCxnSpPr>
           <p:spPr>
             <a:xfrm flipH="1">
-              <a:off x="5040690" y="4319837"/>
+              <a:off x="3961190" y="6466136"/>
               <a:ext cx="7956" cy="867871"/>
             </a:xfrm>
             <a:prstGeom prst="straightConnector1">
@@ -12385,7 +12762,7 @@
         </p:cxnSp>
         <p:cxnSp>
           <p:nvCxnSpPr>
-            <p:cNvPr id="34" name="edge_d512_09_HOST_HOST_EXEC_MANAGER_to_HOST_HOST_SERVICE_EVENT" descr="デバイス処理結果" title="デバイス処理結果">
+            <p:cNvPr id="137" name="edge_d512_09_HOST_HOST_EXEC_MANAGER_to_HOST_HOST_SERVICE_EVENT" descr="デバイス処理結果" title="デバイス処理結果">
               <a:extLst>
                 <a:ext uri="{FF2B5EF4-FFF2-40B4-BE49-F238E27FC236}">
                   <a16:creationId xmlns:a16="http://schemas.microsoft.com/office/drawing/2014/main" id="{281933D5-5644-F522-1455-917DFD607C0F}"/>
@@ -12394,14 +12771,14 @@
             </p:cNvPr>
             <p:cNvCxnSpPr>
               <a:cxnSpLocks/>
-              <a:stCxn id="26" idx="3"/>
-              <a:endCxn id="25" idx="3"/>
+              <a:stCxn id="129" idx="3"/>
+              <a:endCxn id="128" idx="3"/>
             </p:cNvCxnSpPr>
             <p:nvPr/>
           </p:nvCxnSpPr>
           <p:spPr>
             <a:xfrm flipV="1">
-              <a:off x="5455247" y="4546062"/>
+              <a:off x="4375747" y="6692361"/>
               <a:ext cx="486569" cy="1817516"/>
             </a:xfrm>
             <a:prstGeom prst="bentConnector3">
@@ -12436,7 +12813,7 @@
         </p:cxnSp>
         <p:cxnSp>
           <p:nvCxnSpPr>
-            <p:cNvPr id="35" name="edge_d512_10_HOST_HOST_EXEC_HOST_SETTING_to_HOST_HOST_EXEC_MANAGER">
+            <p:cNvPr id="138" name="edge_d512_10_HOST_HOST_EXEC_HOST_SETTING_to_HOST_HOST_EXEC_MANAGER">
               <a:extLst>
                 <a:ext uri="{FF2B5EF4-FFF2-40B4-BE49-F238E27FC236}">
                   <a16:creationId xmlns:a16="http://schemas.microsoft.com/office/drawing/2014/main" id="{DEC49817-4041-2D3E-F661-8A9B08330A8E}"/>
@@ -12450,7 +12827,7 @@
           </p:nvCxnSpPr>
           <p:spPr>
             <a:xfrm rot="16200000" flipH="1">
-              <a:off x="4451805" y="6169713"/>
+              <a:off x="3372305" y="8316012"/>
               <a:ext cx="280649" cy="97694"/>
             </a:xfrm>
             <a:prstGeom prst="curvedConnector3">
@@ -12485,7 +12862,7 @@
         </p:cxnSp>
         <p:cxnSp>
           <p:nvCxnSpPr>
-            <p:cNvPr id="36" name="edge_d512_11_HOST_HOST_EXEC_ORDER_to_HOST_HOST_EXEC_CONTROL">
+            <p:cNvPr id="139" name="edge_d512_11_HOST_HOST_EXEC_ORDER_to_HOST_HOST_EXEC_CONTROL">
               <a:extLst>
                 <a:ext uri="{FF2B5EF4-FFF2-40B4-BE49-F238E27FC236}">
                   <a16:creationId xmlns:a16="http://schemas.microsoft.com/office/drawing/2014/main" id="{B906A755-7308-5D6B-D6C9-9FA25C11C149}"/>
@@ -12494,14 +12871,14 @@
             </p:cNvPr>
             <p:cNvCxnSpPr>
               <a:cxnSpLocks/>
-              <a:stCxn id="18" idx="2"/>
-              <a:endCxn id="15" idx="0"/>
+              <a:stCxn id="121" idx="2"/>
+              <a:endCxn id="118" idx="0"/>
             </p:cNvCxnSpPr>
             <p:nvPr/>
           </p:nvCxnSpPr>
           <p:spPr>
             <a:xfrm>
-              <a:off x="5040690" y="5367683"/>
+              <a:off x="3961190" y="7513982"/>
               <a:ext cx="9010" cy="254312"/>
             </a:xfrm>
             <a:prstGeom prst="straightConnector1">
@@ -12534,7 +12911,7 @@
         </p:cxnSp>
         <p:cxnSp>
           <p:nvCxnSpPr>
-            <p:cNvPr id="37" name="edge_d512_12_HOST_HOST_EXEC_CONTROL_to_HOST_HOST_EXEC_MANAGER">
+            <p:cNvPr id="140" name="edge_d512_12_HOST_HOST_EXEC_CONTROL_to_HOST_HOST_EXEC_MANAGER">
               <a:extLst>
                 <a:ext uri="{FF2B5EF4-FFF2-40B4-BE49-F238E27FC236}">
                   <a16:creationId xmlns:a16="http://schemas.microsoft.com/office/drawing/2014/main" id="{34A51148-B862-D00A-A6D3-5E28E8B0C8D3}"/>
@@ -12548,7 +12925,7 @@
           </p:nvCxnSpPr>
           <p:spPr>
             <a:xfrm>
-              <a:off x="5076852" y="5811378"/>
+              <a:off x="3997352" y="7957677"/>
               <a:ext cx="1962" cy="459987"/>
             </a:xfrm>
             <a:prstGeom prst="straightConnector1">
@@ -12581,7 +12958,7 @@
         </p:cxnSp>
         <p:cxnSp>
           <p:nvCxnSpPr>
-            <p:cNvPr id="38" name="edge_d512_13_HOST_HOST_SERVICE_RUNTIME_to_HOST_HOST_SERVICE_SERVER">
+            <p:cNvPr id="141" name="edge_d512_13_HOST_HOST_SERVICE_RUNTIME_to_HOST_HOST_SERVICE_SERVER">
               <a:extLst>
                 <a:ext uri="{FF2B5EF4-FFF2-40B4-BE49-F238E27FC236}">
                   <a16:creationId xmlns:a16="http://schemas.microsoft.com/office/drawing/2014/main" id="{80AC13D6-6E03-5AF1-D769-F603F1D64DF1}"/>
@@ -12590,14 +12967,14 @@
             </p:cNvPr>
             <p:cNvCxnSpPr>
               <a:cxnSpLocks/>
-              <a:stCxn id="22" idx="2"/>
-              <a:endCxn id="23" idx="0"/>
+              <a:stCxn id="125" idx="2"/>
+              <a:endCxn id="126" idx="0"/>
             </p:cNvCxnSpPr>
             <p:nvPr/>
           </p:nvCxnSpPr>
           <p:spPr>
             <a:xfrm rot="16200000" flipH="1">
-              <a:off x="4938536" y="4027133"/>
+              <a:off x="3859036" y="6173432"/>
               <a:ext cx="219743" cy="475"/>
             </a:xfrm>
             <a:prstGeom prst="bentConnector3">
@@ -12632,7 +13009,7 @@
         </p:cxnSp>
         <p:cxnSp>
           <p:nvCxnSpPr>
-            <p:cNvPr id="39" name="edge_d512_14_APP_APP_COORD_BUSINESS_to_APP_APP_ACCESS_SELECT">
+            <p:cNvPr id="142" name="edge_d512_14_APP_APP_COORD_BUSINESS_to_APP_APP_ACCESS_SELECT">
               <a:extLst>
                 <a:ext uri="{FF2B5EF4-FFF2-40B4-BE49-F238E27FC236}">
                   <a16:creationId xmlns:a16="http://schemas.microsoft.com/office/drawing/2014/main" id="{EEA684FA-7052-61F3-B70A-954BEC3EDBFC}"/>
@@ -12641,14 +13018,14 @@
             </p:cNvPr>
             <p:cNvCxnSpPr>
               <a:cxnSpLocks/>
-              <a:stCxn id="72" idx="1"/>
-              <a:endCxn id="19" idx="1"/>
+              <a:stCxn id="175" idx="1"/>
+              <a:endCxn id="122" idx="1"/>
             </p:cNvCxnSpPr>
             <p:nvPr/>
           </p:nvCxnSpPr>
           <p:spPr>
             <a:xfrm rot="10800000" flipV="1">
-              <a:off x="2068694" y="1945354"/>
+              <a:off x="989194" y="4091653"/>
               <a:ext cx="11146" cy="1953083"/>
             </a:xfrm>
             <a:prstGeom prst="bentConnector3">
@@ -12683,7 +13060,7 @@
         </p:cxnSp>
         <p:cxnSp>
           <p:nvCxnSpPr>
-            <p:cNvPr id="40" name="edge_d512_15_APP_APP_ACCESS_RESULT_to_APP_APP_COORD_BUSINESS">
+            <p:cNvPr id="143" name="edge_d512_15_APP_APP_ACCESS_RESULT_to_APP_APP_COORD_BUSINESS">
               <a:extLst>
                 <a:ext uri="{FF2B5EF4-FFF2-40B4-BE49-F238E27FC236}">
                   <a16:creationId xmlns:a16="http://schemas.microsoft.com/office/drawing/2014/main" id="{02DF7D85-1E88-D9F0-F0EF-BCBB5FEE5DD8}"/>
@@ -12692,14 +13069,14 @@
             </p:cNvPr>
             <p:cNvCxnSpPr>
               <a:cxnSpLocks/>
-              <a:stCxn id="20" idx="3"/>
-              <a:endCxn id="71" idx="3"/>
+              <a:stCxn id="123" idx="3"/>
+              <a:endCxn id="174" idx="3"/>
             </p:cNvCxnSpPr>
             <p:nvPr/>
           </p:nvCxnSpPr>
           <p:spPr>
             <a:xfrm flipV="1">
-              <a:off x="3143698" y="1945791"/>
+              <a:off x="2064198" y="4092090"/>
               <a:ext cx="10175" cy="2878443"/>
             </a:xfrm>
             <a:prstGeom prst="bentConnector3">
@@ -12734,7 +13111,7 @@
         </p:cxnSp>
         <p:cxnSp>
           <p:nvCxnSpPr>
-            <p:cNvPr id="41" name="edge_d512_16_APP_APP_ACCESS_APP_SETTING_to_APP_APP_ACCESS_SELECT">
+            <p:cNvPr id="144" name="edge_d512_16_APP_APP_ACCESS_APP_SETTING_to_APP_APP_ACCESS_SELECT">
               <a:extLst>
                 <a:ext uri="{FF2B5EF4-FFF2-40B4-BE49-F238E27FC236}">
                   <a16:creationId xmlns:a16="http://schemas.microsoft.com/office/drawing/2014/main" id="{4C58630C-35B9-394C-C85C-8E93C5A4C63F}"/>
@@ -12743,14 +13120,14 @@
             </p:cNvPr>
             <p:cNvCxnSpPr>
               <a:cxnSpLocks/>
-              <a:stCxn id="73" idx="2"/>
-              <a:endCxn id="19" idx="0"/>
+              <a:stCxn id="176" idx="2"/>
+              <a:endCxn id="122" idx="0"/>
             </p:cNvCxnSpPr>
             <p:nvPr/>
           </p:nvCxnSpPr>
           <p:spPr>
             <a:xfrm rot="16200000" flipH="1">
-              <a:off x="2325126" y="3524582"/>
+              <a:off x="1245626" y="5670881"/>
               <a:ext cx="169999" cy="385791"/>
             </a:xfrm>
             <a:prstGeom prst="curvedConnector3">
@@ -12785,7 +13162,7 @@
         </p:cxnSp>
         <p:cxnSp>
           <p:nvCxnSpPr>
-            <p:cNvPr id="42" name="edge_d512_17_APP_APP_ACCESS_SELECT_to_APP_APP_ACCESS_COMMAND">
+            <p:cNvPr id="145" name="edge_d512_17_APP_APP_ACCESS_SELECT_to_APP_APP_ACCESS_COMMAND">
               <a:extLst>
                 <a:ext uri="{FF2B5EF4-FFF2-40B4-BE49-F238E27FC236}">
                   <a16:creationId xmlns:a16="http://schemas.microsoft.com/office/drawing/2014/main" id="{EA8C20DE-C491-35EA-E944-59153E1BC7B8}"/>
@@ -12794,14 +13171,14 @@
             </p:cNvPr>
             <p:cNvCxnSpPr>
               <a:cxnSpLocks/>
-              <a:stCxn id="19" idx="2"/>
-              <a:endCxn id="24" idx="0"/>
+              <a:stCxn id="122" idx="2"/>
+              <a:endCxn id="127" idx="0"/>
             </p:cNvCxnSpPr>
             <p:nvPr/>
           </p:nvCxnSpPr>
           <p:spPr>
             <a:xfrm>
-              <a:off x="2603021" y="3988047"/>
+              <a:off x="1523521" y="6134346"/>
               <a:ext cx="1" cy="151693"/>
             </a:xfrm>
             <a:prstGeom prst="straightConnector1">
@@ -12834,7 +13211,7 @@
         </p:cxnSp>
         <p:cxnSp>
           <p:nvCxnSpPr>
-            <p:cNvPr id="43" name="edge_d512_18_APP_APP_ACCESS_COMMAND_to_APP_APP_ACCESS_RESULT">
+            <p:cNvPr id="146" name="edge_d512_18_APP_APP_ACCESS_COMMAND_to_APP_APP_ACCESS_RESULT">
               <a:extLst>
                 <a:ext uri="{FF2B5EF4-FFF2-40B4-BE49-F238E27FC236}">
                   <a16:creationId xmlns:a16="http://schemas.microsoft.com/office/drawing/2014/main" id="{487622D3-5FED-6B7A-BAA5-5C657664EC8E}"/>
@@ -12843,14 +13220,14 @@
             </p:cNvPr>
             <p:cNvCxnSpPr>
               <a:cxnSpLocks/>
-              <a:stCxn id="24" idx="2"/>
-              <a:endCxn id="20" idx="0"/>
+              <a:stCxn id="127" idx="2"/>
+              <a:endCxn id="123" idx="0"/>
             </p:cNvCxnSpPr>
             <p:nvPr/>
           </p:nvCxnSpPr>
           <p:spPr>
             <a:xfrm flipH="1">
-              <a:off x="2601058" y="4326499"/>
+              <a:off x="1521558" y="6472798"/>
               <a:ext cx="1964" cy="431802"/>
             </a:xfrm>
             <a:prstGeom prst="straightConnector1">
@@ -12883,7 +13260,7 @@
         </p:cxnSp>
         <p:cxnSp>
           <p:nvCxnSpPr>
-            <p:cNvPr id="44" name="edge_d512_19_APP_APP_COORD_LIFECYCLE_to_APP_APP_COORD_PROCESS">
+            <p:cNvPr id="147" name="edge_d512_19_APP_APP_COORD_LIFECYCLE_to_APP_APP_COORD_PROCESS">
               <a:extLst>
                 <a:ext uri="{FF2B5EF4-FFF2-40B4-BE49-F238E27FC236}">
                   <a16:creationId xmlns:a16="http://schemas.microsoft.com/office/drawing/2014/main" id="{BD3107D8-0658-D9BC-75FC-7F375F841489}"/>
@@ -12897,7 +13274,7 @@
           </p:nvCxnSpPr>
           <p:spPr>
             <a:xfrm>
-              <a:off x="2603022" y="2403146"/>
+              <a:off x="1523522" y="4549445"/>
               <a:ext cx="4445" cy="171368"/>
             </a:xfrm>
             <a:prstGeom prst="straightConnector1">
@@ -12930,7 +13307,7 @@
         </p:cxnSp>
         <p:grpSp>
           <p:nvGrpSpPr>
-            <p:cNvPr id="45" name="グループ化 44">
+            <p:cNvPr id="148" name="グループ化 147">
               <a:extLst>
                 <a:ext uri="{FF2B5EF4-FFF2-40B4-BE49-F238E27FC236}">
                   <a16:creationId xmlns:a16="http://schemas.microsoft.com/office/drawing/2014/main" id="{343079D0-543B-970E-A86B-9AFD2394D8E6}"/>
@@ -12942,7 +13319,7 @@
           </p:nvGrpSpPr>
           <p:grpSpPr>
             <a:xfrm>
-              <a:off x="6807873" y="3352546"/>
+              <a:off x="5728373" y="5498845"/>
               <a:ext cx="1547555" cy="1016144"/>
               <a:chOff x="5474969" y="5242065"/>
               <a:chExt cx="2528047" cy="1990358"/>
@@ -12950,7 +13327,7 @@
           </p:grpSpPr>
           <p:sp>
             <p:nvSpPr>
-              <p:cNvPr id="81" name="shape_d512_DEVICE_CASH" title="① 釣銭機（RT-300）">
+              <p:cNvPr id="184" name="shape_d512_DEVICE_CASH" title="① 釣銭機（RT-300）">
                 <a:extLst>
                   <a:ext uri="{FF2B5EF4-FFF2-40B4-BE49-F238E27FC236}">
                     <a16:creationId xmlns:a16="http://schemas.microsoft.com/office/drawing/2014/main" id="{BBE465A3-CD95-0923-868A-E701B9AD1D11}"/>
@@ -12996,7 +13373,7 @@
               </a:fontRef>
             </p:style>
             <p:txBody>
-              <a:bodyPr wrap="square" lIns="32301" tIns="16151" rIns="32301" bIns="16151" rtlCol="0" anchor="t">
+              <a:bodyPr wrap="square" lIns="39252" tIns="19626" rIns="39252" bIns="19626" rtlCol="0" anchor="t">
                 <a:noAutofit/>
               </a:bodyPr>
               <a:lstStyle>
@@ -13097,50 +13474,80 @@
               <a:p>
                 <a:pPr algn="ctr"/>
                 <a:r>
-                  <a:rPr kumimoji="0" lang="ja-JP" altLang="en-US" sz="381" b="1" kern="0">
+                  <a:rPr kumimoji="0" lang="ja-JP" altLang="en-US" sz="463" b="1" i="0" u="none" strike="noStrike" kern="0" cap="none" spc="0" normalizeH="0" baseline="0">
+                    <a:ln>
+                      <a:noFill/>
+                    </a:ln>
                     <a:solidFill>
                       <a:srgbClr val="111111"/>
                     </a:solidFill>
+                    <a:effectLst/>
+                    <a:uLnTx/>
+                    <a:uFillTx/>
                     <a:latin typeface="Meiryo UI"/>
                     <a:ea typeface="Meiryo UI"/>
                   </a:rPr>
-                  <a:t>(1) 自動釣銭機（</a:t>
+                  <a:t>3.1 自動釣銭機（</a:t>
                 </a:r>
                 <a:r>
-                  <a:rPr kumimoji="0" lang="en-US" altLang="ja-JP" sz="381" b="1" kern="0">
+                  <a:rPr kumimoji="0" lang="en-US" altLang="ja-JP" sz="463" b="1" i="0" u="none" strike="noStrike" kern="0" cap="none" spc="0" normalizeH="0" baseline="0">
+                    <a:ln>
+                      <a:noFill/>
+                    </a:ln>
                     <a:solidFill>
                       <a:srgbClr val="111111"/>
                     </a:solidFill>
+                    <a:effectLst/>
+                    <a:uLnTx/>
+                    <a:uFillTx/>
                     <a:latin typeface="Meiryo UI"/>
                     <a:ea typeface="Meiryo UI"/>
                   </a:rPr>
                   <a:t>GLORY RT-300</a:t>
                 </a:r>
                 <a:r>
-                  <a:rPr kumimoji="0" lang="ja-JP" altLang="en-US" sz="381" b="1" kern="0">
+                  <a:rPr kumimoji="0" lang="ja-JP" altLang="en-US" sz="463" b="1" i="0" u="none" strike="noStrike" kern="0" cap="none" spc="0" normalizeH="0" baseline="0">
+                    <a:ln>
+                      <a:noFill/>
+                    </a:ln>
                     <a:solidFill>
                       <a:srgbClr val="111111"/>
                     </a:solidFill>
+                    <a:effectLst/>
+                    <a:uLnTx/>
+                    <a:uFillTx/>
                     <a:latin typeface="Meiryo UI"/>
                     <a:ea typeface="Meiryo UI"/>
                   </a:rPr>
                   <a:t>／</a:t>
                 </a:r>
                 <a:r>
-                  <a:rPr kumimoji="0" lang="en-US" altLang="ja-JP" sz="381" b="1" kern="0">
+                  <a:rPr kumimoji="0" lang="en-US" altLang="ja-JP" sz="463" b="1" i="0" u="none" strike="noStrike" kern="0" cap="none" spc="0" normalizeH="0" baseline="0">
+                    <a:ln>
+                      <a:noFill/>
+                    </a:ln>
                     <a:solidFill>
                       <a:srgbClr val="111111"/>
                     </a:solidFill>
+                    <a:effectLst/>
+                    <a:uLnTx/>
+                    <a:uFillTx/>
                     <a:latin typeface="Meiryo UI"/>
                     <a:ea typeface="Meiryo UI"/>
                   </a:rPr>
                   <a:t>RAD-300</a:t>
                 </a:r>
                 <a:r>
-                  <a:rPr kumimoji="0" lang="ja-JP" altLang="en-US" sz="381" b="1" kern="0">
+                  <a:rPr kumimoji="0" lang="ja-JP" altLang="en-US" sz="463" b="1" i="0" u="none" strike="noStrike" kern="0" cap="none" spc="0" normalizeH="0" baseline="0">
+                    <a:ln>
+                      <a:noFill/>
+                    </a:ln>
                     <a:solidFill>
                       <a:srgbClr val="111111"/>
                     </a:solidFill>
+                    <a:effectLst/>
+                    <a:uLnTx/>
+                    <a:uFillTx/>
                     <a:latin typeface="Meiryo UI"/>
                     <a:ea typeface="Meiryo UI"/>
                   </a:rPr>
@@ -13151,7 +13558,7 @@
           </p:sp>
           <p:pic>
             <p:nvPicPr>
-              <p:cNvPr id="82" name="図 81" descr="新型つり銭機「RT-300」「RAD-300」、包装硬貨管理機「WD-300」を開発 | グローリー株式会社">
+              <p:cNvPr id="185" name="図 184" descr="新型つり銭機「RT-300」「RAD-300」、包装硬貨管理機「WD-300」を開発 | グローリー株式会社">
                 <a:extLst>
                   <a:ext uri="{FF2B5EF4-FFF2-40B4-BE49-F238E27FC236}">
                     <a16:creationId xmlns:a16="http://schemas.microsoft.com/office/drawing/2014/main" id="{7D6D6939-E0CB-F16F-ACAF-EC1B7495F89D}"/>
@@ -13199,7 +13606,7 @@
         </p:grpSp>
         <p:grpSp>
           <p:nvGrpSpPr>
-            <p:cNvPr id="46" name="グループ化 45">
+            <p:cNvPr id="149" name="グループ化 148">
               <a:extLst>
                 <a:ext uri="{FF2B5EF4-FFF2-40B4-BE49-F238E27FC236}">
                   <a16:creationId xmlns:a16="http://schemas.microsoft.com/office/drawing/2014/main" id="{80ACEEE1-30E6-9C5B-37B1-85DC6796EB4A}"/>
@@ -13211,7 +13618,7 @@
           </p:nvGrpSpPr>
           <p:grpSpPr>
             <a:xfrm>
-              <a:off x="6865280" y="4432710"/>
+              <a:off x="5785780" y="6579009"/>
               <a:ext cx="1505158" cy="911583"/>
               <a:chOff x="5532376" y="6322229"/>
               <a:chExt cx="2445741" cy="1786219"/>
@@ -13219,7 +13626,7 @@
           </p:grpSpPr>
           <p:sp>
             <p:nvSpPr>
-              <p:cNvPr id="79" name="shape_d512_DEVICE_DRAWER" title="② キャッシュドロア（SHARP）">
+              <p:cNvPr id="182" name="shape_d512_DEVICE_DRAWER" title="② キャッシュドロア（SHARP）">
                 <a:extLst>
                   <a:ext uri="{FF2B5EF4-FFF2-40B4-BE49-F238E27FC236}">
                     <a16:creationId xmlns:a16="http://schemas.microsoft.com/office/drawing/2014/main" id="{5D022E42-2E49-A210-53EC-B5B17621D739}"/>
@@ -13265,7 +13672,7 @@
               </a:fontRef>
             </p:style>
             <p:txBody>
-              <a:bodyPr wrap="square" lIns="32301" tIns="16151" rIns="32301" bIns="16151" rtlCol="0" anchor="t">
+              <a:bodyPr wrap="square" lIns="39252" tIns="19626" rIns="39252" bIns="19626" rtlCol="0" anchor="t">
                 <a:noAutofit/>
               </a:bodyPr>
               <a:lstStyle>
@@ -13366,21 +13773,27 @@
               <a:p>
                 <a:pPr algn="ctr"/>
                 <a:r>
-                  <a:rPr kumimoji="0" lang="ja-JP" altLang="en-US" sz="381" b="1" kern="0">
+                  <a:rPr kumimoji="0" lang="ja-JP" altLang="en-US" sz="463" b="1" i="0" u="none" strike="noStrike" kern="0" cap="none" spc="0" normalizeH="0" baseline="0">
+                    <a:ln>
+                      <a:noFill/>
+                    </a:ln>
                     <a:solidFill>
                       <a:srgbClr val="111111"/>
                     </a:solidFill>
+                    <a:effectLst/>
+                    <a:uLnTx/>
+                    <a:uFillTx/>
                     <a:latin typeface="Meiryo UI"/>
                     <a:ea typeface="Meiryo UI"/>
                   </a:rPr>
-                  <a:t>(2) ドロア（SHARP UP-J36DW3）</a:t>
+                  <a:t>3.2 ドロア（SHARP UP-J36DW3）</a:t>
                 </a:r>
               </a:p>
             </p:txBody>
           </p:sp>
           <p:pic>
             <p:nvPicPr>
-              <p:cNvPr id="80" name="図 79" descr="DSCA-PO 3B/6C 手動開閉式キャッシュドロアー DSCA-PO クローバー電子 25911753">
+              <p:cNvPr id="183" name="図 182" descr="DSCA-PO 3B/6C 手動開閉式キャッシュドロアー DSCA-PO クローバー電子 25911753">
                 <a:extLst>
                   <a:ext uri="{FF2B5EF4-FFF2-40B4-BE49-F238E27FC236}">
                     <a16:creationId xmlns:a16="http://schemas.microsoft.com/office/drawing/2014/main" id="{AC02EDCD-4DE2-50D0-1A95-4483BF0DE54B}"/>
@@ -13428,7 +13841,7 @@
         </p:grpSp>
         <p:grpSp>
           <p:nvGrpSpPr>
-            <p:cNvPr id="47" name="グループ化 46">
+            <p:cNvPr id="150" name="グループ化 149">
               <a:extLst>
                 <a:ext uri="{FF2B5EF4-FFF2-40B4-BE49-F238E27FC236}">
                   <a16:creationId xmlns:a16="http://schemas.microsoft.com/office/drawing/2014/main" id="{2FC63BE7-E46D-7848-4919-91970DFED596}"/>
@@ -13440,7 +13853,7 @@
           </p:nvGrpSpPr>
           <p:grpSpPr>
             <a:xfrm>
-              <a:off x="6855063" y="5375579"/>
+              <a:off x="5775563" y="7521878"/>
               <a:ext cx="1498058" cy="951716"/>
               <a:chOff x="5522159" y="7265098"/>
               <a:chExt cx="2438120" cy="1866900"/>
@@ -13448,7 +13861,7 @@
           </p:grpSpPr>
           <p:sp>
             <p:nvSpPr>
-              <p:cNvPr id="77" name="shape_d512_DEVICE_DISPLAY" title="③ カスタマーディスプレイ（SHARP）">
+              <p:cNvPr id="180" name="shape_d512_DEVICE_DISPLAY" title="③ カスタマーディスプレイ（SHARP）">
                 <a:extLst>
                   <a:ext uri="{FF2B5EF4-FFF2-40B4-BE49-F238E27FC236}">
                     <a16:creationId xmlns:a16="http://schemas.microsoft.com/office/drawing/2014/main" id="{A98F850A-12D9-850C-5D7D-A09EDC83E856}"/>
@@ -13494,7 +13907,7 @@
               </a:fontRef>
             </p:style>
             <p:txBody>
-              <a:bodyPr wrap="square" lIns="32301" tIns="16151" rIns="32301" bIns="16151" rtlCol="0" anchor="t">
+              <a:bodyPr wrap="square" lIns="39252" tIns="19626" rIns="39252" bIns="19626" rtlCol="0" anchor="t">
                 <a:noAutofit/>
               </a:bodyPr>
               <a:lstStyle>
@@ -13595,21 +14008,27 @@
               <a:p>
                 <a:pPr algn="ctr"/>
                 <a:r>
-                  <a:rPr kumimoji="0" lang="ja-JP" altLang="en-US" sz="381" b="1" kern="0">
+                  <a:rPr kumimoji="0" lang="ja-JP" altLang="en-US" sz="463" b="1" i="0" u="none" strike="noStrike" kern="0" cap="none" spc="0" normalizeH="0" baseline="0">
+                    <a:ln>
+                      <a:noFill/>
+                    </a:ln>
                     <a:solidFill>
                       <a:srgbClr val="111111"/>
                     </a:solidFill>
+                    <a:effectLst/>
+                    <a:uLnTx/>
+                    <a:uFillTx/>
                     <a:latin typeface="Meiryo UI"/>
                     <a:ea typeface="Meiryo UI"/>
                   </a:rPr>
-                  <a:t>(3) カスタマディスプレイ（SHARP RZ-4DP1）</a:t>
+                  <a:t>3.3 カスタマディスプレイ（SHARP RZ-4DP1）</a:t>
                 </a:r>
               </a:p>
             </p:txBody>
           </p:sp>
           <p:pic>
             <p:nvPicPr>
-              <p:cNvPr id="78" name="図 77" descr="POSターミナル&lt;RZ-A476S/RZ-A396S&gt;：ニュースリリース画像ダウンロードサービス：シャープ">
+              <p:cNvPr id="181" name="図 180" descr="POSターミナル&lt;RZ-A476S/RZ-A396S&gt;：ニュースリリース画像ダウンロードサービス：シャープ">
                 <a:extLst>
                   <a:ext uri="{FF2B5EF4-FFF2-40B4-BE49-F238E27FC236}">
                     <a16:creationId xmlns:a16="http://schemas.microsoft.com/office/drawing/2014/main" id="{E215A2AD-DE5B-9456-A8BE-07EA6567AC7F}"/>
@@ -13657,7 +14076,7 @@
         </p:grpSp>
         <p:sp>
           <p:nvSpPr>
-            <p:cNvPr id="48" name="AutoShape 5" descr="Json File Document Icon Download SVG Vectors and Icons - SVG ...">
+            <p:cNvPr id="151" name="AutoShape 5" descr="Json File Document Icon Download SVG Vectors and Icons - SVG ...">
               <a:extLst>
                 <a:ext uri="{FF2B5EF4-FFF2-40B4-BE49-F238E27FC236}">
                   <a16:creationId xmlns:a16="http://schemas.microsoft.com/office/drawing/2014/main" id="{66C4166B-6E7F-F4E6-36C4-D4E1223F3E7F}"/>
@@ -13671,7 +14090,7 @@
           </p:nvSpPr>
           <p:spPr bwMode="auto">
             <a:xfrm>
-              <a:off x="10698914" y="946947"/>
+              <a:off x="9619414" y="3093246"/>
               <a:ext cx="160181" cy="159180"/>
             </a:xfrm>
             <a:prstGeom prst="rect">
@@ -13786,13 +14205,13 @@
               </a:lvl9pPr>
             </a:lstStyle>
             <a:p>
-              <a:endParaRPr lang="ja-JP" altLang="en-US" sz="1481"/>
+              <a:endParaRPr lang="ja-JP" altLang="en-US"/>
             </a:p>
           </p:txBody>
         </p:sp>
         <p:sp>
           <p:nvSpPr>
-            <p:cNvPr id="49" name="AutoShape 6" descr="Json File Document Icon Download SVG Vectors and Icons - SVG ...">
+            <p:cNvPr id="152" name="AutoShape 6" descr="Json File Document Icon Download SVG Vectors and Icons - SVG ...">
               <a:extLst>
                 <a:ext uri="{FF2B5EF4-FFF2-40B4-BE49-F238E27FC236}">
                   <a16:creationId xmlns:a16="http://schemas.microsoft.com/office/drawing/2014/main" id="{96B792E1-A3C5-C91C-CFE6-7C0E1FA6D8E0}"/>
@@ -13806,7 +14225,7 @@
           </p:nvSpPr>
           <p:spPr bwMode="auto">
             <a:xfrm>
-              <a:off x="9953132" y="3546823"/>
+              <a:off x="8873632" y="5693122"/>
               <a:ext cx="160181" cy="156005"/>
             </a:xfrm>
             <a:prstGeom prst="rect">
@@ -13921,13 +14340,13 @@
               </a:lvl9pPr>
             </a:lstStyle>
             <a:p>
-              <a:endParaRPr lang="ja-JP" altLang="en-US" sz="1481"/>
+              <a:endParaRPr lang="ja-JP" altLang="en-US"/>
             </a:p>
           </p:txBody>
         </p:sp>
         <p:grpSp>
           <p:nvGrpSpPr>
-            <p:cNvPr id="50" name="グループ化 49">
+            <p:cNvPr id="153" name="グループ化 152">
               <a:extLst>
                 <a:ext uri="{FF2B5EF4-FFF2-40B4-BE49-F238E27FC236}">
                   <a16:creationId xmlns:a16="http://schemas.microsoft.com/office/drawing/2014/main" id="{5FE38E78-691C-66A5-43B1-A3DE4A8BEDEC}"/>
@@ -13939,7 +14358,7 @@
           </p:nvGrpSpPr>
           <p:grpSpPr>
             <a:xfrm>
-              <a:off x="4029366" y="5815980"/>
+              <a:off x="2949866" y="7962279"/>
               <a:ext cx="1019403" cy="180103"/>
               <a:chOff x="2696462" y="7705499"/>
               <a:chExt cx="1879405" cy="428038"/>
@@ -13947,7 +14366,7 @@
           </p:grpSpPr>
           <p:sp>
             <p:nvSpPr>
-              <p:cNvPr id="75" name="shape_d512_HOST_HOST_EXEC_HOST_SETTING" title="デバイスコネクタ側設定">
+              <p:cNvPr id="178" name="shape_d512_HOST_HOST_EXEC_HOST_SETTING" title="デバイスコネクタ側設定">
                 <a:extLst>
                   <a:ext uri="{FF2B5EF4-FFF2-40B4-BE49-F238E27FC236}">
                     <a16:creationId xmlns:a16="http://schemas.microsoft.com/office/drawing/2014/main" id="{A725A9AA-AA96-490C-D5AB-F0F6744008FA}"/>
@@ -13993,7 +14412,7 @@
               </a:fontRef>
             </p:style>
             <p:txBody>
-              <a:bodyPr wrap="square" lIns="32301" tIns="16151" rIns="32301" bIns="16151" rtlCol="0" anchor="ctr">
+              <a:bodyPr wrap="square" lIns="39252" tIns="19626" rIns="39252" bIns="19626" rtlCol="0" anchor="ctr">
                 <a:noAutofit/>
               </a:bodyPr>
               <a:lstStyle>
@@ -14094,30 +14513,48 @@
               <a:p>
                 <a:pPr algn="r"/>
                 <a:r>
-                  <a:rPr kumimoji="0" lang="ja-JP" altLang="en-US" sz="339" b="1" kern="0">
+                  <a:rPr kumimoji="0" lang="ja-JP" altLang="en-US" sz="412" b="1" i="0" u="none" strike="noStrike" kern="0" cap="none" spc="0" normalizeH="0" baseline="0">
+                    <a:ln>
+                      <a:noFill/>
+                    </a:ln>
                     <a:solidFill>
                       <a:srgbClr val="111111"/>
                     </a:solidFill>
+                    <a:effectLst/>
+                    <a:uLnTx/>
+                    <a:uFillTx/>
                     <a:latin typeface="Meiryo UI"/>
                     <a:ea typeface="Meiryo UI"/>
                   </a:rPr>
-                  <a:t>(2)</a:t>
+                  <a:t>2.2.</a:t>
                 </a:r>
                 <a:r>
-                  <a:rPr kumimoji="0" lang="en-US" altLang="ja-JP" sz="339" b="1" kern="0">
+                  <a:rPr kumimoji="0" lang="en-US" altLang="ja-JP" sz="412" b="1" i="0" u="none" strike="noStrike" kern="0" cap="none" spc="0" normalizeH="0" baseline="0">
+                    <a:ln>
+                      <a:noFill/>
+                    </a:ln>
                     <a:solidFill>
                       <a:srgbClr val="111111"/>
                     </a:solidFill>
+                    <a:effectLst/>
+                    <a:uLnTx/>
+                    <a:uFillTx/>
                     <a:latin typeface="Meiryo UI"/>
                     <a:ea typeface="Meiryo UI"/>
                   </a:rPr>
-                  <a:t>-4 </a:t>
+                  <a:t>4 </a:t>
                 </a:r>
                 <a:r>
-                  <a:rPr kumimoji="0" lang="ja-JP" altLang="en-US" sz="339" b="1" kern="0">
+                  <a:rPr kumimoji="0" lang="ja-JP" altLang="en-US" sz="412" b="1" i="0" u="none" strike="noStrike" kern="0" cap="none" spc="0" normalizeH="0" baseline="0">
+                    <a:ln>
+                      <a:noFill/>
+                    </a:ln>
                     <a:solidFill>
                       <a:srgbClr val="111111"/>
                     </a:solidFill>
+                    <a:effectLst/>
+                    <a:uLnTx/>
+                    <a:uFillTx/>
                     <a:latin typeface="Meiryo UI"/>
                     <a:ea typeface="Meiryo UI"/>
                   </a:rPr>
@@ -14128,7 +14565,7 @@
           </p:sp>
           <p:pic>
             <p:nvPicPr>
-              <p:cNvPr id="76" name="図 75" descr="Json file - Free ui icons">
+              <p:cNvPr id="179" name="図 178" descr="Json file - Free ui icons">
                 <a:extLst>
                   <a:ext uri="{FF2B5EF4-FFF2-40B4-BE49-F238E27FC236}">
                     <a16:creationId xmlns:a16="http://schemas.microsoft.com/office/drawing/2014/main" id="{E26EEFCB-2BE4-A42C-AF92-2D296C9ABC67}"/>
@@ -14176,7 +14613,7 @@
         </p:grpSp>
         <p:grpSp>
           <p:nvGrpSpPr>
-            <p:cNvPr id="51" name="グループ化 50">
+            <p:cNvPr id="154" name="グループ化 153">
               <a:extLst>
                 <a:ext uri="{FF2B5EF4-FFF2-40B4-BE49-F238E27FC236}">
                   <a16:creationId xmlns:a16="http://schemas.microsoft.com/office/drawing/2014/main" id="{ABD4FCF6-C914-330E-3C0F-0F9212AFD7AF}"/>
@@ -14188,7 +14625,7 @@
           </p:nvGrpSpPr>
           <p:grpSpPr>
             <a:xfrm>
-              <a:off x="1796536" y="3384912"/>
+              <a:off x="717036" y="5531211"/>
               <a:ext cx="829480" cy="176129"/>
               <a:chOff x="463632" y="5274431"/>
               <a:chExt cx="1542785" cy="439456"/>
@@ -14196,7 +14633,7 @@
           </p:grpSpPr>
           <p:sp>
             <p:nvSpPr>
-              <p:cNvPr id="73" name="shape_d512_APP_APP_ACCESS_APP_SETTING" title="アプリ側設定">
+              <p:cNvPr id="176" name="shape_d512_APP_APP_ACCESS_APP_SETTING" title="アプリ側設定">
                 <a:extLst>
                   <a:ext uri="{FF2B5EF4-FFF2-40B4-BE49-F238E27FC236}">
                     <a16:creationId xmlns:a16="http://schemas.microsoft.com/office/drawing/2014/main" id="{D1D3C8B5-2E36-90BC-6FE1-442418D1F30C}"/>
@@ -14242,7 +14679,7 @@
               </a:fontRef>
             </p:style>
             <p:txBody>
-              <a:bodyPr wrap="square" lIns="32301" tIns="16151" rIns="32301" bIns="16151" rtlCol="0" anchor="ctr">
+              <a:bodyPr wrap="square" lIns="39252" tIns="19626" rIns="39252" bIns="19626" rtlCol="0" anchor="ctr">
                 <a:noAutofit/>
               </a:bodyPr>
               <a:lstStyle>
@@ -14343,30 +14780,48 @@
               <a:p>
                 <a:pPr algn="r"/>
                 <a:r>
-                  <a:rPr kumimoji="0" lang="ja-JP" altLang="en-US" sz="339" b="1" kern="0">
+                  <a:rPr kumimoji="0" lang="ja-JP" altLang="en-US" sz="412" b="1" i="0" u="none" strike="noStrike" kern="0" cap="none" spc="0" normalizeH="0" baseline="0">
+                    <a:ln>
+                      <a:noFill/>
+                    </a:ln>
                     <a:solidFill>
                       <a:srgbClr val="111111"/>
                     </a:solidFill>
+                    <a:effectLst/>
+                    <a:uLnTx/>
+                    <a:uFillTx/>
                     <a:latin typeface="Meiryo UI"/>
                     <a:ea typeface="Meiryo UI"/>
                   </a:rPr>
-                  <a:t>(2)</a:t>
+                  <a:t>1.2.</a:t>
                 </a:r>
                 <a:r>
-                  <a:rPr kumimoji="0" lang="en-US" altLang="ja-JP" sz="339" b="1" kern="0">
+                  <a:rPr kumimoji="0" lang="en-US" altLang="ja-JP" sz="412" b="1" i="0" u="none" strike="noStrike" kern="0" cap="none" spc="0" normalizeH="0" baseline="0">
+                    <a:ln>
+                      <a:noFill/>
+                    </a:ln>
                     <a:solidFill>
                       <a:srgbClr val="111111"/>
                     </a:solidFill>
+                    <a:effectLst/>
+                    <a:uLnTx/>
+                    <a:uFillTx/>
                     <a:latin typeface="Meiryo UI"/>
                     <a:ea typeface="Meiryo UI"/>
                   </a:rPr>
-                  <a:t>-4 </a:t>
+                  <a:t>4 </a:t>
                 </a:r>
                 <a:r>
-                  <a:rPr kumimoji="0" lang="ja-JP" altLang="en-US" sz="339" b="1" kern="0">
+                  <a:rPr kumimoji="0" lang="ja-JP" altLang="en-US" sz="412" b="1" i="0" u="none" strike="noStrike" kern="0" cap="none" spc="0" normalizeH="0" baseline="0">
+                    <a:ln>
+                      <a:noFill/>
+                    </a:ln>
                     <a:solidFill>
                       <a:srgbClr val="111111"/>
                     </a:solidFill>
+                    <a:effectLst/>
+                    <a:uLnTx/>
+                    <a:uFillTx/>
                     <a:latin typeface="Meiryo UI"/>
                     <a:ea typeface="Meiryo UI"/>
                   </a:rPr>
@@ -14377,7 +14832,7 @@
           </p:sp>
           <p:pic>
             <p:nvPicPr>
-              <p:cNvPr id="74" name="図 73" descr="Json file - Free ui icons">
+              <p:cNvPr id="177" name="図 176" descr="Json file - Free ui icons">
                 <a:extLst>
                   <a:ext uri="{FF2B5EF4-FFF2-40B4-BE49-F238E27FC236}">
                     <a16:creationId xmlns:a16="http://schemas.microsoft.com/office/drawing/2014/main" id="{DCEBAFDD-8850-403E-2D2E-F3C34BE19F89}"/>
@@ -14425,7 +14880,7 @@
         </p:grpSp>
         <p:sp>
           <p:nvSpPr>
-            <p:cNvPr id="52" name="shape_comment_d512_HOST_HOST_EXEC_ORDER">
+            <p:cNvPr id="155" name="shape_comment_d512_HOST_HOST_EXEC_ORDER">
               <a:extLst>
                 <a:ext uri="{FF2B5EF4-FFF2-40B4-BE49-F238E27FC236}">
                   <a16:creationId xmlns:a16="http://schemas.microsoft.com/office/drawing/2014/main" id="{1F180C00-94A1-4A08-C50B-1428626D623B}"/>
@@ -14437,7 +14892,7 @@
           </p:nvSpPr>
           <p:spPr>
             <a:xfrm>
-              <a:off x="5460385" y="3744137"/>
+              <a:off x="4380885" y="5890436"/>
               <a:ext cx="1110144" cy="496718"/>
             </a:xfrm>
             <a:prstGeom prst="wedgeRoundRectCallout">
@@ -14477,7 +14932,7 @@
             </a:fontRef>
           </p:style>
           <p:txBody>
-            <a:bodyPr wrap="square" lIns="37685" tIns="21534" rIns="37685" bIns="21534" rtlCol="0" anchor="ctr"/>
+            <a:bodyPr wrap="square" lIns="45794" tIns="26168" rIns="45794" bIns="26168" rtlCol="0" anchor="ctr"/>
             <a:lstStyle>
               <a:defPPr>
                 <a:defRPr lang="en-US"/>
@@ -14576,10 +15031,16 @@
             <a:p>
               <a:pPr algn="l"/>
               <a:r>
-                <a:rPr kumimoji="0" lang="ja-JP" altLang="en-US" sz="339" kern="0">
+                <a:rPr kumimoji="0" lang="ja-JP" altLang="en-US" sz="412" b="0" i="0" u="none" strike="noStrike" kern="0" cap="none" spc="0" normalizeH="0" baseline="0">
+                  <a:ln>
+                    <a:noFill/>
+                  </a:ln>
                   <a:solidFill>
                     <a:srgbClr val="404040"/>
                   </a:solidFill>
+                  <a:effectLst/>
+                  <a:uLnTx/>
+                  <a:uFillTx/>
                   <a:latin typeface="Meiryo UI"/>
                   <a:ea typeface="Meiryo UI"/>
                 </a:rPr>
@@ -14590,7 +15051,7 @@
         </p:sp>
         <p:sp>
           <p:nvSpPr>
-            <p:cNvPr id="53" name="edge_label_d512_05_APP_APP_ACCESS_COMMAND_to_HOST_HOST_SERVICE_SERVER">
+            <p:cNvPr id="156" name="edge_label_d512_05_APP_APP_ACCESS_COMMAND_to_HOST_HOST_SERVICE_SERVER">
               <a:extLst>
                 <a:ext uri="{FF2B5EF4-FFF2-40B4-BE49-F238E27FC236}">
                   <a16:creationId xmlns:a16="http://schemas.microsoft.com/office/drawing/2014/main" id="{4A0D70EB-1185-DD3B-7890-EB7DADB355C2}"/>
@@ -14602,7 +15063,7 @@
           </p:nvSpPr>
           <p:spPr>
             <a:xfrm>
-              <a:off x="4012564" y="4137552"/>
+              <a:off x="2933064" y="6283851"/>
               <a:ext cx="552547" cy="184372"/>
             </a:xfrm>
             <a:prstGeom prst="rect">
@@ -14618,7 +15079,7 @@
             </a:ln>
           </p:spPr>
           <p:txBody>
-            <a:bodyPr vert="horz" wrap="square" lIns="26918" tIns="10767" rIns="26918" bIns="10767" rtlCol="0" anchor="ctr">
+            <a:bodyPr vert="horz" wrap="square" lIns="32710" tIns="13084" rIns="32710" bIns="13084" rtlCol="0" anchor="ctr">
               <a:noAutofit/>
             </a:bodyPr>
             <a:lstStyle>
@@ -14719,10 +15180,16 @@
             <a:p>
               <a:pPr algn="ctr"/>
               <a:r>
-                <a:rPr kumimoji="0" lang="ja-JP" altLang="en-US" sz="381" kern="0">
+                <a:rPr kumimoji="0" lang="ja-JP" altLang="en-US" sz="463" b="0" i="0" u="none" strike="noStrike" kern="0" cap="none" spc="0" normalizeH="0" baseline="0">
+                  <a:ln>
+                    <a:noFill/>
+                  </a:ln>
                   <a:solidFill>
                     <a:srgbClr val="000000"/>
                   </a:solidFill>
+                  <a:effectLst/>
+                  <a:uLnTx/>
+                  <a:uFillTx/>
                   <a:latin typeface="Meiryo UI"/>
                   <a:ea typeface="Meiryo UI"/>
                 </a:rPr>
@@ -14734,7 +15201,7 @@
         </p:sp>
         <p:grpSp>
           <p:nvGrpSpPr>
-            <p:cNvPr id="54" name="グループ化 53">
+            <p:cNvPr id="157" name="グループ化 156">
               <a:extLst>
                 <a:ext uri="{FF2B5EF4-FFF2-40B4-BE49-F238E27FC236}">
                   <a16:creationId xmlns:a16="http://schemas.microsoft.com/office/drawing/2014/main" id="{20B1198B-2977-EBFA-B898-D3D79F698D4D}"/>
@@ -14746,7 +15213,7 @@
           </p:nvGrpSpPr>
           <p:grpSpPr>
             <a:xfrm>
-              <a:off x="2067315" y="1788753"/>
+              <a:off x="987815" y="3935052"/>
               <a:ext cx="1082192" cy="187870"/>
               <a:chOff x="734411" y="3678272"/>
               <a:chExt cx="1712259" cy="362606"/>
@@ -14754,7 +15221,7 @@
           </p:grpSpPr>
           <p:sp>
             <p:nvSpPr>
-              <p:cNvPr id="71" name="shape_d512_APP_APP_COORD_BUSINESS" title="①-1 画面・業務処理">
+              <p:cNvPr id="174" name="shape_d512_APP_APP_COORD_BUSINESS" title="①-1 画面・業務処理">
                 <a:extLst>
                   <a:ext uri="{FF2B5EF4-FFF2-40B4-BE49-F238E27FC236}">
                     <a16:creationId xmlns:a16="http://schemas.microsoft.com/office/drawing/2014/main" id="{2F9918C8-8491-7307-E04C-D6998414BAE8}"/>
@@ -14800,7 +15267,7 @@
               </a:fontRef>
             </p:style>
             <p:txBody>
-              <a:bodyPr wrap="square" lIns="32301" tIns="16151" rIns="32301" bIns="16151" rtlCol="0" anchor="ctr">
+              <a:bodyPr wrap="square" lIns="39252" tIns="19626" rIns="39252" bIns="19626" rtlCol="0" anchor="ctr">
                 <a:noAutofit/>
               </a:bodyPr>
               <a:lstStyle>
@@ -14901,30 +15368,48 @@
               <a:p>
                 <a:pPr algn="ctr"/>
                 <a:r>
-                  <a:rPr kumimoji="0" lang="ja-JP" altLang="en-US" sz="424" b="1" kern="0">
+                  <a:rPr kumimoji="0" lang="ja-JP" altLang="en-US" sz="515" b="1" i="0" u="none" strike="noStrike" kern="0" cap="none" spc="0" normalizeH="0" baseline="0">
+                    <a:ln>
+                      <a:noFill/>
+                    </a:ln>
                     <a:solidFill>
                       <a:srgbClr val="111111"/>
                     </a:solidFill>
+                    <a:effectLst/>
+                    <a:uLnTx/>
+                    <a:uFillTx/>
                     <a:latin typeface="Meiryo UI"/>
                     <a:ea typeface="Meiryo UI"/>
                   </a:rPr>
-                  <a:t>(1)</a:t>
+                  <a:t>1.1.</a:t>
                 </a:r>
                 <a:r>
-                  <a:rPr kumimoji="0" lang="en-US" altLang="ja-JP" sz="424" b="1" kern="0">
+                  <a:rPr kumimoji="0" lang="en-US" altLang="ja-JP" sz="515" b="1" i="0" u="none" strike="noStrike" kern="0" cap="none" spc="0" normalizeH="0" baseline="0">
+                    <a:ln>
+                      <a:noFill/>
+                    </a:ln>
                     <a:solidFill>
                       <a:srgbClr val="111111"/>
                     </a:solidFill>
+                    <a:effectLst/>
+                    <a:uLnTx/>
+                    <a:uFillTx/>
                     <a:latin typeface="Meiryo UI"/>
                     <a:ea typeface="Meiryo UI"/>
                   </a:rPr>
-                  <a:t>-1 </a:t>
+                  <a:t>1 </a:t>
                 </a:r>
                 <a:r>
-                  <a:rPr kumimoji="0" lang="ja-JP" altLang="en-US" sz="424" b="1" kern="0">
+                  <a:rPr kumimoji="0" lang="ja-JP" altLang="en-US" sz="515" b="1" i="0" u="none" strike="noStrike" kern="0" cap="none" spc="0" normalizeH="0" baseline="0">
+                    <a:ln>
+                      <a:noFill/>
+                    </a:ln>
                     <a:solidFill>
                       <a:srgbClr val="111111"/>
                     </a:solidFill>
+                    <a:effectLst/>
+                    <a:uLnTx/>
+                    <a:uFillTx/>
                     <a:latin typeface="Meiryo UI"/>
                     <a:ea typeface="Meiryo UI"/>
                   </a:rPr>
@@ -14935,7 +15420,7 @@
           </p:sp>
           <p:pic>
             <p:nvPicPr>
-              <p:cNvPr id="72" name="図 71" descr="Actor | UML Use Case">
+              <p:cNvPr id="175" name="図 174" descr="Actor | UML Use Case">
                 <a:extLst>
                   <a:ext uri="{FF2B5EF4-FFF2-40B4-BE49-F238E27FC236}">
                     <a16:creationId xmlns:a16="http://schemas.microsoft.com/office/drawing/2014/main" id="{3FA313EF-90BA-2E43-53DE-B8602273FBFA}"/>
@@ -14983,7 +15468,7 @@
         </p:grpSp>
         <p:sp>
           <p:nvSpPr>
-            <p:cNvPr id="55" name="edge_label_d512_04_APP_APP_COORD_PROCESS_to_HOST_HOST_SERVICE_RUNTIME">
+            <p:cNvPr id="158" name="edge_label_d512_04_APP_APP_COORD_PROCESS_to_HOST_HOST_SERVICE_RUNTIME">
               <a:extLst>
                 <a:ext uri="{FF2B5EF4-FFF2-40B4-BE49-F238E27FC236}">
                   <a16:creationId xmlns:a16="http://schemas.microsoft.com/office/drawing/2014/main" id="{142A79A2-0025-86D8-91CD-0DA2091B232D}"/>
@@ -14995,7 +15480,7 @@
           </p:nvSpPr>
           <p:spPr>
             <a:xfrm>
-              <a:off x="4410127" y="2699155"/>
+              <a:off x="3330627" y="4845454"/>
               <a:ext cx="554576" cy="149986"/>
             </a:xfrm>
             <a:prstGeom prst="rect">
@@ -15011,7 +15496,7 @@
             </a:ln>
           </p:spPr>
           <p:txBody>
-            <a:bodyPr vert="horz" wrap="square" lIns="26918" tIns="10767" rIns="26918" bIns="10767" rtlCol="0" anchor="ctr">
+            <a:bodyPr vert="horz" wrap="square" lIns="32710" tIns="13084" rIns="32710" bIns="13084" rtlCol="0" anchor="ctr">
               <a:noAutofit/>
             </a:bodyPr>
             <a:lstStyle>
@@ -15112,20 +15597,32 @@
             <a:p>
               <a:pPr algn="ctr"/>
               <a:r>
-                <a:rPr kumimoji="0" lang="en-US" altLang="ja-JP" sz="381" kern="0">
+                <a:rPr kumimoji="0" lang="en-US" altLang="ja-JP" sz="463" b="0" i="0" u="none" strike="noStrike" kern="0" cap="none" spc="0" normalizeH="0" baseline="0">
+                  <a:ln>
+                    <a:noFill/>
+                  </a:ln>
                   <a:solidFill>
                     <a:srgbClr val="000000"/>
                   </a:solidFill>
+                  <a:effectLst/>
+                  <a:uLnTx/>
+                  <a:uFillTx/>
                   <a:latin typeface="Meiryo UI"/>
                   <a:ea typeface="Meiryo UI"/>
                 </a:rPr>
                 <a:t>OS</a:t>
               </a:r>
               <a:r>
-                <a:rPr kumimoji="0" lang="ja-JP" altLang="en-US" sz="381" kern="0">
+                <a:rPr kumimoji="0" lang="ja-JP" altLang="en-US" sz="463" b="0" i="0" u="none" strike="noStrike" kern="0" cap="none" spc="0" normalizeH="0" baseline="0">
+                  <a:ln>
+                    <a:noFill/>
+                  </a:ln>
                   <a:solidFill>
                     <a:srgbClr val="000000"/>
                   </a:solidFill>
+                  <a:effectLst/>
+                  <a:uLnTx/>
+                  <a:uFillTx/>
                   <a:latin typeface="Meiryo UI"/>
                   <a:ea typeface="Meiryo UI"/>
                 </a:rPr>
@@ -15136,7 +15633,7 @@
         </p:sp>
         <p:sp>
           <p:nvSpPr>
-            <p:cNvPr id="56" name="edge_label_d512_06_HOST_HOST_SERVICE_EVENT_to_APP_APP_ACCESS_RESULT">
+            <p:cNvPr id="159" name="edge_label_d512_06_HOST_HOST_SERVICE_EVENT_to_APP_APP_ACCESS_RESULT">
               <a:extLst>
                 <a:ext uri="{FF2B5EF4-FFF2-40B4-BE49-F238E27FC236}">
                   <a16:creationId xmlns:a16="http://schemas.microsoft.com/office/drawing/2014/main" id="{77E71629-E26B-C782-32DB-2C4477E960B1}"/>
@@ -15148,7 +15645,7 @@
           </p:nvSpPr>
           <p:spPr>
             <a:xfrm>
-              <a:off x="3049285" y="3497654"/>
+              <a:off x="1969785" y="5643953"/>
               <a:ext cx="734003" cy="183942"/>
             </a:xfrm>
             <a:prstGeom prst="rect">
@@ -15164,7 +15661,7 @@
             </a:ln>
           </p:spPr>
           <p:txBody>
-            <a:bodyPr vert="horz" wrap="square" lIns="26918" tIns="10767" rIns="26918" bIns="10767" rtlCol="0" anchor="ctr">
+            <a:bodyPr vert="horz" wrap="square" lIns="32710" tIns="13084" rIns="32710" bIns="13084" rtlCol="0" anchor="ctr">
               <a:noAutofit/>
             </a:bodyPr>
             <a:lstStyle>
@@ -15265,13 +15762,16 @@
             <a:p>
               <a:pPr algn="ctr"/>
               <a:r>
-                <a:rPr lang="ja-JP" altLang="ja-JP" sz="466">
+                <a:rPr lang="ja-JP" altLang="ja-JP" sz="566" b="0" i="0" baseline="0">
+                  <a:effectLst/>
                   <a:latin typeface="Meiryo UI" panose="020B0604030504040204" pitchFamily="50" charset="-128"/>
                   <a:ea typeface="Meiryo UI" panose="020B0604030504040204" pitchFamily="50" charset="-128"/>
+                  <a:cs typeface="+mn-cs"/>
                 </a:rPr>
                 <a:t>デバイス処理結果</a:t>
               </a:r>
-              <a:endParaRPr lang="ja-JP" altLang="ja-JP" sz="381">
+              <a:endParaRPr lang="ja-JP" altLang="ja-JP" sz="463">
+                <a:effectLst/>
                 <a:latin typeface="Meiryo UI" panose="020B0604030504040204" pitchFamily="50" charset="-128"/>
                 <a:ea typeface="Meiryo UI" panose="020B0604030504040204" pitchFamily="50" charset="-128"/>
               </a:endParaRPr>
@@ -15280,7 +15780,7 @@
         </p:sp>
         <p:grpSp>
           <p:nvGrpSpPr>
-            <p:cNvPr id="57" name="グループ化 56">
+            <p:cNvPr id="160" name="グループ化 159">
               <a:extLst>
                 <a:ext uri="{FF2B5EF4-FFF2-40B4-BE49-F238E27FC236}">
                   <a16:creationId xmlns:a16="http://schemas.microsoft.com/office/drawing/2014/main" id="{C8FAE033-B051-AC04-0C18-A7CB1A25299D}"/>
@@ -15292,7 +15792,7 @@
           </p:nvGrpSpPr>
           <p:grpSpPr>
             <a:xfrm>
-              <a:off x="6844817" y="6435017"/>
+              <a:off x="5765317" y="8581316"/>
               <a:ext cx="1507728" cy="1021717"/>
               <a:chOff x="5511913" y="8324536"/>
               <a:chExt cx="2528047" cy="2268071"/>
@@ -15300,7 +15800,7 @@
           </p:grpSpPr>
           <p:sp>
             <p:nvSpPr>
-              <p:cNvPr id="69" name="shape_d512_DEVICE_DISPLAY" title="③ カスタマーディスプレイ（SHARP）">
+              <p:cNvPr id="172" name="shape_d512_DEVICE_DISPLAY" title="③ カスタマーディスプレイ（SHARP）">
                 <a:extLst>
                   <a:ext uri="{FF2B5EF4-FFF2-40B4-BE49-F238E27FC236}">
                     <a16:creationId xmlns:a16="http://schemas.microsoft.com/office/drawing/2014/main" id="{12E66C84-CC66-ED27-22E0-EBE74046CE69}"/>
@@ -15346,7 +15846,7 @@
               </a:fontRef>
             </p:style>
             <p:txBody>
-              <a:bodyPr wrap="square" lIns="32301" tIns="16151" rIns="32301" bIns="16151" rtlCol="0" anchor="t">
+              <a:bodyPr wrap="square" lIns="39252" tIns="19626" rIns="39252" bIns="19626" rtlCol="0" anchor="t">
                 <a:noAutofit/>
               </a:bodyPr>
               <a:lstStyle>
@@ -15447,30 +15947,48 @@
               <a:p>
                 <a:pPr algn="ctr"/>
                 <a:r>
-                  <a:rPr kumimoji="0" lang="ja-JP" altLang="en-US" sz="381" b="1" kern="0">
+                  <a:rPr kumimoji="0" lang="ja-JP" altLang="en-US" sz="463" b="1" i="0" u="none" strike="noStrike" kern="0" cap="none" spc="0" normalizeH="0" baseline="0">
+                    <a:ln>
+                      <a:noFill/>
+                    </a:ln>
                     <a:solidFill>
                       <a:srgbClr val="111111"/>
                     </a:solidFill>
+                    <a:effectLst/>
+                    <a:uLnTx/>
+                    <a:uFillTx/>
                     <a:latin typeface="Meiryo UI"/>
                     <a:ea typeface="Meiryo UI"/>
                   </a:rPr>
-                  <a:t>(4) 決済端末（</a:t>
+                  <a:t>3.4 決済端末（</a:t>
                 </a:r>
                 <a:r>
-                  <a:rPr kumimoji="0" lang="en-US" altLang="ja-JP" sz="381" b="1" kern="0">
+                  <a:rPr kumimoji="0" lang="en-US" altLang="ja-JP" sz="463" b="1" i="0" u="none" strike="noStrike" kern="0" cap="none" spc="0" normalizeH="0" baseline="0">
+                    <a:ln>
+                      <a:noFill/>
+                    </a:ln>
                     <a:solidFill>
                       <a:srgbClr val="111111"/>
                     </a:solidFill>
+                    <a:effectLst/>
+                    <a:uLnTx/>
+                    <a:uFillTx/>
                     <a:latin typeface="Meiryo UI"/>
                     <a:ea typeface="Meiryo UI"/>
                   </a:rPr>
                   <a:t>CAFIS Arch Saturn</a:t>
                 </a:r>
                 <a:r>
-                  <a:rPr kumimoji="0" lang="ja-JP" altLang="en-US" sz="381" b="1" kern="0">
+                  <a:rPr kumimoji="0" lang="ja-JP" altLang="en-US" sz="463" b="1" i="0" u="none" strike="noStrike" kern="0" cap="none" spc="0" normalizeH="0" baseline="0">
+                    <a:ln>
+                      <a:noFill/>
+                    </a:ln>
                     <a:solidFill>
                       <a:srgbClr val="111111"/>
                     </a:solidFill>
+                    <a:effectLst/>
+                    <a:uLnTx/>
+                    <a:uFillTx/>
                     <a:latin typeface="Meiryo UI"/>
                     <a:ea typeface="Meiryo UI"/>
                   </a:rPr>
@@ -15481,7 +15999,7 @@
           </p:sp>
           <p:pic>
             <p:nvPicPr>
-              <p:cNvPr id="70" name="図 69" descr="CAFISArch Saturn 1000 E | 日本決済情報センター">
+              <p:cNvPr id="173" name="図 172" descr="CAFISArch Saturn 1000 E | 日本決済情報センター">
                 <a:extLst>
                   <a:ext uri="{FF2B5EF4-FFF2-40B4-BE49-F238E27FC236}">
                     <a16:creationId xmlns:a16="http://schemas.microsoft.com/office/drawing/2014/main" id="{495DC4BB-6E8B-A100-AFA1-5BACE4AF68D2}"/>
@@ -15529,7 +16047,7 @@
         </p:grpSp>
         <p:cxnSp>
           <p:nvCxnSpPr>
-            <p:cNvPr id="58" name="edge_d512_03_DEVICE_DISPLAY_to_HOST_HOST_ADAPTER_ADAPTER" descr="制御／結果" title="制御／結果">
+            <p:cNvPr id="161" name="edge_d512_03_DEVICE_DISPLAY_to_HOST_HOST_ADAPTER_ADAPTER" descr="制御／結果" title="制御／結果">
               <a:extLst>
                 <a:ext uri="{FF2B5EF4-FFF2-40B4-BE49-F238E27FC236}">
                   <a16:creationId xmlns:a16="http://schemas.microsoft.com/office/drawing/2014/main" id="{FBA57668-BD8B-8682-BFC7-763FDFC43819}"/>
@@ -15538,14 +16056,14 @@
             </p:cNvPr>
             <p:cNvCxnSpPr>
               <a:cxnSpLocks/>
-              <a:stCxn id="69" idx="1"/>
-              <a:endCxn id="21" idx="3"/>
+              <a:stCxn id="172" idx="1"/>
+              <a:endCxn id="124" idx="3"/>
             </p:cNvCxnSpPr>
             <p:nvPr/>
           </p:nvCxnSpPr>
           <p:spPr>
             <a:xfrm rot="10800000" flipV="1">
-              <a:off x="5612424" y="7032790"/>
+              <a:off x="4532924" y="9179089"/>
               <a:ext cx="1233584" cy="171777"/>
             </a:xfrm>
             <a:prstGeom prst="bentConnector3">
@@ -15581,7 +16099,7 @@
         </p:cxnSp>
         <p:cxnSp>
           <p:nvCxnSpPr>
-            <p:cNvPr id="59" name="edge_d512_06_HOST_HOST_SERVICE_EVENT_to_APP_APP_ACCESS_RESULT" descr="イベント通知用パイプ&#10;非同期イベント" title="イベント通知用パイプ&#10;非同期イベント">
+            <p:cNvPr id="162" name="edge_d512_06_HOST_HOST_SERVICE_EVENT_to_APP_APP_ACCESS_RESULT" descr="イベント通知用パイプ&#10;非同期イベント" title="イベント通知用パイプ&#10;非同期イベント">
               <a:extLst>
                 <a:ext uri="{FF2B5EF4-FFF2-40B4-BE49-F238E27FC236}">
                   <a16:creationId xmlns:a16="http://schemas.microsoft.com/office/drawing/2014/main" id="{14EF4F07-AC7B-D135-D1E0-9F24C638545A}"/>
@@ -15590,14 +16108,14 @@
             </p:cNvPr>
             <p:cNvCxnSpPr>
               <a:cxnSpLocks/>
-              <a:stCxn id="25" idx="1"/>
-              <a:endCxn id="20" idx="2"/>
+              <a:stCxn id="128" idx="1"/>
+              <a:endCxn id="123" idx="2"/>
             </p:cNvCxnSpPr>
             <p:nvPr/>
           </p:nvCxnSpPr>
           <p:spPr>
             <a:xfrm rot="10800000" flipV="1">
-              <a:off x="2601059" y="4549237"/>
+              <a:off x="1521559" y="6695536"/>
               <a:ext cx="2526904" cy="339737"/>
             </a:xfrm>
             <a:prstGeom prst="bentConnector4">
@@ -15633,7 +16151,7 @@
         </p:cxnSp>
         <p:sp>
           <p:nvSpPr>
-            <p:cNvPr id="60" name="edge_label_d512_06_HOST_HOST_SERVICE_EVENT_to_APP_APP_ACCESS_RESULT">
+            <p:cNvPr id="163" name="edge_label_d512_06_HOST_HOST_SERVICE_EVENT_to_APP_APP_ACCESS_RESULT">
               <a:extLst>
                 <a:ext uri="{FF2B5EF4-FFF2-40B4-BE49-F238E27FC236}">
                   <a16:creationId xmlns:a16="http://schemas.microsoft.com/office/drawing/2014/main" id="{2A8D83E1-2D96-3613-B3E5-6CEA096AB1F2}"/>
@@ -15645,7 +16163,7 @@
           </p:nvSpPr>
           <p:spPr>
             <a:xfrm>
-              <a:off x="3124752" y="5004122"/>
+              <a:off x="2045252" y="7150421"/>
               <a:ext cx="655361" cy="171672"/>
             </a:xfrm>
             <a:prstGeom prst="rect">
@@ -15661,7 +16179,7 @@
             </a:ln>
           </p:spPr>
           <p:txBody>
-            <a:bodyPr vert="horz" wrap="square" lIns="26918" tIns="10767" rIns="26918" bIns="10767" rtlCol="0" anchor="ctr">
+            <a:bodyPr vert="horz" wrap="square" lIns="32710" tIns="13084" rIns="32710" bIns="13084" rtlCol="0" anchor="ctr">
               <a:noAutofit/>
             </a:bodyPr>
             <a:lstStyle>
@@ -15762,10 +16280,16 @@
             <a:p>
               <a:pPr algn="ctr"/>
               <a:r>
-                <a:rPr kumimoji="0" lang="ja-JP" altLang="en-US" sz="381" kern="0">
+                <a:rPr kumimoji="0" lang="ja-JP" altLang="en-US" sz="463" b="0" i="0" u="none" strike="noStrike" kern="0" cap="none" spc="0" normalizeH="0" baseline="0">
+                  <a:ln>
+                    <a:noFill/>
+                  </a:ln>
                   <a:solidFill>
                     <a:srgbClr val="000000"/>
                   </a:solidFill>
+                  <a:effectLst/>
+                  <a:uLnTx/>
+                  <a:uFillTx/>
                   <a:latin typeface="Meiryo UI"/>
                   <a:ea typeface="Meiryo UI"/>
                 </a:rPr>
@@ -15777,7 +16301,7 @@
         </p:sp>
         <p:sp>
           <p:nvSpPr>
-            <p:cNvPr id="61" name="shape_d512_APP_APP_ACCESS_CONTRACT" title="②-3 結果・イベント連携">
+            <p:cNvPr id="164" name="shape_d512_APP_APP_ACCESS_CONTRACT" title="②-3 結果・イベント連携">
               <a:extLst>
                 <a:ext uri="{FF2B5EF4-FFF2-40B4-BE49-F238E27FC236}">
                   <a16:creationId xmlns:a16="http://schemas.microsoft.com/office/drawing/2014/main" id="{71A1E1CC-B109-4DB5-8906-136023029A83}"/>
@@ -15789,7 +16313,7 @@
           </p:nvSpPr>
           <p:spPr>
             <a:xfrm>
-              <a:off x="1532739" y="4416896"/>
+              <a:off x="453239" y="6563195"/>
               <a:ext cx="935253" cy="254437"/>
             </a:xfrm>
             <a:prstGeom prst="roundRect">
@@ -15823,7 +16347,7 @@
             </a:fontRef>
           </p:style>
           <p:txBody>
-            <a:bodyPr wrap="square" lIns="32301" tIns="16151" rIns="32301" bIns="16151" rtlCol="0" anchor="ctr">
+            <a:bodyPr wrap="square" lIns="39252" tIns="19626" rIns="39252" bIns="19626" rtlCol="0" anchor="ctr">
               <a:noAutofit/>
             </a:bodyPr>
             <a:lstStyle>
@@ -15924,19 +16448,31 @@
             <a:p>
               <a:pPr algn="ctr"/>
               <a:r>
-                <a:rPr kumimoji="0" lang="ja-JP" altLang="en-US" sz="344" b="1" kern="0">
+                <a:rPr kumimoji="0" lang="ja-JP" altLang="en-US" sz="418" b="1" i="0" u="none" strike="noStrike" kern="0" cap="none" spc="0" normalizeH="0" baseline="0">
+                  <a:ln>
+                    <a:noFill/>
+                  </a:ln>
                   <a:solidFill>
                     <a:srgbClr val="111111"/>
                   </a:solidFill>
+                  <a:effectLst/>
+                  <a:uLnTx/>
+                  <a:uFillTx/>
                   <a:latin typeface="Meiryo UI"/>
                   <a:ea typeface="Meiryo UI"/>
                 </a:rPr>
-                <a:t>(2)-5 共通デバイス通信契約　Pos.DeviceContracts</a:t>
+                <a:t>1.2.5 共通デバイス通信契約　Pos.DeviceContracts</a:t>
               </a:r>
-              <a:endParaRPr kumimoji="0" lang="en-US" altLang="ja-JP" sz="344" b="1" kern="0">
+              <a:endParaRPr kumimoji="0" lang="en-US" altLang="ja-JP" sz="418" b="1" i="0" u="none" strike="noStrike" kern="0" cap="none" spc="0" normalizeH="0" baseline="0">
+                <a:ln>
+                  <a:noFill/>
+                </a:ln>
                 <a:solidFill>
                   <a:srgbClr val="111111"/>
                 </a:solidFill>
+                <a:effectLst/>
+                <a:uLnTx/>
+                <a:uFillTx/>
                 <a:latin typeface="Meiryo UI"/>
                 <a:ea typeface="Meiryo UI"/>
               </a:endParaRPr>
@@ -15944,10 +16480,16 @@
             <a:p>
               <a:pPr algn="ctr"/>
               <a:r>
-                <a:rPr kumimoji="0" lang="ja-JP" altLang="en-US" sz="344" b="1" kern="0">
+                <a:rPr kumimoji="0" lang="ja-JP" altLang="en-US" sz="418" b="1" i="0" u="none" strike="noStrike" kern="0" cap="none" spc="0" normalizeH="0" baseline="0">
+                  <a:ln>
+                    <a:noFill/>
+                  </a:ln>
                   <a:solidFill>
                     <a:srgbClr val="111111"/>
                   </a:solidFill>
+                  <a:effectLst/>
+                  <a:uLnTx/>
+                  <a:uFillTx/>
                   <a:latin typeface="Meiryo UI"/>
                   <a:ea typeface="Meiryo UI"/>
                 </a:rPr>
@@ -15958,7 +16500,7 @@
         </p:sp>
         <p:cxnSp>
           <p:nvCxnSpPr>
-            <p:cNvPr id="62" name="edge_d512_command_to_contract_sync">
+            <p:cNvPr id="165" name="edge_d512_command_to_contract_sync">
               <a:extLst>
                 <a:ext uri="{FF2B5EF4-FFF2-40B4-BE49-F238E27FC236}">
                   <a16:creationId xmlns:a16="http://schemas.microsoft.com/office/drawing/2014/main" id="{AE02EAC5-78DE-99AD-CBFC-CC18B680DC11}"/>
@@ -15967,14 +16509,14 @@
             </p:cNvPr>
             <p:cNvCxnSpPr>
               <a:cxnSpLocks/>
-              <a:stCxn id="24" idx="1"/>
-              <a:endCxn id="61" idx="0"/>
+              <a:stCxn id="127" idx="1"/>
+              <a:endCxn id="164" idx="0"/>
             </p:cNvCxnSpPr>
             <p:nvPr/>
           </p:nvCxnSpPr>
           <p:spPr>
             <a:xfrm rot="10800000" flipV="1">
-              <a:off x="1994017" y="4230937"/>
+              <a:off x="914517" y="6377236"/>
               <a:ext cx="223603" cy="185959"/>
             </a:xfrm>
             <a:prstGeom prst="bentConnector2">
@@ -16005,7 +16547,7 @@
         </p:cxnSp>
         <p:sp>
           <p:nvSpPr>
-            <p:cNvPr id="63" name="shape_comment_d512_APP_APP_COORD_PROCESS">
+            <p:cNvPr id="166" name="shape_comment_d512_APP_APP_COORD_PROCESS">
               <a:extLst>
                 <a:ext uri="{FF2B5EF4-FFF2-40B4-BE49-F238E27FC236}">
                   <a16:creationId xmlns:a16="http://schemas.microsoft.com/office/drawing/2014/main" id="{C20B8041-203B-17C1-B00C-1FB8C059956D}"/>
@@ -16017,7 +16559,7 @@
           </p:nvSpPr>
           <p:spPr>
             <a:xfrm>
-              <a:off x="2836833" y="5376420"/>
+              <a:off x="1757333" y="7522719"/>
               <a:ext cx="962268" cy="579875"/>
             </a:xfrm>
             <a:prstGeom prst="wedgeRoundRectCallout">
@@ -16057,7 +16599,7 @@
             </a:fontRef>
           </p:style>
           <p:txBody>
-            <a:bodyPr wrap="square" lIns="37685" tIns="21534" rIns="37685" bIns="21534" rtlCol="0" anchor="ctr"/>
+            <a:bodyPr wrap="square" lIns="45794" tIns="26168" rIns="45794" bIns="26168" rtlCol="0" anchor="ctr"/>
             <a:lstStyle>
               <a:defPPr>
                 <a:defRPr lang="en-US"/>
@@ -16156,10 +16698,16 @@
             <a:p>
               <a:pPr algn="l"/>
               <a:r>
-                <a:rPr kumimoji="0" lang="ja-JP" altLang="en-US" sz="339" kern="0">
+                <a:rPr kumimoji="0" lang="ja-JP" altLang="en-US" sz="412" b="0" i="0" u="none" strike="noStrike" kern="0" cap="none" spc="0" normalizeH="0" baseline="0">
+                  <a:ln>
+                    <a:noFill/>
+                  </a:ln>
                   <a:solidFill>
                     <a:srgbClr val="404040"/>
                   </a:solidFill>
+                  <a:effectLst/>
+                  <a:uLnTx/>
+                  <a:uFillTx/>
                   <a:latin typeface="Meiryo UI"/>
                   <a:ea typeface="Meiryo UI"/>
                 </a:rPr>
@@ -16169,30 +16717,48 @@
             <a:p>
               <a:pPr algn="l"/>
               <a:r>
-                <a:rPr kumimoji="0" lang="ja-JP" altLang="en-US" sz="339" kern="0">
+                <a:rPr kumimoji="0" lang="ja-JP" altLang="en-US" sz="412" b="0" i="0" u="none" strike="noStrike" kern="0" cap="none" spc="0" normalizeH="0" baseline="0">
+                  <a:ln>
+                    <a:noFill/>
+                  </a:ln>
                   <a:solidFill>
                     <a:srgbClr val="404040"/>
                   </a:solidFill>
+                  <a:effectLst/>
+                  <a:uLnTx/>
+                  <a:uFillTx/>
                   <a:latin typeface="Meiryo UI"/>
                   <a:ea typeface="Meiryo UI"/>
                 </a:rPr>
                 <a:t>デバイス</a:t>
               </a:r>
               <a:r>
-                <a:rPr kumimoji="0" lang="en-US" altLang="ja-JP" sz="339" kern="0">
+                <a:rPr kumimoji="0" lang="en-US" altLang="ja-JP" sz="412" b="0" i="0" u="none" strike="noStrike" kern="0" cap="none" spc="0" normalizeH="0" baseline="0">
+                  <a:ln>
+                    <a:noFill/>
+                  </a:ln>
                   <a:solidFill>
                     <a:srgbClr val="404040"/>
                   </a:solidFill>
+                  <a:effectLst/>
+                  <a:uLnTx/>
+                  <a:uFillTx/>
                   <a:latin typeface="Meiryo UI"/>
                   <a:ea typeface="Meiryo UI"/>
                 </a:rPr>
                 <a:t>ID</a:t>
               </a:r>
               <a:r>
-                <a:rPr kumimoji="0" lang="ja-JP" altLang="en-US" sz="339" kern="0">
+                <a:rPr kumimoji="0" lang="ja-JP" altLang="en-US" sz="412" b="0" i="0" u="none" strike="noStrike" kern="0" cap="none" spc="0" normalizeH="0" baseline="0">
+                  <a:ln>
+                    <a:noFill/>
+                  </a:ln>
                   <a:solidFill>
                     <a:srgbClr val="404040"/>
                   </a:solidFill>
+                  <a:effectLst/>
+                  <a:uLnTx/>
+                  <a:uFillTx/>
                   <a:latin typeface="Meiryo UI"/>
                   <a:ea typeface="Meiryo UI"/>
                 </a:rPr>
@@ -16202,10 +16768,16 @@
             <a:p>
               <a:pPr algn="l"/>
               <a:r>
-                <a:rPr kumimoji="0" lang="ja-JP" altLang="en-US" sz="339" kern="0">
+                <a:rPr kumimoji="0" lang="ja-JP" altLang="en-US" sz="412" b="0" i="0" u="none" strike="noStrike" kern="0" cap="none" spc="0" normalizeH="0" baseline="0">
+                  <a:ln>
+                    <a:noFill/>
+                  </a:ln>
                   <a:solidFill>
                     <a:srgbClr val="404040"/>
                   </a:solidFill>
+                  <a:effectLst/>
+                  <a:uLnTx/>
+                  <a:uFillTx/>
                   <a:latin typeface="Meiryo UI"/>
                   <a:ea typeface="Meiryo UI"/>
                 </a:rPr>
@@ -16216,7 +16788,7 @@
         </p:sp>
         <p:sp>
           <p:nvSpPr>
-            <p:cNvPr id="64" name="shape_comment_d512_HOST_HOST_SERVICE_EVENT">
+            <p:cNvPr id="167" name="shape_comment_d512_HOST_HOST_SERVICE_EVENT">
               <a:extLst>
                 <a:ext uri="{FF2B5EF4-FFF2-40B4-BE49-F238E27FC236}">
                   <a16:creationId xmlns:a16="http://schemas.microsoft.com/office/drawing/2014/main" id="{966E1B51-D59F-7410-5141-46C163FB64C8}"/>
@@ -16228,7 +16800,7 @@
           </p:nvSpPr>
           <p:spPr>
             <a:xfrm>
-              <a:off x="3360145" y="2077566"/>
+              <a:off x="2280645" y="4223865"/>
               <a:ext cx="1040084" cy="573869"/>
             </a:xfrm>
             <a:prstGeom prst="wedgeRoundRectCallout">
@@ -16268,7 +16840,7 @@
             </a:fontRef>
           </p:style>
           <p:txBody>
-            <a:bodyPr wrap="square" lIns="37685" tIns="21534" rIns="37685" bIns="21534" rtlCol="0" anchor="ctr"/>
+            <a:bodyPr wrap="square" lIns="45794" tIns="26168" rIns="45794" bIns="26168" rtlCol="0" anchor="ctr"/>
             <a:lstStyle>
               <a:defPPr>
                 <a:defRPr lang="en-US"/>
@@ -16367,10 +16939,16 @@
             <a:p>
               <a:pPr algn="l"/>
               <a:r>
-                <a:rPr kumimoji="0" lang="ja-JP" altLang="en-US" sz="339" kern="0">
+                <a:rPr kumimoji="0" lang="ja-JP" altLang="en-US" sz="412" b="0" i="0" u="none" strike="noStrike" kern="0" cap="none" spc="0" normalizeH="0" baseline="0">
+                  <a:ln>
+                    <a:noFill/>
+                  </a:ln>
                   <a:solidFill>
                     <a:srgbClr val="404040"/>
                   </a:solidFill>
+                  <a:effectLst/>
+                  <a:uLnTx/>
+                  <a:uFillTx/>
                   <a:latin typeface="Meiryo UI"/>
                   <a:ea typeface="Meiryo UI"/>
                 </a:rPr>
@@ -16380,10 +16958,16 @@
             <a:p>
               <a:pPr algn="l"/>
               <a:r>
-                <a:rPr kumimoji="0" lang="ja-JP" altLang="en-US" sz="339" kern="0">
+                <a:rPr kumimoji="0" lang="ja-JP" altLang="en-US" sz="412" b="0" i="0" u="none" strike="noStrike" kern="0" cap="none" spc="0" normalizeH="0" baseline="0">
+                  <a:ln>
+                    <a:noFill/>
+                  </a:ln>
                   <a:solidFill>
                     <a:srgbClr val="404040"/>
                   </a:solidFill>
+                  <a:effectLst/>
+                  <a:uLnTx/>
+                  <a:uFillTx/>
                   <a:latin typeface="Meiryo UI"/>
                   <a:ea typeface="Meiryo UI"/>
                 </a:rPr>
@@ -16393,10 +16977,16 @@
             <a:p>
               <a:pPr algn="l"/>
               <a:r>
-                <a:rPr kumimoji="0" lang="ja-JP" altLang="en-US" sz="339" kern="0">
+                <a:rPr kumimoji="0" lang="ja-JP" altLang="en-US" sz="412" b="0" i="0" u="none" strike="noStrike" kern="0" cap="none" spc="0" normalizeH="0" baseline="0">
+                  <a:ln>
+                    <a:noFill/>
+                  </a:ln>
                   <a:solidFill>
                     <a:srgbClr val="404040"/>
                   </a:solidFill>
+                  <a:effectLst/>
+                  <a:uLnTx/>
+                  <a:uFillTx/>
                   <a:latin typeface="Meiryo UI"/>
                   <a:ea typeface="Meiryo UI"/>
                 </a:rPr>
@@ -16406,10 +16996,16 @@
             <a:p>
               <a:pPr algn="l"/>
               <a:r>
-                <a:rPr kumimoji="0" lang="ja-JP" altLang="en-US" sz="339" kern="0">
+                <a:rPr kumimoji="0" lang="ja-JP" altLang="en-US" sz="412" b="0" i="0" u="none" strike="noStrike" kern="0" cap="none" spc="0" normalizeH="0" baseline="0">
+                  <a:ln>
+                    <a:noFill/>
+                  </a:ln>
                   <a:solidFill>
                     <a:srgbClr val="404040"/>
                   </a:solidFill>
+                  <a:effectLst/>
+                  <a:uLnTx/>
+                  <a:uFillTx/>
                   <a:latin typeface="Meiryo UI"/>
                   <a:ea typeface="Meiryo UI"/>
                 </a:rPr>
@@ -16420,7 +17016,7 @@
         </p:sp>
         <p:cxnSp>
           <p:nvCxnSpPr>
-            <p:cNvPr id="65" name="edge_d512_03_DEVICE_DISPLAY_to_HOST_HOST_ADAPTER_ADAPTER" descr="制御／結果" title="制御／結果">
+            <p:cNvPr id="168" name="edge_d512_03_DEVICE_DISPLAY_to_HOST_HOST_ADAPTER_ADAPTER" descr="制御／結果" title="制御／結果">
               <a:extLst>
                 <a:ext uri="{FF2B5EF4-FFF2-40B4-BE49-F238E27FC236}">
                   <a16:creationId xmlns:a16="http://schemas.microsoft.com/office/drawing/2014/main" id="{5FACC5C1-1484-E3EF-D958-F8BD07436A98}"/>
@@ -16429,14 +17025,14 @@
             </p:cNvPr>
             <p:cNvCxnSpPr>
               <a:cxnSpLocks/>
-              <a:stCxn id="66" idx="1"/>
-              <a:endCxn id="21" idx="3"/>
+              <a:stCxn id="169" idx="1"/>
+              <a:endCxn id="124" idx="3"/>
             </p:cNvCxnSpPr>
             <p:nvPr/>
           </p:nvCxnSpPr>
           <p:spPr>
             <a:xfrm rot="10800000">
-              <a:off x="5612424" y="7204568"/>
+              <a:off x="4532924" y="9350867"/>
               <a:ext cx="1255966" cy="913799"/>
             </a:xfrm>
             <a:prstGeom prst="bentConnector3">
@@ -16472,7 +17068,7 @@
         </p:cxnSp>
         <p:sp>
           <p:nvSpPr>
-            <p:cNvPr id="66" name="shape_d512_DEVICE_DISPLAY" title="③ カスタマーディスプレイ（SHARP）">
+            <p:cNvPr id="169" name="shape_d512_DEVICE_DISPLAY" title="③ カスタマーディスプレイ（SHARP）">
               <a:extLst>
                 <a:ext uri="{FF2B5EF4-FFF2-40B4-BE49-F238E27FC236}">
                   <a16:creationId xmlns:a16="http://schemas.microsoft.com/office/drawing/2014/main" id="{5E39003A-8BFF-32A6-0B26-546D26399216}"/>
@@ -16484,7 +17080,7 @@
           </p:nvSpPr>
           <p:spPr>
             <a:xfrm>
-              <a:off x="6868390" y="7605127"/>
+              <a:off x="5788890" y="9751426"/>
               <a:ext cx="1498203" cy="1026479"/>
             </a:xfrm>
             <a:prstGeom prst="roundRect">
@@ -16518,7 +17114,7 @@
             </a:fontRef>
           </p:style>
           <p:txBody>
-            <a:bodyPr wrap="square" lIns="32301" tIns="16151" rIns="32301" bIns="16151" rtlCol="0" anchor="t">
+            <a:bodyPr wrap="square" lIns="39252" tIns="19626" rIns="39252" bIns="19626" rtlCol="0" anchor="t">
               <a:noAutofit/>
             </a:bodyPr>
             <a:lstStyle>
@@ -16619,17 +17215,17 @@
             <a:p>
               <a:pPr algn="ctr"/>
               <a:r>
-                <a:rPr lang="ja-JP" altLang="en-US" sz="405" b="1" kern="0">
+                <a:rPr lang="ja-JP" altLang="en-US" sz="492" b="1" kern="0">
                   <a:solidFill>
                     <a:srgbClr val="111111"/>
                   </a:solidFill>
                   <a:latin typeface="Meiryo UI"/>
                   <a:ea typeface="Meiryo UI"/>
                 </a:rPr>
-                <a:t>(5) レシートプリンター（</a:t>
+                <a:t>3.5 レシートプリンター（</a:t>
               </a:r>
               <a:r>
-                <a:rPr lang="en-US" altLang="ja-JP" sz="405" b="1" kern="0">
+                <a:rPr lang="en-US" altLang="ja-JP" sz="492" b="1" kern="0">
                   <a:solidFill>
                     <a:srgbClr val="111111"/>
                   </a:solidFill>
@@ -16639,7 +17235,7 @@
                 <a:t>SHARP 80mm</a:t>
               </a:r>
               <a:r>
-                <a:rPr lang="ja-JP" altLang="en-US" sz="405" b="1" kern="0">
+                <a:rPr lang="ja-JP" altLang="en-US" sz="492" b="1" kern="0">
                   <a:solidFill>
                     <a:srgbClr val="111111"/>
                   </a:solidFill>
@@ -16653,7 +17249,7 @@
         </p:sp>
         <p:pic>
           <p:nvPicPr>
-            <p:cNvPr id="67" name="Picture 2" descr="EPSON レシートプリンター/80mm・58mm/電源同梱/ホワイト TM302-611W">
+            <p:cNvPr id="170" name="Picture 2" descr="EPSON レシートプリンター/80mm・58mm/電源同梱/ホワイト TM302-611W">
               <a:extLst>
                 <a:ext uri="{FF2B5EF4-FFF2-40B4-BE49-F238E27FC236}">
                   <a16:creationId xmlns:a16="http://schemas.microsoft.com/office/drawing/2014/main" id="{29C61264-567A-B42E-CBE2-F504312FFE7D}"/>
@@ -16680,7 +17276,7 @@
           </p:blipFill>
           <p:spPr bwMode="auto">
             <a:xfrm>
-              <a:off x="7316070" y="7852749"/>
+              <a:off x="6236570" y="9999048"/>
               <a:ext cx="620266" cy="629107"/>
             </a:xfrm>
             <a:prstGeom prst="rect">
@@ -16700,7 +17296,7 @@
         </p:pic>
         <p:sp>
           <p:nvSpPr>
-            <p:cNvPr id="68" name="edge_label_d512_02_DEVICE_DRAWER_to_HOST_HOST_ADAPTER_ADAPTER">
+            <p:cNvPr id="171" name="edge_label_d512_02_DEVICE_DRAWER_to_HOST_HOST_ADAPTER_ADAPTER">
               <a:extLst>
                 <a:ext uri="{FF2B5EF4-FFF2-40B4-BE49-F238E27FC236}">
                   <a16:creationId xmlns:a16="http://schemas.microsoft.com/office/drawing/2014/main" id="{1A25EA96-20F4-6BC4-C981-2477153466DF}"/>
@@ -16712,7 +17308,7 @@
           </p:nvSpPr>
           <p:spPr>
             <a:xfrm>
-              <a:off x="6108295" y="7017295"/>
+              <a:off x="5028795" y="9163594"/>
               <a:ext cx="436162" cy="120696"/>
             </a:xfrm>
             <a:prstGeom prst="rect">
@@ -16728,7 +17324,7 @@
             </a:ln>
           </p:spPr>
           <p:txBody>
-            <a:bodyPr vert="horz" wrap="square" lIns="26918" tIns="10767" rIns="26918" bIns="10767" rtlCol="0" anchor="ctr">
+            <a:bodyPr vert="horz" wrap="square" lIns="32710" tIns="13084" rIns="32710" bIns="13084" rtlCol="0" anchor="ctr">
               <a:noAutofit/>
             </a:bodyPr>
             <a:lstStyle>
@@ -16829,10 +17425,16 @@
             <a:p>
               <a:pPr algn="ctr"/>
               <a:r>
-                <a:rPr kumimoji="0" lang="ja-JP" altLang="en-US" sz="381" kern="0">
+                <a:rPr kumimoji="0" lang="ja-JP" altLang="en-US" sz="463" b="0" i="0" u="none" strike="noStrike" kern="0" cap="none" spc="0" normalizeH="0" baseline="0">
+                  <a:ln>
+                    <a:noFill/>
+                  </a:ln>
                   <a:solidFill>
                     <a:srgbClr val="000000"/>
                   </a:solidFill>
+                  <a:effectLst/>
+                  <a:uLnTx/>
+                  <a:uFillTx/>
                   <a:latin typeface="Meiryo UI"/>
                   <a:ea typeface="Meiryo UI"/>
                 </a:rPr>
@@ -16874,7 +17476,7 @@
       </p:grpSpPr>
       <p:grpSp>
         <p:nvGrpSpPr>
-          <p:cNvPr id="2" name="ImportedDiagram_slide_3">
+          <p:cNvPr id="69" name="ImportedDiagram_slide_3">
             <a:extLst>
               <a:ext uri="{FF2B5EF4-FFF2-40B4-BE49-F238E27FC236}">
                 <a16:creationId xmlns:a16="http://schemas.microsoft.com/office/drawing/2014/main" id="{31F26D00-46F2-45D6-A318-9FA3CC03DDDC}"/>
@@ -16888,15 +17490,15 @@
         </p:nvGrpSpPr>
         <p:grpSpPr>
           <a:xfrm>
-            <a:off x="254000" y="254000"/>
-            <a:ext cx="7838281" cy="4320812"/>
+            <a:off x="76200" y="2851985"/>
+            <a:ext cx="9880600" cy="5446630"/>
             <a:chOff x="0" y="0"/>
             <a:chExt cx="19531150" cy="10653225"/>
           </a:xfrm>
         </p:grpSpPr>
         <p:sp>
           <p:nvSpPr>
-            <p:cNvPr id="3" name="frame_0">
+            <p:cNvPr id="70" name="frame_0">
               <a:extLst>
                 <a:ext uri="{FF2B5EF4-FFF2-40B4-BE49-F238E27FC236}">
                   <a16:creationId xmlns:a16="http://schemas.microsoft.com/office/drawing/2014/main" id="{7C799600-8B58-95DA-007D-6EF0F09E7C19}"/>
@@ -17021,13 +17623,13 @@
               </a:lvl9pPr>
             </a:lstStyle>
             <a:p>
-              <a:endParaRPr lang="ja-JP" altLang="en-US" sz="1481"/>
+              <a:endParaRPr lang="ja-JP" altLang="en-US"/>
             </a:p>
           </p:txBody>
         </p:sp>
         <p:sp>
           <p:nvSpPr>
-            <p:cNvPr id="4" name="frame_title_0">
+            <p:cNvPr id="71" name="frame_title_0">
               <a:extLst>
                 <a:ext uri="{FF2B5EF4-FFF2-40B4-BE49-F238E27FC236}">
                   <a16:creationId xmlns:a16="http://schemas.microsoft.com/office/drawing/2014/main" id="{46047D03-B1E9-0334-C920-33BF0A4EC8BA}"/>
@@ -17039,8 +17641,8 @@
           </p:nvSpPr>
           <p:spPr>
             <a:xfrm>
-              <a:off x="1598978" y="94973"/>
-              <a:ext cx="1890058" cy="249290"/>
+              <a:off x="1598976" y="48804"/>
+              <a:ext cx="1890058" cy="341628"/>
             </a:xfrm>
             <a:prstGeom prst="rect">
               <a:avLst/>
@@ -17053,7 +17655,7 @@
             </a:ln>
           </p:spPr>
           <p:txBody>
-            <a:bodyPr wrap="square" lIns="15422" tIns="7711" rIns="15422" bIns="7711" anchor="ctr">
+            <a:bodyPr wrap="square" lIns="18741" tIns="9370" rIns="18741" bIns="9370" anchor="ctr">
               <a:spAutoFit/>
             </a:bodyPr>
             <a:lstStyle>
@@ -17154,7 +17756,7 @@
             <a:p>
               <a:pPr algn="ctr"/>
               <a:r>
-                <a:rPr lang="ja-JP" altLang="en-US" sz="556" b="1">
+                <a:rPr lang="ja-JP" sz="676" b="1">
                   <a:solidFill>
                     <a:srgbClr val="2E75B6"/>
                   </a:solidFill>
@@ -17162,36 +17764,14 @@
                   <a:ea typeface="Meiryo UI"/>
                   <a:cs typeface="Meiryo UI"/>
                 </a:rPr>
-                <a:t>（</a:t>
-              </a:r>
-              <a:r>
-                <a:rPr lang="en-US" altLang="ja-JP" sz="556" b="1">
-                  <a:solidFill>
-                    <a:srgbClr val="2E75B6"/>
-                  </a:solidFill>
-                  <a:latin typeface="Meiryo UI"/>
-                  <a:ea typeface="Meiryo UI"/>
-                  <a:cs typeface="Meiryo UI"/>
-                </a:rPr>
-                <a:t>1</a:t>
-              </a:r>
-              <a:r>
-                <a:rPr lang="ja-JP" altLang="en-US" sz="556" b="1">
-                  <a:solidFill>
-                    <a:srgbClr val="2E75B6"/>
-                  </a:solidFill>
-                  <a:latin typeface="Meiryo UI"/>
-                  <a:ea typeface="Meiryo UI"/>
-                  <a:cs typeface="Meiryo UI"/>
-                </a:rPr>
-                <a:t>）起動フェーズ</a:t>
+                <a:t>1 起動フェーズ</a:t>
               </a:r>
             </a:p>
           </p:txBody>
         </p:sp>
         <p:sp>
           <p:nvSpPr>
-            <p:cNvPr id="5" name="frame_1">
+            <p:cNvPr id="72" name="frame_1">
               <a:extLst>
                 <a:ext uri="{FF2B5EF4-FFF2-40B4-BE49-F238E27FC236}">
                   <a16:creationId xmlns:a16="http://schemas.microsoft.com/office/drawing/2014/main" id="{9EF6457E-5B4D-3E50-20E4-A1685DF4F997}"/>
@@ -17316,13 +17896,13 @@
               </a:lvl9pPr>
             </a:lstStyle>
             <a:p>
-              <a:endParaRPr lang="ja-JP" altLang="en-US" sz="1481"/>
+              <a:endParaRPr lang="ja-JP" altLang="en-US"/>
             </a:p>
           </p:txBody>
         </p:sp>
         <p:sp>
           <p:nvSpPr>
-            <p:cNvPr id="6" name="frame_title_1">
+            <p:cNvPr id="73" name="frame_title_1">
               <a:extLst>
                 <a:ext uri="{FF2B5EF4-FFF2-40B4-BE49-F238E27FC236}">
                   <a16:creationId xmlns:a16="http://schemas.microsoft.com/office/drawing/2014/main" id="{850AEB05-ED66-6EDD-2B5B-F30025B91C56}"/>
@@ -17334,8 +17914,8 @@
           </p:nvSpPr>
           <p:spPr>
             <a:xfrm>
-              <a:off x="7717889" y="94973"/>
-              <a:ext cx="2637301" cy="249290"/>
+              <a:off x="7717888" y="48804"/>
+              <a:ext cx="2637302" cy="341628"/>
             </a:xfrm>
             <a:prstGeom prst="rect">
               <a:avLst/>
@@ -17348,7 +17928,7 @@
             </a:ln>
           </p:spPr>
           <p:txBody>
-            <a:bodyPr wrap="square" lIns="15422" tIns="7711" rIns="15422" bIns="7711" anchor="ctr">
+            <a:bodyPr wrap="square" lIns="18741" tIns="9370" rIns="18741" bIns="9370" anchor="ctr">
               <a:spAutoFit/>
             </a:bodyPr>
             <a:lstStyle>
@@ -17449,7 +18029,7 @@
             <a:p>
               <a:pPr algn="ctr"/>
               <a:r>
-                <a:rPr lang="ja-JP" altLang="en-US" sz="556" b="1">
+                <a:rPr lang="ja-JP" sz="676" b="1">
                   <a:solidFill>
                     <a:srgbClr val="C55A11"/>
                   </a:solidFill>
@@ -17457,36 +18037,14 @@
                   <a:ea typeface="Meiryo UI"/>
                   <a:cs typeface="Meiryo UI"/>
                 </a:rPr>
-                <a:t>（</a:t>
-              </a:r>
-              <a:r>
-                <a:rPr lang="en-US" altLang="ja-JP" sz="556" b="1">
-                  <a:solidFill>
-                    <a:srgbClr val="C55A11"/>
-                  </a:solidFill>
-                  <a:latin typeface="Meiryo UI"/>
-                  <a:ea typeface="Meiryo UI"/>
-                  <a:cs typeface="Meiryo UI"/>
-                </a:rPr>
-                <a:t>2</a:t>
-              </a:r>
-              <a:r>
-                <a:rPr lang="ja-JP" altLang="en-US" sz="556" b="1">
-                  <a:solidFill>
-                    <a:srgbClr val="C55A11"/>
-                  </a:solidFill>
-                  <a:latin typeface="Meiryo UI"/>
-                  <a:ea typeface="Meiryo UI"/>
-                  <a:cs typeface="Meiryo UI"/>
-                </a:rPr>
-                <a:t>）デバイス操作フェーズ</a:t>
+                <a:t>2 デバイス操作フェーズ</a:t>
               </a:r>
             </a:p>
           </p:txBody>
         </p:sp>
         <p:sp>
           <p:nvSpPr>
-            <p:cNvPr id="7" name="frame_2">
+            <p:cNvPr id="74" name="frame_2">
               <a:extLst>
                 <a:ext uri="{FF2B5EF4-FFF2-40B4-BE49-F238E27FC236}">
                   <a16:creationId xmlns:a16="http://schemas.microsoft.com/office/drawing/2014/main" id="{D33C9D2D-7EC2-F190-7068-18BB6F34FFF7}"/>
@@ -17611,13 +18169,13 @@
               </a:lvl9pPr>
             </a:lstStyle>
             <a:p>
-              <a:endParaRPr lang="ja-JP" altLang="en-US" sz="1481"/>
+              <a:endParaRPr lang="ja-JP" altLang="en-US"/>
             </a:p>
           </p:txBody>
         </p:sp>
         <p:sp>
           <p:nvSpPr>
-            <p:cNvPr id="8" name="frame_title_2">
+            <p:cNvPr id="75" name="frame_title_2">
               <a:extLst>
                 <a:ext uri="{FF2B5EF4-FFF2-40B4-BE49-F238E27FC236}">
                   <a16:creationId xmlns:a16="http://schemas.microsoft.com/office/drawing/2014/main" id="{4126C5A8-8D7C-E499-DFE9-9B8410A85DC3}"/>
@@ -17629,8 +18187,8 @@
           </p:nvSpPr>
           <p:spPr>
             <a:xfrm>
-              <a:off x="14587801" y="94973"/>
-              <a:ext cx="1890058" cy="249290"/>
+              <a:off x="14587801" y="48804"/>
+              <a:ext cx="1890058" cy="341628"/>
             </a:xfrm>
             <a:prstGeom prst="rect">
               <a:avLst/>
@@ -17643,7 +18201,7 @@
             </a:ln>
           </p:spPr>
           <p:txBody>
-            <a:bodyPr wrap="square" lIns="15422" tIns="7711" rIns="15422" bIns="7711" anchor="ctr">
+            <a:bodyPr wrap="square" lIns="18741" tIns="9370" rIns="18741" bIns="9370" anchor="ctr">
               <a:spAutoFit/>
             </a:bodyPr>
             <a:lstStyle>
@@ -17744,7 +18302,7 @@
             <a:p>
               <a:pPr algn="ctr"/>
               <a:r>
-                <a:rPr lang="ja-JP" altLang="en-US" sz="556" b="1">
+                <a:rPr lang="ja-JP" sz="676" b="1">
                   <a:solidFill>
                     <a:srgbClr val="7030A0"/>
                   </a:solidFill>
@@ -17752,36 +18310,14 @@
                   <a:ea typeface="Meiryo UI"/>
                   <a:cs typeface="Meiryo UI"/>
                 </a:rPr>
-                <a:t>（</a:t>
-              </a:r>
-              <a:r>
-                <a:rPr lang="en-US" altLang="ja-JP" sz="556" b="1">
-                  <a:solidFill>
-                    <a:srgbClr val="7030A0"/>
-                  </a:solidFill>
-                  <a:latin typeface="Meiryo UI"/>
-                  <a:ea typeface="Meiryo UI"/>
-                  <a:cs typeface="Meiryo UI"/>
-                </a:rPr>
-                <a:t>3</a:t>
-              </a:r>
-              <a:r>
-                <a:rPr lang="ja-JP" altLang="en-US" sz="556" b="1">
-                  <a:solidFill>
-                    <a:srgbClr val="7030A0"/>
-                  </a:solidFill>
-                  <a:latin typeface="Meiryo UI"/>
-                  <a:ea typeface="Meiryo UI"/>
-                  <a:cs typeface="Meiryo UI"/>
-                </a:rPr>
-                <a:t>）終了フェーズ</a:t>
+                <a:t>3 終了フェーズ</a:t>
               </a:r>
             </a:p>
           </p:txBody>
         </p:sp>
         <p:sp>
           <p:nvSpPr>
-            <p:cNvPr id="9" name="shape_d61_STOP_T2" descr="アプリが起動した所有&#10;プロセスだけを停止対象とします。&#10;既存プロセスは停止しません。" title="② 所有プロセスか">
+            <p:cNvPr id="76" name="shape_d61_STOP_T2" descr="アプリが起動した所有&#10;プロセスだけを停止対象とします。&#10;既存プロセスは停止しません。" title="② 所有プロセスか">
               <a:extLst>
                 <a:ext uri="{FF2B5EF4-FFF2-40B4-BE49-F238E27FC236}">
                   <a16:creationId xmlns:a16="http://schemas.microsoft.com/office/drawing/2014/main" id="{609E0EB7-EB97-0966-3945-C02E7B06089F}"/>
@@ -17793,8 +18329,8 @@
           </p:nvSpPr>
           <p:spPr>
             <a:xfrm>
-              <a:off x="14109781" y="1664091"/>
-              <a:ext cx="2729853" cy="483967"/>
+              <a:off x="14109781" y="1373927"/>
+              <a:ext cx="2729851" cy="1064293"/>
             </a:xfrm>
             <a:prstGeom prst="diamond">
               <a:avLst/>
@@ -17827,7 +18363,7 @@
             </a:fontRef>
           </p:style>
           <p:txBody>
-            <a:bodyPr wrap="square" lIns="32643" tIns="16322" rIns="32643" bIns="16322" rtlCol="0" anchor="ctr">
+            <a:bodyPr wrap="square" lIns="39668" tIns="19834" rIns="39668" bIns="19834" rtlCol="0" anchor="ctr">
               <a:spAutoFit/>
             </a:bodyPr>
             <a:lstStyle>
@@ -17928,21 +18464,27 @@
             <a:p>
               <a:pPr algn="ctr"/>
               <a:r>
-                <a:rPr kumimoji="0" lang="ja-JP" altLang="en-US" sz="428" b="1" kern="0">
+                <a:rPr kumimoji="0" lang="ja-JP" altLang="en-US" sz="520" b="1" i="0" u="none" strike="noStrike" kern="0" cap="none" spc="0" normalizeH="0" baseline="0">
+                  <a:ln>
+                    <a:noFill/>
+                  </a:ln>
                   <a:solidFill>
                     <a:srgbClr val="111111"/>
                   </a:solidFill>
+                  <a:effectLst/>
+                  <a:uLnTx/>
+                  <a:uFillTx/>
                   <a:latin typeface="Meiryo UI"/>
                   <a:ea typeface="Meiryo UI"/>
                 </a:rPr>
-                <a:t>(2) 所有プロセスか</a:t>
+                <a:t>3.2 所有プロセスか</a:t>
               </a:r>
             </a:p>
           </p:txBody>
         </p:sp>
         <p:sp>
           <p:nvSpPr>
-            <p:cNvPr id="10" name="shape_d61_OPERATION_O6" descr="失敗応答と通信失敗を区別します。&#10;同期結果を確定できない&#10;要求は自動再送しません。" title="運用を継続するか">
+            <p:cNvPr id="77" name="shape_d61_OPERATION_O6" descr="失敗応答と通信失敗を区別します。&#10;同期結果を確定できない&#10;要求は自動再送しません。" title="運用を継続するか">
               <a:extLst>
                 <a:ext uri="{FF2B5EF4-FFF2-40B4-BE49-F238E27FC236}">
                   <a16:creationId xmlns:a16="http://schemas.microsoft.com/office/drawing/2014/main" id="{C73A5853-F7DA-1AC5-7956-DC38F8DBA800}"/>
@@ -17988,7 +18530,7 @@
             </a:fontRef>
           </p:style>
           <p:txBody>
-            <a:bodyPr wrap="square" lIns="32643" tIns="16322" rIns="32643" bIns="16322" rtlCol="0" anchor="ctr">
+            <a:bodyPr wrap="square" lIns="39668" tIns="19834" rIns="39668" bIns="19834" rtlCol="0" anchor="ctr">
               <a:noAutofit/>
             </a:bodyPr>
             <a:lstStyle>
@@ -18089,21 +18631,27 @@
             <a:p>
               <a:pPr algn="ctr"/>
               <a:r>
-                <a:rPr kumimoji="0" lang="ja-JP" altLang="en-US" sz="428" b="1" kern="0">
+                <a:rPr kumimoji="0" lang="ja-JP" altLang="en-US" sz="520" b="1" i="0" u="none" strike="noStrike" kern="0" cap="none" spc="0" normalizeH="0" baseline="0">
+                  <a:ln>
+                    <a:noFill/>
+                  </a:ln>
                   <a:solidFill>
                     <a:srgbClr val="111111"/>
                   </a:solidFill>
+                  <a:effectLst/>
+                  <a:uLnTx/>
+                  <a:uFillTx/>
                   <a:latin typeface="Meiryo UI"/>
                   <a:ea typeface="Meiryo UI"/>
                 </a:rPr>
-                <a:t>(7) 運用を継続するか</a:t>
+                <a:t>2.7 運用を継続するか</a:t>
               </a:r>
             </a:p>
           </p:txBody>
         </p:sp>
         <p:sp>
           <p:nvSpPr>
-            <p:cNvPr id="11" name="shape_d61_OPERATION_O4" title="④ 同期結果を 確定できたか">
+            <p:cNvPr id="78" name="shape_d61_OPERATION_O4" title="④ 同期結果を 確定できたか">
               <a:extLst>
                 <a:ext uri="{FF2B5EF4-FFF2-40B4-BE49-F238E27FC236}">
                   <a16:creationId xmlns:a16="http://schemas.microsoft.com/office/drawing/2014/main" id="{6711A61B-CEA1-DB64-A488-CC2CA1D99E81}"/>
@@ -18149,7 +18697,7 @@
             </a:fontRef>
           </p:style>
           <p:txBody>
-            <a:bodyPr wrap="square" lIns="32643" tIns="16322" rIns="32643" bIns="16322" rtlCol="0" anchor="ctr">
+            <a:bodyPr wrap="square" lIns="39668" tIns="19834" rIns="39668" bIns="19834" rtlCol="0" anchor="ctr">
               <a:noAutofit/>
             </a:bodyPr>
             <a:lstStyle>
@@ -18250,14 +18798,20 @@
             <a:p>
               <a:pPr algn="ctr"/>
               <a:r>
-                <a:rPr kumimoji="0" lang="ja-JP" altLang="en-US" sz="428" b="1" kern="0">
+                <a:rPr kumimoji="0" lang="ja-JP" altLang="en-US" sz="520" b="1" i="0" u="none" strike="noStrike" kern="0" cap="none" spc="0" normalizeH="0" baseline="0">
+                  <a:ln>
+                    <a:noFill/>
+                  </a:ln>
                   <a:solidFill>
                     <a:srgbClr val="111111"/>
                   </a:solidFill>
+                  <a:effectLst/>
+                  <a:uLnTx/>
+                  <a:uFillTx/>
                   <a:latin typeface="Meiryo UI"/>
                   <a:ea typeface="Meiryo UI"/>
                 </a:rPr>
-                <a:t>(4) 同期結果を
+                <a:t>2.4 同期結果を
 確定できたか</a:t>
               </a:r>
             </a:p>
@@ -18265,7 +18819,7 @@
         </p:sp>
         <p:sp>
           <p:nvSpPr>
-            <p:cNvPr id="12" name="shape_d61_START_S4" title="④ 起動準備が 完了したか">
+            <p:cNvPr id="79" name="shape_d61_START_S4" title="④ 起動準備が 完了したか">
               <a:extLst>
                 <a:ext uri="{FF2B5EF4-FFF2-40B4-BE49-F238E27FC236}">
                   <a16:creationId xmlns:a16="http://schemas.microsoft.com/office/drawing/2014/main" id="{D33AFFA6-5CC7-FDF7-123C-51D38C24CEE9}"/>
@@ -18277,8 +18831,8 @@
           </p:nvSpPr>
           <p:spPr>
             <a:xfrm>
-              <a:off x="274251" y="4502390"/>
-              <a:ext cx="3586534" cy="806490"/>
+              <a:off x="274252" y="4497856"/>
+              <a:ext cx="3586534" cy="815556"/>
             </a:xfrm>
             <a:prstGeom prst="diamond">
               <a:avLst/>
@@ -18311,7 +18865,7 @@
             </a:fontRef>
           </p:style>
           <p:txBody>
-            <a:bodyPr wrap="square" lIns="32643" tIns="16322" rIns="32643" bIns="16322" rtlCol="0" anchor="ctr">
+            <a:bodyPr wrap="square" lIns="39668" tIns="19834" rIns="39668" bIns="19834" rtlCol="0" anchor="ctr">
               <a:spAutoFit/>
             </a:bodyPr>
             <a:lstStyle>
@@ -18412,23 +18966,35 @@
             <a:p>
               <a:pPr algn="ctr"/>
               <a:r>
-                <a:rPr kumimoji="0" lang="ja-JP" altLang="en-US" sz="428" b="1" kern="0">
+                <a:rPr kumimoji="0" lang="ja-JP" altLang="en-US" sz="520" b="1" i="0" u="none" strike="noStrike" kern="0" cap="none" spc="0" normalizeH="0" baseline="0">
+                  <a:ln>
+                    <a:noFill/>
+                  </a:ln>
                   <a:solidFill>
                     <a:srgbClr val="111111"/>
                   </a:solidFill>
+                  <a:effectLst/>
+                  <a:uLnTx/>
+                  <a:uFillTx/>
                   <a:latin typeface="Meiryo UI"/>
                   <a:ea typeface="Meiryo UI"/>
                 </a:rPr>
-                <a:t>(6) 起動準備が</a:t>
+                <a:t>1.6 起動準備が</a:t>
               </a:r>
             </a:p>
             <a:p>
               <a:pPr algn="ctr"/>
               <a:r>
-                <a:rPr kumimoji="0" lang="ja-JP" altLang="en-US" sz="428" b="1" kern="0">
+                <a:rPr kumimoji="0" lang="ja-JP" altLang="en-US" sz="520" b="1" i="0" u="none" strike="noStrike" kern="0" cap="none" spc="0" normalizeH="0" baseline="0">
+                  <a:ln>
+                    <a:noFill/>
+                  </a:ln>
                   <a:solidFill>
                     <a:srgbClr val="111111"/>
                   </a:solidFill>
+                  <a:effectLst/>
+                  <a:uLnTx/>
+                  <a:uFillTx/>
                   <a:latin typeface="Meiryo UI"/>
                   <a:ea typeface="Meiryo UI"/>
                 </a:rPr>
@@ -18439,7 +19005,7 @@
         </p:sp>
         <p:sp>
           <p:nvSpPr>
-            <p:cNvPr id="13" name="shape_d61_STOP_T3" title="③ 停止要求を送信して 終了を監視">
+            <p:cNvPr id="80" name="shape_d61_STOP_T3" title="③ 停止要求を送信して 終了を監視">
               <a:extLst>
                 <a:ext uri="{FF2B5EF4-FFF2-40B4-BE49-F238E27FC236}">
                   <a16:creationId xmlns:a16="http://schemas.microsoft.com/office/drawing/2014/main" id="{0E2A6350-B8E7-62AB-22B9-91415FBB64B0}"/>
@@ -18485,7 +19051,7 @@
             </a:fontRef>
           </p:style>
           <p:txBody>
-            <a:bodyPr wrap="square" lIns="32643" tIns="16322" rIns="32643" bIns="16322" rtlCol="0" anchor="ctr">
+            <a:bodyPr wrap="square" lIns="39668" tIns="19834" rIns="39668" bIns="19834" rtlCol="0" anchor="ctr">
               <a:noAutofit/>
             </a:bodyPr>
             <a:lstStyle>
@@ -18586,14 +19152,20 @@
             <a:p>
               <a:pPr algn="ctr"/>
               <a:r>
-                <a:rPr kumimoji="0" lang="ja-JP" altLang="en-US" sz="428" b="1" kern="0">
+                <a:rPr kumimoji="0" lang="ja-JP" altLang="en-US" sz="520" b="1" i="0" u="none" strike="noStrike" kern="0" cap="none" spc="0" normalizeH="0" baseline="0">
+                  <a:ln>
+                    <a:noFill/>
+                  </a:ln>
                   <a:solidFill>
                     <a:srgbClr val="111111"/>
                   </a:solidFill>
+                  <a:effectLst/>
+                  <a:uLnTx/>
+                  <a:uFillTx/>
                   <a:latin typeface="Meiryo UI"/>
                   <a:ea typeface="Meiryo UI"/>
                 </a:rPr>
-                <a:t>(3) 停止要求を送信して
+                <a:t>3.3 停止要求を送信して
 終了を監視</a:t>
               </a:r>
             </a:p>
@@ -18601,7 +19173,7 @@
         </p:sp>
         <p:sp>
           <p:nvSpPr>
-            <p:cNvPr id="14" name="shape_d61_START_S3" title="③ デバイスコネクタと 通信・デバイスを準備">
+            <p:cNvPr id="81" name="shape_d61_START_S3" title="③ デバイスコネクタと 通信・デバイスを準備">
               <a:extLst>
                 <a:ext uri="{FF2B5EF4-FFF2-40B4-BE49-F238E27FC236}">
                   <a16:creationId xmlns:a16="http://schemas.microsoft.com/office/drawing/2014/main" id="{B20230C1-F0CB-C90A-90B3-299CE24BA9B7}"/>
@@ -18613,8 +19185,8 @@
           </p:nvSpPr>
           <p:spPr>
             <a:xfrm>
-              <a:off x="1103959" y="2166308"/>
-              <a:ext cx="1927121" cy="449183"/>
+              <a:off x="1103959" y="2095415"/>
+              <a:ext cx="1927120" cy="590971"/>
             </a:xfrm>
             <a:prstGeom prst="roundRect">
               <a:avLst/>
@@ -18647,7 +19219,7 @@
             </a:fontRef>
           </p:style>
           <p:txBody>
-            <a:bodyPr wrap="square" lIns="32643" tIns="16322" rIns="32643" bIns="16322" rtlCol="0" anchor="ctr">
+            <a:bodyPr wrap="square" lIns="39668" tIns="19834" rIns="39668" bIns="19834" rtlCol="0" anchor="ctr">
               <a:spAutoFit/>
             </a:bodyPr>
             <a:lstStyle>
@@ -18748,41 +19320,60 @@
             <a:p>
               <a:pPr algn="ctr"/>
               <a:r>
-                <a:rPr kumimoji="0" lang="ja-JP" altLang="en-US" sz="428" b="1" kern="0">
+                <a:rPr kumimoji="0" lang="ja-JP" altLang="en-US" sz="520" b="1" i="0" u="none" strike="noStrike" kern="0" cap="none" spc="0" normalizeH="0" baseline="0">
+                  <a:ln>
+                    <a:noFill/>
+                  </a:ln>
                   <a:solidFill>
                     <a:srgbClr val="111111"/>
                   </a:solidFill>
+                  <a:effectLst/>
+                  <a:uLnTx/>
+                  <a:uFillTx/>
                   <a:latin typeface="Meiryo UI"/>
                   <a:ea typeface="Meiryo UI"/>
                 </a:rPr>
-                <a:t>(3)</a:t>
+                <a:t>1.3</a:t>
               </a:r>
               <a:r>
-                <a:rPr kumimoji="0" lang="vi-VN" altLang="ja-JP" sz="428" b="1" kern="0">
+                <a:rPr kumimoji="0" lang="vi-VN" altLang="ja-JP" sz="520" b="1" i="0" u="none" strike="noStrike" kern="0" cap="none" spc="0" normalizeH="0" baseline="0">
+                  <a:ln>
+                    <a:noFill/>
+                  </a:ln>
                   <a:solidFill>
                     <a:srgbClr val="111111"/>
                   </a:solidFill>
+                  <a:effectLst/>
+                  <a:uLnTx/>
+                  <a:uFillTx/>
                   <a:latin typeface="Meiryo UI"/>
                   <a:ea typeface="Meiryo UI"/>
                 </a:rPr>
                 <a:t> </a:t>
               </a:r>
               <a:r>
-                <a:rPr kumimoji="0" lang="ja-JP" altLang="en-US" sz="428" b="1" kern="0">
+                <a:rPr kumimoji="0" lang="ja-JP" altLang="en-US" sz="520" b="1" i="0" u="none" strike="noStrike" kern="0" cap="none" spc="0" normalizeH="0" baseline="0">
+                  <a:ln>
+                    <a:noFill/>
+                  </a:ln>
                   <a:solidFill>
                     <a:srgbClr val="111111"/>
                   </a:solidFill>
+                  <a:effectLst/>
+                  <a:uLnTx/>
+                  <a:uFillTx/>
                   <a:latin typeface="Meiryo UI"/>
                   <a:ea typeface="Meiryo UI"/>
                 </a:rPr>
-                <a:t>既存プロセスを確認し未起動時だけ起動</a:t>
+                <a:t>既存プロセスを確認し
+未起動時だけ起動</a:t>
               </a:r>
             </a:p>
           </p:txBody>
         </p:sp>
         <p:sp>
           <p:nvSpPr>
-            <p:cNvPr id="15" name="shape_d61_OPERATION_COMM_ERROR" title="通信失敗を返却 送信後は自動再送なし">
+            <p:cNvPr id="82" name="shape_d61_OPERATION_COMM_ERROR" title="通信失敗を返却 送信後は自動再送なし">
               <a:extLst>
                 <a:ext uri="{FF2B5EF4-FFF2-40B4-BE49-F238E27FC236}">
                   <a16:creationId xmlns:a16="http://schemas.microsoft.com/office/drawing/2014/main" id="{4CC4EB8C-2593-5268-DFE0-F7306CE6FE4C}"/>
@@ -18794,8 +19385,8 @@
           </p:nvSpPr>
           <p:spPr>
             <a:xfrm>
-              <a:off x="8198590" y="6923852"/>
-              <a:ext cx="1908298" cy="449183"/>
+              <a:off x="8198591" y="6921328"/>
+              <a:ext cx="1908296" cy="454234"/>
             </a:xfrm>
             <a:prstGeom prst="roundRect">
               <a:avLst/>
@@ -18828,7 +19419,7 @@
             </a:fontRef>
           </p:style>
           <p:txBody>
-            <a:bodyPr wrap="square" lIns="32643" tIns="16322" rIns="32643" bIns="16322" rtlCol="0" anchor="ctr">
+            <a:bodyPr wrap="square" lIns="39668" tIns="19834" rIns="39668" bIns="19834" rtlCol="0" anchor="ctr">
               <a:spAutoFit/>
             </a:bodyPr>
             <a:lstStyle>
@@ -18929,23 +19520,35 @@
             <a:p>
               <a:pPr algn="ctr"/>
               <a:r>
-                <a:rPr kumimoji="0" lang="ja-JP" altLang="en-US" sz="428" b="1" kern="0">
+                <a:rPr kumimoji="0" lang="ja-JP" altLang="en-US" sz="520" b="1" i="0" u="none" strike="noStrike" kern="0" cap="none" spc="0" normalizeH="0" baseline="0">
+                  <a:ln>
+                    <a:noFill/>
+                  </a:ln>
                   <a:solidFill>
                     <a:srgbClr val="111111"/>
                   </a:solidFill>
+                  <a:effectLst/>
+                  <a:uLnTx/>
+                  <a:uFillTx/>
                   <a:latin typeface="Meiryo UI"/>
                   <a:ea typeface="Meiryo UI"/>
                 </a:rPr>
-                <a:t>(6) 通信失敗を返却</a:t>
+                <a:t>2.6 通信失敗を返却</a:t>
               </a:r>
             </a:p>
             <a:p>
               <a:pPr algn="ctr"/>
               <a:r>
-                <a:rPr kumimoji="0" lang="ja-JP" altLang="en-US" sz="428" b="1" kern="0">
+                <a:rPr kumimoji="0" lang="ja-JP" altLang="en-US" sz="520" b="1" i="0" u="none" strike="noStrike" kern="0" cap="none" spc="0" normalizeH="0" baseline="0">
+                  <a:ln>
+                    <a:noFill/>
+                  </a:ln>
                   <a:solidFill>
                     <a:srgbClr val="111111"/>
                   </a:solidFill>
+                  <a:effectLst/>
+                  <a:uLnTx/>
+                  <a:uFillTx/>
                   <a:latin typeface="Meiryo UI"/>
                   <a:ea typeface="Meiryo UI"/>
                 </a:rPr>
@@ -18956,7 +19559,7 @@
         </p:sp>
         <p:sp>
           <p:nvSpPr>
-            <p:cNvPr id="16" name="shape_d61_START_S2" title="② 設定を準備 運用設定 → 初期設定">
+            <p:cNvPr id="83" name="shape_d61_START_S2" title="② 設定を準備 運用設定 → 初期設定">
               <a:extLst>
                 <a:ext uri="{FF2B5EF4-FFF2-40B4-BE49-F238E27FC236}">
                   <a16:creationId xmlns:a16="http://schemas.microsoft.com/office/drawing/2014/main" id="{D69F0A22-F7B3-05C7-FDDF-79C272067E9B}"/>
@@ -18968,8 +19571,8 @@
           </p:nvSpPr>
           <p:spPr>
             <a:xfrm>
-              <a:off x="1121750" y="1244832"/>
-              <a:ext cx="1881863" cy="569522"/>
+              <a:off x="1121751" y="1241537"/>
+              <a:ext cx="1881861" cy="576111"/>
             </a:xfrm>
             <a:prstGeom prst="roundRect">
               <a:avLst/>
@@ -19002,7 +19605,7 @@
             </a:fontRef>
           </p:style>
           <p:txBody>
-            <a:bodyPr wrap="square" lIns="32643" tIns="16322" rIns="32643" bIns="16322" rtlCol="0" anchor="ctr">
+            <a:bodyPr wrap="square" lIns="39668" tIns="19834" rIns="39668" bIns="19834" rtlCol="0" anchor="ctr">
               <a:spAutoFit/>
             </a:bodyPr>
             <a:lstStyle>
@@ -19103,43 +19706,67 @@
             <a:p>
               <a:pPr algn="ctr"/>
               <a:r>
-                <a:rPr kumimoji="0" lang="ja-JP" altLang="en-US" sz="381" b="1" kern="0">
+                <a:rPr kumimoji="0" lang="ja-JP" altLang="en-US" sz="463" b="1" i="0" u="none" strike="noStrike" kern="0" cap="none" spc="0" normalizeH="0" baseline="0">
+                  <a:ln>
+                    <a:noFill/>
+                  </a:ln>
                   <a:solidFill>
                     <a:srgbClr val="111111"/>
                   </a:solidFill>
+                  <a:effectLst/>
+                  <a:uLnTx/>
+                  <a:uFillTx/>
                   <a:latin typeface="Meiryo UI"/>
                   <a:ea typeface="Meiryo UI"/>
                 </a:rPr>
-                <a:t>(2) 設定を準備</a:t>
+                <a:t>1.2 設定を準備</a:t>
               </a:r>
             </a:p>
             <a:p>
               <a:pPr algn="ctr"/>
               <a:r>
-                <a:rPr kumimoji="0" lang="en-US" altLang="ja-JP" sz="381" b="1" kern="0">
+                <a:rPr kumimoji="0" lang="en-US" altLang="ja-JP" sz="463" b="1" i="0" u="none" strike="noStrike" kern="0" cap="none" spc="0" normalizeH="0" baseline="0">
+                  <a:ln>
+                    <a:noFill/>
+                  </a:ln>
                   <a:solidFill>
                     <a:srgbClr val="111111"/>
                   </a:solidFill>
+                  <a:effectLst/>
+                  <a:uLnTx/>
+                  <a:uFillTx/>
                   <a:latin typeface="Meiryo UI"/>
                   <a:ea typeface="Meiryo UI"/>
                 </a:rPr>
                 <a:t>JSON</a:t>
               </a:r>
               <a:r>
-                <a:rPr kumimoji="0" lang="ja-JP" altLang="en-US" sz="381" b="1" kern="0">
+                <a:rPr kumimoji="0" lang="ja-JP" altLang="en-US" sz="463" b="1" i="0" u="none" strike="noStrike" kern="0" cap="none" spc="0" normalizeH="0" baseline="0">
+                  <a:ln>
+                    <a:noFill/>
+                  </a:ln>
                   <a:solidFill>
                     <a:srgbClr val="111111"/>
                   </a:solidFill>
+                  <a:effectLst/>
+                  <a:uLnTx/>
+                  <a:uFillTx/>
                   <a:latin typeface="Meiryo UI"/>
                   <a:ea typeface="Meiryo UI"/>
                 </a:rPr>
                 <a:t>取込 → </a:t>
               </a:r>
               <a:r>
-                <a:rPr kumimoji="0" lang="en-US" altLang="ja-JP" sz="381" b="1" kern="0">
+                <a:rPr kumimoji="0" lang="en-US" altLang="ja-JP" sz="463" b="1" i="0" u="none" strike="noStrike" kern="0" cap="none" spc="0" normalizeH="0" baseline="0">
+                  <a:ln>
+                    <a:noFill/>
+                  </a:ln>
                   <a:solidFill>
                     <a:srgbClr val="111111"/>
                   </a:solidFill>
+                  <a:effectLst/>
+                  <a:uLnTx/>
+                  <a:uFillTx/>
                   <a:latin typeface="Meiryo UI"/>
                   <a:ea typeface="Meiryo UI"/>
                 </a:rPr>
@@ -19149,30 +19776,48 @@
             <a:p>
               <a:pPr algn="ctr"/>
               <a:r>
-                <a:rPr kumimoji="0" lang="ja-JP" altLang="en-US" sz="381" b="1" kern="0">
+                <a:rPr kumimoji="0" lang="ja-JP" altLang="en-US" sz="463" b="1" i="0" u="none" strike="noStrike" kern="0" cap="none" spc="0" normalizeH="0" baseline="0">
+                  <a:ln>
+                    <a:noFill/>
+                  </a:ln>
                   <a:solidFill>
                     <a:srgbClr val="111111"/>
                   </a:solidFill>
+                  <a:effectLst/>
+                  <a:uLnTx/>
+                  <a:uFillTx/>
                   <a:latin typeface="Meiryo UI"/>
                   <a:ea typeface="Meiryo UI"/>
                 </a:rPr>
                 <a:t>不可時：</a:t>
               </a:r>
               <a:r>
-                <a:rPr kumimoji="0" lang="en-US" altLang="ja-JP" sz="381" b="1" kern="0">
+                <a:rPr kumimoji="0" lang="en-US" altLang="ja-JP" sz="463" b="1" i="0" u="none" strike="noStrike" kern="0" cap="none" spc="0" normalizeH="0" baseline="0">
+                  <a:ln>
+                    <a:noFill/>
+                  </a:ln>
                   <a:solidFill>
                     <a:srgbClr val="111111"/>
                   </a:solidFill>
+                  <a:effectLst/>
+                  <a:uLnTx/>
+                  <a:uFillTx/>
                   <a:latin typeface="Meiryo UI"/>
                   <a:ea typeface="Meiryo UI"/>
                 </a:rPr>
                 <a:t>SQLite</a:t>
               </a:r>
               <a:r>
-                <a:rPr kumimoji="0" lang="ja-JP" altLang="en-US" sz="381" b="1" kern="0">
+                <a:rPr kumimoji="0" lang="ja-JP" altLang="en-US" sz="463" b="1" i="0" u="none" strike="noStrike" kern="0" cap="none" spc="0" normalizeH="0" baseline="0">
+                  <a:ln>
+                    <a:noFill/>
+                  </a:ln>
                   <a:solidFill>
                     <a:srgbClr val="111111"/>
                   </a:solidFill>
+                  <a:effectLst/>
+                  <a:uLnTx/>
+                  <a:uFillTx/>
                   <a:latin typeface="Meiryo UI"/>
                   <a:ea typeface="Meiryo UI"/>
                 </a:rPr>
@@ -19183,7 +19828,7 @@
         </p:sp>
         <p:sp>
           <p:nvSpPr>
-            <p:cNvPr id="17" name="shape_d61_OPERATION_O2" title="② 接続を確認して コマンド要求を送信">
+            <p:cNvPr id="84" name="shape_d61_OPERATION_O2" title="② 接続を確認して コマンド要求を送信">
               <a:extLst>
                 <a:ext uri="{FF2B5EF4-FFF2-40B4-BE49-F238E27FC236}">
                   <a16:creationId xmlns:a16="http://schemas.microsoft.com/office/drawing/2014/main" id="{D75E5DE6-224E-D369-E677-64A825027A9E}"/>
@@ -19229,7 +19874,7 @@
             </a:fontRef>
           </p:style>
           <p:txBody>
-            <a:bodyPr wrap="square" lIns="32643" tIns="16322" rIns="32643" bIns="16322" rtlCol="0" anchor="ctr">
+            <a:bodyPr wrap="square" lIns="39668" tIns="19834" rIns="39668" bIns="19834" rtlCol="0" anchor="ctr">
               <a:noAutofit/>
             </a:bodyPr>
             <a:lstStyle>
@@ -19330,14 +19975,20 @@
             <a:p>
               <a:pPr algn="ctr"/>
               <a:r>
-                <a:rPr kumimoji="0" lang="ja-JP" altLang="en-US" sz="428" b="1" kern="0">
+                <a:rPr kumimoji="0" lang="ja-JP" altLang="en-US" sz="520" b="1" i="0" u="none" strike="noStrike" kern="0" cap="none" spc="0" normalizeH="0" baseline="0">
+                  <a:ln>
+                    <a:noFill/>
+                  </a:ln>
                   <a:solidFill>
                     <a:srgbClr val="111111"/>
                   </a:solidFill>
+                  <a:effectLst/>
+                  <a:uLnTx/>
+                  <a:uFillTx/>
                   <a:latin typeface="Meiryo UI"/>
                   <a:ea typeface="Meiryo UI"/>
                 </a:rPr>
-                <a:t>(2) 接続を確認して
+                <a:t>2.2 接続を確認して
 コマンド要求を送信</a:t>
               </a:r>
             </a:p>
@@ -19345,7 +19996,7 @@
         </p:sp>
         <p:sp>
           <p:nvSpPr>
-            <p:cNvPr id="18" name="shape_d61_OPERATION_O3" descr="設計上の役割：デバイス操作フェーズ。&#10;入力は② 接続を確認して、出力先は④&#10;同期結果を、非同期イベントをです。" title="③ 順序制御して 対象デバイスを制御">
+            <p:cNvPr id="85" name="shape_d61_OPERATION_O3" descr="設計上の役割：デバイス操作フェーズ。&#10;入力は② 接続を確認して、出力先は④&#10;同期結果を、非同期イベントをです。" title="③ 順序制御して 対象デバイスを制御">
               <a:extLst>
                 <a:ext uri="{FF2B5EF4-FFF2-40B4-BE49-F238E27FC236}">
                   <a16:creationId xmlns:a16="http://schemas.microsoft.com/office/drawing/2014/main" id="{4D935129-EA24-17EB-B11C-6A3B66ECEF85}"/>
@@ -19391,7 +20042,7 @@
             </a:fontRef>
           </p:style>
           <p:txBody>
-            <a:bodyPr wrap="square" lIns="32643" tIns="16322" rIns="32643" bIns="16322" rtlCol="0" anchor="ctr">
+            <a:bodyPr wrap="square" lIns="39668" tIns="19834" rIns="39668" bIns="19834" rtlCol="0" anchor="ctr">
               <a:noAutofit/>
             </a:bodyPr>
             <a:lstStyle>
@@ -19492,23 +20143,35 @@
             <a:p>
               <a:pPr algn="ctr"/>
               <a:r>
-                <a:rPr kumimoji="0" lang="ja-JP" altLang="en-US" sz="428" b="1" kern="0">
+                <a:rPr kumimoji="0" lang="ja-JP" altLang="en-US" sz="520" b="1" i="0" u="none" strike="noStrike" kern="0" cap="none" spc="0" normalizeH="0" baseline="0">
+                  <a:ln>
+                    <a:noFill/>
+                  </a:ln>
                   <a:solidFill>
                     <a:srgbClr val="111111"/>
                   </a:solidFill>
+                  <a:effectLst/>
+                  <a:uLnTx/>
+                  <a:uFillTx/>
                   <a:latin typeface="Meiryo UI"/>
                   <a:ea typeface="Meiryo UI"/>
                 </a:rPr>
-                <a:t>(3) 順序制御して</a:t>
+                <a:t>2.3 順序制御して</a:t>
               </a:r>
             </a:p>
             <a:p>
               <a:pPr algn="ctr"/>
               <a:r>
-                <a:rPr kumimoji="0" lang="ja-JP" altLang="en-US" sz="428" b="1" kern="0">
+                <a:rPr kumimoji="0" lang="ja-JP" altLang="en-US" sz="520" b="1" i="0" u="none" strike="noStrike" kern="0" cap="none" spc="0" normalizeH="0" baseline="0">
+                  <a:ln>
+                    <a:noFill/>
+                  </a:ln>
                   <a:solidFill>
                     <a:srgbClr val="111111"/>
                   </a:solidFill>
+                  <a:effectLst/>
+                  <a:uLnTx/>
+                  <a:uFillTx/>
                   <a:latin typeface="Meiryo UI"/>
                   <a:ea typeface="Meiryo UI"/>
                 </a:rPr>
@@ -19518,10 +20181,16 @@
             <a:p>
               <a:pPr algn="ctr"/>
               <a:r>
-                <a:rPr kumimoji="0" lang="ja-JP" altLang="en-US" sz="428" b="1" kern="0">
+                <a:rPr kumimoji="0" lang="ja-JP" altLang="en-US" sz="520" b="1" i="0" u="none" strike="noStrike" kern="0" cap="none" spc="0" normalizeH="0" baseline="0">
+                  <a:ln>
+                    <a:noFill/>
+                  </a:ln>
                   <a:solidFill>
                     <a:srgbClr val="111111"/>
                   </a:solidFill>
+                  <a:effectLst/>
+                  <a:uLnTx/>
+                  <a:uFillTx/>
                   <a:latin typeface="Meiryo UI"/>
                   <a:ea typeface="Meiryo UI"/>
                 </a:rPr>
@@ -19531,20 +20200,32 @@
             <a:p>
               <a:pPr algn="ctr"/>
               <a:r>
-                <a:rPr kumimoji="0" lang="en-US" altLang="ja-JP" sz="428" b="1" kern="0">
+                <a:rPr kumimoji="0" lang="en-US" altLang="ja-JP" sz="520" b="1" i="0" u="none" strike="noStrike" kern="0" cap="none" spc="0" normalizeH="0" baseline="0">
+                  <a:ln>
+                    <a:noFill/>
+                  </a:ln>
                   <a:solidFill>
                     <a:srgbClr val="111111"/>
                   </a:solidFill>
+                  <a:effectLst/>
+                  <a:uLnTx/>
+                  <a:uFillTx/>
                   <a:latin typeface="Meiryo UI"/>
                   <a:ea typeface="Meiryo UI"/>
                 </a:rPr>
                 <a:t>Windows OPOS</a:t>
               </a:r>
               <a:r>
-                <a:rPr kumimoji="0" lang="ja-JP" altLang="en-US" sz="428" b="1" kern="0">
+                <a:rPr kumimoji="0" lang="ja-JP" altLang="en-US" sz="520" b="1" i="0" u="none" strike="noStrike" kern="0" cap="none" spc="0" normalizeH="0" baseline="0">
+                  <a:ln>
+                    <a:noFill/>
+                  </a:ln>
                   <a:solidFill>
                     <a:srgbClr val="111111"/>
                   </a:solidFill>
+                  <a:effectLst/>
+                  <a:uLnTx/>
+                  <a:uFillTx/>
                   <a:latin typeface="Meiryo UI"/>
                   <a:ea typeface="Meiryo UI"/>
                 </a:rPr>
@@ -19555,7 +20236,7 @@
         </p:sp>
         <p:sp>
           <p:nvSpPr>
-            <p:cNvPr id="19" name="shape_d61_OPERATION_O5" title="正常応答または 失敗応答を返却">
+            <p:cNvPr id="86" name="shape_d61_OPERATION_O5" title="正常応答または 失敗応答を返却">
               <a:extLst>
                 <a:ext uri="{FF2B5EF4-FFF2-40B4-BE49-F238E27FC236}">
                   <a16:creationId xmlns:a16="http://schemas.microsoft.com/office/drawing/2014/main" id="{6A4894E3-8BF6-2A5E-6AA0-73581ED526ED}"/>
@@ -19601,7 +20282,7 @@
             </a:fontRef>
           </p:style>
           <p:txBody>
-            <a:bodyPr wrap="square" lIns="32643" tIns="16322" rIns="32643" bIns="16322" rtlCol="0" anchor="ctr">
+            <a:bodyPr wrap="square" lIns="39668" tIns="19834" rIns="39668" bIns="19834" rtlCol="0" anchor="ctr">
               <a:noAutofit/>
             </a:bodyPr>
             <a:lstStyle>
@@ -19702,21 +20383,28 @@
             <a:p>
               <a:pPr algn="ctr"/>
               <a:r>
-                <a:rPr kumimoji="0" lang="ja-JP" altLang="en-US" sz="428" b="1" kern="0">
+                <a:rPr kumimoji="0" lang="ja-JP" altLang="en-US" sz="520" b="1" i="0" u="none" strike="noStrike" kern="0" cap="none" spc="0" normalizeH="0" baseline="0">
+                  <a:ln>
+                    <a:noFill/>
+                  </a:ln>
                   <a:solidFill>
                     <a:srgbClr val="111111"/>
                   </a:solidFill>
+                  <a:effectLst/>
+                  <a:uLnTx/>
+                  <a:uFillTx/>
                   <a:latin typeface="Meiryo UI"/>
                   <a:ea typeface="Meiryo UI"/>
                 </a:rPr>
-                <a:t>(5) 正常応答または失敗応答を返却</a:t>
+                <a:t>2.5 正常応答または
+失敗応答を返却</a:t>
               </a:r>
             </a:p>
           </p:txBody>
         </p:sp>
         <p:sp>
           <p:nvSpPr>
-            <p:cNvPr id="20" name="shape_d61_START_START_ERROR" title="起動を中止して 異常を記録">
+            <p:cNvPr id="87" name="shape_d61_START_START_ERROR" title="起動を中止して 異常を記録">
               <a:extLst>
                 <a:ext uri="{FF2B5EF4-FFF2-40B4-BE49-F238E27FC236}">
                   <a16:creationId xmlns:a16="http://schemas.microsoft.com/office/drawing/2014/main" id="{77038A31-FAD7-E0E7-F604-EA95CCF36C37}"/>
@@ -19728,8 +20416,8 @@
           </p:nvSpPr>
           <p:spPr>
             <a:xfrm>
-              <a:off x="1275033" y="7753333"/>
-              <a:ext cx="1584969" cy="449183"/>
+              <a:off x="1275035" y="7681279"/>
+              <a:ext cx="1584969" cy="593295"/>
             </a:xfrm>
             <a:prstGeom prst="roundRect">
               <a:avLst/>
@@ -19762,7 +20450,7 @@
             </a:fontRef>
           </p:style>
           <p:txBody>
-            <a:bodyPr wrap="square" lIns="32643" tIns="16322" rIns="32643" bIns="16322" rtlCol="0" anchor="ctr">
+            <a:bodyPr wrap="square" lIns="39668" tIns="19834" rIns="39668" bIns="19834" rtlCol="0" anchor="ctr">
               <a:spAutoFit/>
             </a:bodyPr>
             <a:lstStyle>
@@ -19863,21 +20551,28 @@
             <a:p>
               <a:pPr algn="ctr"/>
               <a:r>
-                <a:rPr kumimoji="0" lang="ja-JP" altLang="en-US" sz="428" b="1" kern="0">
+                <a:rPr kumimoji="0" lang="ja-JP" altLang="en-US" sz="520" b="1" i="0" u="none" strike="noStrike" kern="0" cap="none" spc="0" normalizeH="0" baseline="0">
+                  <a:ln>
+                    <a:noFill/>
+                  </a:ln>
                   <a:solidFill>
                     <a:srgbClr val="111111"/>
                   </a:solidFill>
+                  <a:effectLst/>
+                  <a:uLnTx/>
+                  <a:uFillTx/>
                   <a:latin typeface="Meiryo UI"/>
                   <a:ea typeface="Meiryo UI"/>
                 </a:rPr>
-                <a:t>(8) 起動を中止して異常を記録</a:t>
+                <a:t>1.8 起動を中止して
+異常を記録</a:t>
               </a:r>
             </a:p>
           </p:txBody>
         </p:sp>
         <p:sp>
           <p:nvSpPr>
-            <p:cNvPr id="21" name="shape_d61_OPERATION_O1" title="① デバイス操作を依頼">
+            <p:cNvPr id="88" name="shape_d61_OPERATION_O1" title="① デバイス操作を依頼">
               <a:extLst>
                 <a:ext uri="{FF2B5EF4-FFF2-40B4-BE49-F238E27FC236}">
                   <a16:creationId xmlns:a16="http://schemas.microsoft.com/office/drawing/2014/main" id="{8058877D-4849-1A92-B053-3D8531C67924}"/>
@@ -19889,8 +20584,8 @@
           </p:nvSpPr>
           <p:spPr>
             <a:xfrm>
-              <a:off x="8165318" y="631078"/>
-              <a:ext cx="1966251" cy="269552"/>
+              <a:off x="8165316" y="585648"/>
+              <a:ext cx="1966251" cy="360413"/>
             </a:xfrm>
             <a:prstGeom prst="roundRect">
               <a:avLst/>
@@ -19923,7 +20618,7 @@
             </a:fontRef>
           </p:style>
           <p:txBody>
-            <a:bodyPr wrap="square" lIns="32643" tIns="16322" rIns="32643" bIns="16322" rtlCol="0" anchor="ctr">
+            <a:bodyPr wrap="square" lIns="39668" tIns="19834" rIns="39668" bIns="19834" rtlCol="0" anchor="ctr">
               <a:spAutoFit/>
             </a:bodyPr>
             <a:lstStyle>
@@ -20024,21 +20719,27 @@
             <a:p>
               <a:pPr algn="ctr"/>
               <a:r>
-                <a:rPr kumimoji="0" lang="ja-JP" altLang="en-US" sz="428" b="1" kern="0">
+                <a:rPr kumimoji="0" lang="ja-JP" altLang="en-US" sz="520" b="1" i="0" u="none" strike="noStrike" kern="0" cap="none" spc="0" normalizeH="0" baseline="0">
+                  <a:ln>
+                    <a:noFill/>
+                  </a:ln>
                   <a:solidFill>
                     <a:srgbClr val="111111"/>
                   </a:solidFill>
+                  <a:effectLst/>
+                  <a:uLnTx/>
+                  <a:uFillTx/>
                   <a:latin typeface="Meiryo UI"/>
                   <a:ea typeface="Meiryo UI"/>
                 </a:rPr>
-                <a:t>(1) デバイス操作を依頼</a:t>
+                <a:t>2.1 デバイス操作を依頼</a:t>
               </a:r>
             </a:p>
           </p:txBody>
         </p:sp>
         <p:sp>
           <p:nvSpPr>
-            <p:cNvPr id="22" name="shape_d61_STOP_T1" title="① アプリ停止・破棄">
+            <p:cNvPr id="89" name="shape_d61_STOP_T1" title="① アプリ停止・破棄">
               <a:extLst>
                 <a:ext uri="{FF2B5EF4-FFF2-40B4-BE49-F238E27FC236}">
                   <a16:creationId xmlns:a16="http://schemas.microsoft.com/office/drawing/2014/main" id="{F83D0F65-F2E9-A765-FA9A-9A1EE8FB3FBD}"/>
@@ -20050,8 +20751,8 @@
           </p:nvSpPr>
           <p:spPr>
             <a:xfrm>
-              <a:off x="14576663" y="550917"/>
-              <a:ext cx="1796084" cy="449183"/>
+              <a:off x="14576663" y="548392"/>
+              <a:ext cx="1796085" cy="454234"/>
             </a:xfrm>
             <a:prstGeom prst="roundRect">
               <a:avLst/>
@@ -20084,7 +20785,7 @@
             </a:fontRef>
           </p:style>
           <p:txBody>
-            <a:bodyPr wrap="square" lIns="32643" tIns="16322" rIns="32643" bIns="16322" rtlCol="0" anchor="ctr">
+            <a:bodyPr wrap="square" lIns="39668" tIns="19834" rIns="39668" bIns="19834" rtlCol="0" anchor="ctr">
               <a:spAutoFit/>
             </a:bodyPr>
             <a:lstStyle>
@@ -20185,23 +20886,35 @@
             <a:p>
               <a:pPr algn="ctr"/>
               <a:r>
-                <a:rPr kumimoji="0" lang="ja-JP" altLang="en-US" sz="428" b="1" kern="0">
+                <a:rPr kumimoji="0" lang="ja-JP" altLang="en-US" sz="520" b="1" i="0" u="none" strike="noStrike" kern="0" cap="none" spc="0" normalizeH="0" baseline="0">
+                  <a:ln>
+                    <a:noFill/>
+                  </a:ln>
                   <a:solidFill>
                     <a:srgbClr val="111111"/>
                   </a:solidFill>
+                  <a:effectLst/>
+                  <a:uLnTx/>
+                  <a:uFillTx/>
                   <a:latin typeface="Meiryo UI"/>
                   <a:ea typeface="Meiryo UI"/>
                 </a:rPr>
-                <a:t>(1) ウィンドウ終了</a:t>
+                <a:t>3.1 ウィンドウ終了</a:t>
               </a:r>
             </a:p>
             <a:p>
               <a:pPr algn="ctr"/>
               <a:r>
-                <a:rPr kumimoji="0" lang="ja-JP" altLang="en-US" sz="428" b="1" kern="0">
+                <a:rPr kumimoji="0" lang="ja-JP" altLang="en-US" sz="520" b="1" i="0" u="none" strike="noStrike" kern="0" cap="none" spc="0" normalizeH="0" baseline="0">
+                  <a:ln>
+                    <a:noFill/>
+                  </a:ln>
                   <a:solidFill>
                     <a:srgbClr val="111111"/>
                   </a:solidFill>
+                  <a:effectLst/>
+                  <a:uLnTx/>
+                  <a:uFillTx/>
                   <a:latin typeface="Meiryo UI"/>
                   <a:ea typeface="Meiryo UI"/>
                 </a:rPr>
@@ -20212,7 +20925,7 @@
         </p:sp>
         <p:sp>
           <p:nvSpPr>
-            <p:cNvPr id="23" name="shape_d61_START_S1" title="① アプリ起動">
+            <p:cNvPr id="90" name="shape_d61_START_S1" title="① アプリ起動">
               <a:extLst>
                 <a:ext uri="{FF2B5EF4-FFF2-40B4-BE49-F238E27FC236}">
                   <a16:creationId xmlns:a16="http://schemas.microsoft.com/office/drawing/2014/main" id="{420EC924-6CC3-06AD-D5C8-66FB1028EA72}"/>
@@ -20224,8 +20937,8 @@
           </p:nvSpPr>
           <p:spPr>
             <a:xfrm>
-              <a:off x="1270197" y="616726"/>
-              <a:ext cx="1584969" cy="269552"/>
+              <a:off x="1270197" y="566911"/>
+              <a:ext cx="1584969" cy="369180"/>
             </a:xfrm>
             <a:prstGeom prst="roundRect">
               <a:avLst/>
@@ -20258,7 +20971,7 @@
             </a:fontRef>
           </p:style>
           <p:txBody>
-            <a:bodyPr wrap="square" lIns="32643" tIns="16322" rIns="32643" bIns="16322" rtlCol="0" anchor="ctr">
+            <a:bodyPr wrap="square" lIns="39668" tIns="19834" rIns="39668" bIns="19834" rtlCol="0" anchor="ctr">
               <a:spAutoFit/>
             </a:bodyPr>
             <a:lstStyle>
@@ -20359,21 +21072,27 @@
             <a:p>
               <a:pPr algn="ctr"/>
               <a:r>
-                <a:rPr kumimoji="0" lang="ja-JP" altLang="en-US" sz="428" b="1" kern="0">
+                <a:rPr kumimoji="0" lang="ja-JP" altLang="en-US" sz="520" b="1" i="0" u="none" strike="noStrike" kern="0" cap="none" spc="0" normalizeH="0" baseline="0">
+                  <a:ln>
+                    <a:noFill/>
+                  </a:ln>
                   <a:solidFill>
                     <a:srgbClr val="111111"/>
                   </a:solidFill>
+                  <a:effectLst/>
+                  <a:uLnTx/>
+                  <a:uFillTx/>
                   <a:latin typeface="Meiryo UI"/>
                   <a:ea typeface="Meiryo UI"/>
                 </a:rPr>
-                <a:t>(1) ウィンドウ生成</a:t>
+                <a:t>1.1 ウィンドウ生成</a:t>
               </a:r>
             </a:p>
           </p:txBody>
         </p:sp>
         <p:sp>
           <p:nvSpPr>
-            <p:cNvPr id="24" name="shape_d61_START_S5" title="運用開始">
+            <p:cNvPr id="91" name="shape_d61_START_S5" title="運用開始">
               <a:extLst>
                 <a:ext uri="{FF2B5EF4-FFF2-40B4-BE49-F238E27FC236}">
                   <a16:creationId xmlns:a16="http://schemas.microsoft.com/office/drawing/2014/main" id="{91B63198-2D4C-FA7F-F0FF-FCECA671E490}"/>
@@ -20385,8 +21104,8 @@
           </p:nvSpPr>
           <p:spPr>
             <a:xfrm>
-              <a:off x="3263088" y="6165682"/>
-              <a:ext cx="1605302" cy="628819"/>
+              <a:off x="3263089" y="6162136"/>
+              <a:ext cx="1605303" cy="635915"/>
             </a:xfrm>
             <a:prstGeom prst="roundRect">
               <a:avLst/>
@@ -20419,7 +21138,7 @@
             </a:fontRef>
           </p:style>
           <p:txBody>
-            <a:bodyPr wrap="square" lIns="32643" tIns="16322" rIns="32643" bIns="16322" rtlCol="0" anchor="ctr">
+            <a:bodyPr wrap="square" lIns="39668" tIns="19834" rIns="39668" bIns="19834" rtlCol="0" anchor="ctr">
               <a:spAutoFit/>
             </a:bodyPr>
             <a:lstStyle>
@@ -20520,23 +21239,35 @@
             <a:p>
               <a:pPr algn="ctr"/>
               <a:r>
-                <a:rPr kumimoji="0" lang="ja-JP" altLang="en-US" sz="428" b="1" kern="0">
+                <a:rPr kumimoji="0" lang="ja-JP" altLang="en-US" sz="520" b="1" i="0" u="none" strike="noStrike" kern="0" cap="none" spc="0" normalizeH="0" baseline="0">
+                  <a:ln>
+                    <a:noFill/>
+                  </a:ln>
                   <a:solidFill>
                     <a:srgbClr val="111111"/>
                   </a:solidFill>
+                  <a:effectLst/>
+                  <a:uLnTx/>
+                  <a:uFillTx/>
                   <a:latin typeface="Meiryo UI"/>
                   <a:ea typeface="Meiryo UI"/>
                 </a:rPr>
-                <a:t>(7) イベント受信を開始して</a:t>
+                <a:t>1.7 イベント受信を開始して</a:t>
               </a:r>
             </a:p>
             <a:p>
               <a:pPr algn="ctr"/>
               <a:r>
-                <a:rPr kumimoji="0" lang="ja-JP" altLang="en-US" sz="428" b="1" kern="0">
+                <a:rPr kumimoji="0" lang="ja-JP" altLang="en-US" sz="520" b="1" i="0" u="none" strike="noStrike" kern="0" cap="none" spc="0" normalizeH="0" baseline="0">
+                  <a:ln>
+                    <a:noFill/>
+                  </a:ln>
                   <a:solidFill>
                     <a:srgbClr val="111111"/>
                   </a:solidFill>
+                  <a:effectLst/>
+                  <a:uLnTx/>
+                  <a:uFillTx/>
                   <a:latin typeface="Meiryo UI"/>
                   <a:ea typeface="Meiryo UI"/>
                 </a:rPr>
@@ -20547,7 +21278,7 @@
         </p:sp>
         <p:cxnSp>
           <p:nvCxnSpPr>
-            <p:cNvPr id="25" name="edge_d61_03_STOP_T1_to_STOP_T2">
+            <p:cNvPr id="92" name="edge_d61_03_STOP_T1_to_STOP_T2">
               <a:extLst>
                 <a:ext uri="{FF2B5EF4-FFF2-40B4-BE49-F238E27FC236}">
                   <a16:creationId xmlns:a16="http://schemas.microsoft.com/office/drawing/2014/main" id="{E3262098-B642-C225-842A-7F3647EDBB65}"/>
@@ -20556,15 +21287,15 @@
             </p:cNvPr>
             <p:cNvCxnSpPr>
               <a:cxnSpLocks/>
-              <a:stCxn id="22" idx="2"/>
-              <a:endCxn id="9" idx="0"/>
+              <a:stCxn id="89" idx="2"/>
+              <a:endCxn id="76" idx="0"/>
             </p:cNvCxnSpPr>
             <p:nvPr/>
           </p:nvCxnSpPr>
           <p:spPr>
             <a:xfrm>
-              <a:off x="15474704" y="1000101"/>
-              <a:ext cx="2" cy="663990"/>
+              <a:off x="15474705" y="1002626"/>
+              <a:ext cx="2" cy="371301"/>
             </a:xfrm>
             <a:prstGeom prst="straightConnector1">
               <a:avLst/>
@@ -20596,7 +21327,7 @@
         </p:cxnSp>
         <p:cxnSp>
           <p:nvCxnSpPr>
-            <p:cNvPr id="26" name="edge_d61_04_STOP_T2_to_STOP_T6" descr="いいえ" title="いいえ">
+            <p:cNvPr id="93" name="edge_d61_04_STOP_T2_to_STOP_T6" descr="いいえ" title="いいえ">
               <a:extLst>
                 <a:ext uri="{FF2B5EF4-FFF2-40B4-BE49-F238E27FC236}">
                   <a16:creationId xmlns:a16="http://schemas.microsoft.com/office/drawing/2014/main" id="{F40E1D04-782A-EEE7-AEDA-BE7CB5FCDE50}"/>
@@ -20605,19 +21336,19 @@
             </p:cNvPr>
             <p:cNvCxnSpPr>
               <a:cxnSpLocks/>
-              <a:stCxn id="9" idx="1"/>
-              <a:endCxn id="63" idx="1"/>
+              <a:stCxn id="76" idx="1"/>
+              <a:endCxn id="130" idx="1"/>
             </p:cNvCxnSpPr>
             <p:nvPr/>
           </p:nvCxnSpPr>
           <p:spPr>
             <a:xfrm rot="10800000" flipH="1" flipV="1">
-              <a:off x="14109781" y="1906076"/>
-              <a:ext cx="650071" cy="6610775"/>
+              <a:off x="14109781" y="1906075"/>
+              <a:ext cx="650070" cy="6610774"/>
             </a:xfrm>
             <a:prstGeom prst="bentConnector3">
               <a:avLst>
-                <a:gd name="adj1" fmla="val -87624"/>
+                <a:gd name="adj1" fmla="val -72107"/>
               </a:avLst>
             </a:prstGeom>
             <a:noFill/>
@@ -20647,7 +21378,7 @@
         </p:cxnSp>
         <p:cxnSp>
           <p:nvCxnSpPr>
-            <p:cNvPr id="27" name="edge_d61_05_STOP_T2_to_STOP_T3" descr="はい" title="はい">
+            <p:cNvPr id="94" name="edge_d61_05_STOP_T2_to_STOP_T3" descr="はい" title="はい">
               <a:extLst>
                 <a:ext uri="{FF2B5EF4-FFF2-40B4-BE49-F238E27FC236}">
                   <a16:creationId xmlns:a16="http://schemas.microsoft.com/office/drawing/2014/main" id="{A4522CFC-BAE3-4005-4D4C-4F65A15D7B88}"/>
@@ -20656,15 +21387,15 @@
             </p:cNvPr>
             <p:cNvCxnSpPr>
               <a:cxnSpLocks/>
-              <a:stCxn id="9" idx="2"/>
-              <a:endCxn id="13" idx="0"/>
+              <a:stCxn id="76" idx="2"/>
+              <a:endCxn id="80" idx="0"/>
             </p:cNvCxnSpPr>
             <p:nvPr/>
           </p:nvCxnSpPr>
           <p:spPr>
             <a:xfrm rot="16200000" flipH="1">
-              <a:off x="14870828" y="2751934"/>
-              <a:ext cx="1219284" cy="11529"/>
+              <a:off x="15015911" y="2897015"/>
+              <a:ext cx="929121" cy="11530"/>
             </a:xfrm>
             <a:prstGeom prst="bentConnector3">
               <a:avLst>
@@ -20698,7 +21429,7 @@
         </p:cxnSp>
         <p:cxnSp>
           <p:nvCxnSpPr>
-            <p:cNvPr id="28" name="edge_d61_07_STOP_T4_to_STOP_T6" descr="はい" title="はい">
+            <p:cNvPr id="95" name="edge_d61_07_STOP_T4_to_STOP_T6" descr="はい" title="はい">
               <a:extLst>
                 <a:ext uri="{FF2B5EF4-FFF2-40B4-BE49-F238E27FC236}">
                   <a16:creationId xmlns:a16="http://schemas.microsoft.com/office/drawing/2014/main" id="{DA868FCF-49D8-65B0-02EF-EF52F5296831}"/>
@@ -20707,19 +21438,19 @@
             </p:cNvPr>
             <p:cNvCxnSpPr>
               <a:cxnSpLocks/>
-              <a:stCxn id="61" idx="3"/>
-              <a:endCxn id="63" idx="3"/>
+              <a:stCxn id="128" idx="3"/>
+              <a:endCxn id="130" idx="3"/>
             </p:cNvCxnSpPr>
             <p:nvPr/>
           </p:nvCxnSpPr>
           <p:spPr>
             <a:xfrm flipH="1">
-              <a:off x="16261158" y="5937130"/>
-              <a:ext cx="689700" cy="2579721"/>
+              <a:off x="16261156" y="5937131"/>
+              <a:ext cx="689703" cy="2579718"/>
             </a:xfrm>
             <a:prstGeom prst="bentConnector3">
               <a:avLst>
-                <a:gd name="adj1" fmla="val -82589"/>
+                <a:gd name="adj1" fmla="val -67964"/>
               </a:avLst>
             </a:prstGeom>
             <a:noFill/>
@@ -20749,7 +21480,7 @@
         </p:cxnSp>
         <p:cxnSp>
           <p:nvCxnSpPr>
-            <p:cNvPr id="29" name="edge_d61_08_STOP_T4_to_STOP_T5" descr="いいえ" title="いいえ">
+            <p:cNvPr id="96" name="edge_d61_08_STOP_T4_to_STOP_T5" descr="いいえ" title="いいえ">
               <a:extLst>
                 <a:ext uri="{FF2B5EF4-FFF2-40B4-BE49-F238E27FC236}">
                   <a16:creationId xmlns:a16="http://schemas.microsoft.com/office/drawing/2014/main" id="{86CEFADD-753E-BC6C-D3ED-AC23BA9CB9DD}"/>
@@ -20758,15 +21489,15 @@
             </p:cNvPr>
             <p:cNvCxnSpPr>
               <a:cxnSpLocks/>
-              <a:stCxn id="61" idx="2"/>
-              <a:endCxn id="62" idx="0"/>
+              <a:stCxn id="128" idx="2"/>
+              <a:endCxn id="129" idx="0"/>
             </p:cNvCxnSpPr>
             <p:nvPr/>
           </p:nvCxnSpPr>
           <p:spPr>
             <a:xfrm>
-              <a:off x="15486239" y="6340375"/>
-              <a:ext cx="23664" cy="750689"/>
+              <a:off x="15486238" y="6344908"/>
+              <a:ext cx="23665" cy="746156"/>
             </a:xfrm>
             <a:prstGeom prst="straightConnector1">
               <a:avLst/>
@@ -20798,7 +21529,7 @@
         </p:cxnSp>
         <p:cxnSp>
           <p:nvCxnSpPr>
-            <p:cNvPr id="30" name="edge_d61_09_STOP_T5_to_STOP_T6">
+            <p:cNvPr id="97" name="edge_d61_09_STOP_T5_to_STOP_T6">
               <a:extLst>
                 <a:ext uri="{FF2B5EF4-FFF2-40B4-BE49-F238E27FC236}">
                   <a16:creationId xmlns:a16="http://schemas.microsoft.com/office/drawing/2014/main" id="{ECFBA5C2-C1C8-92BC-4286-EEF2BF998CF4}"/>
@@ -20807,15 +21538,15 @@
             </p:cNvPr>
             <p:cNvCxnSpPr>
               <a:cxnSpLocks/>
-              <a:stCxn id="62" idx="2"/>
-              <a:endCxn id="63" idx="0"/>
+              <a:stCxn id="129" idx="2"/>
+              <a:endCxn id="130" idx="0"/>
             </p:cNvCxnSpPr>
             <p:nvPr/>
           </p:nvCxnSpPr>
           <p:spPr>
             <a:xfrm>
-              <a:off x="15509903" y="8005464"/>
-              <a:ext cx="603" cy="376609"/>
+              <a:off x="15509903" y="8005465"/>
+              <a:ext cx="601" cy="375107"/>
             </a:xfrm>
             <a:prstGeom prst="straightConnector1">
               <a:avLst/>
@@ -20847,7 +21578,7 @@
         </p:cxnSp>
         <p:cxnSp>
           <p:nvCxnSpPr>
-            <p:cNvPr id="31" name="edge_d61_10_OPERATION_O1_to_OPERATION_O2">
+            <p:cNvPr id="98" name="edge_d61_10_OPERATION_O1_to_OPERATION_O2">
               <a:extLst>
                 <a:ext uri="{FF2B5EF4-FFF2-40B4-BE49-F238E27FC236}">
                   <a16:creationId xmlns:a16="http://schemas.microsoft.com/office/drawing/2014/main" id="{3A204448-1898-97D8-BE78-7824CCA6AA09}"/>
@@ -20894,7 +21625,7 @@
         </p:cxnSp>
         <p:cxnSp>
           <p:nvCxnSpPr>
-            <p:cNvPr id="32" name="edge_d61_11_OPERATION_O2_to_OPERATION_O3">
+            <p:cNvPr id="99" name="edge_d61_11_OPERATION_O2_to_OPERATION_O3">
               <a:extLst>
                 <a:ext uri="{FF2B5EF4-FFF2-40B4-BE49-F238E27FC236}">
                   <a16:creationId xmlns:a16="http://schemas.microsoft.com/office/drawing/2014/main" id="{3E991B3A-BE19-EAD8-6431-06C436BB6FD6}"/>
@@ -20941,7 +21672,7 @@
         </p:cxnSp>
         <p:cxnSp>
           <p:nvCxnSpPr>
-            <p:cNvPr id="33" name="edge_d61_12_OPERATION_O3_to_OPERATION_O4">
+            <p:cNvPr id="100" name="edge_d61_12_OPERATION_O3_to_OPERATION_O4">
               <a:extLst>
                 <a:ext uri="{FF2B5EF4-FFF2-40B4-BE49-F238E27FC236}">
                   <a16:creationId xmlns:a16="http://schemas.microsoft.com/office/drawing/2014/main" id="{716E9255-9920-6B9B-FEA2-F3AC342B61D8}"/>
@@ -20950,8 +21681,8 @@
             </p:cNvPr>
             <p:cNvCxnSpPr>
               <a:cxnSpLocks/>
-              <a:stCxn id="18" idx="2"/>
-              <a:endCxn id="11" idx="0"/>
+              <a:stCxn id="85" idx="2"/>
+              <a:endCxn id="78" idx="0"/>
             </p:cNvCxnSpPr>
             <p:nvPr/>
           </p:nvCxnSpPr>
@@ -20990,7 +21721,7 @@
         </p:cxnSp>
         <p:cxnSp>
           <p:nvCxnSpPr>
-            <p:cNvPr id="34" name="edge_d61_13_OPERATION_O4_to_OPERATION_O5" descr="はい" title="はい">
+            <p:cNvPr id="101" name="edge_d61_13_OPERATION_O4_to_OPERATION_O5" descr="はい" title="はい">
               <a:extLst>
                 <a:ext uri="{FF2B5EF4-FFF2-40B4-BE49-F238E27FC236}">
                   <a16:creationId xmlns:a16="http://schemas.microsoft.com/office/drawing/2014/main" id="{478FB962-053D-A1F0-D7FF-41C15EC71D54}"/>
@@ -21039,7 +21770,7 @@
         </p:cxnSp>
         <p:cxnSp>
           <p:nvCxnSpPr>
-            <p:cNvPr id="35" name="edge_d61_14_OPERATION_O5_to_OPERATION_O6">
+            <p:cNvPr id="102" name="edge_d61_14_OPERATION_O5_to_OPERATION_O6">
               <a:extLst>
                 <a:ext uri="{FF2B5EF4-FFF2-40B4-BE49-F238E27FC236}">
                   <a16:creationId xmlns:a16="http://schemas.microsoft.com/office/drawing/2014/main" id="{39893A22-935A-E4C1-5FC8-21322DC6AB58}"/>
@@ -21048,8 +21779,8 @@
             </p:cNvPr>
             <p:cNvCxnSpPr>
               <a:cxnSpLocks/>
-              <a:stCxn id="19" idx="2"/>
-              <a:endCxn id="10" idx="1"/>
+              <a:stCxn id="86" idx="2"/>
+              <a:endCxn id="77" idx="1"/>
             </p:cNvCxnSpPr>
             <p:nvPr/>
           </p:nvCxnSpPr>
@@ -21088,7 +21819,7 @@
         </p:cxnSp>
         <p:cxnSp>
           <p:nvCxnSpPr>
-            <p:cNvPr id="36" name="edge_d61_15_OPERATION_O4_to_OPERATION_COMM_ERROR" descr="いいえ" title="いいえ">
+            <p:cNvPr id="103" name="edge_d61_15_OPERATION_O4_to_OPERATION_COMM_ERROR" descr="いいえ" title="いいえ">
               <a:extLst>
                 <a:ext uri="{FF2B5EF4-FFF2-40B4-BE49-F238E27FC236}">
                   <a16:creationId xmlns:a16="http://schemas.microsoft.com/office/drawing/2014/main" id="{B386291B-3D64-669E-AF04-34556D665131}"/>
@@ -21097,15 +21828,15 @@
             </p:cNvPr>
             <p:cNvCxnSpPr>
               <a:cxnSpLocks/>
-              <a:stCxn id="11" idx="2"/>
-              <a:endCxn id="15" idx="0"/>
+              <a:stCxn id="78" idx="2"/>
+              <a:endCxn id="82" idx="0"/>
             </p:cNvCxnSpPr>
             <p:nvPr/>
           </p:nvCxnSpPr>
           <p:spPr>
             <a:xfrm>
-              <a:off x="9146116" y="5669865"/>
-              <a:ext cx="6623" cy="1253987"/>
+              <a:off x="9146119" y="5669869"/>
+              <a:ext cx="6621" cy="1251460"/>
             </a:xfrm>
             <a:prstGeom prst="straightConnector1">
               <a:avLst/>
@@ -21137,7 +21868,7 @@
         </p:cxnSp>
         <p:cxnSp>
           <p:nvCxnSpPr>
-            <p:cNvPr id="37" name="edge_d61_16_OPERATION_COMM_ERROR_to_OPERATION_O6">
+            <p:cNvPr id="104" name="edge_d61_16_OPERATION_COMM_ERROR_to_OPERATION_O6">
               <a:extLst>
                 <a:ext uri="{FF2B5EF4-FFF2-40B4-BE49-F238E27FC236}">
                   <a16:creationId xmlns:a16="http://schemas.microsoft.com/office/drawing/2014/main" id="{13A258D9-DCAF-AB0D-8754-E81D912CCED8}"/>
@@ -21146,15 +21877,15 @@
             </p:cNvPr>
             <p:cNvCxnSpPr>
               <a:cxnSpLocks/>
-              <a:stCxn id="15" idx="2"/>
-              <a:endCxn id="10" idx="0"/>
+              <a:stCxn id="82" idx="2"/>
+              <a:endCxn id="77" idx="0"/>
             </p:cNvCxnSpPr>
             <p:nvPr/>
           </p:nvCxnSpPr>
           <p:spPr>
             <a:xfrm>
-              <a:off x="9152739" y="7373035"/>
-              <a:ext cx="0" cy="593502"/>
+              <a:off x="9152740" y="7375563"/>
+              <a:ext cx="0" cy="590975"/>
             </a:xfrm>
             <a:prstGeom prst="straightConnector1">
               <a:avLst/>
@@ -21186,7 +21917,7 @@
         </p:cxnSp>
         <p:cxnSp>
           <p:nvCxnSpPr>
-            <p:cNvPr id="38" name="edge_d61_17_OPERATION_O6_to_OPERATION_O1" descr="はい" title="はい">
+            <p:cNvPr id="105" name="edge_d61_17_OPERATION_O6_to_OPERATION_O1" descr="はい" title="はい">
               <a:extLst>
                 <a:ext uri="{FF2B5EF4-FFF2-40B4-BE49-F238E27FC236}">
                   <a16:creationId xmlns:a16="http://schemas.microsoft.com/office/drawing/2014/main" id="{D544C1D7-7DFE-F87F-24E9-1866F90BFEAB}"/>
@@ -21195,19 +21926,19 @@
             </p:cNvPr>
             <p:cNvCxnSpPr>
               <a:cxnSpLocks/>
-              <a:stCxn id="10" idx="3"/>
-              <a:endCxn id="21" idx="3"/>
+              <a:stCxn id="77" idx="3"/>
+              <a:endCxn id="88" idx="3"/>
             </p:cNvCxnSpPr>
             <p:nvPr/>
           </p:nvCxnSpPr>
           <p:spPr>
             <a:xfrm flipH="1" flipV="1">
-              <a:off x="10131569" y="765855"/>
-              <a:ext cx="709433" cy="7744016"/>
+              <a:off x="10131567" y="765855"/>
+              <a:ext cx="709435" cy="7744016"/>
             </a:xfrm>
             <a:prstGeom prst="bentConnector3">
               <a:avLst>
-                <a:gd name="adj1" fmla="val -80292"/>
+                <a:gd name="adj1" fmla="val -66073"/>
               </a:avLst>
             </a:prstGeom>
             <a:noFill/>
@@ -21237,7 +21968,7 @@
         </p:cxnSp>
         <p:cxnSp>
           <p:nvCxnSpPr>
-            <p:cNvPr id="39" name="edge_d61_19_START_S1_to_START_S2">
+            <p:cNvPr id="106" name="edge_d61_19_START_S1_to_START_S2">
               <a:extLst>
                 <a:ext uri="{FF2B5EF4-FFF2-40B4-BE49-F238E27FC236}">
                   <a16:creationId xmlns:a16="http://schemas.microsoft.com/office/drawing/2014/main" id="{2BB63765-DBF7-2694-49B8-63BB5312B3F1}"/>
@@ -21246,15 +21977,15 @@
             </p:cNvPr>
             <p:cNvCxnSpPr>
               <a:cxnSpLocks/>
-              <a:stCxn id="23" idx="2"/>
-              <a:endCxn id="16" idx="0"/>
+              <a:stCxn id="90" idx="2"/>
+              <a:endCxn id="83" idx="0"/>
             </p:cNvCxnSpPr>
             <p:nvPr/>
           </p:nvCxnSpPr>
           <p:spPr>
             <a:xfrm>
-              <a:off x="2062683" y="886278"/>
-              <a:ext cx="0" cy="358554"/>
+              <a:off x="2062682" y="936091"/>
+              <a:ext cx="0" cy="305447"/>
             </a:xfrm>
             <a:prstGeom prst="straightConnector1">
               <a:avLst/>
@@ -21286,7 +22017,7 @@
         </p:cxnSp>
         <p:cxnSp>
           <p:nvCxnSpPr>
-            <p:cNvPr id="40" name="edge_d61_20_START_S2_to_START_S3">
+            <p:cNvPr id="107" name="edge_d61_20_START_S2_to_START_S3">
               <a:extLst>
                 <a:ext uri="{FF2B5EF4-FFF2-40B4-BE49-F238E27FC236}">
                   <a16:creationId xmlns:a16="http://schemas.microsoft.com/office/drawing/2014/main" id="{A72961B9-1121-36AA-4A17-C5DC310ACEE4}"/>
@@ -21295,15 +22026,15 @@
             </p:cNvPr>
             <p:cNvCxnSpPr>
               <a:cxnSpLocks/>
-              <a:stCxn id="16" idx="2"/>
-              <a:endCxn id="14" idx="0"/>
+              <a:stCxn id="83" idx="2"/>
+              <a:endCxn id="81" idx="0"/>
             </p:cNvCxnSpPr>
             <p:nvPr/>
           </p:nvCxnSpPr>
           <p:spPr>
             <a:xfrm>
-              <a:off x="2062683" y="1814354"/>
-              <a:ext cx="4837" cy="351954"/>
+              <a:off x="2062682" y="1817648"/>
+              <a:ext cx="4837" cy="277767"/>
             </a:xfrm>
             <a:prstGeom prst="straightConnector1">
               <a:avLst/>
@@ -21335,7 +22066,7 @@
         </p:cxnSp>
         <p:cxnSp>
           <p:nvCxnSpPr>
-            <p:cNvPr id="41" name="edge_d61_21_START_S3_to_START_S4">
+            <p:cNvPr id="108" name="edge_d61_21_START_S3_to_START_S4">
               <a:extLst>
                 <a:ext uri="{FF2B5EF4-FFF2-40B4-BE49-F238E27FC236}">
                   <a16:creationId xmlns:a16="http://schemas.microsoft.com/office/drawing/2014/main" id="{0CBA8BC0-DD83-66AF-9819-2C58A2170C5A}"/>
@@ -21344,15 +22075,15 @@
             </p:cNvPr>
             <p:cNvCxnSpPr>
               <a:cxnSpLocks/>
-              <a:stCxn id="57" idx="2"/>
-              <a:endCxn id="12" idx="0"/>
+              <a:stCxn id="124" idx="2"/>
+              <a:endCxn id="79" idx="0"/>
             </p:cNvCxnSpPr>
             <p:nvPr/>
           </p:nvCxnSpPr>
           <p:spPr>
             <a:xfrm>
-              <a:off x="2062683" y="4133017"/>
-              <a:ext cx="4837" cy="369373"/>
+              <a:off x="2062680" y="4168701"/>
+              <a:ext cx="4839" cy="329155"/>
             </a:xfrm>
             <a:prstGeom prst="straightConnector1">
               <a:avLst/>
@@ -21384,7 +22115,7 @@
         </p:cxnSp>
         <p:cxnSp>
           <p:nvCxnSpPr>
-            <p:cNvPr id="42" name="edge_d61_22_START_S4_to_START_S5" descr="はい" title="はい">
+            <p:cNvPr id="109" name="edge_d61_22_START_S4_to_START_S5" descr="はい" title="はい">
               <a:extLst>
                 <a:ext uri="{FF2B5EF4-FFF2-40B4-BE49-F238E27FC236}">
                   <a16:creationId xmlns:a16="http://schemas.microsoft.com/office/drawing/2014/main" id="{BDAB64AA-0785-2B57-0B62-9F8E5755C686}"/>
@@ -21393,15 +22124,15 @@
             </p:cNvPr>
             <p:cNvCxnSpPr>
               <a:cxnSpLocks/>
-              <a:stCxn id="12" idx="3"/>
-              <a:endCxn id="24" idx="0"/>
+              <a:stCxn id="79" idx="3"/>
+              <a:endCxn id="91" idx="0"/>
             </p:cNvCxnSpPr>
             <p:nvPr/>
           </p:nvCxnSpPr>
           <p:spPr>
             <a:xfrm>
-              <a:off x="3860785" y="4905635"/>
-              <a:ext cx="204955" cy="1260047"/>
+              <a:off x="3860786" y="4905634"/>
+              <a:ext cx="204953" cy="1256502"/>
             </a:xfrm>
             <a:prstGeom prst="bentConnector2">
               <a:avLst/>
@@ -21433,7 +22164,7 @@
         </p:cxnSp>
         <p:cxnSp>
           <p:nvCxnSpPr>
-            <p:cNvPr id="43" name="edge_d61_23_START_S4_to_START_START_ERROR" descr="いいえ" title="いいえ">
+            <p:cNvPr id="110" name="edge_d61_23_START_S4_to_START_START_ERROR" descr="いいえ" title="いいえ">
               <a:extLst>
                 <a:ext uri="{FF2B5EF4-FFF2-40B4-BE49-F238E27FC236}">
                   <a16:creationId xmlns:a16="http://schemas.microsoft.com/office/drawing/2014/main" id="{05022DB0-DC57-0AA1-246C-8C59862B61C1}"/>
@@ -21442,15 +22173,15 @@
             </p:cNvPr>
             <p:cNvCxnSpPr>
               <a:cxnSpLocks/>
-              <a:stCxn id="12" idx="2"/>
-              <a:endCxn id="20" idx="0"/>
+              <a:stCxn id="79" idx="2"/>
+              <a:endCxn id="87" idx="0"/>
             </p:cNvCxnSpPr>
             <p:nvPr/>
           </p:nvCxnSpPr>
           <p:spPr>
             <a:xfrm rot="5400000">
-              <a:off x="845294" y="6530939"/>
-              <a:ext cx="2444453" cy="31645"/>
+              <a:off x="883587" y="6497344"/>
+              <a:ext cx="2367867" cy="26042"/>
             </a:xfrm>
             <a:prstGeom prst="bentConnector3">
               <a:avLst>
@@ -21484,7 +22215,7 @@
         </p:cxnSp>
         <p:sp>
           <p:nvSpPr>
-            <p:cNvPr id="44" name="edge_label_d61_04_STOP_T2_to_STOP_T6">
+            <p:cNvPr id="111" name="edge_label_d61_04_STOP_T2_to_STOP_T6">
               <a:extLst>
                 <a:ext uri="{FF2B5EF4-FFF2-40B4-BE49-F238E27FC236}">
                   <a16:creationId xmlns:a16="http://schemas.microsoft.com/office/drawing/2014/main" id="{DA98F415-AA01-8E69-F37E-7AF5A1CADD49}"/>
@@ -21496,8 +22227,8 @@
           </p:nvSpPr>
           <p:spPr>
             <a:xfrm>
-              <a:off x="13564642" y="2997678"/>
-              <a:ext cx="967906" cy="200258"/>
+              <a:off x="13564643" y="2962082"/>
+              <a:ext cx="967907" cy="271452"/>
             </a:xfrm>
             <a:prstGeom prst="rect">
               <a:avLst/>
@@ -21512,7 +22243,7 @@
             </a:ln>
           </p:spPr>
           <p:txBody>
-            <a:bodyPr vert="horz" wrap="square" lIns="27203" tIns="10881" rIns="27203" bIns="10881" rtlCol="0" anchor="ctr">
+            <a:bodyPr vert="horz" wrap="square" lIns="33057" tIns="13223" rIns="33057" bIns="13223" rtlCol="0" anchor="ctr">
               <a:spAutoFit/>
             </a:bodyPr>
             <a:lstStyle>
@@ -21613,10 +22344,16 @@
             <a:p>
               <a:pPr algn="ctr"/>
               <a:r>
-                <a:rPr kumimoji="0" lang="ja-JP" altLang="en-US" sz="385" kern="0">
+                <a:rPr kumimoji="0" lang="ja-JP" altLang="en-US" sz="468" b="0" i="0" u="none" strike="noStrike" kern="0" cap="none" spc="0" normalizeH="0" baseline="0">
+                  <a:ln>
+                    <a:noFill/>
+                  </a:ln>
                   <a:solidFill>
                     <a:srgbClr val="000000"/>
                   </a:solidFill>
+                  <a:effectLst/>
+                  <a:uLnTx/>
+                  <a:uFillTx/>
                   <a:latin typeface="Meiryo UI"/>
                   <a:ea typeface="Meiryo UI"/>
                 </a:rPr>
@@ -21627,7 +22364,7 @@
         </p:sp>
         <p:sp>
           <p:nvSpPr>
-            <p:cNvPr id="45" name="edge_label_d61_05_STOP_T2_to_STOP_T3">
+            <p:cNvPr id="112" name="edge_label_d61_05_STOP_T2_to_STOP_T3">
               <a:extLst>
                 <a:ext uri="{FF2B5EF4-FFF2-40B4-BE49-F238E27FC236}">
                   <a16:creationId xmlns:a16="http://schemas.microsoft.com/office/drawing/2014/main" id="{520B557B-C1C6-745D-A42F-3CF05530F6B7}"/>
@@ -21639,8 +22376,8 @@
           </p:nvSpPr>
           <p:spPr>
             <a:xfrm>
-              <a:off x="15021467" y="2757962"/>
-              <a:ext cx="978075" cy="200258"/>
+              <a:off x="15021468" y="2720332"/>
+              <a:ext cx="978074" cy="275520"/>
             </a:xfrm>
             <a:prstGeom prst="rect">
               <a:avLst/>
@@ -21655,7 +22392,7 @@
             </a:ln>
           </p:spPr>
           <p:txBody>
-            <a:bodyPr vert="horz" wrap="square" lIns="27203" tIns="10881" rIns="27203" bIns="10881" rtlCol="0" anchor="ctr">
+            <a:bodyPr vert="horz" wrap="square" lIns="33057" tIns="13223" rIns="33057" bIns="13223" rtlCol="0" anchor="ctr">
               <a:spAutoFit/>
             </a:bodyPr>
             <a:lstStyle>
@@ -21756,10 +22493,16 @@
             <a:p>
               <a:pPr algn="ctr"/>
               <a:r>
-                <a:rPr kumimoji="0" lang="ja-JP" altLang="en-US" sz="385" kern="0">
+                <a:rPr kumimoji="0" lang="ja-JP" altLang="en-US" sz="468" b="0" i="0" u="none" strike="noStrike" kern="0" cap="none" spc="0" normalizeH="0" baseline="0">
+                  <a:ln>
+                    <a:noFill/>
+                  </a:ln>
                   <a:solidFill>
                     <a:srgbClr val="000000"/>
                   </a:solidFill>
+                  <a:effectLst/>
+                  <a:uLnTx/>
+                  <a:uFillTx/>
                   <a:latin typeface="Meiryo UI"/>
                   <a:ea typeface="Meiryo UI"/>
                 </a:rPr>
@@ -21770,7 +22513,7 @@
         </p:sp>
         <p:sp>
           <p:nvSpPr>
-            <p:cNvPr id="46" name="edge_label_d61_07_STOP_T4_to_STOP_T6">
+            <p:cNvPr id="113" name="edge_label_d61_07_STOP_T4_to_STOP_T6">
               <a:extLst>
                 <a:ext uri="{FF2B5EF4-FFF2-40B4-BE49-F238E27FC236}">
                   <a16:creationId xmlns:a16="http://schemas.microsoft.com/office/drawing/2014/main" id="{551645CC-6C93-BBEF-09AE-ADE87D6F8838}"/>
@@ -21782,8 +22525,8 @@
           </p:nvSpPr>
           <p:spPr>
             <a:xfrm>
-              <a:off x="16725177" y="6472430"/>
-              <a:ext cx="943504" cy="200258"/>
+              <a:off x="16725176" y="6436593"/>
+              <a:ext cx="943505" cy="271930"/>
             </a:xfrm>
             <a:prstGeom prst="rect">
               <a:avLst/>
@@ -21798,7 +22541,7 @@
             </a:ln>
           </p:spPr>
           <p:txBody>
-            <a:bodyPr vert="horz" wrap="square" lIns="27203" tIns="10881" rIns="27203" bIns="10881" rtlCol="0" anchor="ctr">
+            <a:bodyPr vert="horz" wrap="square" lIns="33057" tIns="13223" rIns="33057" bIns="13223" rtlCol="0" anchor="ctr">
               <a:spAutoFit/>
             </a:bodyPr>
             <a:lstStyle>
@@ -21899,10 +22642,16 @@
             <a:p>
               <a:pPr algn="ctr"/>
               <a:r>
-                <a:rPr kumimoji="0" lang="ja-JP" altLang="en-US" sz="385" kern="0">
+                <a:rPr kumimoji="0" lang="ja-JP" altLang="en-US" sz="468" b="0" i="0" u="none" strike="noStrike" kern="0" cap="none" spc="0" normalizeH="0" baseline="0">
+                  <a:ln>
+                    <a:noFill/>
+                  </a:ln>
                   <a:solidFill>
                     <a:srgbClr val="000000"/>
                   </a:solidFill>
+                  <a:effectLst/>
+                  <a:uLnTx/>
+                  <a:uFillTx/>
                   <a:latin typeface="Meiryo UI"/>
                   <a:ea typeface="Meiryo UI"/>
                 </a:rPr>
@@ -21913,7 +22662,7 @@
         </p:sp>
         <p:sp>
           <p:nvSpPr>
-            <p:cNvPr id="47" name="edge_label_d61_08_STOP_T4_to_STOP_T5">
+            <p:cNvPr id="114" name="edge_label_d61_08_STOP_T4_to_STOP_T5">
               <a:extLst>
                 <a:ext uri="{FF2B5EF4-FFF2-40B4-BE49-F238E27FC236}">
                   <a16:creationId xmlns:a16="http://schemas.microsoft.com/office/drawing/2014/main" id="{D75DCAAA-CD7A-41F4-AD7C-39805F167673}"/>
@@ -21925,8 +22674,8 @@
           </p:nvSpPr>
           <p:spPr>
             <a:xfrm>
-              <a:off x="15069374" y="6588980"/>
-              <a:ext cx="959773" cy="200258"/>
+              <a:off x="15069374" y="6551350"/>
+              <a:ext cx="959773" cy="275519"/>
             </a:xfrm>
             <a:prstGeom prst="rect">
               <a:avLst/>
@@ -21941,7 +22690,7 @@
             </a:ln>
           </p:spPr>
           <p:txBody>
-            <a:bodyPr vert="horz" wrap="square" lIns="27203" tIns="10881" rIns="27203" bIns="10881" rtlCol="0" anchor="ctr">
+            <a:bodyPr vert="horz" wrap="square" lIns="33057" tIns="13223" rIns="33057" bIns="13223" rtlCol="0" anchor="ctr">
               <a:spAutoFit/>
             </a:bodyPr>
             <a:lstStyle>
@@ -22042,10 +22791,16 @@
             <a:p>
               <a:pPr algn="ctr"/>
               <a:r>
-                <a:rPr kumimoji="0" lang="ja-JP" altLang="en-US" sz="385" kern="0">
+                <a:rPr kumimoji="0" lang="ja-JP" altLang="en-US" sz="468" b="0" i="0" u="none" strike="noStrike" kern="0" cap="none" spc="0" normalizeH="0" baseline="0">
+                  <a:ln>
+                    <a:noFill/>
+                  </a:ln>
                   <a:solidFill>
                     <a:srgbClr val="000000"/>
                   </a:solidFill>
+                  <a:effectLst/>
+                  <a:uLnTx/>
+                  <a:uFillTx/>
                   <a:latin typeface="Meiryo UI"/>
                   <a:ea typeface="Meiryo UI"/>
                 </a:rPr>
@@ -22056,7 +22811,7 @@
         </p:sp>
         <p:sp>
           <p:nvSpPr>
-            <p:cNvPr id="48" name="edge_label_d61_13_OPERATION_O4_to_OPERATION_O5">
+            <p:cNvPr id="115" name="edge_label_d61_13_OPERATION_O4_to_OPERATION_O5">
               <a:extLst>
                 <a:ext uri="{FF2B5EF4-FFF2-40B4-BE49-F238E27FC236}">
                   <a16:creationId xmlns:a16="http://schemas.microsoft.com/office/drawing/2014/main" id="{2DFAE507-9F34-2908-80C0-BB54B3EDC8B2}"/>
@@ -22068,8 +22823,8 @@
           </p:nvSpPr>
           <p:spPr>
             <a:xfrm>
-              <a:off x="6601404" y="5483573"/>
-              <a:ext cx="953673" cy="200258"/>
+              <a:off x="6601404" y="5448156"/>
+              <a:ext cx="953672" cy="271094"/>
             </a:xfrm>
             <a:prstGeom prst="rect">
               <a:avLst/>
@@ -22084,7 +22839,7 @@
             </a:ln>
           </p:spPr>
           <p:txBody>
-            <a:bodyPr vert="horz" wrap="square" lIns="27203" tIns="10881" rIns="27203" bIns="10881" rtlCol="0" anchor="ctr">
+            <a:bodyPr vert="horz" wrap="square" lIns="33057" tIns="13223" rIns="33057" bIns="13223" rtlCol="0" anchor="ctr">
               <a:spAutoFit/>
             </a:bodyPr>
             <a:lstStyle>
@@ -22185,10 +22940,16 @@
             <a:p>
               <a:pPr algn="ctr"/>
               <a:r>
-                <a:rPr kumimoji="0" lang="ja-JP" altLang="en-US" sz="385" kern="0">
+                <a:rPr kumimoji="0" lang="ja-JP" altLang="en-US" sz="468" b="0" i="0" u="none" strike="noStrike" kern="0" cap="none" spc="0" normalizeH="0" baseline="0">
+                  <a:ln>
+                    <a:noFill/>
+                  </a:ln>
                   <a:solidFill>
                     <a:srgbClr val="000000"/>
                   </a:solidFill>
+                  <a:effectLst/>
+                  <a:uLnTx/>
+                  <a:uFillTx/>
                   <a:latin typeface="Meiryo UI"/>
                   <a:ea typeface="Meiryo UI"/>
                 </a:rPr>
@@ -22199,7 +22960,7 @@
         </p:sp>
         <p:sp>
           <p:nvSpPr>
-            <p:cNvPr id="49" name="edge_label_d61_15_OPERATION_O4_to_OPERATION_COMM_ERROR">
+            <p:cNvPr id="116" name="edge_label_d61_15_OPERATION_O4_to_OPERATION_COMM_ERROR">
               <a:extLst>
                 <a:ext uri="{FF2B5EF4-FFF2-40B4-BE49-F238E27FC236}">
                   <a16:creationId xmlns:a16="http://schemas.microsoft.com/office/drawing/2014/main" id="{2F41E95D-B351-5CB5-16FA-619831E00413}"/>
@@ -22211,8 +22972,8 @@
           </p:nvSpPr>
           <p:spPr>
             <a:xfrm>
-              <a:off x="8582016" y="6023602"/>
-              <a:ext cx="959773" cy="200258"/>
+              <a:off x="8582016" y="5989204"/>
+              <a:ext cx="959773" cy="269060"/>
             </a:xfrm>
             <a:prstGeom prst="rect">
               <a:avLst/>
@@ -22227,7 +22988,7 @@
             </a:ln>
           </p:spPr>
           <p:txBody>
-            <a:bodyPr vert="horz" wrap="square" lIns="27203" tIns="10881" rIns="27203" bIns="10881" rtlCol="0" anchor="ctr">
+            <a:bodyPr vert="horz" wrap="square" lIns="33057" tIns="13223" rIns="33057" bIns="13223" rtlCol="0" anchor="ctr">
               <a:spAutoFit/>
             </a:bodyPr>
             <a:lstStyle>
@@ -22328,10 +23089,16 @@
             <a:p>
               <a:pPr algn="ctr"/>
               <a:r>
-                <a:rPr kumimoji="0" lang="ja-JP" altLang="en-US" sz="385" kern="0">
+                <a:rPr kumimoji="0" lang="ja-JP" altLang="en-US" sz="468" b="0" i="0" u="none" strike="noStrike" kern="0" cap="none" spc="0" normalizeH="0" baseline="0">
+                  <a:ln>
+                    <a:noFill/>
+                  </a:ln>
                   <a:solidFill>
                     <a:srgbClr val="000000"/>
                   </a:solidFill>
+                  <a:effectLst/>
+                  <a:uLnTx/>
+                  <a:uFillTx/>
                   <a:latin typeface="Meiryo UI"/>
                   <a:ea typeface="Meiryo UI"/>
                 </a:rPr>
@@ -22342,7 +23109,7 @@
         </p:sp>
         <p:sp>
           <p:nvSpPr>
-            <p:cNvPr id="50" name="edge_label_d61_17_OPERATION_O6_to_OPERATION_O1">
+            <p:cNvPr id="117" name="edge_label_d61_17_OPERATION_O6_to_OPERATION_O1">
               <a:extLst>
                 <a:ext uri="{FF2B5EF4-FFF2-40B4-BE49-F238E27FC236}">
                   <a16:creationId xmlns:a16="http://schemas.microsoft.com/office/drawing/2014/main" id="{2EF204D3-C245-C1D2-730C-7442C79F17B7}"/>
@@ -22354,8 +23121,8 @@
           </p:nvSpPr>
           <p:spPr>
             <a:xfrm>
-              <a:off x="10646532" y="6115153"/>
-              <a:ext cx="876757" cy="200258"/>
+              <a:off x="10646533" y="6085658"/>
+              <a:ext cx="876757" cy="259251"/>
             </a:xfrm>
             <a:prstGeom prst="rect">
               <a:avLst/>
@@ -22370,7 +23137,7 @@
             </a:ln>
           </p:spPr>
           <p:txBody>
-            <a:bodyPr vert="horz" wrap="square" lIns="27203" tIns="10881" rIns="27203" bIns="10881" rtlCol="0" anchor="ctr">
+            <a:bodyPr vert="horz" wrap="square" lIns="33057" tIns="13223" rIns="33057" bIns="13223" rtlCol="0" anchor="ctr">
               <a:spAutoFit/>
             </a:bodyPr>
             <a:lstStyle>
@@ -22471,10 +23238,16 @@
             <a:p>
               <a:pPr algn="ctr"/>
               <a:r>
-                <a:rPr kumimoji="0" lang="ja-JP" altLang="en-US" sz="385" kern="0">
+                <a:rPr kumimoji="0" lang="ja-JP" altLang="en-US" sz="468" b="0" i="0" u="none" strike="noStrike" kern="0" cap="none" spc="0" normalizeH="0" baseline="0">
+                  <a:ln>
+                    <a:noFill/>
+                  </a:ln>
                   <a:solidFill>
                     <a:srgbClr val="000000"/>
                   </a:solidFill>
+                  <a:effectLst/>
+                  <a:uLnTx/>
+                  <a:uFillTx/>
                   <a:latin typeface="Meiryo UI"/>
                   <a:ea typeface="Meiryo UI"/>
                 </a:rPr>
@@ -22485,7 +23258,7 @@
         </p:sp>
         <p:sp>
           <p:nvSpPr>
-            <p:cNvPr id="51" name="edge_label_d61_22_START_S4_to_START_S5">
+            <p:cNvPr id="118" name="edge_label_d61_22_START_S4_to_START_S5">
               <a:extLst>
                 <a:ext uri="{FF2B5EF4-FFF2-40B4-BE49-F238E27FC236}">
                   <a16:creationId xmlns:a16="http://schemas.microsoft.com/office/drawing/2014/main" id="{428098D0-3F60-7455-CD66-973ABE18911B}"/>
@@ -22497,8 +23270,8 @@
           </p:nvSpPr>
           <p:spPr>
             <a:xfrm>
-              <a:off x="3639259" y="5303177"/>
-              <a:ext cx="960134" cy="200258"/>
+              <a:off x="3639259" y="5266743"/>
+              <a:ext cx="960132" cy="273127"/>
             </a:xfrm>
             <a:prstGeom prst="rect">
               <a:avLst/>
@@ -22513,7 +23286,7 @@
             </a:ln>
           </p:spPr>
           <p:txBody>
-            <a:bodyPr vert="horz" wrap="square" lIns="27203" tIns="10881" rIns="27203" bIns="10881" rtlCol="0" anchor="ctr">
+            <a:bodyPr vert="horz" wrap="square" lIns="33057" tIns="13223" rIns="33057" bIns="13223" rtlCol="0" anchor="ctr">
               <a:spAutoFit/>
             </a:bodyPr>
             <a:lstStyle>
@@ -22614,10 +23387,16 @@
             <a:p>
               <a:pPr algn="ctr"/>
               <a:r>
-                <a:rPr kumimoji="0" lang="ja-JP" altLang="en-US" sz="385" kern="0">
+                <a:rPr kumimoji="0" lang="ja-JP" altLang="en-US" sz="468" b="0" i="0" u="none" strike="noStrike" kern="0" cap="none" spc="0" normalizeH="0" baseline="0">
+                  <a:ln>
+                    <a:noFill/>
+                  </a:ln>
                   <a:solidFill>
                     <a:srgbClr val="000000"/>
                   </a:solidFill>
+                  <a:effectLst/>
+                  <a:uLnTx/>
+                  <a:uFillTx/>
                   <a:latin typeface="Meiryo UI"/>
                   <a:ea typeface="Meiryo UI"/>
                 </a:rPr>
@@ -22628,7 +23407,7 @@
         </p:sp>
         <p:sp>
           <p:nvSpPr>
-            <p:cNvPr id="52" name="edge_label_d61_23_START_S4_to_START_START_ERROR">
+            <p:cNvPr id="119" name="edge_label_d61_23_START_S4_to_START_START_ERROR">
               <a:extLst>
                 <a:ext uri="{FF2B5EF4-FFF2-40B4-BE49-F238E27FC236}">
                   <a16:creationId xmlns:a16="http://schemas.microsoft.com/office/drawing/2014/main" id="{E79BD608-1D77-2E18-636B-69A81F0D9EA7}"/>
@@ -22640,8 +23419,8 @@
           </p:nvSpPr>
           <p:spPr>
             <a:xfrm>
-              <a:off x="1514569" y="6446372"/>
-              <a:ext cx="943504" cy="200258"/>
+              <a:off x="1514569" y="6410954"/>
+              <a:ext cx="943504" cy="271094"/>
             </a:xfrm>
             <a:prstGeom prst="rect">
               <a:avLst/>
@@ -22656,7 +23435,7 @@
             </a:ln>
           </p:spPr>
           <p:txBody>
-            <a:bodyPr vert="horz" wrap="square" lIns="27203" tIns="10881" rIns="27203" bIns="10881" rtlCol="0" anchor="ctr">
+            <a:bodyPr vert="horz" wrap="square" lIns="33057" tIns="13223" rIns="33057" bIns="13223" rtlCol="0" anchor="ctr">
               <a:spAutoFit/>
             </a:bodyPr>
             <a:lstStyle>
@@ -22757,10 +23536,16 @@
             <a:p>
               <a:pPr algn="ctr"/>
               <a:r>
-                <a:rPr kumimoji="0" lang="ja-JP" altLang="en-US" sz="385" kern="0">
+                <a:rPr kumimoji="0" lang="ja-JP" altLang="en-US" sz="468" b="0" i="0" u="none" strike="noStrike" kern="0" cap="none" spc="0" normalizeH="0" baseline="0">
+                  <a:ln>
+                    <a:noFill/>
+                  </a:ln>
                   <a:solidFill>
                     <a:srgbClr val="000000"/>
                   </a:solidFill>
+                  <a:effectLst/>
+                  <a:uLnTx/>
+                  <a:uFillTx/>
                   <a:latin typeface="Meiryo UI"/>
                   <a:ea typeface="Meiryo UI"/>
                 </a:rPr>
@@ -22771,7 +23556,7 @@
         </p:sp>
         <p:sp>
           <p:nvSpPr>
-            <p:cNvPr id="53" name="shape_comment_d61_OPERATION_O6">
+            <p:cNvPr id="120" name="shape_comment_d61_OPERATION_O6">
               <a:extLst>
                 <a:ext uri="{FF2B5EF4-FFF2-40B4-BE49-F238E27FC236}">
                   <a16:creationId xmlns:a16="http://schemas.microsoft.com/office/drawing/2014/main" id="{42793AC8-FF6A-2DAC-FE60-9D19A0ACCC20}"/>
@@ -22823,7 +23608,7 @@
             </a:fontRef>
           </p:style>
           <p:txBody>
-            <a:bodyPr wrap="square" lIns="38084" tIns="21762" rIns="38084" bIns="21762" rtlCol="0" anchor="ctr"/>
+            <a:bodyPr wrap="square" lIns="46279" tIns="26445" rIns="46279" bIns="26445" rtlCol="0" anchor="ctr"/>
             <a:lstStyle>
               <a:defPPr>
                 <a:defRPr lang="en-US"/>
@@ -22922,10 +23707,16 @@
             <a:p>
               <a:pPr algn="l"/>
               <a:r>
-                <a:rPr kumimoji="0" lang="ja-JP" altLang="en-US" sz="385" kern="0">
+                <a:rPr kumimoji="0" lang="ja-JP" altLang="en-US" sz="468" b="0" i="0" u="none" strike="noStrike" kern="0" cap="none" spc="0" normalizeH="0" baseline="0">
+                  <a:ln>
+                    <a:noFill/>
+                  </a:ln>
                   <a:solidFill>
                     <a:srgbClr val="404040"/>
                   </a:solidFill>
+                  <a:effectLst/>
+                  <a:uLnTx/>
+                  <a:uFillTx/>
                   <a:latin typeface="Meiryo UI"/>
                   <a:ea typeface="Meiryo UI"/>
                 </a:rPr>
@@ -22938,7 +23729,7 @@
         </p:sp>
         <p:sp>
           <p:nvSpPr>
-            <p:cNvPr id="54" name="shape_comment_d61_STOP_T2">
+            <p:cNvPr id="121" name="shape_comment_d61_STOP_T2">
               <a:extLst>
                 <a:ext uri="{FF2B5EF4-FFF2-40B4-BE49-F238E27FC236}">
                   <a16:creationId xmlns:a16="http://schemas.microsoft.com/office/drawing/2014/main" id="{99C604DC-699D-D542-F602-C403BE0678AF}"/>
@@ -22990,7 +23781,7 @@
             </a:fontRef>
           </p:style>
           <p:txBody>
-            <a:bodyPr wrap="square" lIns="38084" tIns="21762" rIns="38084" bIns="21762" rtlCol="0" anchor="ctr"/>
+            <a:bodyPr wrap="square" lIns="46279" tIns="26445" rIns="46279" bIns="26445" rtlCol="0" anchor="ctr"/>
             <a:lstStyle>
               <a:defPPr>
                 <a:defRPr lang="en-US"/>
@@ -23089,10 +23880,16 @@
             <a:p>
               <a:pPr algn="l"/>
               <a:r>
-                <a:rPr kumimoji="0" lang="ja-JP" altLang="en-US" sz="385" kern="0">
+                <a:rPr kumimoji="0" lang="ja-JP" altLang="en-US" sz="468" b="0" i="0" u="none" strike="noStrike" kern="0" cap="none" spc="0" normalizeH="0" baseline="0">
+                  <a:ln>
+                    <a:noFill/>
+                  </a:ln>
                   <a:solidFill>
                     <a:srgbClr val="404040"/>
                   </a:solidFill>
+                  <a:effectLst/>
+                  <a:uLnTx/>
+                  <a:uFillTx/>
                   <a:latin typeface="Meiryo UI"/>
                   <a:ea typeface="Meiryo UI"/>
                 </a:rPr>
@@ -23105,7 +23902,7 @@
         </p:sp>
         <p:sp>
           <p:nvSpPr>
-            <p:cNvPr id="55" name="shape_comment_d61_OPERATION_O3">
+            <p:cNvPr id="122" name="shape_comment_d61_OPERATION_O3">
               <a:extLst>
                 <a:ext uri="{FF2B5EF4-FFF2-40B4-BE49-F238E27FC236}">
                   <a16:creationId xmlns:a16="http://schemas.microsoft.com/office/drawing/2014/main" id="{7C6A9FF1-E828-F21B-2227-61507E1570FF}"/>
@@ -23157,7 +23954,7 @@
             </a:fontRef>
           </p:style>
           <p:txBody>
-            <a:bodyPr wrap="square" lIns="38084" tIns="21762" rIns="38084" bIns="21762" rtlCol="0" anchor="ctr"/>
+            <a:bodyPr wrap="square" lIns="46279" tIns="26445" rIns="46279" bIns="26445" rtlCol="0" anchor="ctr"/>
             <a:lstStyle>
               <a:defPPr>
                 <a:defRPr lang="en-US"/>
@@ -23256,30 +24053,48 @@
             <a:p>
               <a:pPr algn="l"/>
               <a:r>
-                <a:rPr kumimoji="0" lang="ja-JP" altLang="en-US" sz="385" kern="0">
+                <a:rPr kumimoji="0" lang="ja-JP" altLang="en-US" sz="468" b="0" i="0" u="none" strike="noStrike" kern="0" cap="none" spc="0" normalizeH="0" baseline="0">
+                  <a:ln>
+                    <a:noFill/>
+                  </a:ln>
                   <a:solidFill>
                     <a:srgbClr val="404040"/>
                   </a:solidFill>
+                  <a:effectLst/>
+                  <a:uLnTx/>
+                  <a:uFillTx/>
                   <a:latin typeface="Meiryo UI"/>
                   <a:ea typeface="Meiryo UI"/>
                 </a:rPr>
                 <a:t>決済端末とレシートプリンターは</a:t>
               </a:r>
               <a:r>
-                <a:rPr kumimoji="0" lang="en-US" altLang="ja-JP" sz="385" kern="0">
+                <a:rPr kumimoji="0" lang="en-US" altLang="ja-JP" sz="468" b="0" i="0" u="none" strike="noStrike" kern="0" cap="none" spc="0" normalizeH="0" baseline="0">
+                  <a:ln>
+                    <a:noFill/>
+                  </a:ln>
                   <a:solidFill>
                     <a:srgbClr val="404040"/>
                   </a:solidFill>
+                  <a:effectLst/>
+                  <a:uLnTx/>
+                  <a:uFillTx/>
                   <a:latin typeface="Meiryo UI"/>
                   <a:ea typeface="Meiryo UI"/>
                 </a:rPr>
                 <a:t>Windows OPOS</a:t>
               </a:r>
               <a:r>
-                <a:rPr kumimoji="0" lang="ja-JP" altLang="en-US" sz="385" kern="0">
+                <a:rPr kumimoji="0" lang="ja-JP" altLang="en-US" sz="468" b="0" i="0" u="none" strike="noStrike" kern="0" cap="none" spc="0" normalizeH="0" baseline="0">
+                  <a:ln>
+                    <a:noFill/>
+                  </a:ln>
                   <a:solidFill>
                     <a:srgbClr val="404040"/>
                   </a:solidFill>
+                  <a:effectLst/>
+                  <a:uLnTx/>
+                  <a:uFillTx/>
                   <a:latin typeface="Meiryo UI"/>
                   <a:ea typeface="Meiryo UI"/>
                 </a:rPr>
@@ -23289,10 +24104,16 @@
             <a:p>
               <a:pPr algn="l"/>
               <a:r>
-                <a:rPr kumimoji="0" lang="ja-JP" altLang="en-US" sz="385" kern="0">
+                <a:rPr kumimoji="0" lang="ja-JP" altLang="en-US" sz="468" b="0" i="0" u="none" strike="noStrike" kern="0" cap="none" spc="0" normalizeH="0" baseline="0">
+                  <a:ln>
+                    <a:noFill/>
+                  </a:ln>
                   <a:solidFill>
                     <a:srgbClr val="404040"/>
                   </a:solidFill>
+                  <a:effectLst/>
+                  <a:uLnTx/>
+                  <a:uFillTx/>
                   <a:latin typeface="Meiryo UI"/>
                   <a:ea typeface="Meiryo UI"/>
                 </a:rPr>
@@ -23303,7 +24124,7 @@
         </p:sp>
         <p:sp>
           <p:nvSpPr>
-            <p:cNvPr id="56" name="shape_d61_START_S3" title="③ デバイスコネクタと 通信・デバイスを準備">
+            <p:cNvPr id="123" name="shape_d61_START_S3" title="③ デバイスコネクタと 通信・デバイスを準備">
               <a:extLst>
                 <a:ext uri="{FF2B5EF4-FFF2-40B4-BE49-F238E27FC236}">
                   <a16:creationId xmlns:a16="http://schemas.microsoft.com/office/drawing/2014/main" id="{72EF9921-4E43-2B83-F79E-0B3002AE46FA}"/>
@@ -23315,8 +24136,8 @@
           </p:nvSpPr>
           <p:spPr>
             <a:xfrm>
-              <a:off x="1099252" y="3020936"/>
-              <a:ext cx="1927121" cy="449183"/>
+              <a:off x="1099252" y="2950043"/>
+              <a:ext cx="1927120" cy="590971"/>
             </a:xfrm>
             <a:prstGeom prst="roundRect">
               <a:avLst/>
@@ -23349,7 +24170,7 @@
             </a:fontRef>
           </p:style>
           <p:txBody>
-            <a:bodyPr wrap="square" lIns="32643" tIns="16322" rIns="32643" bIns="16322" rtlCol="0" anchor="ctr">
+            <a:bodyPr wrap="square" lIns="39668" tIns="19834" rIns="39668" bIns="19834" rtlCol="0" anchor="ctr">
               <a:spAutoFit/>
             </a:bodyPr>
             <a:lstStyle>
@@ -23450,50 +24271,81 @@
             <a:p>
               <a:pPr algn="ctr"/>
               <a:r>
-                <a:rPr kumimoji="0" lang="ja-JP" altLang="en-US" sz="428" b="1" kern="0">
+                <a:rPr kumimoji="0" lang="ja-JP" altLang="en-US" sz="520" b="1" i="0" u="none" strike="noStrike" kern="0" cap="none" spc="0" normalizeH="0" baseline="0">
+                  <a:ln>
+                    <a:noFill/>
+                  </a:ln>
                   <a:solidFill>
                     <a:srgbClr val="111111"/>
                   </a:solidFill>
+                  <a:effectLst/>
+                  <a:uLnTx/>
+                  <a:uFillTx/>
                   <a:latin typeface="Meiryo UI"/>
                   <a:ea typeface="Meiryo UI"/>
                 </a:rPr>
-                <a:t>(4)</a:t>
+                <a:t>1.4</a:t>
               </a:r>
               <a:r>
-                <a:rPr kumimoji="0" lang="vi-VN" altLang="ja-JP" sz="428" b="1" kern="0">
+                <a:rPr kumimoji="0" lang="vi-VN" altLang="ja-JP" sz="520" b="1" i="0" u="none" strike="noStrike" kern="0" cap="none" spc="0" normalizeH="0" baseline="0">
+                  <a:ln>
+                    <a:noFill/>
+                  </a:ln>
                   <a:solidFill>
                     <a:srgbClr val="111111"/>
                   </a:solidFill>
+                  <a:effectLst/>
+                  <a:uLnTx/>
+                  <a:uFillTx/>
                   <a:latin typeface="Meiryo UI"/>
                   <a:ea typeface="Meiryo UI"/>
                 </a:rPr>
                 <a:t> </a:t>
               </a:r>
               <a:r>
-                <a:rPr kumimoji="0" lang="ja-JP" altLang="en-US" sz="428" b="1" kern="0">
+                <a:rPr kumimoji="0" lang="ja-JP" altLang="en-US" sz="520" b="1" i="0" u="none" strike="noStrike" kern="0" cap="none" spc="0" normalizeH="0" baseline="0">
+                  <a:ln>
+                    <a:noFill/>
+                  </a:ln>
                   <a:solidFill>
                     <a:srgbClr val="111111"/>
                   </a:solidFill>
+                  <a:effectLst/>
+                  <a:uLnTx/>
+                  <a:uFillTx/>
                   <a:latin typeface="Meiryo UI"/>
                   <a:ea typeface="Meiryo UI"/>
                 </a:rPr>
-                <a:t>デバイスコネクタは</a:t>
+                <a:t>デバイスコネクタは
+</a:t>
               </a:r>
               <a:r>
-                <a:rPr kumimoji="0" lang="en-US" altLang="ja-JP" sz="428" b="1" kern="0">
+                <a:rPr kumimoji="0" lang="en-US" altLang="ja-JP" sz="520" b="1" i="0" u="none" strike="noStrike" kern="0" cap="none" spc="0" normalizeH="0" baseline="0">
+                  <a:ln>
+                    <a:noFill/>
+                  </a:ln>
                   <a:solidFill>
                     <a:srgbClr val="111111"/>
                   </a:solidFill>
+                  <a:effectLst/>
+                  <a:uLnTx/>
+                  <a:uFillTx/>
                   <a:latin typeface="Meiryo UI"/>
                   <a:ea typeface="Meiryo UI"/>
                 </a:rPr>
                 <a:t>Mutex</a:t>
               </a:r>
               <a:r>
-                <a:rPr kumimoji="0" lang="ja-JP" altLang="en-US" sz="428" b="1" kern="0">
+                <a:rPr kumimoji="0" lang="ja-JP" altLang="en-US" sz="520" b="1" i="0" u="none" strike="noStrike" kern="0" cap="none" spc="0" normalizeH="0" baseline="0">
+                  <a:ln>
+                    <a:noFill/>
+                  </a:ln>
                   <a:solidFill>
                     <a:srgbClr val="111111"/>
                   </a:solidFill>
+                  <a:effectLst/>
+                  <a:uLnTx/>
+                  <a:uFillTx/>
                   <a:latin typeface="Meiryo UI"/>
                   <a:ea typeface="Meiryo UI"/>
                 </a:rPr>
@@ -23504,7 +24356,7 @@
         </p:sp>
         <p:sp>
           <p:nvSpPr>
-            <p:cNvPr id="57" name="shape_d61_START_S3" title="③ デバイスコネクタと 通信・デバイスを準備">
+            <p:cNvPr id="124" name="shape_d61_START_S3" title="③ デバイスコネクタと 通信・デバイスを準備">
               <a:extLst>
                 <a:ext uri="{FF2B5EF4-FFF2-40B4-BE49-F238E27FC236}">
                   <a16:creationId xmlns:a16="http://schemas.microsoft.com/office/drawing/2014/main" id="{28A6D25C-AB10-C0E8-BFC4-307AEC63E97D}"/>
@@ -23516,8 +24368,8 @@
           </p:nvSpPr>
           <p:spPr>
             <a:xfrm>
-              <a:off x="891384" y="3863465"/>
-              <a:ext cx="2342595" cy="269552"/>
+              <a:off x="891384" y="3827780"/>
+              <a:ext cx="2342594" cy="340921"/>
             </a:xfrm>
             <a:prstGeom prst="roundRect">
               <a:avLst/>
@@ -23550,7 +24402,7 @@
             </a:fontRef>
           </p:style>
           <p:txBody>
-            <a:bodyPr wrap="square" lIns="32643" tIns="16322" rIns="32643" bIns="16322" rtlCol="0" anchor="ctr">
+            <a:bodyPr wrap="square" lIns="39668" tIns="19834" rIns="39668" bIns="19834" rtlCol="0" anchor="ctr">
               <a:spAutoFit/>
             </a:bodyPr>
             <a:lstStyle>
@@ -23651,30 +24503,48 @@
             <a:p>
               <a:pPr algn="ctr"/>
               <a:r>
-                <a:rPr kumimoji="0" lang="ja-JP" altLang="en-US" sz="428" b="1" kern="0">
+                <a:rPr kumimoji="0" lang="ja-JP" altLang="en-US" sz="520" b="1" i="0" u="none" strike="noStrike" kern="0" cap="none" spc="0" normalizeH="0" baseline="0">
+                  <a:ln>
+                    <a:noFill/>
+                  </a:ln>
                   <a:solidFill>
                     <a:srgbClr val="111111"/>
                   </a:solidFill>
+                  <a:effectLst/>
+                  <a:uLnTx/>
+                  <a:uFillTx/>
                   <a:latin typeface="Meiryo UI"/>
                   <a:ea typeface="Meiryo UI"/>
                 </a:rPr>
-                <a:t>(5)</a:t>
+                <a:t>1.5</a:t>
               </a:r>
               <a:r>
-                <a:rPr kumimoji="0" lang="vi-VN" altLang="ja-JP" sz="428" b="1" kern="0">
+                <a:rPr kumimoji="0" lang="vi-VN" altLang="ja-JP" sz="520" b="1" i="0" u="none" strike="noStrike" kern="0" cap="none" spc="0" normalizeH="0" baseline="0">
+                  <a:ln>
+                    <a:noFill/>
+                  </a:ln>
                   <a:solidFill>
                     <a:srgbClr val="111111"/>
                   </a:solidFill>
+                  <a:effectLst/>
+                  <a:uLnTx/>
+                  <a:uFillTx/>
                   <a:latin typeface="Meiryo UI"/>
                   <a:ea typeface="Meiryo UI"/>
                 </a:rPr>
                 <a:t> </a:t>
               </a:r>
               <a:r>
-                <a:rPr kumimoji="0" lang="ja-JP" altLang="en-US" sz="428" b="1" kern="0">
+                <a:rPr kumimoji="0" lang="ja-JP" altLang="en-US" sz="520" b="1" i="0" u="none" strike="noStrike" kern="0" cap="none" spc="0" normalizeH="0" baseline="0">
+                  <a:ln>
+                    <a:noFill/>
+                  </a:ln>
                   <a:solidFill>
                     <a:srgbClr val="111111"/>
                   </a:solidFill>
+                  <a:effectLst/>
+                  <a:uLnTx/>
+                  <a:uFillTx/>
                   <a:latin typeface="Meiryo UI"/>
                   <a:ea typeface="Meiryo UI"/>
                 </a:rPr>
@@ -23685,7 +24555,7 @@
         </p:sp>
         <p:cxnSp>
           <p:nvCxnSpPr>
-            <p:cNvPr id="58" name="edge_d61_21_START_S3_to_START_S4">
+            <p:cNvPr id="125" name="edge_d61_21_START_S3_to_START_S4">
               <a:extLst>
                 <a:ext uri="{FF2B5EF4-FFF2-40B4-BE49-F238E27FC236}">
                   <a16:creationId xmlns:a16="http://schemas.microsoft.com/office/drawing/2014/main" id="{D76EFEB5-A6AF-A655-1B16-909EF66DCB2A}"/>
@@ -23694,15 +24564,15 @@
             </p:cNvPr>
             <p:cNvCxnSpPr>
               <a:cxnSpLocks/>
-              <a:stCxn id="56" idx="2"/>
-              <a:endCxn id="57" idx="0"/>
+              <a:stCxn id="123" idx="2"/>
+              <a:endCxn id="124" idx="0"/>
             </p:cNvCxnSpPr>
             <p:nvPr/>
           </p:nvCxnSpPr>
           <p:spPr>
             <a:xfrm flipH="1">
-              <a:off x="2062683" y="3470119"/>
-              <a:ext cx="130" cy="393346"/>
+              <a:off x="2062680" y="3541014"/>
+              <a:ext cx="133" cy="286767"/>
             </a:xfrm>
             <a:prstGeom prst="straightConnector1">
               <a:avLst/>
@@ -23734,7 +24604,7 @@
         </p:cxnSp>
         <p:cxnSp>
           <p:nvCxnSpPr>
-            <p:cNvPr id="59" name="edge_d61_21_START_S3_to_START_S4">
+            <p:cNvPr id="126" name="edge_d61_21_START_S3_to_START_S4">
               <a:extLst>
                 <a:ext uri="{FF2B5EF4-FFF2-40B4-BE49-F238E27FC236}">
                   <a16:creationId xmlns:a16="http://schemas.microsoft.com/office/drawing/2014/main" id="{CB80B826-DD22-08FA-220A-C72C3C065EB7}"/>
@@ -23743,15 +24613,15 @@
             </p:cNvPr>
             <p:cNvCxnSpPr>
               <a:cxnSpLocks/>
-              <a:stCxn id="14" idx="2"/>
-              <a:endCxn id="56" idx="0"/>
+              <a:stCxn id="81" idx="2"/>
+              <a:endCxn id="123" idx="0"/>
             </p:cNvCxnSpPr>
             <p:nvPr/>
           </p:nvCxnSpPr>
           <p:spPr>
             <a:xfrm flipH="1">
-              <a:off x="2062812" y="2615492"/>
-              <a:ext cx="4707" cy="405444"/>
+              <a:off x="2062813" y="2686386"/>
+              <a:ext cx="4706" cy="263657"/>
             </a:xfrm>
             <a:prstGeom prst="straightConnector1">
               <a:avLst/>
@@ -23783,7 +24653,7 @@
         </p:cxnSp>
         <p:sp>
           <p:nvSpPr>
-            <p:cNvPr id="60" name="link_9001">
+            <p:cNvPr id="127" name="link_9001">
               <a:extLst>
                 <a:ext uri="{FF2B5EF4-FFF2-40B4-BE49-F238E27FC236}">
                   <a16:creationId xmlns:a16="http://schemas.microsoft.com/office/drawing/2014/main" id="{AC2DF892-ADF5-767F-9FA5-6074F4FF92F3}"/>
@@ -23910,13 +24780,13 @@
               </a:lvl9pPr>
             </a:lstStyle>
             <a:p>
-              <a:endParaRPr lang="ja-JP" altLang="en-US" sz="1481"/>
+              <a:endParaRPr lang="ja-JP" altLang="en-US"/>
             </a:p>
           </p:txBody>
         </p:sp>
         <p:sp>
           <p:nvSpPr>
-            <p:cNvPr id="61" name="shape_d61_STOP_T4" title="④ 10秒以内に 終了したか">
+            <p:cNvPr id="128" name="shape_d61_STOP_T4" title="④ 10秒以内に 終了したか">
               <a:extLst>
                 <a:ext uri="{FF2B5EF4-FFF2-40B4-BE49-F238E27FC236}">
                   <a16:creationId xmlns:a16="http://schemas.microsoft.com/office/drawing/2014/main" id="{CE48A2FC-09FA-8035-4F82-06B40D304830}"/>
@@ -23928,8 +24798,8 @@
           </p:nvSpPr>
           <p:spPr>
             <a:xfrm>
-              <a:off x="14021617" y="5533885"/>
-              <a:ext cx="2929241" cy="806490"/>
+              <a:off x="14021617" y="5529353"/>
+              <a:ext cx="2929241" cy="815556"/>
             </a:xfrm>
             <a:prstGeom prst="diamond">
               <a:avLst/>
@@ -23962,7 +24832,7 @@
             </a:fontRef>
           </p:style>
           <p:txBody>
-            <a:bodyPr wrap="square" lIns="32643" tIns="16322" rIns="32643" bIns="16322" rtlCol="0" anchor="ctr">
+            <a:bodyPr wrap="square" lIns="39668" tIns="19834" rIns="39668" bIns="19834" rtlCol="0" anchor="ctr">
               <a:spAutoFit/>
             </a:bodyPr>
             <a:lstStyle>
@@ -24063,30 +24933,48 @@
             <a:p>
               <a:pPr algn="ctr"/>
               <a:r>
-                <a:rPr kumimoji="0" lang="ja-JP" altLang="en-US" sz="428" b="1" kern="0">
+                <a:rPr kumimoji="0" lang="ja-JP" altLang="en-US" sz="520" b="1" i="0" u="none" strike="noStrike" kern="0" cap="none" spc="0" normalizeH="0" baseline="0">
+                  <a:ln>
+                    <a:noFill/>
+                  </a:ln>
                   <a:solidFill>
                     <a:srgbClr val="111111"/>
                   </a:solidFill>
+                  <a:effectLst/>
+                  <a:uLnTx/>
+                  <a:uFillTx/>
                   <a:latin typeface="Meiryo UI"/>
                   <a:ea typeface="Meiryo UI"/>
                 </a:rPr>
-                <a:t>(5) </a:t>
+                <a:t>3.5 </a:t>
               </a:r>
               <a:r>
-                <a:rPr kumimoji="0" lang="en-US" altLang="ja-JP" sz="428" b="1" kern="0">
+                <a:rPr kumimoji="0" lang="en-US" altLang="ja-JP" sz="520" b="1" i="0" u="none" strike="noStrike" kern="0" cap="none" spc="0" normalizeH="0" baseline="0">
+                  <a:ln>
+                    <a:noFill/>
+                  </a:ln>
                   <a:solidFill>
                     <a:srgbClr val="111111"/>
                   </a:solidFill>
+                  <a:effectLst/>
+                  <a:uLnTx/>
+                  <a:uFillTx/>
                   <a:latin typeface="Meiryo UI"/>
                   <a:ea typeface="Meiryo UI"/>
                 </a:rPr>
                 <a:t>10</a:t>
               </a:r>
               <a:r>
-                <a:rPr kumimoji="0" lang="ja-JP" altLang="en-US" sz="428" b="1" kern="0">
+                <a:rPr kumimoji="0" lang="ja-JP" altLang="en-US" sz="520" b="1" i="0" u="none" strike="noStrike" kern="0" cap="none" spc="0" normalizeH="0" baseline="0">
+                  <a:ln>
+                    <a:noFill/>
+                  </a:ln>
                   <a:solidFill>
                     <a:srgbClr val="111111"/>
                   </a:solidFill>
+                  <a:effectLst/>
+                  <a:uLnTx/>
+                  <a:uFillTx/>
                   <a:latin typeface="Meiryo UI"/>
                   <a:ea typeface="Meiryo UI"/>
                 </a:rPr>
@@ -24096,10 +24984,16 @@
             <a:p>
               <a:pPr algn="ctr"/>
               <a:r>
-                <a:rPr kumimoji="0" lang="ja-JP" altLang="en-US" sz="428" b="1" kern="0">
+                <a:rPr kumimoji="0" lang="ja-JP" altLang="en-US" sz="520" b="1" i="0" u="none" strike="noStrike" kern="0" cap="none" spc="0" normalizeH="0" baseline="0">
+                  <a:ln>
+                    <a:noFill/>
+                  </a:ln>
                   <a:solidFill>
                     <a:srgbClr val="111111"/>
                   </a:solidFill>
+                  <a:effectLst/>
+                  <a:uLnTx/>
+                  <a:uFillTx/>
                   <a:latin typeface="Meiryo UI"/>
                   <a:ea typeface="Meiryo UI"/>
                 </a:rPr>
@@ -24110,7 +25004,7 @@
         </p:sp>
         <p:sp>
           <p:nvSpPr>
-            <p:cNvPr id="62" name="shape_d61_STOP_T5" title="所有プロセスツリーを 強制終了">
+            <p:cNvPr id="129" name="shape_d61_STOP_T5" title="所有プロセスツリーを 強制終了">
               <a:extLst>
                 <a:ext uri="{FF2B5EF4-FFF2-40B4-BE49-F238E27FC236}">
                   <a16:creationId xmlns:a16="http://schemas.microsoft.com/office/drawing/2014/main" id="{F6B009D8-6186-4F78-6381-DA2D2557450F}"/>
@@ -24156,7 +25050,7 @@
             </a:fontRef>
           </p:style>
           <p:txBody>
-            <a:bodyPr wrap="square" lIns="32643" tIns="16322" rIns="32643" bIns="16322" rtlCol="0" anchor="ctr">
+            <a:bodyPr wrap="square" lIns="39668" tIns="19834" rIns="39668" bIns="19834" rtlCol="0" anchor="ctr">
               <a:noAutofit/>
             </a:bodyPr>
             <a:lstStyle>
@@ -24257,23 +25151,35 @@
             <a:p>
               <a:pPr algn="ctr"/>
               <a:r>
-                <a:rPr kumimoji="0" lang="ja-JP" altLang="en-US" sz="428" b="1" kern="0">
+                <a:rPr kumimoji="0" lang="ja-JP" altLang="en-US" sz="520" b="1" i="0" u="none" strike="noStrike" kern="0" cap="none" spc="0" normalizeH="0" baseline="0">
+                  <a:ln>
+                    <a:noFill/>
+                  </a:ln>
                   <a:solidFill>
                     <a:srgbClr val="111111"/>
                   </a:solidFill>
+                  <a:effectLst/>
+                  <a:uLnTx/>
+                  <a:uFillTx/>
                   <a:latin typeface="Meiryo UI"/>
                   <a:ea typeface="Meiryo UI"/>
                 </a:rPr>
-                <a:t>(6) 所有プロセスツリーを</a:t>
+                <a:t>3.6 所有プロセスツリーを</a:t>
               </a:r>
             </a:p>
             <a:p>
               <a:pPr algn="ctr"/>
               <a:r>
-                <a:rPr kumimoji="0" lang="ja-JP" altLang="en-US" sz="428" b="1" kern="0">
+                <a:rPr kumimoji="0" lang="ja-JP" altLang="en-US" sz="520" b="1" i="0" u="none" strike="noStrike" kern="0" cap="none" spc="0" normalizeH="0" baseline="0">
+                  <a:ln>
+                    <a:noFill/>
+                  </a:ln>
                   <a:solidFill>
                     <a:srgbClr val="111111"/>
                   </a:solidFill>
+                  <a:effectLst/>
+                  <a:uLnTx/>
+                  <a:uFillTx/>
                   <a:latin typeface="Meiryo UI"/>
                   <a:ea typeface="Meiryo UI"/>
                 </a:rPr>
@@ -24284,7 +25190,7 @@
         </p:sp>
         <p:sp>
           <p:nvSpPr>
-            <p:cNvPr id="63" name="shape_d61_STOP_T6" title="終了処理完了">
+            <p:cNvPr id="130" name="shape_d61_STOP_T6" title="終了処理完了">
               <a:extLst>
                 <a:ext uri="{FF2B5EF4-FFF2-40B4-BE49-F238E27FC236}">
                   <a16:creationId xmlns:a16="http://schemas.microsoft.com/office/drawing/2014/main" id="{B1DFD561-EF9C-EB95-89B5-200B6697BB34}"/>
@@ -24296,8 +25202,8 @@
           </p:nvSpPr>
           <p:spPr>
             <a:xfrm>
-              <a:off x="14759852" y="8382074"/>
-              <a:ext cx="1501306" cy="269552"/>
+              <a:off x="14759852" y="8380572"/>
+              <a:ext cx="1501305" cy="272554"/>
             </a:xfrm>
             <a:prstGeom prst="roundRect">
               <a:avLst/>
@@ -24330,7 +25236,7 @@
             </a:fontRef>
           </p:style>
           <p:txBody>
-            <a:bodyPr wrap="square" lIns="32643" tIns="16322" rIns="32643" bIns="16322" rtlCol="0" anchor="ctr">
+            <a:bodyPr wrap="square" lIns="39668" tIns="19834" rIns="39668" bIns="19834" rtlCol="0" anchor="ctr">
               <a:spAutoFit/>
             </a:bodyPr>
             <a:lstStyle>
@@ -24431,19 +25337,31 @@
             <a:p>
               <a:pPr algn="ctr"/>
               <a:r>
-                <a:rPr kumimoji="0" lang="zh-TW" altLang="en-US" sz="428" b="1" kern="0">
+                <a:rPr kumimoji="0" lang="zh-TW" altLang="en-US" sz="520" b="1" i="0" u="none" strike="noStrike" kern="0" cap="none" spc="0" normalizeH="0" baseline="0">
+                  <a:ln>
+                    <a:noFill/>
+                  </a:ln>
                   <a:solidFill>
                     <a:srgbClr val="111111"/>
                   </a:solidFill>
+                  <a:effectLst/>
+                  <a:uLnTx/>
+                  <a:uFillTx/>
                   <a:latin typeface="Meiryo UI"/>
                   <a:ea typeface="Meiryo UI"/>
                 </a:rPr>
-                <a:t>(7) 終了処理完了</a:t>
+                <a:t>3.7 終了処理完了</a:t>
               </a:r>
-              <a:endParaRPr kumimoji="0" lang="ja-JP" altLang="en-US" sz="428" b="1" kern="0">
+              <a:endParaRPr kumimoji="0" lang="ja-JP" altLang="en-US" sz="520" b="1" i="0" u="none" strike="noStrike" kern="0" cap="none" spc="0" normalizeH="0" baseline="0">
+                <a:ln>
+                  <a:noFill/>
+                </a:ln>
                 <a:solidFill>
                   <a:srgbClr val="111111"/>
                 </a:solidFill>
+                <a:effectLst/>
+                <a:uLnTx/>
+                <a:uFillTx/>
                 <a:latin typeface="Meiryo UI"/>
                 <a:ea typeface="Meiryo UI"/>
               </a:endParaRPr>
@@ -24452,7 +25370,7 @@
         </p:sp>
         <p:sp>
           <p:nvSpPr>
-            <p:cNvPr id="64" name="shape_d61_STOP_T4_INSERTED" title="③ 停止要求を送信して 終了を監視">
+            <p:cNvPr id="131" name="shape_d61_STOP_T4_INSERTED" title="③ 停止要求を送信して 終了を監視">
               <a:extLst>
                 <a:ext uri="{FF2B5EF4-FFF2-40B4-BE49-F238E27FC236}">
                   <a16:creationId xmlns:a16="http://schemas.microsoft.com/office/drawing/2014/main" id="{7794E4BA-18EA-7AFA-233F-564B118C9D59}"/>
@@ -24498,7 +25416,7 @@
             </a:fontRef>
           </p:style>
           <p:txBody>
-            <a:bodyPr wrap="square" lIns="32643" tIns="16322" rIns="32643" bIns="16322" rtlCol="0" anchor="ctr">
+            <a:bodyPr wrap="square" lIns="39668" tIns="19834" rIns="39668" bIns="19834" rtlCol="0" anchor="ctr">
               <a:noAutofit/>
             </a:bodyPr>
             <a:lstStyle>
@@ -24599,23 +25517,35 @@
             <a:p>
               <a:pPr algn="ctr"/>
               <a:r>
-                <a:rPr kumimoji="0" lang="ja-JP" altLang="en-US" sz="402" b="1" kern="0">
+                <a:rPr kumimoji="0" lang="ja-JP" altLang="en-US" sz="488" b="1" i="0" u="none" strike="noStrike" kern="0" cap="none" spc="0" normalizeH="0" baseline="0">
+                  <a:ln>
+                    <a:noFill/>
+                  </a:ln>
                   <a:solidFill>
                     <a:srgbClr val="111111"/>
                   </a:solidFill>
+                  <a:effectLst/>
+                  <a:uLnTx/>
+                  <a:uFillTx/>
                   <a:latin typeface="Meiryo UI"/>
                   <a:ea typeface="Meiryo UI"/>
                 </a:rPr>
-                <a:t>(4) デバイスコネクタが</a:t>
+                <a:t>1.4 デバイスコネクタが</a:t>
               </a:r>
             </a:p>
             <a:p>
               <a:pPr algn="ctr"/>
               <a:r>
-                <a:rPr kumimoji="0" lang="ja-JP" altLang="en-US" sz="402" b="1" kern="0">
+                <a:rPr kumimoji="0" lang="ja-JP" altLang="en-US" sz="488" b="1" i="0" u="none" strike="noStrike" kern="0" cap="none" spc="0" normalizeH="0" baseline="0">
+                  <a:ln>
+                    <a:noFill/>
+                  </a:ln>
                   <a:solidFill>
                     <a:srgbClr val="111111"/>
                   </a:solidFill>
+                  <a:effectLst/>
+                  <a:uLnTx/>
+                  <a:uFillTx/>
                   <a:latin typeface="Meiryo UI"/>
                   <a:ea typeface="Meiryo UI"/>
                 </a:rPr>
@@ -24626,7 +25556,7 @@
         </p:sp>
         <p:cxnSp>
           <p:nvCxnSpPr>
-            <p:cNvPr id="65" name="edge_sync_stop_t3_t4">
+            <p:cNvPr id="132" name="edge_sync_stop_t3_t4">
               <a:extLst>
                 <a:ext uri="{FF2B5EF4-FFF2-40B4-BE49-F238E27FC236}">
                   <a16:creationId xmlns:a16="http://schemas.microsoft.com/office/drawing/2014/main" id="{F98D9A36-B33A-2019-1412-C9D0A1C7DFDC}"/>
@@ -24635,8 +25565,8 @@
             </p:cNvPr>
             <p:cNvCxnSpPr>
               <a:cxnSpLocks/>
-              <a:stCxn id="13" idx="2"/>
-              <a:endCxn id="64" idx="0"/>
+              <a:stCxn id="80" idx="2"/>
+              <a:endCxn id="131" idx="0"/>
             </p:cNvCxnSpPr>
             <p:nvPr/>
           </p:nvCxnSpPr>
@@ -24672,7 +25602,7 @@
         </p:cxnSp>
         <p:cxnSp>
           <p:nvCxnSpPr>
-            <p:cNvPr id="66" name="edge_sync_stop_t4_t5">
+            <p:cNvPr id="133" name="edge_sync_stop_t4_t5">
               <a:extLst>
                 <a:ext uri="{FF2B5EF4-FFF2-40B4-BE49-F238E27FC236}">
                   <a16:creationId xmlns:a16="http://schemas.microsoft.com/office/drawing/2014/main" id="{7C9FC304-867F-32AD-F16D-56CF416F7598}"/>
@@ -24681,15 +25611,15 @@
             </p:cNvPr>
             <p:cNvCxnSpPr>
               <a:cxnSpLocks/>
-              <a:stCxn id="64" idx="2"/>
-              <a:endCxn id="61" idx="0"/>
+              <a:stCxn id="131" idx="2"/>
+              <a:endCxn id="128" idx="0"/>
             </p:cNvCxnSpPr>
             <p:nvPr/>
           </p:nvCxnSpPr>
           <p:spPr>
             <a:xfrm>
-              <a:off x="15480473" y="5256620"/>
-              <a:ext cx="5766" cy="277265"/>
+              <a:off x="15480472" y="5256620"/>
+              <a:ext cx="5766" cy="272733"/>
             </a:xfrm>
             <a:prstGeom prst="straightConnector1">
               <a:avLst/>
@@ -24718,7 +25648,7 @@
         </p:cxnSp>
         <p:cxnSp>
           <p:nvCxnSpPr>
-            <p:cNvPr id="67" name="edge_d61_23_START_S4_to_START_START_ERROR" descr="いいえ" title="いいえ">
+            <p:cNvPr id="134" name="edge_d61_23_START_S4_to_START_START_ERROR" descr="いいえ" title="いいえ">
               <a:extLst>
                 <a:ext uri="{FF2B5EF4-FFF2-40B4-BE49-F238E27FC236}">
                   <a16:creationId xmlns:a16="http://schemas.microsoft.com/office/drawing/2014/main" id="{379D1768-481D-403F-9433-1883EF4FD98E}"/>
@@ -24727,20 +25657,20 @@
             </p:cNvPr>
             <p:cNvCxnSpPr>
               <a:cxnSpLocks/>
-              <a:stCxn id="22" idx="1"/>
-              <a:endCxn id="10" idx="2"/>
+              <a:stCxn id="89" idx="1"/>
+              <a:endCxn id="77" idx="2"/>
             </p:cNvCxnSpPr>
             <p:nvPr/>
           </p:nvCxnSpPr>
           <p:spPr>
             <a:xfrm rot="10800000" flipV="1">
-              <a:off x="9152739" y="775510"/>
-              <a:ext cx="5423923" cy="8277692"/>
+              <a:off x="9152740" y="775507"/>
+              <a:ext cx="5423922" cy="8277693"/>
             </a:xfrm>
             <a:prstGeom prst="bentConnector4">
               <a:avLst>
                 <a:gd name="adj1" fmla="val 34437"/>
-                <a:gd name="adj2" fmla="val 106809"/>
+                <a:gd name="adj2" fmla="val 105663"/>
               </a:avLst>
             </a:prstGeom>
             <a:noFill/>
@@ -24770,7 +25700,7 @@
         </p:cxnSp>
         <p:sp>
           <p:nvSpPr>
-            <p:cNvPr id="68" name="edge_label_d61_01_OPERATION_O6_to_STOP_T1">
+            <p:cNvPr id="135" name="edge_label_d61_01_OPERATION_O6_to_STOP_T1">
               <a:extLst>
                 <a:ext uri="{FF2B5EF4-FFF2-40B4-BE49-F238E27FC236}">
                   <a16:creationId xmlns:a16="http://schemas.microsoft.com/office/drawing/2014/main" id="{D25853A4-28F3-9C94-F06D-8BF2525AB5FB}"/>
@@ -24782,8 +25712,8 @@
           </p:nvSpPr>
           <p:spPr>
             <a:xfrm>
-              <a:off x="12252076" y="5094939"/>
-              <a:ext cx="840153" cy="200258"/>
+              <a:off x="12252075" y="5058328"/>
+              <a:ext cx="840154" cy="273487"/>
             </a:xfrm>
             <a:prstGeom prst="rect">
               <a:avLst/>
@@ -24798,7 +25728,7 @@
             </a:ln>
           </p:spPr>
           <p:txBody>
-            <a:bodyPr vert="horz" wrap="square" lIns="27203" tIns="10881" rIns="27203" bIns="10881" rtlCol="0" anchor="ctr">
+            <a:bodyPr vert="horz" wrap="square" lIns="33057" tIns="13223" rIns="33057" bIns="13223" rtlCol="0" anchor="ctr">
               <a:spAutoFit/>
             </a:bodyPr>
             <a:lstStyle>
@@ -24899,10 +25829,16 @@
             <a:p>
               <a:pPr algn="ctr"/>
               <a:r>
-                <a:rPr kumimoji="0" lang="ja-JP" altLang="en-US" sz="385" kern="0">
+                <a:rPr kumimoji="0" lang="ja-JP" altLang="en-US" sz="468" b="0" i="0" u="none" strike="noStrike" kern="0" cap="none" spc="0" normalizeH="0" baseline="0">
+                  <a:ln>
+                    <a:noFill/>
+                  </a:ln>
                   <a:solidFill>
                     <a:srgbClr val="000000"/>
                   </a:solidFill>
+                  <a:effectLst/>
+                  <a:uLnTx/>
+                  <a:uFillTx/>
                   <a:latin typeface="Meiryo UI"/>
                   <a:ea typeface="Meiryo UI"/>
                 </a:rPr>
